--- a/output/pptx/AURA_TRENDVI_STYLE_DECK.pptx
+++ b/output/pptx/AURA_TRENDVI_STYLE_DECK.pptx
@@ -2,31 +2,31 @@
 <file path=ppt/presentation.xml><?xml version="1.0" encoding="utf-8"?>
 <p:presentation xmlns:p="http://schemas.openxmlformats.org/presentationml/2006/main">
   <p:sldMasterIdLst>
-    <p:sldMasterId xmlns:r="http://schemas.openxmlformats.org/officeDocument/2006/relationships" id="2147483648" r:id="R375cefc90e8446a2"/>
+    <p:sldMasterId xmlns:r="http://schemas.openxmlformats.org/officeDocument/2006/relationships" id="2147483648" r:id="R233b0f49f1344cbc"/>
   </p:sldMasterIdLst>
   <p:notesMasterIdLst>
-    <p:notesMasterId xmlns:r="http://schemas.openxmlformats.org/officeDocument/2006/relationships" r:id="R000c24e41f80416d"/>
+    <p:notesMasterId xmlns:r="http://schemas.openxmlformats.org/officeDocument/2006/relationships" r:id="Rcdc05d38a1ac4dfd"/>
   </p:notesMasterIdLst>
   <p:sldIdLst>
-    <p:sldId xmlns:r="http://schemas.openxmlformats.org/officeDocument/2006/relationships" id="256" r:id="R12cd2a0c4cbb472d"/>
-    <p:sldId xmlns:r="http://schemas.openxmlformats.org/officeDocument/2006/relationships" id="257" r:id="R423f442117c14e4b"/>
-    <p:sldId xmlns:r="http://schemas.openxmlformats.org/officeDocument/2006/relationships" id="258" r:id="Rb079ef7abf2b4d70"/>
-    <p:sldId xmlns:r="http://schemas.openxmlformats.org/officeDocument/2006/relationships" id="259" r:id="R0b42f3fd487242e9"/>
-    <p:sldId xmlns:r="http://schemas.openxmlformats.org/officeDocument/2006/relationships" id="260" r:id="R3d0bd0e8b0a84ed0"/>
-    <p:sldId xmlns:r="http://schemas.openxmlformats.org/officeDocument/2006/relationships" id="261" r:id="R713a5ae2a3be418a"/>
-    <p:sldId xmlns:r="http://schemas.openxmlformats.org/officeDocument/2006/relationships" id="262" r:id="R56dbd9f0727f45e1"/>
-    <p:sldId xmlns:r="http://schemas.openxmlformats.org/officeDocument/2006/relationships" id="263" r:id="Rc8784f80ac534999"/>
-    <p:sldId xmlns:r="http://schemas.openxmlformats.org/officeDocument/2006/relationships" id="264" r:id="R947dd535c8d947e4"/>
-    <p:sldId xmlns:r="http://schemas.openxmlformats.org/officeDocument/2006/relationships" id="265" r:id="R4e9c79e6d0a24504"/>
-    <p:sldId xmlns:r="http://schemas.openxmlformats.org/officeDocument/2006/relationships" id="266" r:id="R8ca6a012f37d4f4c"/>
-    <p:sldId xmlns:r="http://schemas.openxmlformats.org/officeDocument/2006/relationships" id="267" r:id="R5654ffc0aa1d4296"/>
-    <p:sldId xmlns:r="http://schemas.openxmlformats.org/officeDocument/2006/relationships" id="268" r:id="R21172c35f8aa43bc"/>
-    <p:sldId xmlns:r="http://schemas.openxmlformats.org/officeDocument/2006/relationships" id="269" r:id="R2dca069e7f32486e"/>
-    <p:sldId xmlns:r="http://schemas.openxmlformats.org/officeDocument/2006/relationships" id="270" r:id="Rbb962423d6ca49d4"/>
-    <p:sldId xmlns:r="http://schemas.openxmlformats.org/officeDocument/2006/relationships" id="271" r:id="Raabab61dec544e99"/>
-    <p:sldId xmlns:r="http://schemas.openxmlformats.org/officeDocument/2006/relationships" id="272" r:id="R6f0e9702746349cc"/>
-    <p:sldId xmlns:r="http://schemas.openxmlformats.org/officeDocument/2006/relationships" id="273" r:id="R18d5a85c2b7941bd"/>
-    <p:sldId xmlns:r="http://schemas.openxmlformats.org/officeDocument/2006/relationships" id="274" r:id="R2747e4991c6545eb"/>
+    <p:sldId xmlns:r="http://schemas.openxmlformats.org/officeDocument/2006/relationships" id="256" r:id="R01f5a381a6484938"/>
+    <p:sldId xmlns:r="http://schemas.openxmlformats.org/officeDocument/2006/relationships" id="257" r:id="R07eae5d7f7fe48a5"/>
+    <p:sldId xmlns:r="http://schemas.openxmlformats.org/officeDocument/2006/relationships" id="258" r:id="R869193742b3b441e"/>
+    <p:sldId xmlns:r="http://schemas.openxmlformats.org/officeDocument/2006/relationships" id="259" r:id="R5902b648c41b4427"/>
+    <p:sldId xmlns:r="http://schemas.openxmlformats.org/officeDocument/2006/relationships" id="260" r:id="Rdea15c651f494998"/>
+    <p:sldId xmlns:r="http://schemas.openxmlformats.org/officeDocument/2006/relationships" id="261" r:id="Rfb152f5e558a4ceb"/>
+    <p:sldId xmlns:r="http://schemas.openxmlformats.org/officeDocument/2006/relationships" id="262" r:id="Rf73e6dbf78b34f9f"/>
+    <p:sldId xmlns:r="http://schemas.openxmlformats.org/officeDocument/2006/relationships" id="263" r:id="Rcd5ee34eb38d43f2"/>
+    <p:sldId xmlns:r="http://schemas.openxmlformats.org/officeDocument/2006/relationships" id="264" r:id="R583dd34e48de4c88"/>
+    <p:sldId xmlns:r="http://schemas.openxmlformats.org/officeDocument/2006/relationships" id="265" r:id="R41979e53bf0849c0"/>
+    <p:sldId xmlns:r="http://schemas.openxmlformats.org/officeDocument/2006/relationships" id="266" r:id="R5ff11f81b2ba4a96"/>
+    <p:sldId xmlns:r="http://schemas.openxmlformats.org/officeDocument/2006/relationships" id="267" r:id="R03bb676de65d4228"/>
+    <p:sldId xmlns:r="http://schemas.openxmlformats.org/officeDocument/2006/relationships" id="268" r:id="Reed01436c1824e45"/>
+    <p:sldId xmlns:r="http://schemas.openxmlformats.org/officeDocument/2006/relationships" id="269" r:id="Re53b0d71c48747bf"/>
+    <p:sldId xmlns:r="http://schemas.openxmlformats.org/officeDocument/2006/relationships" id="270" r:id="R40ab159e92d54f6c"/>
+    <p:sldId xmlns:r="http://schemas.openxmlformats.org/officeDocument/2006/relationships" id="271" r:id="R0e9e13a42aa64e59"/>
+    <p:sldId xmlns:r="http://schemas.openxmlformats.org/officeDocument/2006/relationships" id="272" r:id="R59f36db461814195"/>
+    <p:sldId xmlns:r="http://schemas.openxmlformats.org/officeDocument/2006/relationships" id="273" r:id="Rbd23694832cc4da0"/>
+    <p:sldId xmlns:r="http://schemas.openxmlformats.org/officeDocument/2006/relationships" id="274" r:id="R4406f819390a45ee"/>
   </p:sldIdLst>
   <p:sldSz cx="12192000" cy="6858000"/>
   <p:notesSz cx="6858000" cy="9144000"/>
@@ -1761,7 +1761,7 @@
   </p:cSld>
   <p:clrMap bg1="lt1" tx1="dk1" bg2="lt2" tx2="dk2" accent1="accent1" accent2="accent2" accent3="accent3" accent4="accent4" accent5="accent5" accent6="accent6" hlink="hlink" folHlink="folHlink"/>
   <p:sldLayoutIdLst>
-    <p:sldLayoutId xmlns:r="http://schemas.openxmlformats.org/officeDocument/2006/relationships" id="2147483649" r:id="R8324dc7e11354fc2"/>
+    <p:sldLayoutId xmlns:r="http://schemas.openxmlformats.org/officeDocument/2006/relationships" id="2147483649" r:id="R91d8dfee33844b80"/>
   </p:sldLayoutIdLst>
   <p:txStyles>
     <p:titleStyle>
@@ -2060,7 +2060,7 @@
           <p:cNvPr id="1" name="">
             <a:extLst xmlns:a="http://schemas.openxmlformats.org/drawingml/2006/main">
               <a:ext uri="{FF2B5EF4-FFF2-40B4-BE49-F238E27FC236}">
-                <a16:creationId xmlns:a16="http://schemas.microsoft.com/office/drawing/2014/main" id="{B91B6D20-237B-4DC3-AB18-00E792329AEB}"/>
+                <a16:creationId xmlns:a16="http://schemas.microsoft.com/office/drawing/2014/main" id="{7AE8B484-39FF-48D8-9F9B-A533993F86E3}"/>
               </a:ext>
             </a:extLst>
           </p:cNvPr>
@@ -2093,7 +2093,7 @@
           <p:cNvPr id="2" name="">
             <a:extLst xmlns:a="http://schemas.openxmlformats.org/drawingml/2006/main">
               <a:ext uri="{FF2B5EF4-FFF2-40B4-BE49-F238E27FC236}">
-                <a16:creationId xmlns:a16="http://schemas.microsoft.com/office/drawing/2014/main" id="{CCB7DD82-03AB-4CAD-B6E8-D3BD1AD88C20}"/>
+                <a16:creationId xmlns:a16="http://schemas.microsoft.com/office/drawing/2014/main" id="{8A843FFF-01D4-4678-9CFD-A9EE7E27FAF4}"/>
               </a:ext>
             </a:extLst>
           </p:cNvPr>
@@ -2126,7 +2126,7 @@
           <p:cNvPr id="3" name="">
             <a:extLst xmlns:a="http://schemas.openxmlformats.org/drawingml/2006/main">
               <a:ext uri="{FF2B5EF4-FFF2-40B4-BE49-F238E27FC236}">
-                <a16:creationId xmlns:a16="http://schemas.microsoft.com/office/drawing/2014/main" id="{D099EE6D-17C7-4392-A33E-0D67BEB80CBF}"/>
+                <a16:creationId xmlns:a16="http://schemas.microsoft.com/office/drawing/2014/main" id="{E965A7F4-E2F7-4723-AC94-F062626918B0}"/>
               </a:ext>
             </a:extLst>
           </p:cNvPr>
@@ -2190,7 +2190,7 @@
           <p:cNvPr id="4" name="">
             <a:extLst xmlns:a="http://schemas.openxmlformats.org/drawingml/2006/main">
               <a:ext uri="{FF2B5EF4-FFF2-40B4-BE49-F238E27FC236}">
-                <a16:creationId xmlns:a16="http://schemas.microsoft.com/office/drawing/2014/main" id="{75101739-C90E-4043-8DFD-B4F4FCD76EF3}"/>
+                <a16:creationId xmlns:a16="http://schemas.microsoft.com/office/drawing/2014/main" id="{A05670C8-8D45-45DF-B130-34BD07E534ED}"/>
               </a:ext>
             </a:extLst>
           </p:cNvPr>
@@ -2254,7 +2254,7 @@
           <p:cNvPr id="5" name="">
             <a:extLst xmlns:a="http://schemas.openxmlformats.org/drawingml/2006/main">
               <a:ext uri="{FF2B5EF4-FFF2-40B4-BE49-F238E27FC236}">
-                <a16:creationId xmlns:a16="http://schemas.microsoft.com/office/drawing/2014/main" id="{9E0F21BD-6247-4C03-9E82-37F98E559EC1}"/>
+                <a16:creationId xmlns:a16="http://schemas.microsoft.com/office/drawing/2014/main" id="{546A0CD2-5B2F-4A36-967E-9CD9686B0AD0}"/>
               </a:ext>
             </a:extLst>
           </p:cNvPr>
@@ -2318,7 +2318,7 @@
           <p:cNvPr id="6" name="">
             <a:extLst xmlns:a="http://schemas.openxmlformats.org/drawingml/2006/main">
               <a:ext uri="{FF2B5EF4-FFF2-40B4-BE49-F238E27FC236}">
-                <a16:creationId xmlns:a16="http://schemas.microsoft.com/office/drawing/2014/main" id="{9D07DEA8-DE85-43F6-9257-FC6A52BE8E61}"/>
+                <a16:creationId xmlns:a16="http://schemas.microsoft.com/office/drawing/2014/main" id="{6F21988D-5E9D-42A9-99EE-A38EDB0732D4}"/>
               </a:ext>
             </a:extLst>
           </p:cNvPr>
@@ -2380,7 +2380,7 @@
     </p:spTree>
     <p:extLst>
       <p:ext uri="{BB962C8B-B14F-4D97-AF65-F5344CB8AC3E}">
-        <p14:creationId xmlns:p14="http://schemas.microsoft.com/office/powerpoint/2010/main" val="85575710"/>
+        <p14:creationId xmlns:p14="http://schemas.microsoft.com/office/powerpoint/2010/main" val="487410678"/>
       </p:ext>
     </p:extLst>
   </p:cSld>
@@ -2404,7 +2404,7 @@
           <p:cNvPr id="1" name="">
             <a:extLst xmlns:a="http://schemas.openxmlformats.org/drawingml/2006/main">
               <a:ext uri="{FF2B5EF4-FFF2-40B4-BE49-F238E27FC236}">
-                <a16:creationId xmlns:a16="http://schemas.microsoft.com/office/drawing/2014/main" id="{2E054A5D-2F99-4810-B07B-B86483CFEA84}"/>
+                <a16:creationId xmlns:a16="http://schemas.microsoft.com/office/drawing/2014/main" id="{25BEFC12-93F6-43F1-8B07-A4572CEBC88A}"/>
               </a:ext>
             </a:extLst>
           </p:cNvPr>
@@ -2437,7 +2437,7 @@
           <p:cNvPr id="2" name="">
             <a:extLst xmlns:a="http://schemas.openxmlformats.org/drawingml/2006/main">
               <a:ext uri="{FF2B5EF4-FFF2-40B4-BE49-F238E27FC236}">
-                <a16:creationId xmlns:a16="http://schemas.microsoft.com/office/drawing/2014/main" id="{5D17532E-EDC5-48FB-BE6F-27FFC5961C45}"/>
+                <a16:creationId xmlns:a16="http://schemas.microsoft.com/office/drawing/2014/main" id="{8C0428B0-E99C-4D06-82AB-FBB0FE5037B8}"/>
               </a:ext>
             </a:extLst>
           </p:cNvPr>
@@ -2470,7 +2470,7 @@
           <p:cNvPr id="3" name="">
             <a:extLst xmlns:a="http://schemas.openxmlformats.org/drawingml/2006/main">
               <a:ext uri="{FF2B5EF4-FFF2-40B4-BE49-F238E27FC236}">
-                <a16:creationId xmlns:a16="http://schemas.microsoft.com/office/drawing/2014/main" id="{E161C42A-83E5-4950-90AD-D307050B9588}"/>
+                <a16:creationId xmlns:a16="http://schemas.microsoft.com/office/drawing/2014/main" id="{4DEB177E-4F2F-443D-800C-B3054A72E4D9}"/>
               </a:ext>
             </a:extLst>
           </p:cNvPr>
@@ -2503,7 +2503,7 @@
           <p:cNvPr id="4" name="">
             <a:extLst xmlns:a="http://schemas.openxmlformats.org/drawingml/2006/main">
               <a:ext uri="{FF2B5EF4-FFF2-40B4-BE49-F238E27FC236}">
-                <a16:creationId xmlns:a16="http://schemas.microsoft.com/office/drawing/2014/main" id="{CC440913-8BA4-4A64-984A-BABE12252528}"/>
+                <a16:creationId xmlns:a16="http://schemas.microsoft.com/office/drawing/2014/main" id="{D691A618-18B1-4DE9-B18B-D79106036684}"/>
               </a:ext>
             </a:extLst>
           </p:cNvPr>
@@ -2567,7 +2567,7 @@
           <p:cNvPr id="5" name="">
             <a:extLst xmlns:a="http://schemas.openxmlformats.org/drawingml/2006/main">
               <a:ext uri="{FF2B5EF4-FFF2-40B4-BE49-F238E27FC236}">
-                <a16:creationId xmlns:a16="http://schemas.microsoft.com/office/drawing/2014/main" id="{018502E9-D71C-4A02-BC70-656893717033}"/>
+                <a16:creationId xmlns:a16="http://schemas.microsoft.com/office/drawing/2014/main" id="{7ED8CEF5-ED96-410C-A511-518767D38B45}"/>
               </a:ext>
             </a:extLst>
           </p:cNvPr>
@@ -2631,7 +2631,7 @@
           <p:cNvPr id="6" name="">
             <a:extLst xmlns:a="http://schemas.openxmlformats.org/drawingml/2006/main">
               <a:ext uri="{FF2B5EF4-FFF2-40B4-BE49-F238E27FC236}">
-                <a16:creationId xmlns:a16="http://schemas.microsoft.com/office/drawing/2014/main" id="{0CEEBA18-DFBF-4824-9F18-DC8DB2131748}"/>
+                <a16:creationId xmlns:a16="http://schemas.microsoft.com/office/drawing/2014/main" id="{2596DBE5-6C4A-428E-A4BD-8C8B78B7994E}"/>
               </a:ext>
             </a:extLst>
           </p:cNvPr>
@@ -2664,7 +2664,7 @@
           <p:cNvPr id="7" name="">
             <a:extLst xmlns:a="http://schemas.openxmlformats.org/drawingml/2006/main">
               <a:ext uri="{FF2B5EF4-FFF2-40B4-BE49-F238E27FC236}">
-                <a16:creationId xmlns:a16="http://schemas.microsoft.com/office/drawing/2014/main" id="{062EF529-318F-478C-A684-1BD021E4A69E}"/>
+                <a16:creationId xmlns:a16="http://schemas.microsoft.com/office/drawing/2014/main" id="{56752DAC-E0BD-4A4C-97BA-7570BE720041}"/>
               </a:ext>
             </a:extLst>
           </p:cNvPr>
@@ -2728,7 +2728,7 @@
           <p:cNvPr id="8" name="">
             <a:extLst xmlns:a="http://schemas.openxmlformats.org/drawingml/2006/main">
               <a:ext uri="{FF2B5EF4-FFF2-40B4-BE49-F238E27FC236}">
-                <a16:creationId xmlns:a16="http://schemas.microsoft.com/office/drawing/2014/main" id="{F376A10A-E83A-4974-AC43-6606CCA40BF5}"/>
+                <a16:creationId xmlns:a16="http://schemas.microsoft.com/office/drawing/2014/main" id="{EBFB2D43-C8AF-4CCA-B6A7-B270B95F4EAC}"/>
               </a:ext>
             </a:extLst>
           </p:cNvPr>
@@ -2761,7 +2761,7 @@
           <p:cNvPr id="9" name="">
             <a:extLst xmlns:a="http://schemas.openxmlformats.org/drawingml/2006/main">
               <a:ext uri="{FF2B5EF4-FFF2-40B4-BE49-F238E27FC236}">
-                <a16:creationId xmlns:a16="http://schemas.microsoft.com/office/drawing/2014/main" id="{4A8A56A7-5DFB-4C20-9EAC-3AC54B5A08DA}"/>
+                <a16:creationId xmlns:a16="http://schemas.microsoft.com/office/drawing/2014/main" id="{FE542F88-94B9-46CE-8A98-0702C747AB64}"/>
               </a:ext>
             </a:extLst>
           </p:cNvPr>
@@ -2825,7 +2825,7 @@
           <p:cNvPr id="10" name="">
             <a:extLst xmlns:a="http://schemas.openxmlformats.org/drawingml/2006/main">
               <a:ext uri="{FF2B5EF4-FFF2-40B4-BE49-F238E27FC236}">
-                <a16:creationId xmlns:a16="http://schemas.microsoft.com/office/drawing/2014/main" id="{928B8C02-0641-42FC-813D-23C8B367A721}"/>
+                <a16:creationId xmlns:a16="http://schemas.microsoft.com/office/drawing/2014/main" id="{E0563434-2121-499D-A836-00C2B3FB9DF6}"/>
               </a:ext>
             </a:extLst>
           </p:cNvPr>
@@ -2858,7 +2858,7 @@
           <p:cNvPr id="11" name="">
             <a:extLst xmlns:a="http://schemas.openxmlformats.org/drawingml/2006/main">
               <a:ext uri="{FF2B5EF4-FFF2-40B4-BE49-F238E27FC236}">
-                <a16:creationId xmlns:a16="http://schemas.microsoft.com/office/drawing/2014/main" id="{0CD0C603-253B-42EE-AFCF-B4C5FE0497A3}"/>
+                <a16:creationId xmlns:a16="http://schemas.microsoft.com/office/drawing/2014/main" id="{11020D5C-E511-473F-BCDB-50CFC654FDDB}"/>
               </a:ext>
             </a:extLst>
           </p:cNvPr>
@@ -2922,7 +2922,7 @@
           <p:cNvPr id="12" name="">
             <a:extLst xmlns:a="http://schemas.openxmlformats.org/drawingml/2006/main">
               <a:ext uri="{FF2B5EF4-FFF2-40B4-BE49-F238E27FC236}">
-                <a16:creationId xmlns:a16="http://schemas.microsoft.com/office/drawing/2014/main" id="{F6A645BA-5E59-4728-96A1-191673E706BF}"/>
+                <a16:creationId xmlns:a16="http://schemas.microsoft.com/office/drawing/2014/main" id="{E8EF83E1-B510-487D-A92F-C457B45E48D2}"/>
               </a:ext>
             </a:extLst>
           </p:cNvPr>
@@ -2955,7 +2955,7 @@
           <p:cNvPr id="13" name="">
             <a:extLst xmlns:a="http://schemas.openxmlformats.org/drawingml/2006/main">
               <a:ext uri="{FF2B5EF4-FFF2-40B4-BE49-F238E27FC236}">
-                <a16:creationId xmlns:a16="http://schemas.microsoft.com/office/drawing/2014/main" id="{B51872E7-0913-40D4-9792-FF7395D6C9CB}"/>
+                <a16:creationId xmlns:a16="http://schemas.microsoft.com/office/drawing/2014/main" id="{B4F78CC3-D36B-456B-9542-6F038AC8E797}"/>
               </a:ext>
             </a:extLst>
           </p:cNvPr>
@@ -3009,7 +3009,7 @@
                 <a:ea typeface="Aptos"/>
                 <a:cs typeface="Aptos"/>
               </a:rPr>
-              <a:t>annual subscription anchor</a:t>
+              <a:t>годовой план как anchor доверия и привычки</a:t>
             </a:r>
           </a:p>
         </p:txBody>
@@ -3019,7 +3019,7 @@
           <p:cNvPr id="14" name="">
             <a:extLst xmlns:a="http://schemas.openxmlformats.org/drawingml/2006/main">
               <a:ext uri="{FF2B5EF4-FFF2-40B4-BE49-F238E27FC236}">
-                <a16:creationId xmlns:a16="http://schemas.microsoft.com/office/drawing/2014/main" id="{5A13AD00-3119-4E0F-ACD3-23676F09A9F1}"/>
+                <a16:creationId xmlns:a16="http://schemas.microsoft.com/office/drawing/2014/main" id="{60AC1146-70B8-4334-ACFF-D0DD72C96395}"/>
               </a:ext>
             </a:extLst>
           </p:cNvPr>
@@ -3052,7 +3052,7 @@
           <p:cNvPr id="15" name="">
             <a:extLst xmlns:a="http://schemas.openxmlformats.org/drawingml/2006/main">
               <a:ext uri="{FF2B5EF4-FFF2-40B4-BE49-F238E27FC236}">
-                <a16:creationId xmlns:a16="http://schemas.microsoft.com/office/drawing/2014/main" id="{69E09451-ACF7-4D7F-8A25-72B80BA38B7F}"/>
+                <a16:creationId xmlns:a16="http://schemas.microsoft.com/office/drawing/2014/main" id="{DD579F6E-F5FC-46A3-82ED-B3EC8356E4C0}"/>
               </a:ext>
             </a:extLst>
           </p:cNvPr>
@@ -3116,7 +3116,7 @@
           <p:cNvPr id="16" name="">
             <a:extLst xmlns:a="http://schemas.openxmlformats.org/drawingml/2006/main">
               <a:ext uri="{FF2B5EF4-FFF2-40B4-BE49-F238E27FC236}">
-                <a16:creationId xmlns:a16="http://schemas.microsoft.com/office/drawing/2014/main" id="{2B03CB80-E82F-43D2-9819-9804C1AD93DE}"/>
+                <a16:creationId xmlns:a16="http://schemas.microsoft.com/office/drawing/2014/main" id="{9825990F-8CC9-4ABD-9684-56454B8851C0}"/>
               </a:ext>
             </a:extLst>
           </p:cNvPr>
@@ -3149,7 +3149,7 @@
           <p:cNvPr id="17" name="">
             <a:extLst xmlns:a="http://schemas.openxmlformats.org/drawingml/2006/main">
               <a:ext uri="{FF2B5EF4-FFF2-40B4-BE49-F238E27FC236}">
-                <a16:creationId xmlns:a16="http://schemas.microsoft.com/office/drawing/2014/main" id="{EC5EFE4D-49FA-465A-9460-27F44702166D}"/>
+                <a16:creationId xmlns:a16="http://schemas.microsoft.com/office/drawing/2014/main" id="{C3305152-A6E2-499B-8FF4-3D28099AAF5D}"/>
               </a:ext>
             </a:extLst>
           </p:cNvPr>
@@ -3213,7 +3213,7 @@
           <p:cNvPr id="18" name="">
             <a:extLst xmlns:a="http://schemas.openxmlformats.org/drawingml/2006/main">
               <a:ext uri="{FF2B5EF4-FFF2-40B4-BE49-F238E27FC236}">
-                <a16:creationId xmlns:a16="http://schemas.microsoft.com/office/drawing/2014/main" id="{111E899F-E9B3-45E9-AE2D-881316324560}"/>
+                <a16:creationId xmlns:a16="http://schemas.microsoft.com/office/drawing/2014/main" id="{2B2B4D3D-523F-45A0-9CF0-C0F0EB929DAD}"/>
               </a:ext>
             </a:extLst>
           </p:cNvPr>
@@ -3246,7 +3246,7 @@
           <p:cNvPr id="19" name="">
             <a:extLst xmlns:a="http://schemas.openxmlformats.org/drawingml/2006/main">
               <a:ext uri="{FF2B5EF4-FFF2-40B4-BE49-F238E27FC236}">
-                <a16:creationId xmlns:a16="http://schemas.microsoft.com/office/drawing/2014/main" id="{D2BFA5C1-F164-4CF9-B34F-CAB5D781E652}"/>
+                <a16:creationId xmlns:a16="http://schemas.microsoft.com/office/drawing/2014/main" id="{6E968021-BBF4-4D1A-84D6-5319EC645FF1}"/>
               </a:ext>
             </a:extLst>
           </p:cNvPr>
@@ -3300,7 +3300,7 @@
                 <a:ea typeface="Aptos"/>
                 <a:cs typeface="Aptos"/>
               </a:rPr>
-              <a:t>better memory, voice, premium models</a:t>
+              <a:t>priority, memory/voice/premium access</a:t>
             </a:r>
           </a:p>
         </p:txBody>
@@ -3310,7 +3310,7 @@
           <p:cNvPr id="20" name="">
             <a:extLst xmlns:a="http://schemas.openxmlformats.org/drawingml/2006/main">
               <a:ext uri="{FF2B5EF4-FFF2-40B4-BE49-F238E27FC236}">
-                <a16:creationId xmlns:a16="http://schemas.microsoft.com/office/drawing/2014/main" id="{B8C8E77C-823D-47FE-A516-63F7AEA9B481}"/>
+                <a16:creationId xmlns:a16="http://schemas.microsoft.com/office/drawing/2014/main" id="{2D5E1398-742E-42E2-BD90-36AFB874B14D}"/>
               </a:ext>
             </a:extLst>
           </p:cNvPr>
@@ -3343,7 +3343,7 @@
           <p:cNvPr id="21" name="">
             <a:extLst xmlns:a="http://schemas.openxmlformats.org/drawingml/2006/main">
               <a:ext uri="{FF2B5EF4-FFF2-40B4-BE49-F238E27FC236}">
-                <a16:creationId xmlns:a16="http://schemas.microsoft.com/office/drawing/2014/main" id="{72F862B5-277F-4455-96F4-D5E49EA721A1}"/>
+                <a16:creationId xmlns:a16="http://schemas.microsoft.com/office/drawing/2014/main" id="{99FA4A50-4FDC-40D1-B030-50C384FF0DAF}"/>
               </a:ext>
             </a:extLst>
           </p:cNvPr>
@@ -3397,7 +3397,7 @@
                 <a:ea typeface="Aptos"/>
                 <a:cs typeface="Aptos"/>
               </a:rPr>
-              <a:t>AI companion subscription ceiling</a:t>
+              <a:t>AI companion ceiling around $10/mo mass-market</a:t>
             </a:r>
           </a:p>
         </p:txBody>
@@ -3407,7 +3407,7 @@
           <p:cNvPr id="22" name="">
             <a:extLst xmlns:a="http://schemas.openxmlformats.org/drawingml/2006/main">
               <a:ext uri="{FF2B5EF4-FFF2-40B4-BE49-F238E27FC236}">
-                <a16:creationId xmlns:a16="http://schemas.microsoft.com/office/drawing/2014/main" id="{54C1169C-3A14-4036-AC3D-4A15A4135E48}"/>
+                <a16:creationId xmlns:a16="http://schemas.microsoft.com/office/drawing/2014/main" id="{898C5AEC-D5DE-44B1-8D92-B6AB34DC655E}"/>
               </a:ext>
             </a:extLst>
           </p:cNvPr>
@@ -3440,7 +3440,7 @@
           <p:cNvPr id="23" name="">
             <a:extLst xmlns:a="http://schemas.openxmlformats.org/drawingml/2006/main">
               <a:ext uri="{FF2B5EF4-FFF2-40B4-BE49-F238E27FC236}">
-                <a16:creationId xmlns:a16="http://schemas.microsoft.com/office/drawing/2014/main" id="{641F8CBF-CFCC-4FB9-9815-3DACC2412E29}"/>
+                <a16:creationId xmlns:a16="http://schemas.microsoft.com/office/drawing/2014/main" id="{4249B0F6-25EC-45D1-ACC1-E0F8D7373A32}"/>
               </a:ext>
             </a:extLst>
           </p:cNvPr>
@@ -3504,7 +3504,7 @@
           <p:cNvPr id="24" name="">
             <a:extLst xmlns:a="http://schemas.openxmlformats.org/drawingml/2006/main">
               <a:ext uri="{FF2B5EF4-FFF2-40B4-BE49-F238E27FC236}">
-                <a16:creationId xmlns:a16="http://schemas.microsoft.com/office/drawing/2014/main" id="{CE0C9654-A270-495A-9ABA-F1C8B467DC06}"/>
+                <a16:creationId xmlns:a16="http://schemas.microsoft.com/office/drawing/2014/main" id="{C2C28AD4-FEBE-40A7-B972-2D82B2085308}"/>
               </a:ext>
             </a:extLst>
           </p:cNvPr>
@@ -3537,7 +3537,7 @@
           <p:cNvPr id="25" name="">
             <a:extLst xmlns:a="http://schemas.openxmlformats.org/drawingml/2006/main">
               <a:ext uri="{FF2B5EF4-FFF2-40B4-BE49-F238E27FC236}">
-                <a16:creationId xmlns:a16="http://schemas.microsoft.com/office/drawing/2014/main" id="{361F4B82-ECD4-43C9-84B5-DA79484EE143}"/>
+                <a16:creationId xmlns:a16="http://schemas.microsoft.com/office/drawing/2014/main" id="{6EB03AF6-0386-4AE0-8209-F6B47F430C7E}"/>
               </a:ext>
             </a:extLst>
           </p:cNvPr>
@@ -3591,7 +3591,7 @@
                 <a:ea typeface="Aptos"/>
                 <a:cs typeface="Aptos"/>
               </a:rPr>
-              <a:t>$7.99/week, $24.99/mo, $29.99/3mo</a:t>
+              <a:t>$7.99/wk, $24.99/mo, $29.99/3mo</a:t>
             </a:r>
           </a:p>
         </p:txBody>
@@ -3601,7 +3601,7 @@
           <p:cNvPr id="26" name="">
             <a:extLst xmlns:a="http://schemas.openxmlformats.org/drawingml/2006/main">
               <a:ext uri="{FF2B5EF4-FFF2-40B4-BE49-F238E27FC236}">
-                <a16:creationId xmlns:a16="http://schemas.microsoft.com/office/drawing/2014/main" id="{C600122A-7784-4DB0-B319-1C177B4EE643}"/>
+                <a16:creationId xmlns:a16="http://schemas.microsoft.com/office/drawing/2014/main" id="{9249D12D-A32E-4D1D-A925-AFE9E4D73B4A}"/>
               </a:ext>
             </a:extLst>
           </p:cNvPr>
@@ -3634,7 +3634,7 @@
           <p:cNvPr id="27" name="">
             <a:extLst xmlns:a="http://schemas.openxmlformats.org/drawingml/2006/main">
               <a:ext uri="{FF2B5EF4-FFF2-40B4-BE49-F238E27FC236}">
-                <a16:creationId xmlns:a16="http://schemas.microsoft.com/office/drawing/2014/main" id="{387DC602-4CE2-427B-A228-4DD872B7BF56}"/>
+                <a16:creationId xmlns:a16="http://schemas.microsoft.com/office/drawing/2014/main" id="{A066AE55-8A0E-41B7-B4C1-8DA16F5BCD38}"/>
               </a:ext>
             </a:extLst>
           </p:cNvPr>
@@ -3688,7 +3688,7 @@
                 <a:ea typeface="Aptos"/>
                 <a:cs typeface="Aptos"/>
               </a:rPr>
-              <a:t>spiritual guidance, astrology depth</a:t>
+              <a:t>spiritual guidance, compatibility, deep readings</a:t>
             </a:r>
           </a:p>
         </p:txBody>
@@ -3698,7 +3698,7 @@
           <p:cNvPr id="28" name="">
             <a:extLst xmlns:a="http://schemas.openxmlformats.org/drawingml/2006/main">
               <a:ext uri="{FF2B5EF4-FFF2-40B4-BE49-F238E27FC236}">
-                <a16:creationId xmlns:a16="http://schemas.microsoft.com/office/drawing/2014/main" id="{BADD6094-9B3B-43A5-B34D-13C837FF4A9C}"/>
+                <a16:creationId xmlns:a16="http://schemas.microsoft.com/office/drawing/2014/main" id="{2E798DFC-F948-4B7E-9552-F1491CE57167}"/>
               </a:ext>
             </a:extLst>
           </p:cNvPr>
@@ -3731,7 +3731,7 @@
           <p:cNvPr id="29" name="">
             <a:extLst xmlns:a="http://schemas.openxmlformats.org/drawingml/2006/main">
               <a:ext uri="{FF2B5EF4-FFF2-40B4-BE49-F238E27FC236}">
-                <a16:creationId xmlns:a16="http://schemas.microsoft.com/office/drawing/2014/main" id="{12AADA70-18E5-4A24-8021-C43BDF10C0AB}"/>
+                <a16:creationId xmlns:a16="http://schemas.microsoft.com/office/drawing/2014/main" id="{B9539A72-C4E9-4062-B098-FFB6B8601EDB}"/>
               </a:ext>
             </a:extLst>
           </p:cNvPr>
@@ -3785,7 +3785,7 @@
                 <a:ea typeface="Aptos"/>
                 <a:cs typeface="Aptos"/>
               </a:rPr>
-              <a:t>high willingness to pay for personal insight</a:t>
+              <a:t>высокая цена возможна, но paywall вызывает риск</a:t>
             </a:r>
           </a:p>
         </p:txBody>
@@ -3795,7 +3795,7 @@
           <p:cNvPr id="30" name="">
             <a:extLst xmlns:a="http://schemas.openxmlformats.org/drawingml/2006/main">
               <a:ext uri="{FF2B5EF4-FFF2-40B4-BE49-F238E27FC236}">
-                <a16:creationId xmlns:a16="http://schemas.microsoft.com/office/drawing/2014/main" id="{8552B5D9-1597-4B4B-8272-605AC2FCE79A}"/>
+                <a16:creationId xmlns:a16="http://schemas.microsoft.com/office/drawing/2014/main" id="{B27DB049-BAD2-4FC8-B2CF-BE8D23682D62}"/>
               </a:ext>
             </a:extLst>
           </p:cNvPr>
@@ -3828,7 +3828,7 @@
           <p:cNvPr id="31" name="">
             <a:extLst xmlns:a="http://schemas.openxmlformats.org/drawingml/2006/main">
               <a:ext uri="{FF2B5EF4-FFF2-40B4-BE49-F238E27FC236}">
-                <a16:creationId xmlns:a16="http://schemas.microsoft.com/office/drawing/2014/main" id="{D97FF3F5-A041-4CD7-8D91-3E9DA44A25E6}"/>
+                <a16:creationId xmlns:a16="http://schemas.microsoft.com/office/drawing/2014/main" id="{CFA2063E-5D9F-4616-B7F6-8F6CA470C3A2}"/>
               </a:ext>
             </a:extLst>
           </p:cNvPr>
@@ -3892,7 +3892,7 @@
           <p:cNvPr id="32" name="">
             <a:extLst xmlns:a="http://schemas.openxmlformats.org/drawingml/2006/main">
               <a:ext uri="{FF2B5EF4-FFF2-40B4-BE49-F238E27FC236}">
-                <a16:creationId xmlns:a16="http://schemas.microsoft.com/office/drawing/2014/main" id="{9EE4B3E2-62B8-44A9-8453-C3BA4ADBA0DC}"/>
+                <a16:creationId xmlns:a16="http://schemas.microsoft.com/office/drawing/2014/main" id="{09EBF4CA-DA9D-4CA2-9167-AFE5B980ED33}"/>
               </a:ext>
             </a:extLst>
           </p:cNvPr>
@@ -3925,7 +3925,7 @@
           <p:cNvPr id="33" name="">
             <a:extLst xmlns:a="http://schemas.openxmlformats.org/drawingml/2006/main">
               <a:ext uri="{FF2B5EF4-FFF2-40B4-BE49-F238E27FC236}">
-                <a16:creationId xmlns:a16="http://schemas.microsoft.com/office/drawing/2014/main" id="{CECF54DA-4154-4265-AF4A-750D914EEFA0}"/>
+                <a16:creationId xmlns:a16="http://schemas.microsoft.com/office/drawing/2014/main" id="{966D8248-844E-46CB-AF36-DADD0CCABF4C}"/>
               </a:ext>
             </a:extLst>
           </p:cNvPr>
@@ -3989,7 +3989,7 @@
           <p:cNvPr id="34" name="">
             <a:extLst xmlns:a="http://schemas.openxmlformats.org/drawingml/2006/main">
               <a:ext uri="{FF2B5EF4-FFF2-40B4-BE49-F238E27FC236}">
-                <a16:creationId xmlns:a16="http://schemas.microsoft.com/office/drawing/2014/main" id="{E88C51C3-DCFB-4196-9F16-79AEFA5ED29F}"/>
+                <a16:creationId xmlns:a16="http://schemas.microsoft.com/office/drawing/2014/main" id="{5BF5B14F-C736-4F4E-83B1-D65022EBB400}"/>
               </a:ext>
             </a:extLst>
           </p:cNvPr>
@@ -4022,7 +4022,7 @@
           <p:cNvPr id="35" name="">
             <a:extLst xmlns:a="http://schemas.openxmlformats.org/drawingml/2006/main">
               <a:ext uri="{FF2B5EF4-FFF2-40B4-BE49-F238E27FC236}">
-                <a16:creationId xmlns:a16="http://schemas.microsoft.com/office/drawing/2014/main" id="{CFEDEE69-7D8A-4F10-9450-6C54045FA062}"/>
+                <a16:creationId xmlns:a16="http://schemas.microsoft.com/office/drawing/2014/main" id="{269D7491-DFCF-411B-963C-1667E7029361}"/>
               </a:ext>
             </a:extLst>
           </p:cNvPr>
@@ -4086,7 +4086,7 @@
           <p:cNvPr id="36" name="">
             <a:extLst xmlns:a="http://schemas.openxmlformats.org/drawingml/2006/main">
               <a:ext uri="{FF2B5EF4-FFF2-40B4-BE49-F238E27FC236}">
-                <a16:creationId xmlns:a16="http://schemas.microsoft.com/office/drawing/2014/main" id="{886E5A16-3B62-4692-9F44-4DA32AC48BE5}"/>
+                <a16:creationId xmlns:a16="http://schemas.microsoft.com/office/drawing/2014/main" id="{E583E47C-59B0-4B89-8F58-BE21A05338D8}"/>
               </a:ext>
             </a:extLst>
           </p:cNvPr>
@@ -4119,7 +4119,7 @@
           <p:cNvPr id="37" name="">
             <a:extLst xmlns:a="http://schemas.openxmlformats.org/drawingml/2006/main">
               <a:ext uri="{FF2B5EF4-FFF2-40B4-BE49-F238E27FC236}">
-                <a16:creationId xmlns:a16="http://schemas.microsoft.com/office/drawing/2014/main" id="{ABBD6618-103C-472E-A3CA-CA9ED007BFBF}"/>
+                <a16:creationId xmlns:a16="http://schemas.microsoft.com/office/drawing/2014/main" id="{FD9F5449-5F19-4A23-9821-394985B79CDC}"/>
               </a:ext>
             </a:extLst>
           </p:cNvPr>
@@ -4173,7 +4173,7 @@
                 <a:ea typeface="Aptos"/>
                 <a:cs typeface="Aptos"/>
               </a:rPr>
-              <a:t>strong paid intent, but pricing risk</a:t>
+              <a:t>paid intent сильный, но trust/safety важны</a:t>
             </a:r>
           </a:p>
         </p:txBody>
@@ -4183,7 +4183,7 @@
           <p:cNvPr id="38" name="">
             <a:extLst xmlns:a="http://schemas.openxmlformats.org/drawingml/2006/main">
               <a:ext uri="{FF2B5EF4-FFF2-40B4-BE49-F238E27FC236}">
-                <a16:creationId xmlns:a16="http://schemas.microsoft.com/office/drawing/2014/main" id="{46D67F5E-4E23-4C0E-8E94-BF4CDF5A6B78}"/>
+                <a16:creationId xmlns:a16="http://schemas.microsoft.com/office/drawing/2014/main" id="{17177C4D-2EDB-4FD5-B89F-6F3CC5E9A4A7}"/>
               </a:ext>
             </a:extLst>
           </p:cNvPr>
@@ -4216,7 +4216,7 @@
           <p:cNvPr id="39" name="">
             <a:extLst xmlns:a="http://schemas.openxmlformats.org/drawingml/2006/main">
               <a:ext uri="{FF2B5EF4-FFF2-40B4-BE49-F238E27FC236}">
-                <a16:creationId xmlns:a16="http://schemas.microsoft.com/office/drawing/2014/main" id="{D7AA48FE-3B5E-4E8E-9FA9-B4FC35C3D64C}"/>
+                <a16:creationId xmlns:a16="http://schemas.microsoft.com/office/drawing/2014/main" id="{C0A1A485-1687-4DC7-9120-D96DCF94615A}"/>
               </a:ext>
             </a:extLst>
           </p:cNvPr>
@@ -4280,7 +4280,7 @@
           <p:cNvPr id="40" name="">
             <a:extLst xmlns:a="http://schemas.openxmlformats.org/drawingml/2006/main">
               <a:ext uri="{FF2B5EF4-FFF2-40B4-BE49-F238E27FC236}">
-                <a16:creationId xmlns:a16="http://schemas.microsoft.com/office/drawing/2014/main" id="{EC46D660-4CE8-4A3C-B8B3-C33DBEC9C3BC}"/>
+                <a16:creationId xmlns:a16="http://schemas.microsoft.com/office/drawing/2014/main" id="{16BA6904-2BB2-4588-A1D8-D0A5A8631B3A}"/>
               </a:ext>
             </a:extLst>
           </p:cNvPr>
@@ -4313,7 +4313,7 @@
           <p:cNvPr id="41" name="">
             <a:extLst xmlns:a="http://schemas.openxmlformats.org/drawingml/2006/main">
               <a:ext uri="{FF2B5EF4-FFF2-40B4-BE49-F238E27FC236}">
-                <a16:creationId xmlns:a16="http://schemas.microsoft.com/office/drawing/2014/main" id="{FD631F89-9845-4B70-92FD-2CB763573699}"/>
+                <a16:creationId xmlns:a16="http://schemas.microsoft.com/office/drawing/2014/main" id="{03E2FB34-D842-45FC-B047-B0C67E7DA4C6}"/>
               </a:ext>
             </a:extLst>
           </p:cNvPr>
@@ -4367,7 +4367,7 @@
                 <a:ea typeface="Aptos"/>
                 <a:cs typeface="Aptos"/>
               </a:rPr>
-              <a:t>$9.99-14.99/mo target</a:t>
+              <a:t>$9.99-14.99/mo + tokens</a:t>
             </a:r>
           </a:p>
         </p:txBody>
@@ -4377,7 +4377,7 @@
           <p:cNvPr id="42" name="">
             <a:extLst xmlns:a="http://schemas.openxmlformats.org/drawingml/2006/main">
               <a:ext uri="{FF2B5EF4-FFF2-40B4-BE49-F238E27FC236}">
-                <a16:creationId xmlns:a16="http://schemas.microsoft.com/office/drawing/2014/main" id="{9AAC5456-E50F-4EE9-AD05-E6D8AD21380C}"/>
+                <a16:creationId xmlns:a16="http://schemas.microsoft.com/office/drawing/2014/main" id="{CB9E72F5-13A9-4CC2-8435-93C67A5008C0}"/>
               </a:ext>
             </a:extLst>
           </p:cNvPr>
@@ -4410,7 +4410,7 @@
           <p:cNvPr id="43" name="">
             <a:extLst xmlns:a="http://schemas.openxmlformats.org/drawingml/2006/main">
               <a:ext uri="{FF2B5EF4-FFF2-40B4-BE49-F238E27FC236}">
-                <a16:creationId xmlns:a16="http://schemas.microsoft.com/office/drawing/2014/main" id="{BDA0068B-8DE4-4F13-ABD7-41BE537370B5}"/>
+                <a16:creationId xmlns:a16="http://schemas.microsoft.com/office/drawing/2014/main" id="{755F14A9-3820-4B7E-AE8D-E6D96D901C65}"/>
               </a:ext>
             </a:extLst>
           </p:cNvPr>
@@ -4464,7 +4464,7 @@
                 <a:ea typeface="Aptos"/>
                 <a:cs typeface="Aptos"/>
               </a:rPr>
-              <a:t>weekly season, memory, Life Canvas, premium moments</a:t>
+              <a:t>season, memory, Life Canvas, premium video</a:t>
             </a:r>
           </a:p>
         </p:txBody>
@@ -4474,7 +4474,7 @@
           <p:cNvPr id="44" name="">
             <a:extLst xmlns:a="http://schemas.openxmlformats.org/drawingml/2006/main">
               <a:ext uri="{FF2B5EF4-FFF2-40B4-BE49-F238E27FC236}">
-                <a16:creationId xmlns:a16="http://schemas.microsoft.com/office/drawing/2014/main" id="{14BF2B24-8895-4DE2-8514-7AD394576553}"/>
+                <a16:creationId xmlns:a16="http://schemas.microsoft.com/office/drawing/2014/main" id="{368DE18B-5300-4CC4-ADC9-0C0C2FC3CED4}"/>
               </a:ext>
             </a:extLst>
           </p:cNvPr>
@@ -4507,7 +4507,7 @@
           <p:cNvPr id="45" name="">
             <a:extLst xmlns:a="http://schemas.openxmlformats.org/drawingml/2006/main">
               <a:ext uri="{FF2B5EF4-FFF2-40B4-BE49-F238E27FC236}">
-                <a16:creationId xmlns:a16="http://schemas.microsoft.com/office/drawing/2014/main" id="{B103AA8F-8FAF-46F5-99CE-6B643EE6D887}"/>
+                <a16:creationId xmlns:a16="http://schemas.microsoft.com/office/drawing/2014/main" id="{DF6AB25C-536B-414E-8566-D28646ED9D61}"/>
               </a:ext>
             </a:extLst>
           </p:cNvPr>
@@ -4561,7 +4561,7 @@
                 <a:ea typeface="Aptos"/>
                 <a:cs typeface="Aptos"/>
               </a:rPr>
-              <a:t>start below high-friction astrology/companion pricing</a:t>
+              <a:t>подписка ниже high-friction apps, video отдельно</a:t>
             </a:r>
           </a:p>
         </p:txBody>
@@ -4571,7 +4571,7 @@
           <p:cNvPr id="46" name="">
             <a:extLst xmlns:a="http://schemas.openxmlformats.org/drawingml/2006/main">
               <a:ext uri="{FF2B5EF4-FFF2-40B4-BE49-F238E27FC236}">
-                <a16:creationId xmlns:a16="http://schemas.microsoft.com/office/drawing/2014/main" id="{AA4AC0D0-0027-4CBC-BFC4-F4B66ED1F880}"/>
+                <a16:creationId xmlns:a16="http://schemas.microsoft.com/office/drawing/2014/main" id="{F6FC8C02-C617-4553-B7AE-DBF143B1CC8B}"/>
               </a:ext>
             </a:extLst>
           </p:cNvPr>
@@ -4633,7 +4633,7 @@
     </p:spTree>
     <p:extLst>
       <p:ext uri="{BB962C8B-B14F-4D97-AF65-F5344CB8AC3E}">
-        <p14:creationId xmlns:p14="http://schemas.microsoft.com/office/powerpoint/2010/main" val="1136353996"/>
+        <p14:creationId xmlns:p14="http://schemas.microsoft.com/office/powerpoint/2010/main" val="1001845442"/>
       </p:ext>
     </p:extLst>
   </p:cSld>
@@ -4657,7 +4657,7 @@
           <p:cNvPr id="1" name="">
             <a:extLst xmlns:a="http://schemas.openxmlformats.org/drawingml/2006/main">
               <a:ext uri="{FF2B5EF4-FFF2-40B4-BE49-F238E27FC236}">
-                <a16:creationId xmlns:a16="http://schemas.microsoft.com/office/drawing/2014/main" id="{4407CF6D-2EED-44A1-8D55-4A6B49ED22E0}"/>
+                <a16:creationId xmlns:a16="http://schemas.microsoft.com/office/drawing/2014/main" id="{2C8C158F-0C90-4C00-ACC4-DD0A1E27229B}"/>
               </a:ext>
             </a:extLst>
           </p:cNvPr>
@@ -4690,7 +4690,7 @@
           <p:cNvPr id="2" name="">
             <a:extLst xmlns:a="http://schemas.openxmlformats.org/drawingml/2006/main">
               <a:ext uri="{FF2B5EF4-FFF2-40B4-BE49-F238E27FC236}">
-                <a16:creationId xmlns:a16="http://schemas.microsoft.com/office/drawing/2014/main" id="{90FD00E1-534D-45F7-8D4A-99782870AF3C}"/>
+                <a16:creationId xmlns:a16="http://schemas.microsoft.com/office/drawing/2014/main" id="{E4C5304B-1919-4FFB-B3DF-12609ABE6C07}"/>
               </a:ext>
             </a:extLst>
           </p:cNvPr>
@@ -4723,7 +4723,7 @@
           <p:cNvPr id="3" name="">
             <a:extLst xmlns:a="http://schemas.openxmlformats.org/drawingml/2006/main">
               <a:ext uri="{FF2B5EF4-FFF2-40B4-BE49-F238E27FC236}">
-                <a16:creationId xmlns:a16="http://schemas.microsoft.com/office/drawing/2014/main" id="{D40E0F2A-C1C6-4736-85E8-8F47248F8AF9}"/>
+                <a16:creationId xmlns:a16="http://schemas.microsoft.com/office/drawing/2014/main" id="{F35D7763-C27A-4FF5-B5BB-CC889D9D4D37}"/>
               </a:ext>
             </a:extLst>
           </p:cNvPr>
@@ -4756,7 +4756,7 @@
           <p:cNvPr id="4" name="">
             <a:extLst xmlns:a="http://schemas.openxmlformats.org/drawingml/2006/main">
               <a:ext uri="{FF2B5EF4-FFF2-40B4-BE49-F238E27FC236}">
-                <a16:creationId xmlns:a16="http://schemas.microsoft.com/office/drawing/2014/main" id="{B2E1B079-F898-45F8-9833-AF2E67906751}"/>
+                <a16:creationId xmlns:a16="http://schemas.microsoft.com/office/drawing/2014/main" id="{E65EBA80-EBAB-42D5-92EA-C7F602DC85C1}"/>
               </a:ext>
             </a:extLst>
           </p:cNvPr>
@@ -4820,7 +4820,7 @@
           <p:cNvPr id="5" name="">
             <a:extLst xmlns:a="http://schemas.openxmlformats.org/drawingml/2006/main">
               <a:ext uri="{FF2B5EF4-FFF2-40B4-BE49-F238E27FC236}">
-                <a16:creationId xmlns:a16="http://schemas.microsoft.com/office/drawing/2014/main" id="{D292799E-D25B-440A-B9C0-E89416DDDAB7}"/>
+                <a16:creationId xmlns:a16="http://schemas.microsoft.com/office/drawing/2014/main" id="{AACC34C6-0B07-4167-9855-75EA5FCF569B}"/>
               </a:ext>
             </a:extLst>
           </p:cNvPr>
@@ -4884,7 +4884,7 @@
           <p:cNvPr id="6" name="">
             <a:extLst xmlns:a="http://schemas.openxmlformats.org/drawingml/2006/main">
               <a:ext uri="{FF2B5EF4-FFF2-40B4-BE49-F238E27FC236}">
-                <a16:creationId xmlns:a16="http://schemas.microsoft.com/office/drawing/2014/main" id="{50FCB08E-E8AF-4613-AC66-EA925E35BE32}"/>
+                <a16:creationId xmlns:a16="http://schemas.microsoft.com/office/drawing/2014/main" id="{EB149CB8-D443-48F8-A2A2-635DC29F80B8}"/>
               </a:ext>
             </a:extLst>
           </p:cNvPr>
@@ -4948,7 +4948,7 @@
           <p:cNvPr id="7" name="">
             <a:extLst xmlns:a="http://schemas.openxmlformats.org/drawingml/2006/main">
               <a:ext uri="{FF2B5EF4-FFF2-40B4-BE49-F238E27FC236}">
-                <a16:creationId xmlns:a16="http://schemas.microsoft.com/office/drawing/2014/main" id="{9F56CB69-7AD0-43E0-AAEB-1C7C17014174}"/>
+                <a16:creationId xmlns:a16="http://schemas.microsoft.com/office/drawing/2014/main" id="{62D760DE-A368-4B45-AC49-7B3355405C91}"/>
               </a:ext>
             </a:extLst>
           </p:cNvPr>
@@ -5012,7 +5012,7 @@
           <p:cNvPr id="8" name="">
             <a:extLst xmlns:a="http://schemas.openxmlformats.org/drawingml/2006/main">
               <a:ext uri="{FF2B5EF4-FFF2-40B4-BE49-F238E27FC236}">
-                <a16:creationId xmlns:a16="http://schemas.microsoft.com/office/drawing/2014/main" id="{6C6C733C-48AA-495A-9CED-A5F51B5A24CC}"/>
+                <a16:creationId xmlns:a16="http://schemas.microsoft.com/office/drawing/2014/main" id="{3A19475E-2817-4E4B-A29C-6D88439442E9}"/>
               </a:ext>
             </a:extLst>
           </p:cNvPr>
@@ -5066,7 +5066,7 @@
                 <a:ea typeface="Aptos"/>
                 <a:cs typeface="Aptos"/>
               </a:rPr>
-              <a:t>AURA should start with a free first loop: дата рождения, первый прогноз, первый episode, первое visual change.</a:t>
+              <a:t>Free: первый прогноз, Day 1 episode, одно действие/reset и первый avatar / Life Canvas moment.</a:t>
             </a:r>
           </a:p>
         </p:txBody>
@@ -5076,7 +5076,7 @@
           <p:cNvPr id="9" name="">
             <a:extLst xmlns:a="http://schemas.openxmlformats.org/drawingml/2006/main">
               <a:ext uri="{FF2B5EF4-FFF2-40B4-BE49-F238E27FC236}">
-                <a16:creationId xmlns:a16="http://schemas.microsoft.com/office/drawing/2014/main" id="{46F9BEA1-3004-4425-912E-00BF53B87C1F}"/>
+                <a16:creationId xmlns:a16="http://schemas.microsoft.com/office/drawing/2014/main" id="{D9A2598F-4D00-49F2-915E-B3FA1136E291}"/>
               </a:ext>
             </a:extLst>
           </p:cNvPr>
@@ -5140,7 +5140,7 @@
           <p:cNvPr id="10" name="">
             <a:extLst xmlns:a="http://schemas.openxmlformats.org/drawingml/2006/main">
               <a:ext uri="{FF2B5EF4-FFF2-40B4-BE49-F238E27FC236}">
-                <a16:creationId xmlns:a16="http://schemas.microsoft.com/office/drawing/2014/main" id="{9206F9F0-5466-4D1D-9F20-CEBB6D482DFC}"/>
+                <a16:creationId xmlns:a16="http://schemas.microsoft.com/office/drawing/2014/main" id="{C5C67746-9459-49A4-AE23-E15AAEF93D91}"/>
               </a:ext>
             </a:extLst>
           </p:cNvPr>
@@ -5194,7 +5194,7 @@
                 <a:ea typeface="Aptos"/>
                 <a:cs typeface="Aptos"/>
               </a:rPr>
-              <a:t>Plus subscription sells weekly seasons, memory, recap, advanced avatar styles and assistant continuity.</a:t>
+              <a:t>Plus: продолжение сезона, memory, weekly recap, assistant continuity, style presets и больше visual depth.</a:t>
             </a:r>
           </a:p>
         </p:txBody>
@@ -5204,7 +5204,7 @@
           <p:cNvPr id="11" name="">
             <a:extLst xmlns:a="http://schemas.openxmlformats.org/drawingml/2006/main">
               <a:ext uri="{FF2B5EF4-FFF2-40B4-BE49-F238E27FC236}">
-                <a16:creationId xmlns:a16="http://schemas.microsoft.com/office/drawing/2014/main" id="{4C9F810B-470B-470C-8B78-973FE13F1F2B}"/>
+                <a16:creationId xmlns:a16="http://schemas.microsoft.com/office/drawing/2014/main" id="{54A55979-9D0A-4733-9C75-252BC3C99D01}"/>
               </a:ext>
             </a:extLst>
           </p:cNvPr>
@@ -5268,7 +5268,7 @@
           <p:cNvPr id="12" name="">
             <a:extLst xmlns:a="http://schemas.openxmlformats.org/drawingml/2006/main">
               <a:ext uri="{FF2B5EF4-FFF2-40B4-BE49-F238E27FC236}">
-                <a16:creationId xmlns:a16="http://schemas.microsoft.com/office/drawing/2014/main" id="{515BA3BB-4EB9-4322-8E01-8D82FE485D4E}"/>
+                <a16:creationId xmlns:a16="http://schemas.microsoft.com/office/drawing/2014/main" id="{618B0347-6319-436C-9705-6413355D5109}"/>
               </a:ext>
             </a:extLst>
           </p:cNvPr>
@@ -5322,7 +5322,7 @@
                 <a:ea typeface="Aptos"/>
                 <a:cs typeface="Aptos"/>
               </a:rPr>
-              <a:t>Premium moments sell AI video, cinematic future-self scenes and limited creator seasons as tokens or packs.</a:t>
+              <a:t>Premium / tokens: video-avatar, cinematic future-self, trailer недели, creator season, редкие special episodes.</a:t>
             </a:r>
           </a:p>
         </p:txBody>
@@ -5332,7 +5332,7 @@
           <p:cNvPr id="13" name="">
             <a:extLst xmlns:a="http://schemas.openxmlformats.org/drawingml/2006/main">
               <a:ext uri="{FF2B5EF4-FFF2-40B4-BE49-F238E27FC236}">
-                <a16:creationId xmlns:a16="http://schemas.microsoft.com/office/drawing/2014/main" id="{AB329A72-E959-4B52-AE83-8F7545FA1580}"/>
+                <a16:creationId xmlns:a16="http://schemas.microsoft.com/office/drawing/2014/main" id="{2C51AB64-44DE-4521-A882-333D2E0896EF}"/>
               </a:ext>
             </a:extLst>
           </p:cNvPr>
@@ -5396,7 +5396,7 @@
           <p:cNvPr id="14" name="">
             <a:extLst xmlns:a="http://schemas.openxmlformats.org/drawingml/2006/main">
               <a:ext uri="{FF2B5EF4-FFF2-40B4-BE49-F238E27FC236}">
-                <a16:creationId xmlns:a16="http://schemas.microsoft.com/office/drawing/2014/main" id="{C863A234-6416-4FE0-AE94-F3CD79AFEC03}"/>
+                <a16:creationId xmlns:a16="http://schemas.microsoft.com/office/drawing/2014/main" id="{BD8DAB2C-3047-4A24-BA2E-CAE6267EBFCC}"/>
               </a:ext>
             </a:extLst>
           </p:cNvPr>
@@ -5450,7 +5450,7 @@
                 <a:ea typeface="Aptos"/>
                 <a:cs typeface="Aptos"/>
               </a:rPr>
-              <a:t>Video must be a paid event, not a free daily feature.</a:t>
+              <a:t>Правило экономики: daily loop дешевый, video только как paid event или milestone.</a:t>
             </a:r>
           </a:p>
         </p:txBody>
@@ -5460,7 +5460,7 @@
           <p:cNvPr id="15" name="">
             <a:extLst xmlns:a="http://schemas.openxmlformats.org/drawingml/2006/main">
               <a:ext uri="{FF2B5EF4-FFF2-40B4-BE49-F238E27FC236}">
-                <a16:creationId xmlns:a16="http://schemas.microsoft.com/office/drawing/2014/main" id="{7C3EB6F9-93D8-44E2-9A43-3AD0AA8D3306}"/>
+                <a16:creationId xmlns:a16="http://schemas.microsoft.com/office/drawing/2014/main" id="{2DEDB7CD-49D0-4200-BA86-692540945679}"/>
               </a:ext>
             </a:extLst>
           </p:cNvPr>
@@ -5493,7 +5493,7 @@
           <p:cNvPr id="16" name="">
             <a:extLst xmlns:a="http://schemas.openxmlformats.org/drawingml/2006/main">
               <a:ext uri="{FF2B5EF4-FFF2-40B4-BE49-F238E27FC236}">
-                <a16:creationId xmlns:a16="http://schemas.microsoft.com/office/drawing/2014/main" id="{6015BF12-512F-4939-B6AD-CD25288A65AD}"/>
+                <a16:creationId xmlns:a16="http://schemas.microsoft.com/office/drawing/2014/main" id="{F8C3C801-23E7-43CA-A783-4062C261392C}"/>
               </a:ext>
             </a:extLst>
           </p:cNvPr>
@@ -5557,7 +5557,7 @@
           <p:cNvPr id="17" name="">
             <a:extLst xmlns:a="http://schemas.openxmlformats.org/drawingml/2006/main">
               <a:ext uri="{FF2B5EF4-FFF2-40B4-BE49-F238E27FC236}">
-                <a16:creationId xmlns:a16="http://schemas.microsoft.com/office/drawing/2014/main" id="{85FA53FA-DDDC-4D3A-ABFF-E0F3DDBC9020}"/>
+                <a16:creationId xmlns:a16="http://schemas.microsoft.com/office/drawing/2014/main" id="{C967B11F-063A-4B0F-AECE-60B49947F374}"/>
               </a:ext>
             </a:extLst>
           </p:cNvPr>
@@ -5590,7 +5590,7 @@
           <p:cNvPr id="18" name="">
             <a:extLst xmlns:a="http://schemas.openxmlformats.org/drawingml/2006/main">
               <a:ext uri="{FF2B5EF4-FFF2-40B4-BE49-F238E27FC236}">
-                <a16:creationId xmlns:a16="http://schemas.microsoft.com/office/drawing/2014/main" id="{F6C06537-5A31-4ECD-B4E2-BD1323F6181E}"/>
+                <a16:creationId xmlns:a16="http://schemas.microsoft.com/office/drawing/2014/main" id="{B6B7D8CE-1B31-4EED-A8E1-3F09390CB371}"/>
               </a:ext>
             </a:extLst>
           </p:cNvPr>
@@ -5654,7 +5654,7 @@
           <p:cNvPr id="19" name="">
             <a:extLst xmlns:a="http://schemas.openxmlformats.org/drawingml/2006/main">
               <a:ext uri="{FF2B5EF4-FFF2-40B4-BE49-F238E27FC236}">
-                <a16:creationId xmlns:a16="http://schemas.microsoft.com/office/drawing/2014/main" id="{2DF473A4-E074-4BB9-BF1B-6224C5FBA71A}"/>
+                <a16:creationId xmlns:a16="http://schemas.microsoft.com/office/drawing/2014/main" id="{388AAFAA-8631-4951-9AD3-A15F0AE0C6D3}"/>
               </a:ext>
             </a:extLst>
           </p:cNvPr>
@@ -5687,7 +5687,7 @@
           <p:cNvPr id="20" name="">
             <a:extLst xmlns:a="http://schemas.openxmlformats.org/drawingml/2006/main">
               <a:ext uri="{FF2B5EF4-FFF2-40B4-BE49-F238E27FC236}">
-                <a16:creationId xmlns:a16="http://schemas.microsoft.com/office/drawing/2014/main" id="{F36AD13D-7E68-4C52-9097-F652E5E93F02}"/>
+                <a16:creationId xmlns:a16="http://schemas.microsoft.com/office/drawing/2014/main" id="{CD3FCB39-26D3-455C-8E13-9B473CAA78E0}"/>
               </a:ext>
             </a:extLst>
           </p:cNvPr>
@@ -5751,7 +5751,7 @@
           <p:cNvPr id="21" name="">
             <a:extLst xmlns:a="http://schemas.openxmlformats.org/drawingml/2006/main">
               <a:ext uri="{FF2B5EF4-FFF2-40B4-BE49-F238E27FC236}">
-                <a16:creationId xmlns:a16="http://schemas.microsoft.com/office/drawing/2014/main" id="{5D246DB1-9D65-4ED8-8C25-67CE3A1D5EC6}"/>
+                <a16:creationId xmlns:a16="http://schemas.microsoft.com/office/drawing/2014/main" id="{A4200A5A-56D0-4138-A1D9-7C77730F0329}"/>
               </a:ext>
             </a:extLst>
           </p:cNvPr>
@@ -5813,7 +5813,7 @@
     </p:spTree>
     <p:extLst>
       <p:ext uri="{BB962C8B-B14F-4D97-AF65-F5344CB8AC3E}">
-        <p14:creationId xmlns:p14="http://schemas.microsoft.com/office/powerpoint/2010/main" val="1815151191"/>
+        <p14:creationId xmlns:p14="http://schemas.microsoft.com/office/powerpoint/2010/main" val="568641245"/>
       </p:ext>
     </p:extLst>
   </p:cSld>
@@ -5837,7 +5837,7 @@
           <p:cNvPr id="1" name="">
             <a:extLst xmlns:a="http://schemas.openxmlformats.org/drawingml/2006/main">
               <a:ext uri="{FF2B5EF4-FFF2-40B4-BE49-F238E27FC236}">
-                <a16:creationId xmlns:a16="http://schemas.microsoft.com/office/drawing/2014/main" id="{4BCDCE54-601F-4E25-9564-23E3A693F502}"/>
+                <a16:creationId xmlns:a16="http://schemas.microsoft.com/office/drawing/2014/main" id="{96CDB691-DD63-4070-961D-66F29AFC52B2}"/>
               </a:ext>
             </a:extLst>
           </p:cNvPr>
@@ -5870,7 +5870,7 @@
           <p:cNvPr id="2" name="">
             <a:extLst xmlns:a="http://schemas.openxmlformats.org/drawingml/2006/main">
               <a:ext uri="{FF2B5EF4-FFF2-40B4-BE49-F238E27FC236}">
-                <a16:creationId xmlns:a16="http://schemas.microsoft.com/office/drawing/2014/main" id="{C0F05AE7-720C-46B2-8E93-2101DAF486C4}"/>
+                <a16:creationId xmlns:a16="http://schemas.microsoft.com/office/drawing/2014/main" id="{4981A2A6-6C61-4674-A3A8-AADE2E48AD2F}"/>
               </a:ext>
             </a:extLst>
           </p:cNvPr>
@@ -5903,7 +5903,7 @@
           <p:cNvPr id="3" name="">
             <a:extLst xmlns:a="http://schemas.openxmlformats.org/drawingml/2006/main">
               <a:ext uri="{FF2B5EF4-FFF2-40B4-BE49-F238E27FC236}">
-                <a16:creationId xmlns:a16="http://schemas.microsoft.com/office/drawing/2014/main" id="{6235139C-0865-4405-8E51-68EEA617B5E1}"/>
+                <a16:creationId xmlns:a16="http://schemas.microsoft.com/office/drawing/2014/main" id="{EEE8066D-3940-4B22-94F9-47320BAF6EE5}"/>
               </a:ext>
             </a:extLst>
           </p:cNvPr>
@@ -5936,7 +5936,7 @@
           <p:cNvPr id="4" name="">
             <a:extLst xmlns:a="http://schemas.openxmlformats.org/drawingml/2006/main">
               <a:ext uri="{FF2B5EF4-FFF2-40B4-BE49-F238E27FC236}">
-                <a16:creationId xmlns:a16="http://schemas.microsoft.com/office/drawing/2014/main" id="{570214F7-F285-4E74-ABB4-86470EFA3672}"/>
+                <a16:creationId xmlns:a16="http://schemas.microsoft.com/office/drawing/2014/main" id="{A7A03B1D-776D-4736-8328-735D8F4F72A8}"/>
               </a:ext>
             </a:extLst>
           </p:cNvPr>
@@ -6000,7 +6000,7 @@
           <p:cNvPr id="5" name="">
             <a:extLst xmlns:a="http://schemas.openxmlformats.org/drawingml/2006/main">
               <a:ext uri="{FF2B5EF4-FFF2-40B4-BE49-F238E27FC236}">
-                <a16:creationId xmlns:a16="http://schemas.microsoft.com/office/drawing/2014/main" id="{9C315394-C7D7-4AD7-B8A6-812574083EA7}"/>
+                <a16:creationId xmlns:a16="http://schemas.microsoft.com/office/drawing/2014/main" id="{C024634D-8849-465C-A091-906084F3DA8F}"/>
               </a:ext>
             </a:extLst>
           </p:cNvPr>
@@ -6064,7 +6064,7 @@
           <p:cNvPr id="6" name="">
             <a:extLst xmlns:a="http://schemas.openxmlformats.org/drawingml/2006/main">
               <a:ext uri="{FF2B5EF4-FFF2-40B4-BE49-F238E27FC236}">
-                <a16:creationId xmlns:a16="http://schemas.microsoft.com/office/drawing/2014/main" id="{D3A8410A-0B40-447B-8255-17C6869E34D9}"/>
+                <a16:creationId xmlns:a16="http://schemas.microsoft.com/office/drawing/2014/main" id="{0988DC58-7AA0-47F5-A9D4-0A9139297F94}"/>
               </a:ext>
             </a:extLst>
           </p:cNvPr>
@@ -6097,7 +6097,7 @@
           <p:cNvPr id="7" name="">
             <a:extLst xmlns:a="http://schemas.openxmlformats.org/drawingml/2006/main">
               <a:ext uri="{FF2B5EF4-FFF2-40B4-BE49-F238E27FC236}">
-                <a16:creationId xmlns:a16="http://schemas.microsoft.com/office/drawing/2014/main" id="{45218D65-2854-47CD-AE94-61FD2657DCC6}"/>
+                <a16:creationId xmlns:a16="http://schemas.microsoft.com/office/drawing/2014/main" id="{A4D270F3-38C8-4574-A166-8F1E065A2380}"/>
               </a:ext>
             </a:extLst>
           </p:cNvPr>
@@ -6151,7 +6151,7 @@
                 <a:ea typeface="Aptos"/>
                 <a:cs typeface="Aptos"/>
               </a:rPr>
-              <a:t>Metric</a:t>
+              <a:t>Scenario</a:t>
             </a:r>
           </a:p>
         </p:txBody>
@@ -6161,7 +6161,7 @@
           <p:cNvPr id="8" name="">
             <a:extLst xmlns:a="http://schemas.openxmlformats.org/drawingml/2006/main">
               <a:ext uri="{FF2B5EF4-FFF2-40B4-BE49-F238E27FC236}">
-                <a16:creationId xmlns:a16="http://schemas.microsoft.com/office/drawing/2014/main" id="{EF4CFD38-9B4C-453E-951E-E36D133D9B6C}"/>
+                <a16:creationId xmlns:a16="http://schemas.microsoft.com/office/drawing/2014/main" id="{FAD900AE-5F4D-4967-BAA4-C2C427A9B6EA}"/>
               </a:ext>
             </a:extLst>
           </p:cNvPr>
@@ -6194,7 +6194,7 @@
           <p:cNvPr id="9" name="">
             <a:extLst xmlns:a="http://schemas.openxmlformats.org/drawingml/2006/main">
               <a:ext uri="{FF2B5EF4-FFF2-40B4-BE49-F238E27FC236}">
-                <a16:creationId xmlns:a16="http://schemas.microsoft.com/office/drawing/2014/main" id="{966D7BB9-1DFD-4BBE-B49B-C9B0B8808812}"/>
+                <a16:creationId xmlns:a16="http://schemas.microsoft.com/office/drawing/2014/main" id="{338DD96D-6A0B-48D1-86E4-822A2EB51F91}"/>
               </a:ext>
             </a:extLst>
           </p:cNvPr>
@@ -6248,7 +6248,7 @@
                 <a:ea typeface="Aptos"/>
                 <a:cs typeface="Aptos"/>
               </a:rPr>
-              <a:t>MVP</a:t>
+              <a:t>Conservative</a:t>
             </a:r>
           </a:p>
         </p:txBody>
@@ -6258,7 +6258,7 @@
           <p:cNvPr id="10" name="">
             <a:extLst xmlns:a="http://schemas.openxmlformats.org/drawingml/2006/main">
               <a:ext uri="{FF2B5EF4-FFF2-40B4-BE49-F238E27FC236}">
-                <a16:creationId xmlns:a16="http://schemas.microsoft.com/office/drawing/2014/main" id="{CA995C24-9E79-4AF8-B954-BA2B3191DCDA}"/>
+                <a16:creationId xmlns:a16="http://schemas.microsoft.com/office/drawing/2014/main" id="{1BEC3F07-B5F8-40A4-B3C7-73317098D101}"/>
               </a:ext>
             </a:extLst>
           </p:cNvPr>
@@ -6291,7 +6291,7 @@
           <p:cNvPr id="11" name="">
             <a:extLst xmlns:a="http://schemas.openxmlformats.org/drawingml/2006/main">
               <a:ext uri="{FF2B5EF4-FFF2-40B4-BE49-F238E27FC236}">
-                <a16:creationId xmlns:a16="http://schemas.microsoft.com/office/drawing/2014/main" id="{7E4AD52B-83F5-4D95-9C91-C90D83A489DE}"/>
+                <a16:creationId xmlns:a16="http://schemas.microsoft.com/office/drawing/2014/main" id="{F4E4215D-1E59-4AA3-849D-98CAE9A65E3D}"/>
               </a:ext>
             </a:extLst>
           </p:cNvPr>
@@ -6345,7 +6345,7 @@
                 <a:ea typeface="Aptos"/>
                 <a:cs typeface="Aptos"/>
               </a:rPr>
-              <a:t>Early scale</a:t>
+              <a:t>Base</a:t>
             </a:r>
           </a:p>
         </p:txBody>
@@ -6355,7 +6355,7 @@
           <p:cNvPr id="12" name="">
             <a:extLst xmlns:a="http://schemas.openxmlformats.org/drawingml/2006/main">
               <a:ext uri="{FF2B5EF4-FFF2-40B4-BE49-F238E27FC236}">
-                <a16:creationId xmlns:a16="http://schemas.microsoft.com/office/drawing/2014/main" id="{A52E5260-6548-41AC-86D7-CF863F3C8A43}"/>
+                <a16:creationId xmlns:a16="http://schemas.microsoft.com/office/drawing/2014/main" id="{6DBAC385-FD96-4C76-A907-B5CE66AAE1CC}"/>
               </a:ext>
             </a:extLst>
           </p:cNvPr>
@@ -6388,7 +6388,7 @@
           <p:cNvPr id="13" name="">
             <a:extLst xmlns:a="http://schemas.openxmlformats.org/drawingml/2006/main">
               <a:ext uri="{FF2B5EF4-FFF2-40B4-BE49-F238E27FC236}">
-                <a16:creationId xmlns:a16="http://schemas.microsoft.com/office/drawing/2014/main" id="{044E0367-586D-46DB-A07C-4C9E61E57AAD}"/>
+                <a16:creationId xmlns:a16="http://schemas.microsoft.com/office/drawing/2014/main" id="{199AA98B-FDAD-4ABF-8D65-E0994B67AC5D}"/>
               </a:ext>
             </a:extLst>
           </p:cNvPr>
@@ -6442,7 +6442,7 @@
                 <a:ea typeface="Aptos"/>
                 <a:cs typeface="Aptos"/>
               </a:rPr>
-              <a:t>Growth</a:t>
+              <a:t>Optimistic</a:t>
             </a:r>
           </a:p>
         </p:txBody>
@@ -6452,7 +6452,7 @@
           <p:cNvPr id="14" name="">
             <a:extLst xmlns:a="http://schemas.openxmlformats.org/drawingml/2006/main">
               <a:ext uri="{FF2B5EF4-FFF2-40B4-BE49-F238E27FC236}">
-                <a16:creationId xmlns:a16="http://schemas.microsoft.com/office/drawing/2014/main" id="{F5C4650F-19F7-4A3D-BAB1-E54C86FA4CAA}"/>
+                <a16:creationId xmlns:a16="http://schemas.microsoft.com/office/drawing/2014/main" id="{AD7DA933-D892-4F11-9E09-F546F237FFF1}"/>
               </a:ext>
             </a:extLst>
           </p:cNvPr>
@@ -6485,7 +6485,7 @@
           <p:cNvPr id="15" name="">
             <a:extLst xmlns:a="http://schemas.openxmlformats.org/drawingml/2006/main">
               <a:ext uri="{FF2B5EF4-FFF2-40B4-BE49-F238E27FC236}">
-                <a16:creationId xmlns:a16="http://schemas.microsoft.com/office/drawing/2014/main" id="{7B8D7C12-A972-4736-87C0-2AE12DF57DC7}"/>
+                <a16:creationId xmlns:a16="http://schemas.microsoft.com/office/drawing/2014/main" id="{E0C9536A-1705-4A0B-AEBC-5A4E22B119D9}"/>
               </a:ext>
             </a:extLst>
           </p:cNvPr>
@@ -6539,7 +6539,7 @@
                 <a:ea typeface="Aptos"/>
                 <a:cs typeface="Aptos"/>
               </a:rPr>
-              <a:t>Users</a:t>
+              <a:t>Scale</a:t>
             </a:r>
           </a:p>
         </p:txBody>
@@ -6549,7 +6549,7 @@
           <p:cNvPr id="16" name="">
             <a:extLst xmlns:a="http://schemas.openxmlformats.org/drawingml/2006/main">
               <a:ext uri="{FF2B5EF4-FFF2-40B4-BE49-F238E27FC236}">
-                <a16:creationId xmlns:a16="http://schemas.microsoft.com/office/drawing/2014/main" id="{2C276F2A-9F19-4CF2-94DB-3089D29FB862}"/>
+                <a16:creationId xmlns:a16="http://schemas.microsoft.com/office/drawing/2014/main" id="{15FBC235-6A5A-4771-8352-2E179EADBAD1}"/>
               </a:ext>
             </a:extLst>
           </p:cNvPr>
@@ -6582,7 +6582,7 @@
           <p:cNvPr id="17" name="">
             <a:extLst xmlns:a="http://schemas.openxmlformats.org/drawingml/2006/main">
               <a:ext uri="{FF2B5EF4-FFF2-40B4-BE49-F238E27FC236}">
-                <a16:creationId xmlns:a16="http://schemas.microsoft.com/office/drawing/2014/main" id="{B3AA2C14-89F5-41E5-BA8B-4C53EBC1780D}"/>
+                <a16:creationId xmlns:a16="http://schemas.microsoft.com/office/drawing/2014/main" id="{C0B549C9-1970-4DA8-9332-2DA376F43DA5}"/>
               </a:ext>
             </a:extLst>
           </p:cNvPr>
@@ -6636,7 +6636,7 @@
                 <a:ea typeface="Aptos"/>
                 <a:cs typeface="Aptos"/>
               </a:rPr>
-              <a:t>1,000</a:t>
+              <a:t>10k MAU / 84 payers</a:t>
             </a:r>
           </a:p>
         </p:txBody>
@@ -6646,7 +6646,7 @@
           <p:cNvPr id="18" name="">
             <a:extLst xmlns:a="http://schemas.openxmlformats.org/drawingml/2006/main">
               <a:ext uri="{FF2B5EF4-FFF2-40B4-BE49-F238E27FC236}">
-                <a16:creationId xmlns:a16="http://schemas.microsoft.com/office/drawing/2014/main" id="{7D5F5A90-FF85-4441-B0C5-D3C63A061C79}"/>
+                <a16:creationId xmlns:a16="http://schemas.microsoft.com/office/drawing/2014/main" id="{5A4E1672-BEB3-497F-8E86-ABD02A0F6595}"/>
               </a:ext>
             </a:extLst>
           </p:cNvPr>
@@ -6679,7 +6679,7 @@
           <p:cNvPr id="19" name="">
             <a:extLst xmlns:a="http://schemas.openxmlformats.org/drawingml/2006/main">
               <a:ext uri="{FF2B5EF4-FFF2-40B4-BE49-F238E27FC236}">
-                <a16:creationId xmlns:a16="http://schemas.microsoft.com/office/drawing/2014/main" id="{78E64F3F-F297-425B-B2D1-A79BB3950702}"/>
+                <a16:creationId xmlns:a16="http://schemas.microsoft.com/office/drawing/2014/main" id="{4793BD10-736D-4C3A-B938-75AE70AC75CF}"/>
               </a:ext>
             </a:extLst>
           </p:cNvPr>
@@ -6733,7 +6733,7 @@
                 <a:ea typeface="Aptos"/>
                 <a:cs typeface="Aptos"/>
               </a:rPr>
-              <a:t>10,000</a:t>
+              <a:t>50k MAU / 1,650 payers</a:t>
             </a:r>
           </a:p>
         </p:txBody>
@@ -6743,7 +6743,7 @@
           <p:cNvPr id="20" name="">
             <a:extLst xmlns:a="http://schemas.openxmlformats.org/drawingml/2006/main">
               <a:ext uri="{FF2B5EF4-FFF2-40B4-BE49-F238E27FC236}">
-                <a16:creationId xmlns:a16="http://schemas.microsoft.com/office/drawing/2014/main" id="{6477943D-3CA1-4DAE-8807-026110070542}"/>
+                <a16:creationId xmlns:a16="http://schemas.microsoft.com/office/drawing/2014/main" id="{A93F86F6-9A69-4205-B772-9604396AA62A}"/>
               </a:ext>
             </a:extLst>
           </p:cNvPr>
@@ -6776,7 +6776,7 @@
           <p:cNvPr id="21" name="">
             <a:extLst xmlns:a="http://schemas.openxmlformats.org/drawingml/2006/main">
               <a:ext uri="{FF2B5EF4-FFF2-40B4-BE49-F238E27FC236}">
-                <a16:creationId xmlns:a16="http://schemas.microsoft.com/office/drawing/2014/main" id="{953AAAB9-6AE6-4C31-8B99-C7716D7BA884}"/>
+                <a16:creationId xmlns:a16="http://schemas.microsoft.com/office/drawing/2014/main" id="{49387E4A-652C-40D2-BE2F-3A7206DAEF2A}"/>
               </a:ext>
             </a:extLst>
           </p:cNvPr>
@@ -6830,7 +6830,7 @@
                 <a:ea typeface="Aptos"/>
                 <a:cs typeface="Aptos"/>
               </a:rPr>
-              <a:t>100,000</a:t>
+              <a:t>150k MAU / 8,370 payers</a:t>
             </a:r>
           </a:p>
         </p:txBody>
@@ -6840,7 +6840,7 @@
           <p:cNvPr id="22" name="">
             <a:extLst xmlns:a="http://schemas.openxmlformats.org/drawingml/2006/main">
               <a:ext uri="{FF2B5EF4-FFF2-40B4-BE49-F238E27FC236}">
-                <a16:creationId xmlns:a16="http://schemas.microsoft.com/office/drawing/2014/main" id="{AEDA939E-9ACF-4CE1-964B-EABCD39FFA46}"/>
+                <a16:creationId xmlns:a16="http://schemas.microsoft.com/office/drawing/2014/main" id="{39F91AF1-569E-4367-8BA2-2CF6CB91B5C1}"/>
               </a:ext>
             </a:extLst>
           </p:cNvPr>
@@ -6873,7 +6873,7 @@
           <p:cNvPr id="23" name="">
             <a:extLst xmlns:a="http://schemas.openxmlformats.org/drawingml/2006/main">
               <a:ext uri="{FF2B5EF4-FFF2-40B4-BE49-F238E27FC236}">
-                <a16:creationId xmlns:a16="http://schemas.microsoft.com/office/drawing/2014/main" id="{60DF3DD0-8916-4801-9E07-7CAD56B320F0}"/>
+                <a16:creationId xmlns:a16="http://schemas.microsoft.com/office/drawing/2014/main" id="{A925DA8A-E059-4163-A498-18A5E89513AD}"/>
               </a:ext>
             </a:extLst>
           </p:cNvPr>
@@ -6927,7 +6927,7 @@
                 <a:ea typeface="Aptos"/>
                 <a:cs typeface="Aptos"/>
               </a:rPr>
-              <a:t>Paid conversion</a:t>
+              <a:t>Net revenue / month</a:t>
             </a:r>
           </a:p>
         </p:txBody>
@@ -6937,7 +6937,7 @@
           <p:cNvPr id="24" name="">
             <a:extLst xmlns:a="http://schemas.openxmlformats.org/drawingml/2006/main">
               <a:ext uri="{FF2B5EF4-FFF2-40B4-BE49-F238E27FC236}">
-                <a16:creationId xmlns:a16="http://schemas.microsoft.com/office/drawing/2014/main" id="{C6A532A1-1DE7-4FD7-B725-84A4D1FE5070}"/>
+                <a16:creationId xmlns:a16="http://schemas.microsoft.com/office/drawing/2014/main" id="{46FFC31A-346F-4F49-BDA4-A18174652F9A}"/>
               </a:ext>
             </a:extLst>
           </p:cNvPr>
@@ -6970,7 +6970,7 @@
           <p:cNvPr id="25" name="">
             <a:extLst xmlns:a="http://schemas.openxmlformats.org/drawingml/2006/main">
               <a:ext uri="{FF2B5EF4-FFF2-40B4-BE49-F238E27FC236}">
-                <a16:creationId xmlns:a16="http://schemas.microsoft.com/office/drawing/2014/main" id="{F0D9902A-B598-4216-A87B-C8094E6973A8}"/>
+                <a16:creationId xmlns:a16="http://schemas.microsoft.com/office/drawing/2014/main" id="{CC7F5A65-C285-442E-A1FA-6C347FD09269}"/>
               </a:ext>
             </a:extLst>
           </p:cNvPr>
@@ -7024,7 +7024,7 @@
                 <a:ea typeface="Aptos"/>
                 <a:cs typeface="Aptos"/>
               </a:rPr>
-              <a:t>3%</a:t>
+              <a:t>$413</a:t>
             </a:r>
           </a:p>
         </p:txBody>
@@ -7034,7 +7034,7 @@
           <p:cNvPr id="26" name="">
             <a:extLst xmlns:a="http://schemas.openxmlformats.org/drawingml/2006/main">
               <a:ext uri="{FF2B5EF4-FFF2-40B4-BE49-F238E27FC236}">
-                <a16:creationId xmlns:a16="http://schemas.microsoft.com/office/drawing/2014/main" id="{F36FEBC9-1071-4B24-A92B-4FE46C1F658A}"/>
+                <a16:creationId xmlns:a16="http://schemas.microsoft.com/office/drawing/2014/main" id="{910C737A-FAC7-4F66-B194-455737FE35B2}"/>
               </a:ext>
             </a:extLst>
           </p:cNvPr>
@@ -7067,7 +7067,7 @@
           <p:cNvPr id="27" name="">
             <a:extLst xmlns:a="http://schemas.openxmlformats.org/drawingml/2006/main">
               <a:ext uri="{FF2B5EF4-FFF2-40B4-BE49-F238E27FC236}">
-                <a16:creationId xmlns:a16="http://schemas.microsoft.com/office/drawing/2014/main" id="{F2D509C8-248F-451E-8E7F-48F600609C6D}"/>
+                <a16:creationId xmlns:a16="http://schemas.microsoft.com/office/drawing/2014/main" id="{713531C2-FA0C-4EEB-9A14-DD0918AEC0EB}"/>
               </a:ext>
             </a:extLst>
           </p:cNvPr>
@@ -7121,7 +7121,7 @@
                 <a:ea typeface="Aptos"/>
                 <a:cs typeface="Aptos"/>
               </a:rPr>
-              <a:t>5%</a:t>
+              <a:t>$13.1k</a:t>
             </a:r>
           </a:p>
         </p:txBody>
@@ -7131,7 +7131,7 @@
           <p:cNvPr id="28" name="">
             <a:extLst xmlns:a="http://schemas.openxmlformats.org/drawingml/2006/main">
               <a:ext uri="{FF2B5EF4-FFF2-40B4-BE49-F238E27FC236}">
-                <a16:creationId xmlns:a16="http://schemas.microsoft.com/office/drawing/2014/main" id="{815FD13D-0234-4475-96D2-C2F9A52ABBEF}"/>
+                <a16:creationId xmlns:a16="http://schemas.microsoft.com/office/drawing/2014/main" id="{F7C769EC-CB98-4AC7-8D7E-748DCE2975D9}"/>
               </a:ext>
             </a:extLst>
           </p:cNvPr>
@@ -7164,7 +7164,7 @@
           <p:cNvPr id="29" name="">
             <a:extLst xmlns:a="http://schemas.openxmlformats.org/drawingml/2006/main">
               <a:ext uri="{FF2B5EF4-FFF2-40B4-BE49-F238E27FC236}">
-                <a16:creationId xmlns:a16="http://schemas.microsoft.com/office/drawing/2014/main" id="{D1047E87-34EE-4853-946F-0CB9E212F89E}"/>
+                <a16:creationId xmlns:a16="http://schemas.microsoft.com/office/drawing/2014/main" id="{879FB6F6-06A6-4905-9B69-15DFD91ABCA2}"/>
               </a:ext>
             </a:extLst>
           </p:cNvPr>
@@ -7218,7 +7218,7 @@
                 <a:ea typeface="Aptos"/>
                 <a:cs typeface="Aptos"/>
               </a:rPr>
-              <a:t>7%</a:t>
+              <a:t>$97.0k</a:t>
             </a:r>
           </a:p>
         </p:txBody>
@@ -7228,7 +7228,7 @@
           <p:cNvPr id="30" name="">
             <a:extLst xmlns:a="http://schemas.openxmlformats.org/drawingml/2006/main">
               <a:ext uri="{FF2B5EF4-FFF2-40B4-BE49-F238E27FC236}">
-                <a16:creationId xmlns:a16="http://schemas.microsoft.com/office/drawing/2014/main" id="{C2E85C97-D745-437D-88B4-9DE7E119D0F6}"/>
+                <a16:creationId xmlns:a16="http://schemas.microsoft.com/office/drawing/2014/main" id="{6EAEEA59-AEA7-4181-B207-F9D606B5296C}"/>
               </a:ext>
             </a:extLst>
           </p:cNvPr>
@@ -7261,7 +7261,7 @@
           <p:cNvPr id="31" name="">
             <a:extLst xmlns:a="http://schemas.openxmlformats.org/drawingml/2006/main">
               <a:ext uri="{FF2B5EF4-FFF2-40B4-BE49-F238E27FC236}">
-                <a16:creationId xmlns:a16="http://schemas.microsoft.com/office/drawing/2014/main" id="{00DDE8E1-A780-433C-9D87-54DED7AF92F5}"/>
+                <a16:creationId xmlns:a16="http://schemas.microsoft.com/office/drawing/2014/main" id="{F65ED574-9800-47F6-8263-4691C968EBFE}"/>
               </a:ext>
             </a:extLst>
           </p:cNvPr>
@@ -7315,7 +7315,7 @@
                 <a:ea typeface="Aptos"/>
                 <a:cs typeface="Aptos"/>
               </a:rPr>
-              <a:t>ARPPU / month</a:t>
+              <a:t>Product gross margin</a:t>
             </a:r>
           </a:p>
         </p:txBody>
@@ -7325,7 +7325,7 @@
           <p:cNvPr id="32" name="">
             <a:extLst xmlns:a="http://schemas.openxmlformats.org/drawingml/2006/main">
               <a:ext uri="{FF2B5EF4-FFF2-40B4-BE49-F238E27FC236}">
-                <a16:creationId xmlns:a16="http://schemas.microsoft.com/office/drawing/2014/main" id="{D644AAE1-8CB5-4651-949C-7D875FD6823A}"/>
+                <a16:creationId xmlns:a16="http://schemas.microsoft.com/office/drawing/2014/main" id="{F0473E68-E53F-4FFD-AFBE-8C550F2E95C0}"/>
               </a:ext>
             </a:extLst>
           </p:cNvPr>
@@ -7358,7 +7358,7 @@
           <p:cNvPr id="33" name="">
             <a:extLst xmlns:a="http://schemas.openxmlformats.org/drawingml/2006/main">
               <a:ext uri="{FF2B5EF4-FFF2-40B4-BE49-F238E27FC236}">
-                <a16:creationId xmlns:a16="http://schemas.microsoft.com/office/drawing/2014/main" id="{F929C404-1CBF-403C-93A9-CBD02EA6B36E}"/>
+                <a16:creationId xmlns:a16="http://schemas.microsoft.com/office/drawing/2014/main" id="{D64EA658-8D75-437E-9ADB-B0BB91AD3CA9}"/>
               </a:ext>
             </a:extLst>
           </p:cNvPr>
@@ -7412,7 +7412,7 @@
                 <a:ea typeface="Aptos"/>
                 <a:cs typeface="Aptos"/>
               </a:rPr>
-              <a:t>$10</a:t>
+              <a:t>29.2%</a:t>
             </a:r>
           </a:p>
         </p:txBody>
@@ -7422,7 +7422,7 @@
           <p:cNvPr id="34" name="">
             <a:extLst xmlns:a="http://schemas.openxmlformats.org/drawingml/2006/main">
               <a:ext uri="{FF2B5EF4-FFF2-40B4-BE49-F238E27FC236}">
-                <a16:creationId xmlns:a16="http://schemas.microsoft.com/office/drawing/2014/main" id="{97199C5F-39F5-4127-BC27-0D9C9983D89B}"/>
+                <a16:creationId xmlns:a16="http://schemas.microsoft.com/office/drawing/2014/main" id="{CEF4497D-3007-452F-A8A9-DE88DA267C10}"/>
               </a:ext>
             </a:extLst>
           </p:cNvPr>
@@ -7455,7 +7455,7 @@
           <p:cNvPr id="35" name="">
             <a:extLst xmlns:a="http://schemas.openxmlformats.org/drawingml/2006/main">
               <a:ext uri="{FF2B5EF4-FFF2-40B4-BE49-F238E27FC236}">
-                <a16:creationId xmlns:a16="http://schemas.microsoft.com/office/drawing/2014/main" id="{41B70996-C30A-414D-9F3B-1F17CEC7924D}"/>
+                <a16:creationId xmlns:a16="http://schemas.microsoft.com/office/drawing/2014/main" id="{C8A48CBF-8CDE-43B3-8137-D414A8E250B4}"/>
               </a:ext>
             </a:extLst>
           </p:cNvPr>
@@ -7509,7 +7509,7 @@
                 <a:ea typeface="Aptos"/>
                 <a:cs typeface="Aptos"/>
               </a:rPr>
-              <a:t>$12</a:t>
+              <a:t>68.8%</a:t>
             </a:r>
           </a:p>
         </p:txBody>
@@ -7519,7 +7519,7 @@
           <p:cNvPr id="36" name="">
             <a:extLst xmlns:a="http://schemas.openxmlformats.org/drawingml/2006/main">
               <a:ext uri="{FF2B5EF4-FFF2-40B4-BE49-F238E27FC236}">
-                <a16:creationId xmlns:a16="http://schemas.microsoft.com/office/drawing/2014/main" id="{580EF1FB-C2DB-47CC-8E48-FC930E8F8BC9}"/>
+                <a16:creationId xmlns:a16="http://schemas.microsoft.com/office/drawing/2014/main" id="{6377E6CE-3831-4BAF-AFC4-C0149C415ABE}"/>
               </a:ext>
             </a:extLst>
           </p:cNvPr>
@@ -7552,7 +7552,7 @@
           <p:cNvPr id="37" name="">
             <a:extLst xmlns:a="http://schemas.openxmlformats.org/drawingml/2006/main">
               <a:ext uri="{FF2B5EF4-FFF2-40B4-BE49-F238E27FC236}">
-                <a16:creationId xmlns:a16="http://schemas.microsoft.com/office/drawing/2014/main" id="{8CC16201-315C-455D-A0C4-8F9ED43BB6E4}"/>
+                <a16:creationId xmlns:a16="http://schemas.microsoft.com/office/drawing/2014/main" id="{EFF21056-7AE6-45D8-9C6F-87DCE1D82BDD}"/>
               </a:ext>
             </a:extLst>
           </p:cNvPr>
@@ -7606,7 +7606,7 @@
                 <a:ea typeface="Aptos"/>
                 <a:cs typeface="Aptos"/>
               </a:rPr>
-              <a:t>$14</a:t>
+              <a:t>70.6%</a:t>
             </a:r>
           </a:p>
         </p:txBody>
@@ -7616,7 +7616,7 @@
           <p:cNvPr id="38" name="">
             <a:extLst xmlns:a="http://schemas.openxmlformats.org/drawingml/2006/main">
               <a:ext uri="{FF2B5EF4-FFF2-40B4-BE49-F238E27FC236}">
-                <a16:creationId xmlns:a16="http://schemas.microsoft.com/office/drawing/2014/main" id="{A6BAE549-EACC-4AD1-92F9-AF2E779CEC88}"/>
+                <a16:creationId xmlns:a16="http://schemas.microsoft.com/office/drawing/2014/main" id="{92F5EB86-1A98-457E-82DE-8DB8F9F9A5E7}"/>
               </a:ext>
             </a:extLst>
           </p:cNvPr>
@@ -7649,7 +7649,7 @@
           <p:cNvPr id="39" name="">
             <a:extLst xmlns:a="http://schemas.openxmlformats.org/drawingml/2006/main">
               <a:ext uri="{FF2B5EF4-FFF2-40B4-BE49-F238E27FC236}">
-                <a16:creationId xmlns:a16="http://schemas.microsoft.com/office/drawing/2014/main" id="{4C7BF45E-A10A-4D46-B43E-494D0A54DA2F}"/>
+                <a16:creationId xmlns:a16="http://schemas.microsoft.com/office/drawing/2014/main" id="{39AB79E5-559A-4592-9549-3C86D4C035AF}"/>
               </a:ext>
             </a:extLst>
           </p:cNvPr>
@@ -7703,7 +7703,7 @@
                 <a:ea typeface="Aptos"/>
                 <a:cs typeface="Aptos"/>
               </a:rPr>
-              <a:t>Revenue / month</a:t>
+              <a:t>Payback period</a:t>
             </a:r>
           </a:p>
         </p:txBody>
@@ -7713,7 +7713,7 @@
           <p:cNvPr id="40" name="">
             <a:extLst xmlns:a="http://schemas.openxmlformats.org/drawingml/2006/main">
               <a:ext uri="{FF2B5EF4-FFF2-40B4-BE49-F238E27FC236}">
-                <a16:creationId xmlns:a16="http://schemas.microsoft.com/office/drawing/2014/main" id="{820D752A-A343-4E2E-923F-81CEF9F64889}"/>
+                <a16:creationId xmlns:a16="http://schemas.microsoft.com/office/drawing/2014/main" id="{289ECCC8-8CA4-4A84-A3DF-AA7C7BC2A409}"/>
               </a:ext>
             </a:extLst>
           </p:cNvPr>
@@ -7746,7 +7746,7 @@
           <p:cNvPr id="41" name="">
             <a:extLst xmlns:a="http://schemas.openxmlformats.org/drawingml/2006/main">
               <a:ext uri="{FF2B5EF4-FFF2-40B4-BE49-F238E27FC236}">
-                <a16:creationId xmlns:a16="http://schemas.microsoft.com/office/drawing/2014/main" id="{58C5D663-D991-46AD-92FE-5D0CC2CC3763}"/>
+                <a16:creationId xmlns:a16="http://schemas.microsoft.com/office/drawing/2014/main" id="{648BCE5A-898C-47EE-AFDD-CE4E2080F4B2}"/>
               </a:ext>
             </a:extLst>
           </p:cNvPr>
@@ -7800,7 +7800,7 @@
                 <a:ea typeface="Aptos"/>
                 <a:cs typeface="Aptos"/>
               </a:rPr>
-              <a:t>$300</a:t>
+              <a:t>23.2 months</a:t>
             </a:r>
           </a:p>
         </p:txBody>
@@ -7810,7 +7810,7 @@
           <p:cNvPr id="42" name="">
             <a:extLst xmlns:a="http://schemas.openxmlformats.org/drawingml/2006/main">
               <a:ext uri="{FF2B5EF4-FFF2-40B4-BE49-F238E27FC236}">
-                <a16:creationId xmlns:a16="http://schemas.microsoft.com/office/drawing/2014/main" id="{1D4C5746-2DDD-4F11-9BB8-BFD3A2CC4538}"/>
+                <a16:creationId xmlns:a16="http://schemas.microsoft.com/office/drawing/2014/main" id="{1B6C9EF6-FB5E-4C4B-A995-B5FA17E744E4}"/>
               </a:ext>
             </a:extLst>
           </p:cNvPr>
@@ -7843,7 +7843,7 @@
           <p:cNvPr id="43" name="">
             <a:extLst xmlns:a="http://schemas.openxmlformats.org/drawingml/2006/main">
               <a:ext uri="{FF2B5EF4-FFF2-40B4-BE49-F238E27FC236}">
-                <a16:creationId xmlns:a16="http://schemas.microsoft.com/office/drawing/2014/main" id="{E0AD91EB-ACB7-45AC-9834-CAC590418E2E}"/>
+                <a16:creationId xmlns:a16="http://schemas.microsoft.com/office/drawing/2014/main" id="{F3402618-283E-498A-BE6A-80FDF7119572}"/>
               </a:ext>
             </a:extLst>
           </p:cNvPr>
@@ -7897,7 +7897,7 @@
                 <a:ea typeface="Aptos"/>
                 <a:cs typeface="Aptos"/>
               </a:rPr>
-              <a:t>$6,000</a:t>
+              <a:t>5.5 months</a:t>
             </a:r>
           </a:p>
         </p:txBody>
@@ -7907,7 +7907,7 @@
           <p:cNvPr id="44" name="">
             <a:extLst xmlns:a="http://schemas.openxmlformats.org/drawingml/2006/main">
               <a:ext uri="{FF2B5EF4-FFF2-40B4-BE49-F238E27FC236}">
-                <a16:creationId xmlns:a16="http://schemas.microsoft.com/office/drawing/2014/main" id="{DF0FAF18-5502-4207-9056-663DDAFE6942}"/>
+                <a16:creationId xmlns:a16="http://schemas.microsoft.com/office/drawing/2014/main" id="{59BDBB58-8EF8-492B-AB51-1E51C1370CDF}"/>
               </a:ext>
             </a:extLst>
           </p:cNvPr>
@@ -7940,7 +7940,7 @@
           <p:cNvPr id="45" name="">
             <a:extLst xmlns:a="http://schemas.openxmlformats.org/drawingml/2006/main">
               <a:ext uri="{FF2B5EF4-FFF2-40B4-BE49-F238E27FC236}">
-                <a16:creationId xmlns:a16="http://schemas.microsoft.com/office/drawing/2014/main" id="{F292CE21-5A62-4E80-A724-BACA904D2E35}"/>
+                <a16:creationId xmlns:a16="http://schemas.microsoft.com/office/drawing/2014/main" id="{B8F7BC3B-A677-4D11-8457-A0BE22A03326}"/>
               </a:ext>
             </a:extLst>
           </p:cNvPr>
@@ -7994,7 +7994,7 @@
                 <a:ea typeface="Aptos"/>
                 <a:cs typeface="Aptos"/>
               </a:rPr>
-              <a:t>$98,000</a:t>
+              <a:t>4.8 months</a:t>
             </a:r>
           </a:p>
         </p:txBody>
@@ -8004,7 +8004,7 @@
           <p:cNvPr id="46" name="">
             <a:extLst xmlns:a="http://schemas.openxmlformats.org/drawingml/2006/main">
               <a:ext uri="{FF2B5EF4-FFF2-40B4-BE49-F238E27FC236}">
-                <a16:creationId xmlns:a16="http://schemas.microsoft.com/office/drawing/2014/main" id="{3B82E1F5-D2BC-4B4A-8FDB-23D978A4234C}"/>
+                <a16:creationId xmlns:a16="http://schemas.microsoft.com/office/drawing/2014/main" id="{A23621F0-E8F0-406B-B747-8B2E0D82EF32}"/>
               </a:ext>
             </a:extLst>
           </p:cNvPr>
@@ -8037,7 +8037,7 @@
           <p:cNvPr id="47" name="">
             <a:extLst xmlns:a="http://schemas.openxmlformats.org/drawingml/2006/main">
               <a:ext uri="{FF2B5EF4-FFF2-40B4-BE49-F238E27FC236}">
-                <a16:creationId xmlns:a16="http://schemas.microsoft.com/office/drawing/2014/main" id="{371E19F1-257D-4100-A533-AA3356527781}"/>
+                <a16:creationId xmlns:a16="http://schemas.microsoft.com/office/drawing/2014/main" id="{EB38EF65-16A5-4A5A-A0F6-939ACE487E10}"/>
               </a:ext>
             </a:extLst>
           </p:cNvPr>
@@ -8091,7 +8091,7 @@
                 <a:ea typeface="Aptos"/>
                 <a:cs typeface="Aptos"/>
               </a:rPr>
-              <a:t>Product COGS</a:t>
+              <a:t>Verdict</a:t>
             </a:r>
           </a:p>
         </p:txBody>
@@ -8101,7 +8101,7 @@
           <p:cNvPr id="48" name="">
             <a:extLst xmlns:a="http://schemas.openxmlformats.org/drawingml/2006/main">
               <a:ext uri="{FF2B5EF4-FFF2-40B4-BE49-F238E27FC236}">
-                <a16:creationId xmlns:a16="http://schemas.microsoft.com/office/drawing/2014/main" id="{6E360322-497B-404C-A8FE-56D4995BC739}"/>
+                <a16:creationId xmlns:a16="http://schemas.microsoft.com/office/drawing/2014/main" id="{49BC96B8-5A46-41DB-B49E-9F2F83D3B010}"/>
               </a:ext>
             </a:extLst>
           </p:cNvPr>
@@ -8134,7 +8134,7 @@
           <p:cNvPr id="49" name="">
             <a:extLst xmlns:a="http://schemas.openxmlformats.org/drawingml/2006/main">
               <a:ext uri="{FF2B5EF4-FFF2-40B4-BE49-F238E27FC236}">
-                <a16:creationId xmlns:a16="http://schemas.microsoft.com/office/drawing/2014/main" id="{120A398A-0A64-4A73-B3B2-6AB0BDC099F2}"/>
+                <a16:creationId xmlns:a16="http://schemas.microsoft.com/office/drawing/2014/main" id="{EF5285CA-4561-4E29-8593-DB81FEFAEA66}"/>
               </a:ext>
             </a:extLst>
           </p:cNvPr>
@@ -8188,7 +8188,7 @@
                 <a:ea typeface="Aptos"/>
                 <a:cs typeface="Aptos"/>
               </a:rPr>
-              <a:t>$80-250</a:t>
+              <a:t>does not pass</a:t>
             </a:r>
           </a:p>
         </p:txBody>
@@ -8198,7 +8198,7 @@
           <p:cNvPr id="50" name="">
             <a:extLst xmlns:a="http://schemas.openxmlformats.org/drawingml/2006/main">
               <a:ext uri="{FF2B5EF4-FFF2-40B4-BE49-F238E27FC236}">
-                <a16:creationId xmlns:a16="http://schemas.microsoft.com/office/drawing/2014/main" id="{493BDDDF-F985-4FAD-9BF0-7495F2768565}"/>
+                <a16:creationId xmlns:a16="http://schemas.microsoft.com/office/drawing/2014/main" id="{E7E32527-1079-4B08-B289-C97C7D8F438E}"/>
               </a:ext>
             </a:extLst>
           </p:cNvPr>
@@ -8231,7 +8231,7 @@
           <p:cNvPr id="51" name="">
             <a:extLst xmlns:a="http://schemas.openxmlformats.org/drawingml/2006/main">
               <a:ext uri="{FF2B5EF4-FFF2-40B4-BE49-F238E27FC236}">
-                <a16:creationId xmlns:a16="http://schemas.microsoft.com/office/drawing/2014/main" id="{0308BE0E-B287-46C5-B1B5-97B15365A9DA}"/>
+                <a16:creationId xmlns:a16="http://schemas.microsoft.com/office/drawing/2014/main" id="{603B758C-2804-471F-871A-8B226831EA87}"/>
               </a:ext>
             </a:extLst>
           </p:cNvPr>
@@ -8285,7 +8285,7 @@
                 <a:ea typeface="Aptos"/>
                 <a:cs typeface="Aptos"/>
               </a:rPr>
-              <a:t>$1.5k-5k</a:t>
+              <a:t>works if video gated</a:t>
             </a:r>
           </a:p>
         </p:txBody>
@@ -8295,7 +8295,7 @@
           <p:cNvPr id="52" name="">
             <a:extLst xmlns:a="http://schemas.openxmlformats.org/drawingml/2006/main">
               <a:ext uri="{FF2B5EF4-FFF2-40B4-BE49-F238E27FC236}">
-                <a16:creationId xmlns:a16="http://schemas.microsoft.com/office/drawing/2014/main" id="{58179C9F-DDEA-4EF0-865C-4D32D752126E}"/>
+                <a16:creationId xmlns:a16="http://schemas.microsoft.com/office/drawing/2014/main" id="{590C5961-C4C9-4381-9074-305CED69F27D}"/>
               </a:ext>
             </a:extLst>
           </p:cNvPr>
@@ -8328,7 +8328,7 @@
           <p:cNvPr id="53" name="">
             <a:extLst xmlns:a="http://schemas.openxmlformats.org/drawingml/2006/main">
               <a:ext uri="{FF2B5EF4-FFF2-40B4-BE49-F238E27FC236}">
-                <a16:creationId xmlns:a16="http://schemas.microsoft.com/office/drawing/2014/main" id="{88A53D05-CD44-4FA7-B52C-8E2FEB6C3E85}"/>
+                <a16:creationId xmlns:a16="http://schemas.microsoft.com/office/drawing/2014/main" id="{583926C2-88D8-450F-8805-85D18239D352}"/>
               </a:ext>
             </a:extLst>
           </p:cNvPr>
@@ -8382,7 +8382,7 @@
                 <a:ea typeface="Aptos"/>
                 <a:cs typeface="Aptos"/>
               </a:rPr>
-              <a:t>$18k-45k</a:t>
+              <a:t>strong but needs retention</a:t>
             </a:r>
           </a:p>
         </p:txBody>
@@ -8392,395 +8392,7 @@
           <p:cNvPr id="54" name="">
             <a:extLst xmlns:a="http://schemas.openxmlformats.org/drawingml/2006/main">
               <a:ext uri="{FF2B5EF4-FFF2-40B4-BE49-F238E27FC236}">
-                <a16:creationId xmlns:a16="http://schemas.microsoft.com/office/drawing/2014/main" id="{2C24674F-639C-4E96-BFBD-BE989DD23AFD}"/>
-              </a:ext>
-            </a:extLst>
-          </p:cNvPr>
-          <p:cNvSpPr>
-            <a:spLocks xmlns:a="http://schemas.openxmlformats.org/drawingml/2006/main" noGrp="1"/>
-          </p:cNvSpPr>
-          <p:nvPr/>
-        </p:nvSpPr>
-        <p:spPr>
-          <a:xfrm xmlns:a="http://schemas.openxmlformats.org/drawingml/2006/main">
-            <a:off x="666750" y="4572000"/>
-            <a:ext cx="2286000" cy="476250"/>
-          </a:xfrm>
-          <a:prstGeom xmlns:a="http://schemas.openxmlformats.org/drawingml/2006/main" prst="rect">
-            <a:avLst/>
-          </a:prstGeom>
-          <a:solidFill xmlns:a="http://schemas.openxmlformats.org/drawingml/2006/main">
-            <a:srgbClr val="FFFFFF"/>
-          </a:solidFill>
-          <a:ln xmlns:a="http://schemas.openxmlformats.org/drawingml/2006/main" w="9525">
-            <a:solidFill>
-              <a:srgbClr val="4D5563"/>
-            </a:solidFill>
-            <a:prstDash val="solid"/>
-          </a:ln>
-        </p:spPr>
-      </p:sp>
-      <p:sp>
-        <p:nvSpPr>
-          <p:cNvPr id="55" name="">
-            <a:extLst xmlns:a="http://schemas.openxmlformats.org/drawingml/2006/main">
-              <a:ext uri="{FF2B5EF4-FFF2-40B4-BE49-F238E27FC236}">
-                <a16:creationId xmlns:a16="http://schemas.microsoft.com/office/drawing/2014/main" id="{9AB074BE-97AF-488A-9B53-031404470ADF}"/>
-              </a:ext>
-            </a:extLst>
-          </p:cNvPr>
-          <p:cNvSpPr>
-            <a:spLocks xmlns:a="http://schemas.openxmlformats.org/drawingml/2006/main" noGrp="1"/>
-          </p:cNvSpPr>
-          <p:nvPr/>
-        </p:nvSpPr>
-        <p:spPr>
-          <a:xfrm xmlns:a="http://schemas.openxmlformats.org/drawingml/2006/main">
-            <a:off x="742950" y="4638675"/>
-            <a:ext cx="2133600" cy="361950"/>
-          </a:xfrm>
-          <a:prstGeom xmlns:a="http://schemas.openxmlformats.org/drawingml/2006/main" prst="rect">
-            <a:avLst/>
-          </a:prstGeom>
-          <a:solidFill xmlns:a="http://schemas.openxmlformats.org/drawingml/2006/main">
-            <a:srgbClr val="000000">
-              <a:alpha val="0"/>
-            </a:srgbClr>
-          </a:solidFill>
-          <a:ln xmlns:a="http://schemas.openxmlformats.org/drawingml/2006/main" w="0">
-            <a:solidFill>
-              <a:srgbClr val="000000">
-                <a:alpha val="0"/>
-              </a:srgbClr>
-            </a:solidFill>
-            <a:prstDash val="solid"/>
-          </a:ln>
-        </p:spPr>
-        <p:txBody>
-          <a:bodyPr xmlns:a="http://schemas.openxmlformats.org/drawingml/2006/main" lIns="0" tIns="0" rIns="0" bIns="0" anchor="t"/>
-          <a:lstStyle xmlns:a="http://schemas.openxmlformats.org/drawingml/2006/main"/>
-          <a:p xmlns:a="http://schemas.openxmlformats.org/drawingml/2006/main">
-            <a:pPr algn="l">
-              <a:defRPr sz="1050" b="1">
-                <a:solidFill>
-                  <a:srgbClr val="111111"/>
-                </a:solidFill>
-                <a:latin typeface="Aptos"/>
-                <a:ea typeface="Aptos"/>
-                <a:cs typeface="Aptos"/>
-              </a:defRPr>
-            </a:pPr>
-            <a:r>
-              <a:rPr sz="1050" b="1">
-                <a:solidFill>
-                  <a:srgbClr val="111111"/>
-                </a:solidFill>
-                <a:latin typeface="Aptos"/>
-                <a:ea typeface="Aptos"/>
-                <a:cs typeface="Aptos"/>
-              </a:rPr>
-              <a:t>Gross margin</a:t>
-            </a:r>
-          </a:p>
-        </p:txBody>
-      </p:sp>
-      <p:sp>
-        <p:nvSpPr>
-          <p:cNvPr id="56" name="">
-            <a:extLst xmlns:a="http://schemas.openxmlformats.org/drawingml/2006/main">
-              <a:ext uri="{FF2B5EF4-FFF2-40B4-BE49-F238E27FC236}">
-                <a16:creationId xmlns:a16="http://schemas.microsoft.com/office/drawing/2014/main" id="{99703567-7C84-40C1-BD7A-679E96C08489}"/>
-              </a:ext>
-            </a:extLst>
-          </p:cNvPr>
-          <p:cNvSpPr>
-            <a:spLocks xmlns:a="http://schemas.openxmlformats.org/drawingml/2006/main" noGrp="1"/>
-          </p:cNvSpPr>
-          <p:nvPr/>
-        </p:nvSpPr>
-        <p:spPr>
-          <a:xfrm xmlns:a="http://schemas.openxmlformats.org/drawingml/2006/main">
-            <a:off x="2952750" y="4572000"/>
-            <a:ext cx="2476500" cy="476250"/>
-          </a:xfrm>
-          <a:prstGeom xmlns:a="http://schemas.openxmlformats.org/drawingml/2006/main" prst="rect">
-            <a:avLst/>
-          </a:prstGeom>
-          <a:solidFill xmlns:a="http://schemas.openxmlformats.org/drawingml/2006/main">
-            <a:srgbClr val="FFFFFF"/>
-          </a:solidFill>
-          <a:ln xmlns:a="http://schemas.openxmlformats.org/drawingml/2006/main" w="9525">
-            <a:solidFill>
-              <a:srgbClr val="4D5563"/>
-            </a:solidFill>
-            <a:prstDash val="solid"/>
-          </a:ln>
-        </p:spPr>
-      </p:sp>
-      <p:sp>
-        <p:nvSpPr>
-          <p:cNvPr id="57" name="">
-            <a:extLst xmlns:a="http://schemas.openxmlformats.org/drawingml/2006/main">
-              <a:ext uri="{FF2B5EF4-FFF2-40B4-BE49-F238E27FC236}">
-                <a16:creationId xmlns:a16="http://schemas.microsoft.com/office/drawing/2014/main" id="{B41F6EEB-4A83-47EB-B063-5E273D685013}"/>
-              </a:ext>
-            </a:extLst>
-          </p:cNvPr>
-          <p:cNvSpPr>
-            <a:spLocks xmlns:a="http://schemas.openxmlformats.org/drawingml/2006/main" noGrp="1"/>
-          </p:cNvSpPr>
-          <p:nvPr/>
-        </p:nvSpPr>
-        <p:spPr>
-          <a:xfrm xmlns:a="http://schemas.openxmlformats.org/drawingml/2006/main">
-            <a:off x="3028950" y="4638675"/>
-            <a:ext cx="2324100" cy="361950"/>
-          </a:xfrm>
-          <a:prstGeom xmlns:a="http://schemas.openxmlformats.org/drawingml/2006/main" prst="rect">
-            <a:avLst/>
-          </a:prstGeom>
-          <a:solidFill xmlns:a="http://schemas.openxmlformats.org/drawingml/2006/main">
-            <a:srgbClr val="000000">
-              <a:alpha val="0"/>
-            </a:srgbClr>
-          </a:solidFill>
-          <a:ln xmlns:a="http://schemas.openxmlformats.org/drawingml/2006/main" w="0">
-            <a:solidFill>
-              <a:srgbClr val="000000">
-                <a:alpha val="0"/>
-              </a:srgbClr>
-            </a:solidFill>
-            <a:prstDash val="solid"/>
-          </a:ln>
-        </p:spPr>
-        <p:txBody>
-          <a:bodyPr xmlns:a="http://schemas.openxmlformats.org/drawingml/2006/main" lIns="0" tIns="0" rIns="0" bIns="0" anchor="t"/>
-          <a:lstStyle xmlns:a="http://schemas.openxmlformats.org/drawingml/2006/main"/>
-          <a:p xmlns:a="http://schemas.openxmlformats.org/drawingml/2006/main">
-            <a:pPr algn="l">
-              <a:defRPr sz="1050" b="0">
-                <a:solidFill>
-                  <a:srgbClr val="111111"/>
-                </a:solidFill>
-                <a:latin typeface="Aptos"/>
-                <a:ea typeface="Aptos"/>
-                <a:cs typeface="Aptos"/>
-              </a:defRPr>
-            </a:pPr>
-            <a:r>
-              <a:rPr sz="1050" b="0">
-                <a:solidFill>
-                  <a:srgbClr val="111111"/>
-                </a:solidFill>
-                <a:latin typeface="Aptos"/>
-                <a:ea typeface="Aptos"/>
-                <a:cs typeface="Aptos"/>
-              </a:rPr>
-              <a:t>low / learning</a:t>
-            </a:r>
-          </a:p>
-        </p:txBody>
-      </p:sp>
-      <p:sp>
-        <p:nvSpPr>
-          <p:cNvPr id="58" name="">
-            <a:extLst xmlns:a="http://schemas.openxmlformats.org/drawingml/2006/main">
-              <a:ext uri="{FF2B5EF4-FFF2-40B4-BE49-F238E27FC236}">
-                <a16:creationId xmlns:a16="http://schemas.microsoft.com/office/drawing/2014/main" id="{DDD57197-22EA-4A77-935F-C98071BC15C7}"/>
-              </a:ext>
-            </a:extLst>
-          </p:cNvPr>
-          <p:cNvSpPr>
-            <a:spLocks xmlns:a="http://schemas.openxmlformats.org/drawingml/2006/main" noGrp="1"/>
-          </p:cNvSpPr>
-          <p:nvPr/>
-        </p:nvSpPr>
-        <p:spPr>
-          <a:xfrm xmlns:a="http://schemas.openxmlformats.org/drawingml/2006/main">
-            <a:off x="5429250" y="4572000"/>
-            <a:ext cx="2476500" cy="476250"/>
-          </a:xfrm>
-          <a:prstGeom xmlns:a="http://schemas.openxmlformats.org/drawingml/2006/main" prst="rect">
-            <a:avLst/>
-          </a:prstGeom>
-          <a:solidFill xmlns:a="http://schemas.openxmlformats.org/drawingml/2006/main">
-            <a:srgbClr val="FFFFFF"/>
-          </a:solidFill>
-          <a:ln xmlns:a="http://schemas.openxmlformats.org/drawingml/2006/main" w="9525">
-            <a:solidFill>
-              <a:srgbClr val="4D5563"/>
-            </a:solidFill>
-            <a:prstDash val="solid"/>
-          </a:ln>
-        </p:spPr>
-      </p:sp>
-      <p:sp>
-        <p:nvSpPr>
-          <p:cNvPr id="59" name="">
-            <a:extLst xmlns:a="http://schemas.openxmlformats.org/drawingml/2006/main">
-              <a:ext uri="{FF2B5EF4-FFF2-40B4-BE49-F238E27FC236}">
-                <a16:creationId xmlns:a16="http://schemas.microsoft.com/office/drawing/2014/main" id="{B48F7F1E-6783-48DB-B287-08F0A4437F90}"/>
-              </a:ext>
-            </a:extLst>
-          </p:cNvPr>
-          <p:cNvSpPr>
-            <a:spLocks xmlns:a="http://schemas.openxmlformats.org/drawingml/2006/main" noGrp="1"/>
-          </p:cNvSpPr>
-          <p:nvPr/>
-        </p:nvSpPr>
-        <p:spPr>
-          <a:xfrm xmlns:a="http://schemas.openxmlformats.org/drawingml/2006/main">
-            <a:off x="5505450" y="4638675"/>
-            <a:ext cx="2324100" cy="361950"/>
-          </a:xfrm>
-          <a:prstGeom xmlns:a="http://schemas.openxmlformats.org/drawingml/2006/main" prst="rect">
-            <a:avLst/>
-          </a:prstGeom>
-          <a:solidFill xmlns:a="http://schemas.openxmlformats.org/drawingml/2006/main">
-            <a:srgbClr val="000000">
-              <a:alpha val="0"/>
-            </a:srgbClr>
-          </a:solidFill>
-          <a:ln xmlns:a="http://schemas.openxmlformats.org/drawingml/2006/main" w="0">
-            <a:solidFill>
-              <a:srgbClr val="000000">
-                <a:alpha val="0"/>
-              </a:srgbClr>
-            </a:solidFill>
-            <a:prstDash val="solid"/>
-          </a:ln>
-        </p:spPr>
-        <p:txBody>
-          <a:bodyPr xmlns:a="http://schemas.openxmlformats.org/drawingml/2006/main" lIns="0" tIns="0" rIns="0" bIns="0" anchor="t"/>
-          <a:lstStyle xmlns:a="http://schemas.openxmlformats.org/drawingml/2006/main"/>
-          <a:p xmlns:a="http://schemas.openxmlformats.org/drawingml/2006/main">
-            <a:pPr algn="l">
-              <a:defRPr sz="1050" b="0">
-                <a:solidFill>
-                  <a:srgbClr val="111111"/>
-                </a:solidFill>
-                <a:latin typeface="Aptos"/>
-                <a:ea typeface="Aptos"/>
-                <a:cs typeface="Aptos"/>
-              </a:defRPr>
-            </a:pPr>
-            <a:r>
-              <a:rPr sz="1050" b="0">
-                <a:solidFill>
-                  <a:srgbClr val="111111"/>
-                </a:solidFill>
-                <a:latin typeface="Aptos"/>
-                <a:ea typeface="Aptos"/>
-                <a:cs typeface="Aptos"/>
-              </a:rPr>
-              <a:t>50-75%</a:t>
-            </a:r>
-          </a:p>
-        </p:txBody>
-      </p:sp>
-      <p:sp>
-        <p:nvSpPr>
-          <p:cNvPr id="60" name="">
-            <a:extLst xmlns:a="http://schemas.openxmlformats.org/drawingml/2006/main">
-              <a:ext uri="{FF2B5EF4-FFF2-40B4-BE49-F238E27FC236}">
-                <a16:creationId xmlns:a16="http://schemas.microsoft.com/office/drawing/2014/main" id="{5872F79F-BD42-4C1D-972D-187DD8C57057}"/>
-              </a:ext>
-            </a:extLst>
-          </p:cNvPr>
-          <p:cNvSpPr>
-            <a:spLocks xmlns:a="http://schemas.openxmlformats.org/drawingml/2006/main" noGrp="1"/>
-          </p:cNvSpPr>
-          <p:nvPr/>
-        </p:nvSpPr>
-        <p:spPr>
-          <a:xfrm xmlns:a="http://schemas.openxmlformats.org/drawingml/2006/main">
-            <a:off x="7905750" y="4572000"/>
-            <a:ext cx="2476500" cy="476250"/>
-          </a:xfrm>
-          <a:prstGeom xmlns:a="http://schemas.openxmlformats.org/drawingml/2006/main" prst="rect">
-            <a:avLst/>
-          </a:prstGeom>
-          <a:solidFill xmlns:a="http://schemas.openxmlformats.org/drawingml/2006/main">
-            <a:srgbClr val="FFFFFF"/>
-          </a:solidFill>
-          <a:ln xmlns:a="http://schemas.openxmlformats.org/drawingml/2006/main" w="9525">
-            <a:solidFill>
-              <a:srgbClr val="4D5563"/>
-            </a:solidFill>
-            <a:prstDash val="solid"/>
-          </a:ln>
-        </p:spPr>
-      </p:sp>
-      <p:sp>
-        <p:nvSpPr>
-          <p:cNvPr id="61" name="">
-            <a:extLst xmlns:a="http://schemas.openxmlformats.org/drawingml/2006/main">
-              <a:ext uri="{FF2B5EF4-FFF2-40B4-BE49-F238E27FC236}">
-                <a16:creationId xmlns:a16="http://schemas.microsoft.com/office/drawing/2014/main" id="{26DAD80F-22F6-4EE3-842C-D4419D621E91}"/>
-              </a:ext>
-            </a:extLst>
-          </p:cNvPr>
-          <p:cNvSpPr>
-            <a:spLocks xmlns:a="http://schemas.openxmlformats.org/drawingml/2006/main" noGrp="1"/>
-          </p:cNvSpPr>
-          <p:nvPr/>
-        </p:nvSpPr>
-        <p:spPr>
-          <a:xfrm xmlns:a="http://schemas.openxmlformats.org/drawingml/2006/main">
-            <a:off x="7981950" y="4638675"/>
-            <a:ext cx="2324100" cy="361950"/>
-          </a:xfrm>
-          <a:prstGeom xmlns:a="http://schemas.openxmlformats.org/drawingml/2006/main" prst="rect">
-            <a:avLst/>
-          </a:prstGeom>
-          <a:solidFill xmlns:a="http://schemas.openxmlformats.org/drawingml/2006/main">
-            <a:srgbClr val="000000">
-              <a:alpha val="0"/>
-            </a:srgbClr>
-          </a:solidFill>
-          <a:ln xmlns:a="http://schemas.openxmlformats.org/drawingml/2006/main" w="0">
-            <a:solidFill>
-              <a:srgbClr val="000000">
-                <a:alpha val="0"/>
-              </a:srgbClr>
-            </a:solidFill>
-            <a:prstDash val="solid"/>
-          </a:ln>
-        </p:spPr>
-        <p:txBody>
-          <a:bodyPr xmlns:a="http://schemas.openxmlformats.org/drawingml/2006/main" lIns="0" tIns="0" rIns="0" bIns="0" anchor="t"/>
-          <a:lstStyle xmlns:a="http://schemas.openxmlformats.org/drawingml/2006/main"/>
-          <a:p xmlns:a="http://schemas.openxmlformats.org/drawingml/2006/main">
-            <a:pPr algn="l">
-              <a:defRPr sz="1050" b="0">
-                <a:solidFill>
-                  <a:srgbClr val="111111"/>
-                </a:solidFill>
-                <a:latin typeface="Aptos"/>
-                <a:ea typeface="Aptos"/>
-                <a:cs typeface="Aptos"/>
-              </a:defRPr>
-            </a:pPr>
-            <a:r>
-              <a:rPr sz="1050" b="0">
-                <a:solidFill>
-                  <a:srgbClr val="111111"/>
-                </a:solidFill>
-                <a:latin typeface="Aptos"/>
-                <a:ea typeface="Aptos"/>
-                <a:cs typeface="Aptos"/>
-              </a:rPr>
-              <a:t>60-80% if video gated</a:t>
-            </a:r>
-          </a:p>
-        </p:txBody>
-      </p:sp>
-      <p:sp>
-        <p:nvSpPr>
-          <p:cNvPr id="62" name="">
-            <a:extLst xmlns:a="http://schemas.openxmlformats.org/drawingml/2006/main">
-              <a:ext uri="{FF2B5EF4-FFF2-40B4-BE49-F238E27FC236}">
-                <a16:creationId xmlns:a16="http://schemas.microsoft.com/office/drawing/2014/main" id="{C3AA761D-06F8-42D9-AFE0-919A7C370CEC}"/>
+                <a16:creationId xmlns:a16="http://schemas.microsoft.com/office/drawing/2014/main" id="{22A415DC-5744-4938-8E9C-874C26BE9A07}"/>
               </a:ext>
             </a:extLst>
           </p:cNvPr>
@@ -8834,17 +8446,17 @@
                 <a:ea typeface="Aptos"/>
                 <a:cs typeface="Aptos"/>
               </a:rPr>
-              <a:t>Model is directional: text + images are viable; daily AI video destroys margin unless sold as premium.</a:t>
-            </a:r>
-          </a:p>
-        </p:txBody>
-      </p:sp>
-      <p:sp>
-        <p:nvSpPr>
-          <p:cNvPr id="63" name="">
-            <a:extLst xmlns:a="http://schemas.openxmlformats.org/drawingml/2006/main">
-              <a:ext uri="{FF2B5EF4-FFF2-40B4-BE49-F238E27FC236}">
-                <a16:creationId xmlns:a16="http://schemas.microsoft.com/office/drawing/2014/main" id="{832AB800-5C14-4085-BCA4-4AFAF15084BA}"/>
+              <a:t>Main financial conclusion: AURA must feel premium outside, but keep the daily loop cheap inside.</a:t>
+            </a:r>
+          </a:p>
+        </p:txBody>
+      </p:sp>
+      <p:sp>
+        <p:nvSpPr>
+          <p:cNvPr id="55" name="">
+            <a:extLst xmlns:a="http://schemas.openxmlformats.org/drawingml/2006/main">
+              <a:ext uri="{FF2B5EF4-FFF2-40B4-BE49-F238E27FC236}">
+                <a16:creationId xmlns:a16="http://schemas.microsoft.com/office/drawing/2014/main" id="{F88D7A13-8BC5-4F16-803C-FD9B9160715F}"/>
               </a:ext>
             </a:extLst>
           </p:cNvPr>
@@ -8905,10 +8517,10 @@
       </p:sp>
       <p:sp>
         <p:nvSpPr>
-          <p:cNvPr id="64" name="">
-            <a:extLst xmlns:a="http://schemas.openxmlformats.org/drawingml/2006/main">
-              <a:ext uri="{FF2B5EF4-FFF2-40B4-BE49-F238E27FC236}">
-                <a16:creationId xmlns:a16="http://schemas.microsoft.com/office/drawing/2014/main" id="{D58ABCC7-EF10-4C43-8C73-63E23580DEFA}"/>
+          <p:cNvPr id="56" name="">
+            <a:extLst xmlns:a="http://schemas.openxmlformats.org/drawingml/2006/main">
+              <a:ext uri="{FF2B5EF4-FFF2-40B4-BE49-F238E27FC236}">
+                <a16:creationId xmlns:a16="http://schemas.microsoft.com/office/drawing/2014/main" id="{63FABB9E-A442-49A6-B997-F554FB3684D0}"/>
               </a:ext>
             </a:extLst>
           </p:cNvPr>
@@ -8970,7 +8582,7 @@
     </p:spTree>
     <p:extLst>
       <p:ext uri="{BB962C8B-B14F-4D97-AF65-F5344CB8AC3E}">
-        <p14:creationId xmlns:p14="http://schemas.microsoft.com/office/powerpoint/2010/main" val="2112307875"/>
+        <p14:creationId xmlns:p14="http://schemas.microsoft.com/office/powerpoint/2010/main" val="1234141095"/>
       </p:ext>
     </p:extLst>
   </p:cSld>
@@ -8994,7 +8606,7 @@
           <p:cNvPr id="1" name="">
             <a:extLst xmlns:a="http://schemas.openxmlformats.org/drawingml/2006/main">
               <a:ext uri="{FF2B5EF4-FFF2-40B4-BE49-F238E27FC236}">
-                <a16:creationId xmlns:a16="http://schemas.microsoft.com/office/drawing/2014/main" id="{18063C32-FAB6-44BB-A88A-2EBCD6F5B545}"/>
+                <a16:creationId xmlns:a16="http://schemas.microsoft.com/office/drawing/2014/main" id="{61E05338-8A45-4BB0-A62C-5694E6254A52}"/>
               </a:ext>
             </a:extLst>
           </p:cNvPr>
@@ -9027,7 +8639,7 @@
           <p:cNvPr id="2" name="">
             <a:extLst xmlns:a="http://schemas.openxmlformats.org/drawingml/2006/main">
               <a:ext uri="{FF2B5EF4-FFF2-40B4-BE49-F238E27FC236}">
-                <a16:creationId xmlns:a16="http://schemas.microsoft.com/office/drawing/2014/main" id="{350C27E2-7B7D-4030-BEC0-A231EB5A5506}"/>
+                <a16:creationId xmlns:a16="http://schemas.microsoft.com/office/drawing/2014/main" id="{C2199AA5-7B4D-42DF-9FFF-AE44B877BAE0}"/>
               </a:ext>
             </a:extLst>
           </p:cNvPr>
@@ -9060,7 +8672,7 @@
           <p:cNvPr id="3" name="">
             <a:extLst xmlns:a="http://schemas.openxmlformats.org/drawingml/2006/main">
               <a:ext uri="{FF2B5EF4-FFF2-40B4-BE49-F238E27FC236}">
-                <a16:creationId xmlns:a16="http://schemas.microsoft.com/office/drawing/2014/main" id="{EFB52C78-8F30-4091-8C12-92C22347FB31}"/>
+                <a16:creationId xmlns:a16="http://schemas.microsoft.com/office/drawing/2014/main" id="{EC636E83-A734-4DD5-B214-C32BA44E7967}"/>
               </a:ext>
             </a:extLst>
           </p:cNvPr>
@@ -9093,7 +8705,7 @@
           <p:cNvPr id="4" name="">
             <a:extLst xmlns:a="http://schemas.openxmlformats.org/drawingml/2006/main">
               <a:ext uri="{FF2B5EF4-FFF2-40B4-BE49-F238E27FC236}">
-                <a16:creationId xmlns:a16="http://schemas.microsoft.com/office/drawing/2014/main" id="{C7894701-4EF9-4E16-8E72-639939C79975}"/>
+                <a16:creationId xmlns:a16="http://schemas.microsoft.com/office/drawing/2014/main" id="{A838B221-32EA-4D99-B55F-1BAECFAE42CB}"/>
               </a:ext>
             </a:extLst>
           </p:cNvPr>
@@ -9157,7 +8769,7 @@
           <p:cNvPr id="5" name="">
             <a:extLst xmlns:a="http://schemas.openxmlformats.org/drawingml/2006/main">
               <a:ext uri="{FF2B5EF4-FFF2-40B4-BE49-F238E27FC236}">
-                <a16:creationId xmlns:a16="http://schemas.microsoft.com/office/drawing/2014/main" id="{292A7FDC-BAF5-4DA1-9D56-9F09E17C19AD}"/>
+                <a16:creationId xmlns:a16="http://schemas.microsoft.com/office/drawing/2014/main" id="{AB254476-07FD-4951-BC18-A6B4FAF89606}"/>
               </a:ext>
             </a:extLst>
           </p:cNvPr>
@@ -9221,7 +8833,7 @@
           <p:cNvPr id="6" name="">
             <a:extLst xmlns:a="http://schemas.openxmlformats.org/drawingml/2006/main">
               <a:ext uri="{FF2B5EF4-FFF2-40B4-BE49-F238E27FC236}">
-                <a16:creationId xmlns:a16="http://schemas.microsoft.com/office/drawing/2014/main" id="{063E31B5-D5F4-46C5-87DB-DCC979303D91}"/>
+                <a16:creationId xmlns:a16="http://schemas.microsoft.com/office/drawing/2014/main" id="{97AA6B3C-58C6-43FF-9356-242203D4F136}"/>
               </a:ext>
             </a:extLst>
           </p:cNvPr>
@@ -9275,7 +8887,7 @@
                 <a:ea typeface="Aptos"/>
                 <a:cs typeface="Aptos"/>
               </a:rPr>
-              <a:t>1. Spiritual / self-growth creators</a:t>
+              <a:t>1. First 100 are not bought by ads</a:t>
             </a:r>
           </a:p>
         </p:txBody>
@@ -9285,7 +8897,7 @@
           <p:cNvPr id="7" name="">
             <a:extLst xmlns:a="http://schemas.openxmlformats.org/drawingml/2006/main">
               <a:ext uri="{FF2B5EF4-FFF2-40B4-BE49-F238E27FC236}">
-                <a16:creationId xmlns:a16="http://schemas.microsoft.com/office/drawing/2014/main" id="{DA10B599-9B53-4539-A4F8-8FA761AFD716}"/>
+                <a16:creationId xmlns:a16="http://schemas.microsoft.com/office/drawing/2014/main" id="{B88E5C10-5B01-4BBD-A25E-F3568ED8585D}"/>
               </a:ext>
             </a:extLst>
           </p:cNvPr>
@@ -9339,7 +8951,7 @@
                 <a:ea typeface="Aptos"/>
                 <a:cs typeface="Aptos"/>
               </a:rPr>
-              <a:t>creator-led demos: “я прошла 7-дневный сезон AURA” with honest reactions and visual before/after.</a:t>
+              <a:t>теплые пользователи, interviews, ручные weekly forecasts и concierge cohort — задача не installs, а понимание петли.</a:t>
             </a:r>
           </a:p>
         </p:txBody>
@@ -9349,7 +8961,7 @@
           <p:cNvPr id="8" name="">
             <a:extLst xmlns:a="http://schemas.openxmlformats.org/drawingml/2006/main">
               <a:ext uri="{FF2B5EF4-FFF2-40B4-BE49-F238E27FC236}">
-                <a16:creationId xmlns:a16="http://schemas.microsoft.com/office/drawing/2014/main" id="{B683F45D-4C1E-4CDA-A292-E09D5AF31ADC}"/>
+                <a16:creationId xmlns:a16="http://schemas.microsoft.com/office/drawing/2014/main" id="{19678535-FAA0-446A-9242-B1D71C954A02}"/>
               </a:ext>
             </a:extLst>
           </p:cNvPr>
@@ -9403,7 +9015,7 @@
                 <a:ea typeface="Aptos"/>
                 <a:cs typeface="Aptos"/>
               </a:rPr>
-              <a:t>2. TikTok / Reels / Shorts</a:t>
+              <a:t>2. Creator-led proof</a:t>
             </a:r>
           </a:p>
         </p:txBody>
@@ -9413,7 +9025,7 @@
           <p:cNvPr id="9" name="">
             <a:extLst xmlns:a="http://schemas.openxmlformats.org/drawingml/2006/main">
               <a:ext uri="{FF2B5EF4-FFF2-40B4-BE49-F238E27FC236}">
-                <a16:creationId xmlns:a16="http://schemas.microsoft.com/office/drawing/2014/main" id="{01BC49EB-C9FB-4F94-BC22-6BE4E85EE22D}"/>
+                <a16:creationId xmlns:a16="http://schemas.microsoft.com/office/drawing/2014/main" id="{BCB44468-0BA4-4F9F-8D89-1B69C59079DA}"/>
               </a:ext>
             </a:extLst>
           </p:cNvPr>
@@ -9467,7 +9079,7 @@
                 <a:ea typeface="Aptos"/>
                 <a:cs typeface="Aptos"/>
               </a:rPr>
-              <a:t>hooks around future-self, weekly forecast, avatar transformation and “not a horoscope” objection.</a:t>
+              <a:t>micro creators in astrology/self-growth/visual AI проходят “7-дневный сезон” и показывают не рекламу, а опыт.</a:t>
             </a:r>
           </a:p>
         </p:txBody>
@@ -9477,7 +9089,7 @@
           <p:cNvPr id="10" name="">
             <a:extLst xmlns:a="http://schemas.openxmlformats.org/drawingml/2006/main">
               <a:ext uri="{FF2B5EF4-FFF2-40B4-BE49-F238E27FC236}">
-                <a16:creationId xmlns:a16="http://schemas.microsoft.com/office/drawing/2014/main" id="{DCEA5B23-68D2-406D-98CE-3A47B3BD0446}"/>
+                <a16:creationId xmlns:a16="http://schemas.microsoft.com/office/drawing/2014/main" id="{DC36A501-7DBF-4FD4-80A4-25EC2C7530BC}"/>
               </a:ext>
             </a:extLst>
           </p:cNvPr>
@@ -9531,7 +9143,7 @@
                 <a:ea typeface="Aptos"/>
                 <a:cs typeface="Aptos"/>
               </a:rPr>
-              <a:t>3. Concierge validation</a:t>
+              <a:t>3. TikTok / Reels / Shorts</a:t>
             </a:r>
           </a:p>
         </p:txBody>
@@ -9541,7 +9153,7 @@
           <p:cNvPr id="11" name="">
             <a:extLst xmlns:a="http://schemas.openxmlformats.org/drawingml/2006/main">
               <a:ext uri="{FF2B5EF4-FFF2-40B4-BE49-F238E27FC236}">
-                <a16:creationId xmlns:a16="http://schemas.microsoft.com/office/drawing/2014/main" id="{E36AB384-D2D3-4662-A38B-5BC057BCCD9E}"/>
+                <a16:creationId xmlns:a16="http://schemas.microsoft.com/office/drawing/2014/main" id="{05BAE324-5CE7-47DA-9F4D-C2B7089EFB79}"/>
               </a:ext>
             </a:extLst>
           </p:cNvPr>
@@ -9595,7 +9207,7 @@
                 <a:ea typeface="Aptos"/>
                 <a:cs typeface="Aptos"/>
               </a:rPr>
-              <a:t>first 30-100 users manually guided through the weekly forecast to collect language, objections and paid intent.</a:t>
+              <a:t>future-self, weekly forecast, avatar transformation, “not horoscope”, before/after Life Canvas и paid-intent CTA.</a:t>
             </a:r>
           </a:p>
         </p:txBody>
@@ -9605,7 +9217,7 @@
           <p:cNvPr id="12" name="">
             <a:extLst xmlns:a="http://schemas.openxmlformats.org/drawingml/2006/main">
               <a:ext uri="{FF2B5EF4-FFF2-40B4-BE49-F238E27FC236}">
-                <a16:creationId xmlns:a16="http://schemas.microsoft.com/office/drawing/2014/main" id="{0A383CE7-ED33-41F2-900D-B50B8D2FE663}"/>
+                <a16:creationId xmlns:a16="http://schemas.microsoft.com/office/drawing/2014/main" id="{FFE277B2-1FA5-463D-BD2D-A55AFC417554}"/>
               </a:ext>
             </a:extLst>
           </p:cNvPr>
@@ -9659,7 +9271,7 @@
                 <a:ea typeface="Aptos"/>
                 <a:cs typeface="Aptos"/>
               </a:rPr>
-              <a:t>4. Referral / share cards</a:t>
+              <a:t>4. Shareable artifacts</a:t>
             </a:r>
           </a:p>
         </p:txBody>
@@ -9669,7 +9281,7 @@
           <p:cNvPr id="13" name="">
             <a:extLst xmlns:a="http://schemas.openxmlformats.org/drawingml/2006/main">
               <a:ext uri="{FF2B5EF4-FFF2-40B4-BE49-F238E27FC236}">
-                <a16:creationId xmlns:a16="http://schemas.microsoft.com/office/drawing/2014/main" id="{75B8FB97-227F-4248-9738-34C5A5DEF089}"/>
+                <a16:creationId xmlns:a16="http://schemas.microsoft.com/office/drawing/2014/main" id="{BC863808-76C5-48C1-A368-73DB589B76D2}"/>
               </a:ext>
             </a:extLst>
           </p:cNvPr>
@@ -9723,7 +9335,7 @@
                 <a:ea typeface="Aptos"/>
                 <a:cs typeface="Aptos"/>
               </a:rPr>
-              <a:t>Life Canvas cards and weekly recap as shareable artifacts after value moment.</a:t>
+              <a:t>Life Canvas card, season recap, future-self poster и trailer недели как viral layer после value moment.</a:t>
             </a:r>
           </a:p>
         </p:txBody>
@@ -9733,7 +9345,7 @@
           <p:cNvPr id="14" name="">
             <a:extLst xmlns:a="http://schemas.openxmlformats.org/drawingml/2006/main">
               <a:ext uri="{FF2B5EF4-FFF2-40B4-BE49-F238E27FC236}">
-                <a16:creationId xmlns:a16="http://schemas.microsoft.com/office/drawing/2014/main" id="{957DAC93-70E1-4E43-A2D5-9076E3B1A8A2}"/>
+                <a16:creationId xmlns:a16="http://schemas.microsoft.com/office/drawing/2014/main" id="{9D29D84A-527E-4FD1-9CB9-D63DE7C429E2}"/>
               </a:ext>
             </a:extLst>
           </p:cNvPr>
@@ -9795,7 +9407,7 @@
     </p:spTree>
     <p:extLst>
       <p:ext uri="{BB962C8B-B14F-4D97-AF65-F5344CB8AC3E}">
-        <p14:creationId xmlns:p14="http://schemas.microsoft.com/office/powerpoint/2010/main" val="1861734653"/>
+        <p14:creationId xmlns:p14="http://schemas.microsoft.com/office/powerpoint/2010/main" val="1439533690"/>
       </p:ext>
     </p:extLst>
   </p:cSld>
@@ -9819,7 +9431,7 @@
           <p:cNvPr id="1" name="">
             <a:extLst xmlns:a="http://schemas.openxmlformats.org/drawingml/2006/main">
               <a:ext uri="{FF2B5EF4-FFF2-40B4-BE49-F238E27FC236}">
-                <a16:creationId xmlns:a16="http://schemas.microsoft.com/office/drawing/2014/main" id="{5710C6BB-08F3-496D-A72C-CDAD255A1D31}"/>
+                <a16:creationId xmlns:a16="http://schemas.microsoft.com/office/drawing/2014/main" id="{4CB1CE13-6807-4F1A-9B05-98897F0B33E7}"/>
               </a:ext>
             </a:extLst>
           </p:cNvPr>
@@ -9852,7 +9464,7 @@
           <p:cNvPr id="2" name="">
             <a:extLst xmlns:a="http://schemas.openxmlformats.org/drawingml/2006/main">
               <a:ext uri="{FF2B5EF4-FFF2-40B4-BE49-F238E27FC236}">
-                <a16:creationId xmlns:a16="http://schemas.microsoft.com/office/drawing/2014/main" id="{A722DFCD-CB0E-4BFC-8CDA-B709A01F0144}"/>
+                <a16:creationId xmlns:a16="http://schemas.microsoft.com/office/drawing/2014/main" id="{2C0A425A-90E7-4D4A-8207-2D1B30D9A8C4}"/>
               </a:ext>
             </a:extLst>
           </p:cNvPr>
@@ -9885,7 +9497,7 @@
           <p:cNvPr id="3" name="">
             <a:extLst xmlns:a="http://schemas.openxmlformats.org/drawingml/2006/main">
               <a:ext uri="{FF2B5EF4-FFF2-40B4-BE49-F238E27FC236}">
-                <a16:creationId xmlns:a16="http://schemas.microsoft.com/office/drawing/2014/main" id="{20E5319E-9250-4ADB-9497-32E6987D793E}"/>
+                <a16:creationId xmlns:a16="http://schemas.microsoft.com/office/drawing/2014/main" id="{364605BA-A8E2-45C4-AE2F-BDB3A5A8D4D0}"/>
               </a:ext>
             </a:extLst>
           </p:cNvPr>
@@ -9918,7 +9530,7 @@
           <p:cNvPr id="4" name="">
             <a:extLst xmlns:a="http://schemas.openxmlformats.org/drawingml/2006/main">
               <a:ext uri="{FF2B5EF4-FFF2-40B4-BE49-F238E27FC236}">
-                <a16:creationId xmlns:a16="http://schemas.microsoft.com/office/drawing/2014/main" id="{DD25AC14-9A18-48E4-AC13-74927D88564D}"/>
+                <a16:creationId xmlns:a16="http://schemas.microsoft.com/office/drawing/2014/main" id="{ABD23767-F241-403B-88E6-3152566C6643}"/>
               </a:ext>
             </a:extLst>
           </p:cNvPr>
@@ -9982,7 +9594,7 @@
           <p:cNvPr id="5" name="">
             <a:extLst xmlns:a="http://schemas.openxmlformats.org/drawingml/2006/main">
               <a:ext uri="{FF2B5EF4-FFF2-40B4-BE49-F238E27FC236}">
-                <a16:creationId xmlns:a16="http://schemas.microsoft.com/office/drawing/2014/main" id="{84642EFC-B7A0-4995-A393-60BEE97C2CE9}"/>
+                <a16:creationId xmlns:a16="http://schemas.microsoft.com/office/drawing/2014/main" id="{4A55B497-62CF-4C56-AFE0-449794336360}"/>
               </a:ext>
             </a:extLst>
           </p:cNvPr>
@@ -10046,7 +9658,7 @@
           <p:cNvPr id="6" name="">
             <a:extLst xmlns:a="http://schemas.openxmlformats.org/drawingml/2006/main">
               <a:ext uri="{FF2B5EF4-FFF2-40B4-BE49-F238E27FC236}">
-                <a16:creationId xmlns:a16="http://schemas.microsoft.com/office/drawing/2014/main" id="{E725A6AE-7672-4A84-87F1-F644246AD002}"/>
+                <a16:creationId xmlns:a16="http://schemas.microsoft.com/office/drawing/2014/main" id="{791EE5BE-4922-44D1-93A4-48671BE78F3E}"/>
               </a:ext>
             </a:extLst>
           </p:cNvPr>
@@ -10081,7 +9693,7 @@
           <p:cNvPr id="7" name="">
             <a:extLst xmlns:a="http://schemas.openxmlformats.org/drawingml/2006/main">
               <a:ext uri="{FF2B5EF4-FFF2-40B4-BE49-F238E27FC236}">
-                <a16:creationId xmlns:a16="http://schemas.microsoft.com/office/drawing/2014/main" id="{1F8EA2E5-7A6D-4B2A-B16A-79207091335A}"/>
+                <a16:creationId xmlns:a16="http://schemas.microsoft.com/office/drawing/2014/main" id="{A97F333F-F94E-46B6-82D1-9AB0217E04C1}"/>
               </a:ext>
             </a:extLst>
           </p:cNvPr>
@@ -10114,7 +9726,7 @@
           <p:cNvPr id="8" name="">
             <a:extLst xmlns:a="http://schemas.openxmlformats.org/drawingml/2006/main">
               <a:ext uri="{FF2B5EF4-FFF2-40B4-BE49-F238E27FC236}">
-                <a16:creationId xmlns:a16="http://schemas.microsoft.com/office/drawing/2014/main" id="{1E5D0B85-24C3-481B-9B70-7854771744CD}"/>
+                <a16:creationId xmlns:a16="http://schemas.microsoft.com/office/drawing/2014/main" id="{77431898-F990-40B0-9C98-A012360D77D5}"/>
               </a:ext>
             </a:extLst>
           </p:cNvPr>
@@ -10191,7 +9803,7 @@
                 <a:ea typeface="Aptos"/>
                 <a:cs typeface="Aptos"/>
               </a:rPr>
-              <a:t>product thesis</a:t>
+              <a:t>astrology + avatars</a:t>
             </a:r>
           </a:p>
         </p:txBody>
@@ -10201,7 +9813,7 @@
           <p:cNvPr id="9" name="">
             <a:extLst xmlns:a="http://schemas.openxmlformats.org/drawingml/2006/main">
               <a:ext uri="{FF2B5EF4-FFF2-40B4-BE49-F238E27FC236}">
-                <a16:creationId xmlns:a16="http://schemas.microsoft.com/office/drawing/2014/main" id="{55A65810-D0A4-4CA7-8BEA-E05C02224AF1}"/>
+                <a16:creationId xmlns:a16="http://schemas.microsoft.com/office/drawing/2014/main" id="{1F5DA4D8-2E8B-4C41-8BF1-FD40ACB4F9C9}"/>
               </a:ext>
             </a:extLst>
           </p:cNvPr>
@@ -10234,7 +9846,7 @@
           <p:cNvPr id="10" name="">
             <a:extLst xmlns:a="http://schemas.openxmlformats.org/drawingml/2006/main">
               <a:ext uri="{FF2B5EF4-FFF2-40B4-BE49-F238E27FC236}">
-                <a16:creationId xmlns:a16="http://schemas.microsoft.com/office/drawing/2014/main" id="{5C633C69-EC7C-48E3-B5B2-1673679793DC}"/>
+                <a16:creationId xmlns:a16="http://schemas.microsoft.com/office/drawing/2014/main" id="{9BAEC838-2B07-4D9D-8DEF-BC7800B41C9C}"/>
               </a:ext>
             </a:extLst>
           </p:cNvPr>
@@ -10311,7 +9923,7 @@
                 <a:ea typeface="Aptos"/>
                 <a:cs typeface="Aptos"/>
               </a:rPr>
-              <a:t>weekly forecast + avatar</a:t>
+              <a:t>week forecast + assistant</a:t>
             </a:r>
           </a:p>
         </p:txBody>
@@ -10321,7 +9933,7 @@
           <p:cNvPr id="11" name="">
             <a:extLst xmlns:a="http://schemas.openxmlformats.org/drawingml/2006/main">
               <a:ext uri="{FF2B5EF4-FFF2-40B4-BE49-F238E27FC236}">
-                <a16:creationId xmlns:a16="http://schemas.microsoft.com/office/drawing/2014/main" id="{8C462AC6-26B4-4D97-9B92-D3542F8FA717}"/>
+                <a16:creationId xmlns:a16="http://schemas.microsoft.com/office/drawing/2014/main" id="{DE71D4EA-1E60-4BB2-BB89-86C5FA2AE6E5}"/>
               </a:ext>
             </a:extLst>
           </p:cNvPr>
@@ -10354,7 +9966,7 @@
           <p:cNvPr id="12" name="">
             <a:extLst xmlns:a="http://schemas.openxmlformats.org/drawingml/2006/main">
               <a:ext uri="{FF2B5EF4-FFF2-40B4-BE49-F238E27FC236}">
-                <a16:creationId xmlns:a16="http://schemas.microsoft.com/office/drawing/2014/main" id="{3CD7275E-78A4-4D71-AA9F-2A12C01D1BD4}"/>
+                <a16:creationId xmlns:a16="http://schemas.microsoft.com/office/drawing/2014/main" id="{4C576E6B-9393-4D8D-94ED-97E670502958}"/>
               </a:ext>
             </a:extLst>
           </p:cNvPr>
@@ -10431,7 +10043,7 @@
                 <a:ea typeface="Aptos"/>
                 <a:cs typeface="Aptos"/>
               </a:rPr>
-              <a:t>paid season tests</a:t>
+              <a:t>paid season / Plus</a:t>
             </a:r>
           </a:p>
         </p:txBody>
@@ -10441,7 +10053,7 @@
           <p:cNvPr id="13" name="">
             <a:extLst xmlns:a="http://schemas.openxmlformats.org/drawingml/2006/main">
               <a:ext uri="{FF2B5EF4-FFF2-40B4-BE49-F238E27FC236}">
-                <a16:creationId xmlns:a16="http://schemas.microsoft.com/office/drawing/2014/main" id="{89DE5F89-731B-4770-9A17-9EA64FA3916F}"/>
+                <a16:creationId xmlns:a16="http://schemas.microsoft.com/office/drawing/2014/main" id="{5D093AD9-44AA-4310-A918-C0B26E0479F6}"/>
               </a:ext>
             </a:extLst>
           </p:cNvPr>
@@ -10474,7 +10086,7 @@
           <p:cNvPr id="14" name="">
             <a:extLst xmlns:a="http://schemas.openxmlformats.org/drawingml/2006/main">
               <a:ext uri="{FF2B5EF4-FFF2-40B4-BE49-F238E27FC236}">
-                <a16:creationId xmlns:a16="http://schemas.microsoft.com/office/drawing/2014/main" id="{1602F059-200C-4459-88D2-A45B0A2A0A2F}"/>
+                <a16:creationId xmlns:a16="http://schemas.microsoft.com/office/drawing/2014/main" id="{C6E954F1-AFC0-4343-B9F7-E97137B8E37C}"/>
               </a:ext>
             </a:extLst>
           </p:cNvPr>
@@ -10561,7 +10173,7 @@
           <p:cNvPr id="15" name="">
             <a:extLst xmlns:a="http://schemas.openxmlformats.org/drawingml/2006/main">
               <a:ext uri="{FF2B5EF4-FFF2-40B4-BE49-F238E27FC236}">
-                <a16:creationId xmlns:a16="http://schemas.microsoft.com/office/drawing/2014/main" id="{FEC68D2F-1948-47C8-A1AE-CFB2C0AD8CBD}"/>
+                <a16:creationId xmlns:a16="http://schemas.microsoft.com/office/drawing/2014/main" id="{6D08D995-86A7-4C77-88FC-CD0697D44367}"/>
               </a:ext>
             </a:extLst>
           </p:cNvPr>
@@ -10594,7 +10206,7 @@
           <p:cNvPr id="16" name="">
             <a:extLst xmlns:a="http://schemas.openxmlformats.org/drawingml/2006/main">
               <a:ext uri="{FF2B5EF4-FFF2-40B4-BE49-F238E27FC236}">
-                <a16:creationId xmlns:a16="http://schemas.microsoft.com/office/drawing/2014/main" id="{B5DA1FDF-74A2-49A0-B8C0-557C7EC6C025}"/>
+                <a16:creationId xmlns:a16="http://schemas.microsoft.com/office/drawing/2014/main" id="{EEFF694D-4828-4554-96E3-D05D19C40969}"/>
               </a:ext>
             </a:extLst>
           </p:cNvPr>
@@ -10681,7 +10293,7 @@
           <p:cNvPr id="17" name="">
             <a:extLst xmlns:a="http://schemas.openxmlformats.org/drawingml/2006/main">
               <a:ext uri="{FF2B5EF4-FFF2-40B4-BE49-F238E27FC236}">
-                <a16:creationId xmlns:a16="http://schemas.microsoft.com/office/drawing/2014/main" id="{4D24C91B-BDF9-4193-901B-58A07545F2AC}"/>
+                <a16:creationId xmlns:a16="http://schemas.microsoft.com/office/drawing/2014/main" id="{A1D0A23A-5394-4C43-93E3-F274031AD5F1}"/>
               </a:ext>
             </a:extLst>
           </p:cNvPr>
@@ -10714,7 +10326,7 @@
           <p:cNvPr id="18" name="">
             <a:extLst xmlns:a="http://schemas.openxmlformats.org/drawingml/2006/main">
               <a:ext uri="{FF2B5EF4-FFF2-40B4-BE49-F238E27FC236}">
-                <a16:creationId xmlns:a16="http://schemas.microsoft.com/office/drawing/2014/main" id="{FA2FE7A8-A22C-448B-B356-1708CC14B356}"/>
+                <a16:creationId xmlns:a16="http://schemas.microsoft.com/office/drawing/2014/main" id="{E74E4595-3EDD-486E-A225-17F33C55429C}"/>
               </a:ext>
             </a:extLst>
           </p:cNvPr>
@@ -10768,7 +10380,7 @@
                 <a:ea typeface="Aptos"/>
                 <a:cs typeface="Aptos"/>
               </a:rPr>
-              <a:t>$1M ARR milestone</a:t>
+              <a:t>$1M ARR</a:t>
             </a:r>
           </a:p>
           <a:p xmlns:a="http://schemas.openxmlformats.org/drawingml/2006/main">
@@ -10801,7 +10413,7 @@
           <p:cNvPr id="19" name="">
             <a:extLst xmlns:a="http://schemas.openxmlformats.org/drawingml/2006/main">
               <a:ext uri="{FF2B5EF4-FFF2-40B4-BE49-F238E27FC236}">
-                <a16:creationId xmlns:a16="http://schemas.microsoft.com/office/drawing/2014/main" id="{4E9BAEE2-389F-4731-B3BE-AA19425DCC95}"/>
+                <a16:creationId xmlns:a16="http://schemas.microsoft.com/office/drawing/2014/main" id="{76C9FCC9-D531-4B2A-BC85-892EF5A09940}"/>
               </a:ext>
             </a:extLst>
           </p:cNvPr>
@@ -10863,7 +10475,7 @@
     </p:spTree>
     <p:extLst>
       <p:ext uri="{BB962C8B-B14F-4D97-AF65-F5344CB8AC3E}">
-        <p14:creationId xmlns:p14="http://schemas.microsoft.com/office/powerpoint/2010/main" val="1496825491"/>
+        <p14:creationId xmlns:p14="http://schemas.microsoft.com/office/powerpoint/2010/main" val="266727719"/>
       </p:ext>
     </p:extLst>
   </p:cSld>
@@ -10887,7 +10499,7 @@
           <p:cNvPr id="1" name="">
             <a:extLst xmlns:a="http://schemas.openxmlformats.org/drawingml/2006/main">
               <a:ext uri="{FF2B5EF4-FFF2-40B4-BE49-F238E27FC236}">
-                <a16:creationId xmlns:a16="http://schemas.microsoft.com/office/drawing/2014/main" id="{7F0B2AE8-ECFC-4940-A0BF-24355B192A9B}"/>
+                <a16:creationId xmlns:a16="http://schemas.microsoft.com/office/drawing/2014/main" id="{7A7AADB0-0934-4926-9418-FB05D8E32548}"/>
               </a:ext>
             </a:extLst>
           </p:cNvPr>
@@ -10920,7 +10532,7 @@
           <p:cNvPr id="2" name="">
             <a:extLst xmlns:a="http://schemas.openxmlformats.org/drawingml/2006/main">
               <a:ext uri="{FF2B5EF4-FFF2-40B4-BE49-F238E27FC236}">
-                <a16:creationId xmlns:a16="http://schemas.microsoft.com/office/drawing/2014/main" id="{4F69BEC3-C3DC-41E1-A91E-259E55A351D8}"/>
+                <a16:creationId xmlns:a16="http://schemas.microsoft.com/office/drawing/2014/main" id="{6505E565-0055-4B8F-B6A0-2ADD67AD6A05}"/>
               </a:ext>
             </a:extLst>
           </p:cNvPr>
@@ -10953,7 +10565,7 @@
           <p:cNvPr id="3" name="">
             <a:extLst xmlns:a="http://schemas.openxmlformats.org/drawingml/2006/main">
               <a:ext uri="{FF2B5EF4-FFF2-40B4-BE49-F238E27FC236}">
-                <a16:creationId xmlns:a16="http://schemas.microsoft.com/office/drawing/2014/main" id="{9E342434-33F7-41DB-A03B-5F4A97BF69E3}"/>
+                <a16:creationId xmlns:a16="http://schemas.microsoft.com/office/drawing/2014/main" id="{75DBB407-C5D9-4A8D-BEE0-D0DDA504C424}"/>
               </a:ext>
             </a:extLst>
           </p:cNvPr>
@@ -10986,7 +10598,7 @@
           <p:cNvPr id="4" name="">
             <a:extLst xmlns:a="http://schemas.openxmlformats.org/drawingml/2006/main">
               <a:ext uri="{FF2B5EF4-FFF2-40B4-BE49-F238E27FC236}">
-                <a16:creationId xmlns:a16="http://schemas.microsoft.com/office/drawing/2014/main" id="{E9B3E7C4-54E6-49B1-9D3C-3F77033B3B11}"/>
+                <a16:creationId xmlns:a16="http://schemas.microsoft.com/office/drawing/2014/main" id="{F36B3E41-756B-47CA-9751-E181221788FA}"/>
               </a:ext>
             </a:extLst>
           </p:cNvPr>
@@ -11050,7 +10662,7 @@
           <p:cNvPr id="5" name="">
             <a:extLst xmlns:a="http://schemas.openxmlformats.org/drawingml/2006/main">
               <a:ext uri="{FF2B5EF4-FFF2-40B4-BE49-F238E27FC236}">
-                <a16:creationId xmlns:a16="http://schemas.microsoft.com/office/drawing/2014/main" id="{BBB74EF3-D48D-45E0-96D7-B11CCA4446C9}"/>
+                <a16:creationId xmlns:a16="http://schemas.microsoft.com/office/drawing/2014/main" id="{E7F4B37D-250B-497E-B382-BB0120E65C16}"/>
               </a:ext>
             </a:extLst>
           </p:cNvPr>
@@ -11114,7 +10726,7 @@
           <p:cNvPr id="6" name="">
             <a:extLst xmlns:a="http://schemas.openxmlformats.org/drawingml/2006/main">
               <a:ext uri="{FF2B5EF4-FFF2-40B4-BE49-F238E27FC236}">
-                <a16:creationId xmlns:a16="http://schemas.microsoft.com/office/drawing/2014/main" id="{18A50880-E3E9-40BA-AAEA-6AE23E8596CF}"/>
+                <a16:creationId xmlns:a16="http://schemas.microsoft.com/office/drawing/2014/main" id="{5800F640-3B40-4D9D-BDF5-2E3586958C16}"/>
               </a:ext>
             </a:extLst>
           </p:cNvPr>
@@ -11178,7 +10790,7 @@
           <p:cNvPr id="7" name="">
             <a:extLst xmlns:a="http://schemas.openxmlformats.org/drawingml/2006/main">
               <a:ext uri="{FF2B5EF4-FFF2-40B4-BE49-F238E27FC236}">
-                <a16:creationId xmlns:a16="http://schemas.microsoft.com/office/drawing/2014/main" id="{9EB479EB-F58A-4ED3-B8C5-63E387E42ECC}"/>
+                <a16:creationId xmlns:a16="http://schemas.microsoft.com/office/drawing/2014/main" id="{03A57B06-C096-40DA-A47F-37E182CF742C}"/>
               </a:ext>
             </a:extLst>
           </p:cNvPr>
@@ -11232,7 +10844,7 @@
                 <a:ea typeface="Aptos"/>
                 <a:cs typeface="Aptos"/>
               </a:rPr>
-              <a:t>Исходная идея: специалист по astrology / смыслу + цифровые аватары + визуальная версия другой жизни.</a:t>
+              <a:t>День 0: пользователь ищет прогноз, смысл, образ себя или мягкую опору на неделю.</a:t>
             </a:r>
           </a:p>
         </p:txBody>
@@ -11242,7 +10854,7 @@
           <p:cNvPr id="8" name="">
             <a:extLst xmlns:a="http://schemas.openxmlformats.org/drawingml/2006/main">
               <a:ext uri="{FF2B5EF4-FFF2-40B4-BE49-F238E27FC236}">
-                <a16:creationId xmlns:a16="http://schemas.microsoft.com/office/drawing/2014/main" id="{E416B091-F22E-489F-95DA-C9FA18990A5B}"/>
+                <a16:creationId xmlns:a16="http://schemas.microsoft.com/office/drawing/2014/main" id="{C9E33013-16B7-40AA-A82D-DA44D9B2AB13}"/>
               </a:ext>
             </a:extLst>
           </p:cNvPr>
@@ -11306,7 +10918,7 @@
           <p:cNvPr id="9" name="">
             <a:extLst xmlns:a="http://schemas.openxmlformats.org/drawingml/2006/main">
               <a:ext uri="{FF2B5EF4-FFF2-40B4-BE49-F238E27FC236}">
-                <a16:creationId xmlns:a16="http://schemas.microsoft.com/office/drawing/2014/main" id="{971F55DA-9EC2-47FA-8B26-5AA14E29684A}"/>
+                <a16:creationId xmlns:a16="http://schemas.microsoft.com/office/drawing/2014/main" id="{E5B95FE0-0FED-466F-B49D-7627684ED98D}"/>
               </a:ext>
             </a:extLst>
           </p:cNvPr>
@@ -11360,7 +10972,7 @@
                 <a:ea typeface="Aptos"/>
                 <a:cs typeface="Aptos"/>
               </a:rPr>
-              <a:t>После исследования продукт сужен до weekly life-series: forecast → daily episode → action → avatar / Life Canvas.</a:t>
+              <a:t>День 1: вводит дату рождения/контекст, выбирает помощника, получает прогноз недели и первый episode.</a:t>
             </a:r>
           </a:p>
         </p:txBody>
@@ -11370,7 +10982,7 @@
           <p:cNvPr id="10" name="">
             <a:extLst xmlns:a="http://schemas.openxmlformats.org/drawingml/2006/main">
               <a:ext uri="{FF2B5EF4-FFF2-40B4-BE49-F238E27FC236}">
-                <a16:creationId xmlns:a16="http://schemas.microsoft.com/office/drawing/2014/main" id="{E8B07ADC-EFB6-467C-8BB7-565897B6C18D}"/>
+                <a16:creationId xmlns:a16="http://schemas.microsoft.com/office/drawing/2014/main" id="{0711F827-CB4B-409B-B54C-A2389D7715EA}"/>
               </a:ext>
             </a:extLst>
           </p:cNvPr>
@@ -11434,7 +11046,7 @@
           <p:cNvPr id="11" name="">
             <a:extLst xmlns:a="http://schemas.openxmlformats.org/drawingml/2006/main">
               <a:ext uri="{FF2B5EF4-FFF2-40B4-BE49-F238E27FC236}">
-                <a16:creationId xmlns:a16="http://schemas.microsoft.com/office/drawing/2014/main" id="{7F9AE612-07FF-48B7-BE04-EAB07C259AE3}"/>
+                <a16:creationId xmlns:a16="http://schemas.microsoft.com/office/drawing/2014/main" id="{4E021B7F-266E-4E22-9E28-6FFF92E3A86A}"/>
               </a:ext>
             </a:extLst>
           </p:cNvPr>
@@ -11488,7 +11100,7 @@
                 <a:ea typeface="Aptos"/>
                 <a:cs typeface="Aptos"/>
               </a:rPr>
-              <a:t>Следующий этап: не новое исследование, а prototype, examples of generated video/avatar, interviews and paid intent test.</a:t>
+              <a:t>День 2-7: помощник продолжает season, avatar/Canvas меняется после действий, неделя заканчивается recap или video moment.</a:t>
             </a:r>
           </a:p>
         </p:txBody>
@@ -11498,7 +11110,7 @@
           <p:cNvPr id="12" name="">
             <a:extLst xmlns:a="http://schemas.openxmlformats.org/drawingml/2006/main">
               <a:ext uri="{FF2B5EF4-FFF2-40B4-BE49-F238E27FC236}">
-                <a16:creationId xmlns:a16="http://schemas.microsoft.com/office/drawing/2014/main" id="{3608A33A-A15B-4D56-A9F5-49ABC053A067}"/>
+                <a16:creationId xmlns:a16="http://schemas.microsoft.com/office/drawing/2014/main" id="{0FE83974-62ED-4D7F-97AC-5FA89CC519B5}"/>
               </a:ext>
             </a:extLst>
           </p:cNvPr>
@@ -11562,7 +11174,7 @@
           <p:cNvPr id="13" name="">
             <a:extLst xmlns:a="http://schemas.openxmlformats.org/drawingml/2006/main">
               <a:ext uri="{FF2B5EF4-FFF2-40B4-BE49-F238E27FC236}">
-                <a16:creationId xmlns:a16="http://schemas.microsoft.com/office/drawing/2014/main" id="{16DB428C-FE86-4A2C-8E2B-41B287C9629C}"/>
+                <a16:creationId xmlns:a16="http://schemas.microsoft.com/office/drawing/2014/main" id="{DFCCFBEA-B544-4EA7-9F08-79823B7CFB31}"/>
               </a:ext>
             </a:extLst>
           </p:cNvPr>
@@ -11626,7 +11238,7 @@
           <p:cNvPr id="14" name="">
             <a:extLst xmlns:a="http://schemas.openxmlformats.org/drawingml/2006/main">
               <a:ext uri="{FF2B5EF4-FFF2-40B4-BE49-F238E27FC236}">
-                <a16:creationId xmlns:a16="http://schemas.microsoft.com/office/drawing/2014/main" id="{767AAE2D-72F1-4A16-A5B9-8578BE0C8870}"/>
+                <a16:creationId xmlns:a16="http://schemas.microsoft.com/office/drawing/2014/main" id="{AA9C9236-B4B0-4EAF-BE3F-7237157E6579}"/>
               </a:ext>
             </a:extLst>
           </p:cNvPr>
@@ -11680,7 +11292,7 @@
                 <a:ea typeface="Aptos"/>
                 <a:cs typeface="Aptos"/>
               </a:rPr>
-              <a:t>research</a:t>
+              <a:t>birth data</a:t>
             </a:r>
           </a:p>
         </p:txBody>
@@ -11690,7 +11302,7 @@
           <p:cNvPr id="15" name="">
             <a:extLst xmlns:a="http://schemas.openxmlformats.org/drawingml/2006/main">
               <a:ext uri="{FF2B5EF4-FFF2-40B4-BE49-F238E27FC236}">
-                <a16:creationId xmlns:a16="http://schemas.microsoft.com/office/drawing/2014/main" id="{D0865FA9-1D50-40B2-8FFB-04B4C3D3AD50}"/>
+                <a16:creationId xmlns:a16="http://schemas.microsoft.com/office/drawing/2014/main" id="{7EFAB845-CD4A-4A80-B866-BA2096F9F553}"/>
               </a:ext>
             </a:extLst>
           </p:cNvPr>
@@ -11754,7 +11366,7 @@
           <p:cNvPr id="16" name="">
             <a:extLst xmlns:a="http://schemas.openxmlformats.org/drawingml/2006/main">
               <a:ext uri="{FF2B5EF4-FFF2-40B4-BE49-F238E27FC236}">
-                <a16:creationId xmlns:a16="http://schemas.microsoft.com/office/drawing/2014/main" id="{AE1E95B6-025B-477B-B526-4A29C36A48AB}"/>
+                <a16:creationId xmlns:a16="http://schemas.microsoft.com/office/drawing/2014/main" id="{0DB37137-71E4-48BA-B69D-6F29D9096C74}"/>
               </a:ext>
             </a:extLst>
           </p:cNvPr>
@@ -11808,7 +11420,7 @@
                 <a:ea typeface="Aptos"/>
                 <a:cs typeface="Aptos"/>
               </a:rPr>
-              <a:t>product thesis</a:t>
+              <a:t>week forecast</a:t>
             </a:r>
           </a:p>
         </p:txBody>
@@ -11818,7 +11430,7 @@
           <p:cNvPr id="17" name="">
             <a:extLst xmlns:a="http://schemas.openxmlformats.org/drawingml/2006/main">
               <a:ext uri="{FF2B5EF4-FFF2-40B4-BE49-F238E27FC236}">
-                <a16:creationId xmlns:a16="http://schemas.microsoft.com/office/drawing/2014/main" id="{C8E89811-A10C-4195-B3A4-18FAEB4AE7C2}"/>
+                <a16:creationId xmlns:a16="http://schemas.microsoft.com/office/drawing/2014/main" id="{9EE8A13C-C721-4CF8-8496-48633A953B8B}"/>
               </a:ext>
             </a:extLst>
           </p:cNvPr>
@@ -11882,7 +11494,7 @@
           <p:cNvPr id="18" name="">
             <a:extLst xmlns:a="http://schemas.openxmlformats.org/drawingml/2006/main">
               <a:ext uri="{FF2B5EF4-FFF2-40B4-BE49-F238E27FC236}">
-                <a16:creationId xmlns:a16="http://schemas.microsoft.com/office/drawing/2014/main" id="{6DEF5885-FD45-45D6-81FE-A5662A43DDD9}"/>
+                <a16:creationId xmlns:a16="http://schemas.microsoft.com/office/drawing/2014/main" id="{F97E6763-A5DD-42C6-9120-AB3B636D8342}"/>
               </a:ext>
             </a:extLst>
           </p:cNvPr>
@@ -11936,7 +11548,7 @@
                 <a:ea typeface="Aptos"/>
                 <a:cs typeface="Aptos"/>
               </a:rPr>
-              <a:t>MVP spec</a:t>
+              <a:t>daily episode</a:t>
             </a:r>
           </a:p>
         </p:txBody>
@@ -11946,7 +11558,7 @@
           <p:cNvPr id="19" name="">
             <a:extLst xmlns:a="http://schemas.openxmlformats.org/drawingml/2006/main">
               <a:ext uri="{FF2B5EF4-FFF2-40B4-BE49-F238E27FC236}">
-                <a16:creationId xmlns:a16="http://schemas.microsoft.com/office/drawing/2014/main" id="{31E83E6C-AC96-415D-A746-37EC7F15C0ED}"/>
+                <a16:creationId xmlns:a16="http://schemas.microsoft.com/office/drawing/2014/main" id="{FBC53297-E805-44DA-AAD2-98DE6A95D982}"/>
               </a:ext>
             </a:extLst>
           </p:cNvPr>
@@ -12010,7 +11622,7 @@
           <p:cNvPr id="20" name="">
             <a:extLst xmlns:a="http://schemas.openxmlformats.org/drawingml/2006/main">
               <a:ext uri="{FF2B5EF4-FFF2-40B4-BE49-F238E27FC236}">
-                <a16:creationId xmlns:a16="http://schemas.microsoft.com/office/drawing/2014/main" id="{F047C2A4-AF47-415C-BADD-B961DECCD86C}"/>
+                <a16:creationId xmlns:a16="http://schemas.microsoft.com/office/drawing/2014/main" id="{78BAB65B-7E72-4916-ABA2-068CB511CE79}"/>
               </a:ext>
             </a:extLst>
           </p:cNvPr>
@@ -12064,7 +11676,7 @@
                 <a:ea typeface="Aptos"/>
                 <a:cs typeface="Aptos"/>
               </a:rPr>
-              <a:t>visual examples</a:t>
+              <a:t>action/reset</a:t>
             </a:r>
           </a:p>
         </p:txBody>
@@ -12074,7 +11686,7 @@
           <p:cNvPr id="21" name="">
             <a:extLst xmlns:a="http://schemas.openxmlformats.org/drawingml/2006/main">
               <a:ext uri="{FF2B5EF4-FFF2-40B4-BE49-F238E27FC236}">
-                <a16:creationId xmlns:a16="http://schemas.microsoft.com/office/drawing/2014/main" id="{46B45E9C-6664-4EFE-B9FA-99164C45DD8A}"/>
+                <a16:creationId xmlns:a16="http://schemas.microsoft.com/office/drawing/2014/main" id="{C9E9F142-16BA-44E3-8006-91EA67B3EDEB}"/>
               </a:ext>
             </a:extLst>
           </p:cNvPr>
@@ -12138,7 +11750,7 @@
           <p:cNvPr id="22" name="">
             <a:extLst xmlns:a="http://schemas.openxmlformats.org/drawingml/2006/main">
               <a:ext uri="{FF2B5EF4-FFF2-40B4-BE49-F238E27FC236}">
-                <a16:creationId xmlns:a16="http://schemas.microsoft.com/office/drawing/2014/main" id="{7D26BB31-8E8A-4705-89F3-324F0C48EDAD}"/>
+                <a16:creationId xmlns:a16="http://schemas.microsoft.com/office/drawing/2014/main" id="{8BB3EB70-52CD-45AF-AC62-8EBDCA80CFF9}"/>
               </a:ext>
             </a:extLst>
           </p:cNvPr>
@@ -12192,7 +11804,7 @@
                 <a:ea typeface="Aptos"/>
                 <a:cs typeface="Aptos"/>
               </a:rPr>
-              <a:t>prototype</a:t>
+              <a:t>avatar shift</a:t>
             </a:r>
           </a:p>
         </p:txBody>
@@ -12202,7 +11814,7 @@
           <p:cNvPr id="23" name="">
             <a:extLst xmlns:a="http://schemas.openxmlformats.org/drawingml/2006/main">
               <a:ext uri="{FF2B5EF4-FFF2-40B4-BE49-F238E27FC236}">
-                <a16:creationId xmlns:a16="http://schemas.microsoft.com/office/drawing/2014/main" id="{F6B8BC93-E67E-448F-90C2-D62E09A3C207}"/>
+                <a16:creationId xmlns:a16="http://schemas.microsoft.com/office/drawing/2014/main" id="{BFBC39BB-9539-4BE1-BEC7-01E77740333A}"/>
               </a:ext>
             </a:extLst>
           </p:cNvPr>
@@ -12266,7 +11878,7 @@
           <p:cNvPr id="24" name="">
             <a:extLst xmlns:a="http://schemas.openxmlformats.org/drawingml/2006/main">
               <a:ext uri="{FF2B5EF4-FFF2-40B4-BE49-F238E27FC236}">
-                <a16:creationId xmlns:a16="http://schemas.microsoft.com/office/drawing/2014/main" id="{83E6CC28-D795-4C5D-8BA4-EFB618E89970}"/>
+                <a16:creationId xmlns:a16="http://schemas.microsoft.com/office/drawing/2014/main" id="{1E6939E1-823C-4F43-AF09-CA9086CD71E0}"/>
               </a:ext>
             </a:extLst>
           </p:cNvPr>
@@ -12320,7 +11932,7 @@
                 <a:ea typeface="Aptos"/>
                 <a:cs typeface="Aptos"/>
               </a:rPr>
-              <a:t>first cohort</a:t>
+              <a:t>week recap</a:t>
             </a:r>
           </a:p>
         </p:txBody>
@@ -12330,7 +11942,7 @@
           <p:cNvPr id="25" name="">
             <a:extLst xmlns:a="http://schemas.openxmlformats.org/drawingml/2006/main">
               <a:ext uri="{FF2B5EF4-FFF2-40B4-BE49-F238E27FC236}">
-                <a16:creationId xmlns:a16="http://schemas.microsoft.com/office/drawing/2014/main" id="{5B390987-4FED-48D4-975B-0DC52AF9BD3E}"/>
+                <a16:creationId xmlns:a16="http://schemas.microsoft.com/office/drawing/2014/main" id="{9CD39035-6144-4A21-A70B-46634E7B5ED5}"/>
               </a:ext>
             </a:extLst>
           </p:cNvPr>
@@ -12392,7 +12004,7 @@
     </p:spTree>
     <p:extLst>
       <p:ext uri="{BB962C8B-B14F-4D97-AF65-F5344CB8AC3E}">
-        <p14:creationId xmlns:p14="http://schemas.microsoft.com/office/powerpoint/2010/main" val="1241946362"/>
+        <p14:creationId xmlns:p14="http://schemas.microsoft.com/office/powerpoint/2010/main" val="1657878385"/>
       </p:ext>
     </p:extLst>
   </p:cSld>
@@ -12416,7 +12028,7 @@
           <p:cNvPr id="1" name="">
             <a:extLst xmlns:a="http://schemas.openxmlformats.org/drawingml/2006/main">
               <a:ext uri="{FF2B5EF4-FFF2-40B4-BE49-F238E27FC236}">
-                <a16:creationId xmlns:a16="http://schemas.microsoft.com/office/drawing/2014/main" id="{42CAF45F-E213-4134-9A69-AF132F648B1A}"/>
+                <a16:creationId xmlns:a16="http://schemas.microsoft.com/office/drawing/2014/main" id="{9B66E720-3542-431F-9A60-0D0CEB2B48B6}"/>
               </a:ext>
             </a:extLst>
           </p:cNvPr>
@@ -12449,7 +12061,7 @@
           <p:cNvPr id="2" name="">
             <a:extLst xmlns:a="http://schemas.openxmlformats.org/drawingml/2006/main">
               <a:ext uri="{FF2B5EF4-FFF2-40B4-BE49-F238E27FC236}">
-                <a16:creationId xmlns:a16="http://schemas.microsoft.com/office/drawing/2014/main" id="{FE66DDDE-C64B-4A70-9AAF-308D3EEDFF80}"/>
+                <a16:creationId xmlns:a16="http://schemas.microsoft.com/office/drawing/2014/main" id="{25CF2706-30EE-4269-891B-10B856359CBF}"/>
               </a:ext>
             </a:extLst>
           </p:cNvPr>
@@ -12482,7 +12094,7 @@
           <p:cNvPr id="3" name="">
             <a:extLst xmlns:a="http://schemas.openxmlformats.org/drawingml/2006/main">
               <a:ext uri="{FF2B5EF4-FFF2-40B4-BE49-F238E27FC236}">
-                <a16:creationId xmlns:a16="http://schemas.microsoft.com/office/drawing/2014/main" id="{04942698-6D5A-4B0A-B481-8BFFEC69E1BD}"/>
+                <a16:creationId xmlns:a16="http://schemas.microsoft.com/office/drawing/2014/main" id="{1E2E91DD-9817-4927-A31F-EF8CB2392DE1}"/>
               </a:ext>
             </a:extLst>
           </p:cNvPr>
@@ -12515,7 +12127,7 @@
           <p:cNvPr id="4" name="">
             <a:extLst xmlns:a="http://schemas.openxmlformats.org/drawingml/2006/main">
               <a:ext uri="{FF2B5EF4-FFF2-40B4-BE49-F238E27FC236}">
-                <a16:creationId xmlns:a16="http://schemas.microsoft.com/office/drawing/2014/main" id="{60A84E03-8543-47B7-ADED-D11778661FEA}"/>
+                <a16:creationId xmlns:a16="http://schemas.microsoft.com/office/drawing/2014/main" id="{49C8B517-D1A6-4971-AE90-88678FC7D515}"/>
               </a:ext>
             </a:extLst>
           </p:cNvPr>
@@ -12579,7 +12191,7 @@
           <p:cNvPr id="5" name="">
             <a:extLst xmlns:a="http://schemas.openxmlformats.org/drawingml/2006/main">
               <a:ext uri="{FF2B5EF4-FFF2-40B4-BE49-F238E27FC236}">
-                <a16:creationId xmlns:a16="http://schemas.microsoft.com/office/drawing/2014/main" id="{1A6ECFF4-3B0E-49CC-96BE-6EB84CB0E71C}"/>
+                <a16:creationId xmlns:a16="http://schemas.microsoft.com/office/drawing/2014/main" id="{7E4B2E48-F03C-4F8A-AEC6-E2B844D06F19}"/>
               </a:ext>
             </a:extLst>
           </p:cNvPr>
@@ -12643,7 +12255,7 @@
           <p:cNvPr id="6" name="">
             <a:extLst xmlns:a="http://schemas.openxmlformats.org/drawingml/2006/main">
               <a:ext uri="{FF2B5EF4-FFF2-40B4-BE49-F238E27FC236}">
-                <a16:creationId xmlns:a16="http://schemas.microsoft.com/office/drawing/2014/main" id="{6528D694-5C70-4674-86E5-08FDA65021E5}"/>
+                <a16:creationId xmlns:a16="http://schemas.microsoft.com/office/drawing/2014/main" id="{10F20406-C8D8-49BF-8BE9-4D7C535D3457}"/>
               </a:ext>
             </a:extLst>
           </p:cNvPr>
@@ -12676,7 +12288,7 @@
           <p:cNvPr id="7" name="">
             <a:extLst xmlns:a="http://schemas.openxmlformats.org/drawingml/2006/main">
               <a:ext uri="{FF2B5EF4-FFF2-40B4-BE49-F238E27FC236}">
-                <a16:creationId xmlns:a16="http://schemas.microsoft.com/office/drawing/2014/main" id="{38FF1C7B-FD22-4236-86D9-80B5F7070760}"/>
+                <a16:creationId xmlns:a16="http://schemas.microsoft.com/office/drawing/2014/main" id="{46FF6116-E79D-4DAE-8536-A6A316B0E73A}"/>
               </a:ext>
             </a:extLst>
           </p:cNvPr>
@@ -12740,7 +12352,7 @@
           <p:cNvPr id="8" name="">
             <a:extLst xmlns:a="http://schemas.openxmlformats.org/drawingml/2006/main">
               <a:ext uri="{FF2B5EF4-FFF2-40B4-BE49-F238E27FC236}">
-                <a16:creationId xmlns:a16="http://schemas.microsoft.com/office/drawing/2014/main" id="{CF13BA0A-5A6A-47F9-8C70-2C49DE612BDA}"/>
+                <a16:creationId xmlns:a16="http://schemas.microsoft.com/office/drawing/2014/main" id="{F70CD3C6-67DF-45A4-AD92-DBAF1F940E1A}"/>
               </a:ext>
             </a:extLst>
           </p:cNvPr>
@@ -12804,7 +12416,7 @@
           <p:cNvPr id="9" name="">
             <a:extLst xmlns:a="http://schemas.openxmlformats.org/drawingml/2006/main">
               <a:ext uri="{FF2B5EF4-FFF2-40B4-BE49-F238E27FC236}">
-                <a16:creationId xmlns:a16="http://schemas.microsoft.com/office/drawing/2014/main" id="{D073039B-B58A-4A01-BCD2-D7E07D0CDD87}"/>
+                <a16:creationId xmlns:a16="http://schemas.microsoft.com/office/drawing/2014/main" id="{A72278FA-B821-4498-BE04-CD07C685DA00}"/>
               </a:ext>
             </a:extLst>
           </p:cNvPr>
@@ -12837,7 +12449,7 @@
           <p:cNvPr id="10" name="">
             <a:extLst xmlns:a="http://schemas.openxmlformats.org/drawingml/2006/main">
               <a:ext uri="{FF2B5EF4-FFF2-40B4-BE49-F238E27FC236}">
-                <a16:creationId xmlns:a16="http://schemas.microsoft.com/office/drawing/2014/main" id="{BDD91528-F15E-49AD-B229-78674E8FBD8F}"/>
+                <a16:creationId xmlns:a16="http://schemas.microsoft.com/office/drawing/2014/main" id="{F7799D70-2F35-424F-95BD-385E03BE9D8A}"/>
               </a:ext>
             </a:extLst>
           </p:cNvPr>
@@ -12901,7 +12513,7 @@
           <p:cNvPr id="11" name="">
             <a:extLst xmlns:a="http://schemas.openxmlformats.org/drawingml/2006/main">
               <a:ext uri="{FF2B5EF4-FFF2-40B4-BE49-F238E27FC236}">
-                <a16:creationId xmlns:a16="http://schemas.microsoft.com/office/drawing/2014/main" id="{4C426E5F-1C44-4E22-A025-B9738D88CF7E}"/>
+                <a16:creationId xmlns:a16="http://schemas.microsoft.com/office/drawing/2014/main" id="{D742F473-45A9-48A0-BCEB-0E61745D5D0F}"/>
               </a:ext>
             </a:extLst>
           </p:cNvPr>
@@ -12965,7 +12577,7 @@
           <p:cNvPr id="12" name="">
             <a:extLst xmlns:a="http://schemas.openxmlformats.org/drawingml/2006/main">
               <a:ext uri="{FF2B5EF4-FFF2-40B4-BE49-F238E27FC236}">
-                <a16:creationId xmlns:a16="http://schemas.microsoft.com/office/drawing/2014/main" id="{320D5CFA-9F49-42DA-84FC-9A755EEE5E94}"/>
+                <a16:creationId xmlns:a16="http://schemas.microsoft.com/office/drawing/2014/main" id="{AE5C706A-F454-495A-B3E1-D595AF06C9AE}"/>
               </a:ext>
             </a:extLst>
           </p:cNvPr>
@@ -12998,7 +12610,7 @@
           <p:cNvPr id="13" name="">
             <a:extLst xmlns:a="http://schemas.openxmlformats.org/drawingml/2006/main">
               <a:ext uri="{FF2B5EF4-FFF2-40B4-BE49-F238E27FC236}">
-                <a16:creationId xmlns:a16="http://schemas.microsoft.com/office/drawing/2014/main" id="{EC27F9C5-E050-4943-9E35-33FEA323279E}"/>
+                <a16:creationId xmlns:a16="http://schemas.microsoft.com/office/drawing/2014/main" id="{85E559D3-87CB-447D-9564-E61E01FC627D}"/>
               </a:ext>
             </a:extLst>
           </p:cNvPr>
@@ -13062,7 +12674,7 @@
           <p:cNvPr id="14" name="">
             <a:extLst xmlns:a="http://schemas.openxmlformats.org/drawingml/2006/main">
               <a:ext uri="{FF2B5EF4-FFF2-40B4-BE49-F238E27FC236}">
-                <a16:creationId xmlns:a16="http://schemas.microsoft.com/office/drawing/2014/main" id="{28A78AAD-1C78-4B49-87A5-50BAC42D41CB}"/>
+                <a16:creationId xmlns:a16="http://schemas.microsoft.com/office/drawing/2014/main" id="{7674984B-5410-463B-96F4-A32B45DC70C7}"/>
               </a:ext>
             </a:extLst>
           </p:cNvPr>
@@ -13126,7 +12738,7 @@
           <p:cNvPr id="15" name="">
             <a:extLst xmlns:a="http://schemas.openxmlformats.org/drawingml/2006/main">
               <a:ext uri="{FF2B5EF4-FFF2-40B4-BE49-F238E27FC236}">
-                <a16:creationId xmlns:a16="http://schemas.microsoft.com/office/drawing/2014/main" id="{726DE8C4-5764-4DE9-8598-524D87407149}"/>
+                <a16:creationId xmlns:a16="http://schemas.microsoft.com/office/drawing/2014/main" id="{13280A93-D32B-45C7-B41A-5589529BFFC9}"/>
               </a:ext>
             </a:extLst>
           </p:cNvPr>
@@ -13159,7 +12771,7 @@
           <p:cNvPr id="16" name="">
             <a:extLst xmlns:a="http://schemas.openxmlformats.org/drawingml/2006/main">
               <a:ext uri="{FF2B5EF4-FFF2-40B4-BE49-F238E27FC236}">
-                <a16:creationId xmlns:a16="http://schemas.microsoft.com/office/drawing/2014/main" id="{939A9222-C73A-4EEF-BEC9-ABBC450EE10F}"/>
+                <a16:creationId xmlns:a16="http://schemas.microsoft.com/office/drawing/2014/main" id="{F071DF9A-F079-43DF-894B-5DC99AEC513E}"/>
               </a:ext>
             </a:extLst>
           </p:cNvPr>
@@ -13223,7 +12835,7 @@
           <p:cNvPr id="17" name="">
             <a:extLst xmlns:a="http://schemas.openxmlformats.org/drawingml/2006/main">
               <a:ext uri="{FF2B5EF4-FFF2-40B4-BE49-F238E27FC236}">
-                <a16:creationId xmlns:a16="http://schemas.microsoft.com/office/drawing/2014/main" id="{7ADCB0AC-EF4C-4202-94B3-5E3FE3D08C2D}"/>
+                <a16:creationId xmlns:a16="http://schemas.microsoft.com/office/drawing/2014/main" id="{B910AF16-673D-48A0-B029-78D25F9C9729}"/>
               </a:ext>
             </a:extLst>
           </p:cNvPr>
@@ -13287,7 +12899,7 @@
           <p:cNvPr id="18" name="">
             <a:extLst xmlns:a="http://schemas.openxmlformats.org/drawingml/2006/main">
               <a:ext uri="{FF2B5EF4-FFF2-40B4-BE49-F238E27FC236}">
-                <a16:creationId xmlns:a16="http://schemas.microsoft.com/office/drawing/2014/main" id="{F0701F0C-C19E-49B5-93C6-3F4CAAA21B64}"/>
+                <a16:creationId xmlns:a16="http://schemas.microsoft.com/office/drawing/2014/main" id="{7EE933C0-8718-4DF7-96CA-094E3847D1C7}"/>
               </a:ext>
             </a:extLst>
           </p:cNvPr>
@@ -13320,7 +12932,7 @@
           <p:cNvPr id="19" name="">
             <a:extLst xmlns:a="http://schemas.openxmlformats.org/drawingml/2006/main">
               <a:ext uri="{FF2B5EF4-FFF2-40B4-BE49-F238E27FC236}">
-                <a16:creationId xmlns:a16="http://schemas.microsoft.com/office/drawing/2014/main" id="{0E628FAF-54FD-4DD0-AE82-E0A6589085E5}"/>
+                <a16:creationId xmlns:a16="http://schemas.microsoft.com/office/drawing/2014/main" id="{C535B642-DDD7-4761-B3C8-23C98BC9A90D}"/>
               </a:ext>
             </a:extLst>
           </p:cNvPr>
@@ -13384,7 +12996,7 @@
           <p:cNvPr id="20" name="">
             <a:extLst xmlns:a="http://schemas.openxmlformats.org/drawingml/2006/main">
               <a:ext uri="{FF2B5EF4-FFF2-40B4-BE49-F238E27FC236}">
-                <a16:creationId xmlns:a16="http://schemas.microsoft.com/office/drawing/2014/main" id="{0FAADFA5-D536-475F-A791-E1C890140B9A}"/>
+                <a16:creationId xmlns:a16="http://schemas.microsoft.com/office/drawing/2014/main" id="{AC733E29-2306-4A59-95CD-6069ABEDD5E6}"/>
               </a:ext>
             </a:extLst>
           </p:cNvPr>
@@ -13448,7 +13060,7 @@
           <p:cNvPr id="21" name="">
             <a:extLst xmlns:a="http://schemas.openxmlformats.org/drawingml/2006/main">
               <a:ext uri="{FF2B5EF4-FFF2-40B4-BE49-F238E27FC236}">
-                <a16:creationId xmlns:a16="http://schemas.microsoft.com/office/drawing/2014/main" id="{00FD93A0-CA50-4254-86B3-CA030627E956}"/>
+                <a16:creationId xmlns:a16="http://schemas.microsoft.com/office/drawing/2014/main" id="{DC1170FA-FAB6-40BB-BBF9-AB76F4290973}"/>
               </a:ext>
             </a:extLst>
           </p:cNvPr>
@@ -13502,7 +13114,7 @@
                 <a:ea typeface="Aptos"/>
                 <a:cs typeface="Aptos"/>
               </a:rPr>
-              <a:t>Veo-class video is expensive: official Vertex AI Veo 2 pricing is around $0.50/sec, so video should be gated.</a:t>
+              <a:t>Video is a wow layer, not the core loop: official Vertex AI Veo 2 pricing is around $0.50/sec, so video should be gated.</a:t>
             </a:r>
           </a:p>
         </p:txBody>
@@ -13512,7 +13124,7 @@
           <p:cNvPr id="22" name="">
             <a:extLst xmlns:a="http://schemas.openxmlformats.org/drawingml/2006/main">
               <a:ext uri="{FF2B5EF4-FFF2-40B4-BE49-F238E27FC236}">
-                <a16:creationId xmlns:a16="http://schemas.microsoft.com/office/drawing/2014/main" id="{C8DD8EDB-53D7-469E-8785-8A7350E5FE74}"/>
+                <a16:creationId xmlns:a16="http://schemas.microsoft.com/office/drawing/2014/main" id="{47101792-A8B9-4456-871C-47D2D0BD6995}"/>
               </a:ext>
             </a:extLst>
           </p:cNvPr>
@@ -13576,7 +13188,7 @@
           <p:cNvPr id="23" name="">
             <a:extLst xmlns:a="http://schemas.openxmlformats.org/drawingml/2006/main">
               <a:ext uri="{FF2B5EF4-FFF2-40B4-BE49-F238E27FC236}">
-                <a16:creationId xmlns:a16="http://schemas.microsoft.com/office/drawing/2014/main" id="{2977BBC9-EB0E-4EDA-BE58-DEDD50F17E28}"/>
+                <a16:creationId xmlns:a16="http://schemas.microsoft.com/office/drawing/2014/main" id="{D4C9F7C5-2C86-4719-8891-78AE11EA22DC}"/>
               </a:ext>
             </a:extLst>
           </p:cNvPr>
@@ -13638,7 +13250,7 @@
     </p:spTree>
     <p:extLst>
       <p:ext uri="{BB962C8B-B14F-4D97-AF65-F5344CB8AC3E}">
-        <p14:creationId xmlns:p14="http://schemas.microsoft.com/office/powerpoint/2010/main" val="1056693689"/>
+        <p14:creationId xmlns:p14="http://schemas.microsoft.com/office/powerpoint/2010/main" val="535531405"/>
       </p:ext>
     </p:extLst>
   </p:cSld>
@@ -13662,7 +13274,7 @@
           <p:cNvPr id="1" name="">
             <a:extLst xmlns:a="http://schemas.openxmlformats.org/drawingml/2006/main">
               <a:ext uri="{FF2B5EF4-FFF2-40B4-BE49-F238E27FC236}">
-                <a16:creationId xmlns:a16="http://schemas.microsoft.com/office/drawing/2014/main" id="{3652A8A7-7988-42A2-9DA1-15425E7812AE}"/>
+                <a16:creationId xmlns:a16="http://schemas.microsoft.com/office/drawing/2014/main" id="{0B8A744A-2A6E-4AE5-89D7-0D6EEEE34425}"/>
               </a:ext>
             </a:extLst>
           </p:cNvPr>
@@ -13695,7 +13307,7 @@
           <p:cNvPr id="2" name="">
             <a:extLst xmlns:a="http://schemas.openxmlformats.org/drawingml/2006/main">
               <a:ext uri="{FF2B5EF4-FFF2-40B4-BE49-F238E27FC236}">
-                <a16:creationId xmlns:a16="http://schemas.microsoft.com/office/drawing/2014/main" id="{637E6325-E429-414E-9207-343E1C7A3EDA}"/>
+                <a16:creationId xmlns:a16="http://schemas.microsoft.com/office/drawing/2014/main" id="{B0DF5861-A23B-4D93-A603-C3DCE3E5689F}"/>
               </a:ext>
             </a:extLst>
           </p:cNvPr>
@@ -13728,7 +13340,7 @@
           <p:cNvPr id="3" name="">
             <a:extLst xmlns:a="http://schemas.openxmlformats.org/drawingml/2006/main">
               <a:ext uri="{FF2B5EF4-FFF2-40B4-BE49-F238E27FC236}">
-                <a16:creationId xmlns:a16="http://schemas.microsoft.com/office/drawing/2014/main" id="{A17BB144-7FA2-42BA-8F7B-0CC90F978B6C}"/>
+                <a16:creationId xmlns:a16="http://schemas.microsoft.com/office/drawing/2014/main" id="{34E4A144-0771-4C52-A9CD-2A3F9754CDA0}"/>
               </a:ext>
             </a:extLst>
           </p:cNvPr>
@@ -13761,7 +13373,7 @@
           <p:cNvPr id="4" name="">
             <a:extLst xmlns:a="http://schemas.openxmlformats.org/drawingml/2006/main">
               <a:ext uri="{FF2B5EF4-FFF2-40B4-BE49-F238E27FC236}">
-                <a16:creationId xmlns:a16="http://schemas.microsoft.com/office/drawing/2014/main" id="{F696484C-3E89-4192-9E9C-5B365E27664C}"/>
+                <a16:creationId xmlns:a16="http://schemas.microsoft.com/office/drawing/2014/main" id="{6DBEB8F9-00EC-4DB9-B5B5-4D7CCF2D6A48}"/>
               </a:ext>
             </a:extLst>
           </p:cNvPr>
@@ -13825,7 +13437,7 @@
           <p:cNvPr id="5" name="">
             <a:extLst xmlns:a="http://schemas.openxmlformats.org/drawingml/2006/main">
               <a:ext uri="{FF2B5EF4-FFF2-40B4-BE49-F238E27FC236}">
-                <a16:creationId xmlns:a16="http://schemas.microsoft.com/office/drawing/2014/main" id="{1193A65D-7502-4E6C-8A6E-F7CA2B9A5AE8}"/>
+                <a16:creationId xmlns:a16="http://schemas.microsoft.com/office/drawing/2014/main" id="{E48347E4-1CC7-4E1A-8B0B-8AE54058527A}"/>
               </a:ext>
             </a:extLst>
           </p:cNvPr>
@@ -13889,7 +13501,7 @@
           <p:cNvPr id="6" name="">
             <a:extLst xmlns:a="http://schemas.openxmlformats.org/drawingml/2006/main">
               <a:ext uri="{FF2B5EF4-FFF2-40B4-BE49-F238E27FC236}">
-                <a16:creationId xmlns:a16="http://schemas.microsoft.com/office/drawing/2014/main" id="{388B8F59-5E47-4128-BD1F-3D62B76C8A69}"/>
+                <a16:creationId xmlns:a16="http://schemas.microsoft.com/office/drawing/2014/main" id="{9FB10E32-182E-424B-8D25-92D8EA94108B}"/>
               </a:ext>
             </a:extLst>
           </p:cNvPr>
@@ -13922,7 +13534,7 @@
           <p:cNvPr id="7" name="">
             <a:extLst xmlns:a="http://schemas.openxmlformats.org/drawingml/2006/main">
               <a:ext uri="{FF2B5EF4-FFF2-40B4-BE49-F238E27FC236}">
-                <a16:creationId xmlns:a16="http://schemas.microsoft.com/office/drawing/2014/main" id="{AD8AD4E9-D6B6-49C9-9E30-B1072F69624E}"/>
+                <a16:creationId xmlns:a16="http://schemas.microsoft.com/office/drawing/2014/main" id="{8F349F7E-7F34-44C9-8CC9-09FE09DA4DB1}"/>
               </a:ext>
             </a:extLst>
           </p:cNvPr>
@@ -13986,7 +13598,7 @@
           <p:cNvPr id="8" name="">
             <a:extLst xmlns:a="http://schemas.openxmlformats.org/drawingml/2006/main">
               <a:ext uri="{FF2B5EF4-FFF2-40B4-BE49-F238E27FC236}">
-                <a16:creationId xmlns:a16="http://schemas.microsoft.com/office/drawing/2014/main" id="{8E5C3EA0-10DB-4E59-8547-47CC24402367}"/>
+                <a16:creationId xmlns:a16="http://schemas.microsoft.com/office/drawing/2014/main" id="{462E56B8-A5F7-41C2-897B-5241DB4270FB}"/>
               </a:ext>
             </a:extLst>
           </p:cNvPr>
@@ -14019,7 +13631,7 @@
           <p:cNvPr id="9" name="">
             <a:extLst xmlns:a="http://schemas.openxmlformats.org/drawingml/2006/main">
               <a:ext uri="{FF2B5EF4-FFF2-40B4-BE49-F238E27FC236}">
-                <a16:creationId xmlns:a16="http://schemas.microsoft.com/office/drawing/2014/main" id="{CC7286E6-2DA5-48FE-813F-90A746881EE8}"/>
+                <a16:creationId xmlns:a16="http://schemas.microsoft.com/office/drawing/2014/main" id="{B090C77F-B9B1-4C69-8859-C45447ED7AD1}"/>
               </a:ext>
             </a:extLst>
           </p:cNvPr>
@@ -14083,7 +13695,7 @@
           <p:cNvPr id="10" name="">
             <a:extLst xmlns:a="http://schemas.openxmlformats.org/drawingml/2006/main">
               <a:ext uri="{FF2B5EF4-FFF2-40B4-BE49-F238E27FC236}">
-                <a16:creationId xmlns:a16="http://schemas.microsoft.com/office/drawing/2014/main" id="{145550BF-A2CB-4633-8114-F543FB223756}"/>
+                <a16:creationId xmlns:a16="http://schemas.microsoft.com/office/drawing/2014/main" id="{AAB35079-6F40-41AD-BDD0-4C2855BF8C73}"/>
               </a:ext>
             </a:extLst>
           </p:cNvPr>
@@ -14116,7 +13728,7 @@
           <p:cNvPr id="11" name="">
             <a:extLst xmlns:a="http://schemas.openxmlformats.org/drawingml/2006/main">
               <a:ext uri="{FF2B5EF4-FFF2-40B4-BE49-F238E27FC236}">
-                <a16:creationId xmlns:a16="http://schemas.microsoft.com/office/drawing/2014/main" id="{0B7CEEF6-4F13-48C1-A367-FC0783D0E78E}"/>
+                <a16:creationId xmlns:a16="http://schemas.microsoft.com/office/drawing/2014/main" id="{AF68AE82-D333-4640-884B-51FBF07CDAAF}"/>
               </a:ext>
             </a:extLst>
           </p:cNvPr>
@@ -14180,7 +13792,7 @@
           <p:cNvPr id="12" name="">
             <a:extLst xmlns:a="http://schemas.openxmlformats.org/drawingml/2006/main">
               <a:ext uri="{FF2B5EF4-FFF2-40B4-BE49-F238E27FC236}">
-                <a16:creationId xmlns:a16="http://schemas.microsoft.com/office/drawing/2014/main" id="{6FC0FB5C-7C1D-41C2-B9A5-2846CB49C5E6}"/>
+                <a16:creationId xmlns:a16="http://schemas.microsoft.com/office/drawing/2014/main" id="{EDF1BCA8-1F36-4F1E-89C9-F1A7A4011941}"/>
               </a:ext>
             </a:extLst>
           </p:cNvPr>
@@ -14213,7 +13825,7 @@
           <p:cNvPr id="13" name="">
             <a:extLst xmlns:a="http://schemas.openxmlformats.org/drawingml/2006/main">
               <a:ext uri="{FF2B5EF4-FFF2-40B4-BE49-F238E27FC236}">
-                <a16:creationId xmlns:a16="http://schemas.microsoft.com/office/drawing/2014/main" id="{5E5F12A3-1F4D-4065-9CAC-EB7974EAEEFA}"/>
+                <a16:creationId xmlns:a16="http://schemas.microsoft.com/office/drawing/2014/main" id="{1C72A98C-7829-49E6-9BA9-F20B903D47F2}"/>
               </a:ext>
             </a:extLst>
           </p:cNvPr>
@@ -14277,7 +13889,7 @@
           <p:cNvPr id="14" name="">
             <a:extLst xmlns:a="http://schemas.openxmlformats.org/drawingml/2006/main">
               <a:ext uri="{FF2B5EF4-FFF2-40B4-BE49-F238E27FC236}">
-                <a16:creationId xmlns:a16="http://schemas.microsoft.com/office/drawing/2014/main" id="{7249890A-F7AC-4698-9D1D-E41745BBE0FB}"/>
+                <a16:creationId xmlns:a16="http://schemas.microsoft.com/office/drawing/2014/main" id="{28568808-039A-43E6-9769-663432E9FC69}"/>
               </a:ext>
             </a:extLst>
           </p:cNvPr>
@@ -14310,7 +13922,7 @@
           <p:cNvPr id="15" name="">
             <a:extLst xmlns:a="http://schemas.openxmlformats.org/drawingml/2006/main">
               <a:ext uri="{FF2B5EF4-FFF2-40B4-BE49-F238E27FC236}">
-                <a16:creationId xmlns:a16="http://schemas.microsoft.com/office/drawing/2014/main" id="{7267F324-191C-48C8-9BF1-F2A5E0D95088}"/>
+                <a16:creationId xmlns:a16="http://schemas.microsoft.com/office/drawing/2014/main" id="{53F0A299-4DA5-4689-B9AA-494BC3411C92}"/>
               </a:ext>
             </a:extLst>
           </p:cNvPr>
@@ -14374,7 +13986,7 @@
           <p:cNvPr id="16" name="">
             <a:extLst xmlns:a="http://schemas.openxmlformats.org/drawingml/2006/main">
               <a:ext uri="{FF2B5EF4-FFF2-40B4-BE49-F238E27FC236}">
-                <a16:creationId xmlns:a16="http://schemas.microsoft.com/office/drawing/2014/main" id="{FA5F0D8E-7CA3-4374-839D-2B566D075A65}"/>
+                <a16:creationId xmlns:a16="http://schemas.microsoft.com/office/drawing/2014/main" id="{DCB371A4-B54D-4183-9BBE-44CA2C61F010}"/>
               </a:ext>
             </a:extLst>
           </p:cNvPr>
@@ -14407,7 +14019,7 @@
           <p:cNvPr id="17" name="">
             <a:extLst xmlns:a="http://schemas.openxmlformats.org/drawingml/2006/main">
               <a:ext uri="{FF2B5EF4-FFF2-40B4-BE49-F238E27FC236}">
-                <a16:creationId xmlns:a16="http://schemas.microsoft.com/office/drawing/2014/main" id="{724E117A-2151-4D17-A048-6D108D414820}"/>
+                <a16:creationId xmlns:a16="http://schemas.microsoft.com/office/drawing/2014/main" id="{9572BE0F-7BB6-4031-B699-EF7076C8CE54}"/>
               </a:ext>
             </a:extLst>
           </p:cNvPr>
@@ -14471,7 +14083,7 @@
           <p:cNvPr id="18" name="">
             <a:extLst xmlns:a="http://schemas.openxmlformats.org/drawingml/2006/main">
               <a:ext uri="{FF2B5EF4-FFF2-40B4-BE49-F238E27FC236}">
-                <a16:creationId xmlns:a16="http://schemas.microsoft.com/office/drawing/2014/main" id="{280F9B3F-4FE9-47CD-B6EB-D5B87A462D00}"/>
+                <a16:creationId xmlns:a16="http://schemas.microsoft.com/office/drawing/2014/main" id="{EE6738DC-EB91-4A2F-B651-9CD7782F30A9}"/>
               </a:ext>
             </a:extLst>
           </p:cNvPr>
@@ -14504,7 +14116,7 @@
           <p:cNvPr id="19" name="">
             <a:extLst xmlns:a="http://schemas.openxmlformats.org/drawingml/2006/main">
               <a:ext uri="{FF2B5EF4-FFF2-40B4-BE49-F238E27FC236}">
-                <a16:creationId xmlns:a16="http://schemas.microsoft.com/office/drawing/2014/main" id="{045F12C3-E7AC-414B-982E-85E87041D653}"/>
+                <a16:creationId xmlns:a16="http://schemas.microsoft.com/office/drawing/2014/main" id="{143628A3-4AA8-4432-A17A-5DD22FCC6D9F}"/>
               </a:ext>
             </a:extLst>
           </p:cNvPr>
@@ -14568,7 +14180,7 @@
           <p:cNvPr id="20" name="">
             <a:extLst xmlns:a="http://schemas.openxmlformats.org/drawingml/2006/main">
               <a:ext uri="{FF2B5EF4-FFF2-40B4-BE49-F238E27FC236}">
-                <a16:creationId xmlns:a16="http://schemas.microsoft.com/office/drawing/2014/main" id="{9F8D7542-FB7A-41FF-A517-05C10BBBD2C7}"/>
+                <a16:creationId xmlns:a16="http://schemas.microsoft.com/office/drawing/2014/main" id="{2208BD0D-DD5C-4005-8437-4B7C709525A7}"/>
               </a:ext>
             </a:extLst>
           </p:cNvPr>
@@ -14601,7 +14213,7 @@
           <p:cNvPr id="21" name="">
             <a:extLst xmlns:a="http://schemas.openxmlformats.org/drawingml/2006/main">
               <a:ext uri="{FF2B5EF4-FFF2-40B4-BE49-F238E27FC236}">
-                <a16:creationId xmlns:a16="http://schemas.microsoft.com/office/drawing/2014/main" id="{0EE59E21-6055-4D8F-9FAA-4302537B833B}"/>
+                <a16:creationId xmlns:a16="http://schemas.microsoft.com/office/drawing/2014/main" id="{7579C0C4-75AC-486C-94DC-27E2948097A3}"/>
               </a:ext>
             </a:extLst>
           </p:cNvPr>
@@ -14665,7 +14277,7 @@
           <p:cNvPr id="22" name="">
             <a:extLst xmlns:a="http://schemas.openxmlformats.org/drawingml/2006/main">
               <a:ext uri="{FF2B5EF4-FFF2-40B4-BE49-F238E27FC236}">
-                <a16:creationId xmlns:a16="http://schemas.microsoft.com/office/drawing/2014/main" id="{FD530633-087A-45CE-9175-85C8C40817F6}"/>
+                <a16:creationId xmlns:a16="http://schemas.microsoft.com/office/drawing/2014/main" id="{9D57FF90-DCFE-4B48-B987-60588CF79599}"/>
               </a:ext>
             </a:extLst>
           </p:cNvPr>
@@ -14698,7 +14310,7 @@
           <p:cNvPr id="23" name="">
             <a:extLst xmlns:a="http://schemas.openxmlformats.org/drawingml/2006/main">
               <a:ext uri="{FF2B5EF4-FFF2-40B4-BE49-F238E27FC236}">
-                <a16:creationId xmlns:a16="http://schemas.microsoft.com/office/drawing/2014/main" id="{C30BEC84-5DE6-41F5-B5D1-314EB4A90657}"/>
+                <a16:creationId xmlns:a16="http://schemas.microsoft.com/office/drawing/2014/main" id="{38F0517B-82F5-45A0-8C8F-338620B93F0C}"/>
               </a:ext>
             </a:extLst>
           </p:cNvPr>
@@ -14762,7 +14374,7 @@
           <p:cNvPr id="24" name="">
             <a:extLst xmlns:a="http://schemas.openxmlformats.org/drawingml/2006/main">
               <a:ext uri="{FF2B5EF4-FFF2-40B4-BE49-F238E27FC236}">
-                <a16:creationId xmlns:a16="http://schemas.microsoft.com/office/drawing/2014/main" id="{D5357B08-9C39-4DDF-8D23-2F9625DB09ED}"/>
+                <a16:creationId xmlns:a16="http://schemas.microsoft.com/office/drawing/2014/main" id="{8FBEB4CA-CE86-4D26-B3DB-E77C690258F0}"/>
               </a:ext>
             </a:extLst>
           </p:cNvPr>
@@ -14795,7 +14407,7 @@
           <p:cNvPr id="25" name="">
             <a:extLst xmlns:a="http://schemas.openxmlformats.org/drawingml/2006/main">
               <a:ext uri="{FF2B5EF4-FFF2-40B4-BE49-F238E27FC236}">
-                <a16:creationId xmlns:a16="http://schemas.microsoft.com/office/drawing/2014/main" id="{90FDD6FC-2167-4B35-BC6E-1E323D34D7E6}"/>
+                <a16:creationId xmlns:a16="http://schemas.microsoft.com/office/drawing/2014/main" id="{BE4DF164-3F12-4D59-891E-EC72F1C623CC}"/>
               </a:ext>
             </a:extLst>
           </p:cNvPr>
@@ -14859,7 +14471,7 @@
           <p:cNvPr id="26" name="">
             <a:extLst xmlns:a="http://schemas.openxmlformats.org/drawingml/2006/main">
               <a:ext uri="{FF2B5EF4-FFF2-40B4-BE49-F238E27FC236}">
-                <a16:creationId xmlns:a16="http://schemas.microsoft.com/office/drawing/2014/main" id="{1E300D9E-F4A4-45A9-B471-38318C0725DC}"/>
+                <a16:creationId xmlns:a16="http://schemas.microsoft.com/office/drawing/2014/main" id="{81EC00D5-DBAF-4C6B-B7DD-36987DCF7916}"/>
               </a:ext>
             </a:extLst>
           </p:cNvPr>
@@ -14892,7 +14504,7 @@
           <p:cNvPr id="27" name="">
             <a:extLst xmlns:a="http://schemas.openxmlformats.org/drawingml/2006/main">
               <a:ext uri="{FF2B5EF4-FFF2-40B4-BE49-F238E27FC236}">
-                <a16:creationId xmlns:a16="http://schemas.microsoft.com/office/drawing/2014/main" id="{AECE1814-3B8B-4045-924F-B7F8123473F9}"/>
+                <a16:creationId xmlns:a16="http://schemas.microsoft.com/office/drawing/2014/main" id="{6ECB68D7-69C7-42CF-8803-D7BB6BB8C2A3}"/>
               </a:ext>
             </a:extLst>
           </p:cNvPr>
@@ -14956,7 +14568,7 @@
           <p:cNvPr id="28" name="">
             <a:extLst xmlns:a="http://schemas.openxmlformats.org/drawingml/2006/main">
               <a:ext uri="{FF2B5EF4-FFF2-40B4-BE49-F238E27FC236}">
-                <a16:creationId xmlns:a16="http://schemas.microsoft.com/office/drawing/2014/main" id="{17C7A300-9649-4361-8BC3-0557699CE658}"/>
+                <a16:creationId xmlns:a16="http://schemas.microsoft.com/office/drawing/2014/main" id="{2615A9CF-5916-479F-9B33-3F07A8B2C626}"/>
               </a:ext>
             </a:extLst>
           </p:cNvPr>
@@ -14989,7 +14601,7 @@
           <p:cNvPr id="29" name="">
             <a:extLst xmlns:a="http://schemas.openxmlformats.org/drawingml/2006/main">
               <a:ext uri="{FF2B5EF4-FFF2-40B4-BE49-F238E27FC236}">
-                <a16:creationId xmlns:a16="http://schemas.microsoft.com/office/drawing/2014/main" id="{8409A71D-91EC-436B-951C-0E05DEB10CB0}"/>
+                <a16:creationId xmlns:a16="http://schemas.microsoft.com/office/drawing/2014/main" id="{B539CC62-7906-4571-8740-7B3D4DD0B3F9}"/>
               </a:ext>
             </a:extLst>
           </p:cNvPr>
@@ -15053,7 +14665,7 @@
           <p:cNvPr id="30" name="">
             <a:extLst xmlns:a="http://schemas.openxmlformats.org/drawingml/2006/main">
               <a:ext uri="{FF2B5EF4-FFF2-40B4-BE49-F238E27FC236}">
-                <a16:creationId xmlns:a16="http://schemas.microsoft.com/office/drawing/2014/main" id="{903140B0-1B9E-4F5B-9F9E-1C0C9EACEC30}"/>
+                <a16:creationId xmlns:a16="http://schemas.microsoft.com/office/drawing/2014/main" id="{89A75506-CD4B-498E-835A-8F295A3DCD89}"/>
               </a:ext>
             </a:extLst>
           </p:cNvPr>
@@ -15086,7 +14698,7 @@
           <p:cNvPr id="31" name="">
             <a:extLst xmlns:a="http://schemas.openxmlformats.org/drawingml/2006/main">
               <a:ext uri="{FF2B5EF4-FFF2-40B4-BE49-F238E27FC236}">
-                <a16:creationId xmlns:a16="http://schemas.microsoft.com/office/drawing/2014/main" id="{88DF18E2-67DB-4378-BB18-9D4CE41F03F6}"/>
+                <a16:creationId xmlns:a16="http://schemas.microsoft.com/office/drawing/2014/main" id="{85426067-DABD-4DDE-84B8-A5E6AFDA96A1}"/>
               </a:ext>
             </a:extLst>
           </p:cNvPr>
@@ -15150,7 +14762,7 @@
           <p:cNvPr id="32" name="">
             <a:extLst xmlns:a="http://schemas.openxmlformats.org/drawingml/2006/main">
               <a:ext uri="{FF2B5EF4-FFF2-40B4-BE49-F238E27FC236}">
-                <a16:creationId xmlns:a16="http://schemas.microsoft.com/office/drawing/2014/main" id="{FA33D495-F67B-4512-97FC-731AC3BF4EA9}"/>
+                <a16:creationId xmlns:a16="http://schemas.microsoft.com/office/drawing/2014/main" id="{595356ED-6620-4381-B680-AC49768F69ED}"/>
               </a:ext>
             </a:extLst>
           </p:cNvPr>
@@ -15183,7 +14795,7 @@
           <p:cNvPr id="33" name="">
             <a:extLst xmlns:a="http://schemas.openxmlformats.org/drawingml/2006/main">
               <a:ext uri="{FF2B5EF4-FFF2-40B4-BE49-F238E27FC236}">
-                <a16:creationId xmlns:a16="http://schemas.microsoft.com/office/drawing/2014/main" id="{1B015AC1-A0A5-40BE-9EC0-19787D6B9C61}"/>
+                <a16:creationId xmlns:a16="http://schemas.microsoft.com/office/drawing/2014/main" id="{D45B0934-1ADD-49D2-A3D9-7AAEF9AC822D}"/>
               </a:ext>
             </a:extLst>
           </p:cNvPr>
@@ -15247,7 +14859,7 @@
           <p:cNvPr id="34" name="">
             <a:extLst xmlns:a="http://schemas.openxmlformats.org/drawingml/2006/main">
               <a:ext uri="{FF2B5EF4-FFF2-40B4-BE49-F238E27FC236}">
-                <a16:creationId xmlns:a16="http://schemas.microsoft.com/office/drawing/2014/main" id="{9310B802-0A72-4102-8EF2-C13EBC66BCBA}"/>
+                <a16:creationId xmlns:a16="http://schemas.microsoft.com/office/drawing/2014/main" id="{713D9A74-C996-4049-A2A7-7FBA92EC88EB}"/>
               </a:ext>
             </a:extLst>
           </p:cNvPr>
@@ -15280,7 +14892,7 @@
           <p:cNvPr id="35" name="">
             <a:extLst xmlns:a="http://schemas.openxmlformats.org/drawingml/2006/main">
               <a:ext uri="{FF2B5EF4-FFF2-40B4-BE49-F238E27FC236}">
-                <a16:creationId xmlns:a16="http://schemas.microsoft.com/office/drawing/2014/main" id="{CD8A3ABB-987F-4D6A-984D-10C4E8C303E4}"/>
+                <a16:creationId xmlns:a16="http://schemas.microsoft.com/office/drawing/2014/main" id="{CB4D1200-3443-4CA1-BF28-538AFBD7F180}"/>
               </a:ext>
             </a:extLst>
           </p:cNvPr>
@@ -15344,7 +14956,7 @@
           <p:cNvPr id="36" name="">
             <a:extLst xmlns:a="http://schemas.openxmlformats.org/drawingml/2006/main">
               <a:ext uri="{FF2B5EF4-FFF2-40B4-BE49-F238E27FC236}">
-                <a16:creationId xmlns:a16="http://schemas.microsoft.com/office/drawing/2014/main" id="{317405ED-E37A-446A-B4F0-A3274A61661F}"/>
+                <a16:creationId xmlns:a16="http://schemas.microsoft.com/office/drawing/2014/main" id="{41C517B9-BDC0-40FD-9A5A-99E9A4541A70}"/>
               </a:ext>
             </a:extLst>
           </p:cNvPr>
@@ -15406,7 +15018,7 @@
     </p:spTree>
     <p:extLst>
       <p:ext uri="{BB962C8B-B14F-4D97-AF65-F5344CB8AC3E}">
-        <p14:creationId xmlns:p14="http://schemas.microsoft.com/office/powerpoint/2010/main" val="889965617"/>
+        <p14:creationId xmlns:p14="http://schemas.microsoft.com/office/powerpoint/2010/main" val="1814584490"/>
       </p:ext>
     </p:extLst>
   </p:cSld>
@@ -15430,7 +15042,7 @@
           <p:cNvPr id="1" name="">
             <a:extLst xmlns:a="http://schemas.openxmlformats.org/drawingml/2006/main">
               <a:ext uri="{FF2B5EF4-FFF2-40B4-BE49-F238E27FC236}">
-                <a16:creationId xmlns:a16="http://schemas.microsoft.com/office/drawing/2014/main" id="{1ED04352-32ED-46FE-AC7B-AFFB4518EA09}"/>
+                <a16:creationId xmlns:a16="http://schemas.microsoft.com/office/drawing/2014/main" id="{DC259131-361A-4FB0-9AC3-8E521FC8CB50}"/>
               </a:ext>
             </a:extLst>
           </p:cNvPr>
@@ -15463,7 +15075,7 @@
           <p:cNvPr id="2" name="">
             <a:extLst xmlns:a="http://schemas.openxmlformats.org/drawingml/2006/main">
               <a:ext uri="{FF2B5EF4-FFF2-40B4-BE49-F238E27FC236}">
-                <a16:creationId xmlns:a16="http://schemas.microsoft.com/office/drawing/2014/main" id="{DBF8CB8B-87D7-4599-BECF-0853CA5B9B6B}"/>
+                <a16:creationId xmlns:a16="http://schemas.microsoft.com/office/drawing/2014/main" id="{4DFAA8FD-FFC2-4FFF-BAE7-FC004858CA01}"/>
               </a:ext>
             </a:extLst>
           </p:cNvPr>
@@ -15496,7 +15108,7 @@
           <p:cNvPr id="3" name="">
             <a:extLst xmlns:a="http://schemas.openxmlformats.org/drawingml/2006/main">
               <a:ext uri="{FF2B5EF4-FFF2-40B4-BE49-F238E27FC236}">
-                <a16:creationId xmlns:a16="http://schemas.microsoft.com/office/drawing/2014/main" id="{FD12E7CB-319C-467F-A85A-7EA20F333066}"/>
+                <a16:creationId xmlns:a16="http://schemas.microsoft.com/office/drawing/2014/main" id="{A4847C30-CFDD-411D-84D2-B2E8B3E455C3}"/>
               </a:ext>
             </a:extLst>
           </p:cNvPr>
@@ -15529,7 +15141,7 @@
           <p:cNvPr id="4" name="">
             <a:extLst xmlns:a="http://schemas.openxmlformats.org/drawingml/2006/main">
               <a:ext uri="{FF2B5EF4-FFF2-40B4-BE49-F238E27FC236}">
-                <a16:creationId xmlns:a16="http://schemas.microsoft.com/office/drawing/2014/main" id="{179857A5-61B3-42D1-8995-E4746E78980D}"/>
+                <a16:creationId xmlns:a16="http://schemas.microsoft.com/office/drawing/2014/main" id="{5E4B31B3-0569-469C-A39E-EFB71699FD06}"/>
               </a:ext>
             </a:extLst>
           </p:cNvPr>
@@ -15593,7 +15205,7 @@
           <p:cNvPr id="5" name="">
             <a:extLst xmlns:a="http://schemas.openxmlformats.org/drawingml/2006/main">
               <a:ext uri="{FF2B5EF4-FFF2-40B4-BE49-F238E27FC236}">
-                <a16:creationId xmlns:a16="http://schemas.microsoft.com/office/drawing/2014/main" id="{D4966B2A-7667-4059-BF23-A41BE059484B}"/>
+                <a16:creationId xmlns:a16="http://schemas.microsoft.com/office/drawing/2014/main" id="{61D9A625-41A2-4A0F-9EF9-973A9615DDFE}"/>
               </a:ext>
             </a:extLst>
           </p:cNvPr>
@@ -15657,7 +15269,7 @@
           <p:cNvPr id="6" name="">
             <a:extLst xmlns:a="http://schemas.openxmlformats.org/drawingml/2006/main">
               <a:ext uri="{FF2B5EF4-FFF2-40B4-BE49-F238E27FC236}">
-                <a16:creationId xmlns:a16="http://schemas.microsoft.com/office/drawing/2014/main" id="{E2FC5BBA-F61F-424D-BF9F-C37D1C388151}"/>
+                <a16:creationId xmlns:a16="http://schemas.microsoft.com/office/drawing/2014/main" id="{0EB61F3D-E4BB-44E6-906E-394339E0E44E}"/>
               </a:ext>
             </a:extLst>
           </p:cNvPr>
@@ -15690,7 +15302,7 @@
           <p:cNvPr id="7" name="">
             <a:extLst xmlns:a="http://schemas.openxmlformats.org/drawingml/2006/main">
               <a:ext uri="{FF2B5EF4-FFF2-40B4-BE49-F238E27FC236}">
-                <a16:creationId xmlns:a16="http://schemas.microsoft.com/office/drawing/2014/main" id="{1BBB6E8C-DB0A-4A97-B7DD-511E1BB96D11}"/>
+                <a16:creationId xmlns:a16="http://schemas.microsoft.com/office/drawing/2014/main" id="{31FAE442-378C-4459-90B8-465191349B3A}"/>
               </a:ext>
             </a:extLst>
           </p:cNvPr>
@@ -15754,7 +15366,7 @@
           <p:cNvPr id="8" name="">
             <a:extLst xmlns:a="http://schemas.openxmlformats.org/drawingml/2006/main">
               <a:ext uri="{FF2B5EF4-FFF2-40B4-BE49-F238E27FC236}">
-                <a16:creationId xmlns:a16="http://schemas.microsoft.com/office/drawing/2014/main" id="{759C276A-446D-4428-9469-2D73C371FB51}"/>
+                <a16:creationId xmlns:a16="http://schemas.microsoft.com/office/drawing/2014/main" id="{F4557019-DDA6-45D2-B2A8-0207A9E6556E}"/>
               </a:ext>
             </a:extLst>
           </p:cNvPr>
@@ -15808,7 +15420,7 @@
                 <a:ea typeface="Aptos"/>
                 <a:cs typeface="Aptos"/>
               </a:rPr>
-              <a:t>10-screen prototype + 20 interviews</a:t>
+              <a:t>20-30 interviews + manual competitor review</a:t>
             </a:r>
           </a:p>
         </p:txBody>
@@ -15818,7 +15430,7 @@
           <p:cNvPr id="9" name="">
             <a:extLst xmlns:a="http://schemas.openxmlformats.org/drawingml/2006/main">
               <a:ext uri="{FF2B5EF4-FFF2-40B4-BE49-F238E27FC236}">
-                <a16:creationId xmlns:a16="http://schemas.microsoft.com/office/drawing/2014/main" id="{56FAE724-E896-4329-8262-C56254616A36}"/>
+                <a16:creationId xmlns:a16="http://schemas.microsoft.com/office/drawing/2014/main" id="{CEF61D66-3270-4D60-951F-0B6FE15687CB}"/>
               </a:ext>
             </a:extLst>
           </p:cNvPr>
@@ -15851,7 +15463,7 @@
           <p:cNvPr id="10" name="">
             <a:extLst xmlns:a="http://schemas.openxmlformats.org/drawingml/2006/main">
               <a:ext uri="{FF2B5EF4-FFF2-40B4-BE49-F238E27FC236}">
-                <a16:creationId xmlns:a16="http://schemas.microsoft.com/office/drawing/2014/main" id="{CB71EC2C-783B-44B4-A207-A66349DB58C9}"/>
+                <a16:creationId xmlns:a16="http://schemas.microsoft.com/office/drawing/2014/main" id="{E7DF8CBC-882F-4FD7-ACFC-35FEA68C154A}"/>
               </a:ext>
             </a:extLst>
           </p:cNvPr>
@@ -15915,7 +15527,7 @@
           <p:cNvPr id="11" name="">
             <a:extLst xmlns:a="http://schemas.openxmlformats.org/drawingml/2006/main">
               <a:ext uri="{FF2B5EF4-FFF2-40B4-BE49-F238E27FC236}">
-                <a16:creationId xmlns:a16="http://schemas.microsoft.com/office/drawing/2014/main" id="{DCF9E49F-9710-4ACE-B3DF-A8533D21A619}"/>
+                <a16:creationId xmlns:a16="http://schemas.microsoft.com/office/drawing/2014/main" id="{4F8F4BF7-8A60-4292-B625-AB7C74E6BF63}"/>
               </a:ext>
             </a:extLst>
           </p:cNvPr>
@@ -15969,7 +15581,7 @@
                 <a:ea typeface="Aptos"/>
                 <a:cs typeface="Aptos"/>
               </a:rPr>
-              <a:t>manual weekly forecasts + avatar examples</a:t>
+              <a:t>10-screen prototype + 2 Life Canvas styles</a:t>
             </a:r>
           </a:p>
         </p:txBody>
@@ -15979,7 +15591,7 @@
           <p:cNvPr id="12" name="">
             <a:extLst xmlns:a="http://schemas.openxmlformats.org/drawingml/2006/main">
               <a:ext uri="{FF2B5EF4-FFF2-40B4-BE49-F238E27FC236}">
-                <a16:creationId xmlns:a16="http://schemas.microsoft.com/office/drawing/2014/main" id="{1054621F-D16B-446B-83A0-5DBDF4BC3B99}"/>
+                <a16:creationId xmlns:a16="http://schemas.microsoft.com/office/drawing/2014/main" id="{6BB4503B-8E48-4416-B981-441A9C032EA6}"/>
               </a:ext>
             </a:extLst>
           </p:cNvPr>
@@ -16012,7 +15624,7 @@
           <p:cNvPr id="13" name="">
             <a:extLst xmlns:a="http://schemas.openxmlformats.org/drawingml/2006/main">
               <a:ext uri="{FF2B5EF4-FFF2-40B4-BE49-F238E27FC236}">
-                <a16:creationId xmlns:a16="http://schemas.microsoft.com/office/drawing/2014/main" id="{446F982B-931A-4812-8228-7AEC87107027}"/>
+                <a16:creationId xmlns:a16="http://schemas.microsoft.com/office/drawing/2014/main" id="{E56A8B1E-85F4-4D52-BDE3-F005507FE1E5}"/>
               </a:ext>
             </a:extLst>
           </p:cNvPr>
@@ -16076,7 +15688,7 @@
           <p:cNvPr id="14" name="">
             <a:extLst xmlns:a="http://schemas.openxmlformats.org/drawingml/2006/main">
               <a:ext uri="{FF2B5EF4-FFF2-40B4-BE49-F238E27FC236}">
-                <a16:creationId xmlns:a16="http://schemas.microsoft.com/office/drawing/2014/main" id="{6CC612F2-E5DB-4C15-8638-01F037F8A869}"/>
+                <a16:creationId xmlns:a16="http://schemas.microsoft.com/office/drawing/2014/main" id="{0029FA91-B122-4103-8B62-3C343F16C229}"/>
               </a:ext>
             </a:extLst>
           </p:cNvPr>
@@ -16130,7 +15742,7 @@
                 <a:ea typeface="Aptos"/>
                 <a:cs typeface="Aptos"/>
               </a:rPr>
-              <a:t>concierge cohort: 30-50 users</a:t>
+              <a:t>landing + price test $7.99/$9.99/$14.99</a:t>
             </a:r>
           </a:p>
         </p:txBody>
@@ -16140,7 +15752,7 @@
           <p:cNvPr id="15" name="">
             <a:extLst xmlns:a="http://schemas.openxmlformats.org/drawingml/2006/main">
               <a:ext uri="{FF2B5EF4-FFF2-40B4-BE49-F238E27FC236}">
-                <a16:creationId xmlns:a16="http://schemas.microsoft.com/office/drawing/2014/main" id="{DB6A7F3D-5FB1-4326-9BEA-F578D70FEA48}"/>
+                <a16:creationId xmlns:a16="http://schemas.microsoft.com/office/drawing/2014/main" id="{B9DB0359-460C-4405-AA97-6A2C4F925CC4}"/>
               </a:ext>
             </a:extLst>
           </p:cNvPr>
@@ -16173,7 +15785,7 @@
           <p:cNvPr id="16" name="">
             <a:extLst xmlns:a="http://schemas.openxmlformats.org/drawingml/2006/main">
               <a:ext uri="{FF2B5EF4-FFF2-40B4-BE49-F238E27FC236}">
-                <a16:creationId xmlns:a16="http://schemas.microsoft.com/office/drawing/2014/main" id="{7F9AD5E7-8FFC-4BEE-B0B3-7404C3D09E2A}"/>
+                <a16:creationId xmlns:a16="http://schemas.microsoft.com/office/drawing/2014/main" id="{B90671B8-E98E-478F-B484-92575CB54ABE}"/>
               </a:ext>
             </a:extLst>
           </p:cNvPr>
@@ -16237,7 +15849,7 @@
           <p:cNvPr id="17" name="">
             <a:extLst xmlns:a="http://schemas.openxmlformats.org/drawingml/2006/main">
               <a:ext uri="{FF2B5EF4-FFF2-40B4-BE49-F238E27FC236}">
-                <a16:creationId xmlns:a16="http://schemas.microsoft.com/office/drawing/2014/main" id="{07C43610-8BF7-4188-A1F4-4856131BC81B}"/>
+                <a16:creationId xmlns:a16="http://schemas.microsoft.com/office/drawing/2014/main" id="{3B137B9E-2F1F-470B-97B5-CE5E9D2EF789}"/>
               </a:ext>
             </a:extLst>
           </p:cNvPr>
@@ -16291,7 +15903,7 @@
                 <a:ea typeface="Aptos"/>
                 <a:cs typeface="Aptos"/>
               </a:rPr>
-              <a:t>paid intent, pricing test, final go/no-go</a:t>
+              <a:t>30-50 concierge users through 3-7 days</a:t>
             </a:r>
           </a:p>
         </p:txBody>
@@ -16301,7 +15913,7 @@
           <p:cNvPr id="18" name="">
             <a:extLst xmlns:a="http://schemas.openxmlformats.org/drawingml/2006/main">
               <a:ext uri="{FF2B5EF4-FFF2-40B4-BE49-F238E27FC236}">
-                <a16:creationId xmlns:a16="http://schemas.microsoft.com/office/drawing/2014/main" id="{1F85B557-4D80-491E-AE78-66E5150347E2}"/>
+                <a16:creationId xmlns:a16="http://schemas.microsoft.com/office/drawing/2014/main" id="{742A051E-0CFB-43E7-B5B1-C7C26A5B2BA2}"/>
               </a:ext>
             </a:extLst>
           </p:cNvPr>
@@ -16365,7 +15977,7 @@
           <p:cNvPr id="19" name="">
             <a:extLst xmlns:a="http://schemas.openxmlformats.org/drawingml/2006/main">
               <a:ext uri="{FF2B5EF4-FFF2-40B4-BE49-F238E27FC236}">
-                <a16:creationId xmlns:a16="http://schemas.microsoft.com/office/drawing/2014/main" id="{3C48EB0E-80C1-43A1-A640-A56E74B1825B}"/>
+                <a16:creationId xmlns:a16="http://schemas.microsoft.com/office/drawing/2014/main" id="{4CC2C5B9-CE8F-45B8-A913-AE56B86A5720}"/>
               </a:ext>
             </a:extLst>
           </p:cNvPr>
@@ -16429,7 +16041,7 @@
           <p:cNvPr id="20" name="">
             <a:extLst xmlns:a="http://schemas.openxmlformats.org/drawingml/2006/main">
               <a:ext uri="{FF2B5EF4-FFF2-40B4-BE49-F238E27FC236}">
-                <a16:creationId xmlns:a16="http://schemas.microsoft.com/office/drawing/2014/main" id="{2E9B7680-A10F-4D61-970C-235D88501552}"/>
+                <a16:creationId xmlns:a16="http://schemas.microsoft.com/office/drawing/2014/main" id="{D4D7CC04-5698-4D1C-A98F-F84095261E21}"/>
               </a:ext>
             </a:extLst>
           </p:cNvPr>
@@ -16491,7 +16103,7 @@
     </p:spTree>
     <p:extLst>
       <p:ext uri="{BB962C8B-B14F-4D97-AF65-F5344CB8AC3E}">
-        <p14:creationId xmlns:p14="http://schemas.microsoft.com/office/powerpoint/2010/main" val="1834693580"/>
+        <p14:creationId xmlns:p14="http://schemas.microsoft.com/office/powerpoint/2010/main" val="56079585"/>
       </p:ext>
     </p:extLst>
   </p:cSld>
@@ -16515,7 +16127,7 @@
           <p:cNvPr id="1" name="">
             <a:extLst xmlns:a="http://schemas.openxmlformats.org/drawingml/2006/main">
               <a:ext uri="{FF2B5EF4-FFF2-40B4-BE49-F238E27FC236}">
-                <a16:creationId xmlns:a16="http://schemas.microsoft.com/office/drawing/2014/main" id="{6F414647-48BC-4621-A044-528CAB7FE27F}"/>
+                <a16:creationId xmlns:a16="http://schemas.microsoft.com/office/drawing/2014/main" id="{9D8AF50B-11EC-4028-A3D0-F86C23D10B0A}"/>
               </a:ext>
             </a:extLst>
           </p:cNvPr>
@@ -16548,7 +16160,7 @@
           <p:cNvPr id="2" name="">
             <a:extLst xmlns:a="http://schemas.openxmlformats.org/drawingml/2006/main">
               <a:ext uri="{FF2B5EF4-FFF2-40B4-BE49-F238E27FC236}">
-                <a16:creationId xmlns:a16="http://schemas.microsoft.com/office/drawing/2014/main" id="{52E6ABB1-DA0F-408E-8D09-0DC2B7DB66DC}"/>
+                <a16:creationId xmlns:a16="http://schemas.microsoft.com/office/drawing/2014/main" id="{CE95E60C-0565-4C19-9C73-B44FEB0C53BD}"/>
               </a:ext>
             </a:extLst>
           </p:cNvPr>
@@ -16581,7 +16193,7 @@
           <p:cNvPr id="3" name="">
             <a:extLst xmlns:a="http://schemas.openxmlformats.org/drawingml/2006/main">
               <a:ext uri="{FF2B5EF4-FFF2-40B4-BE49-F238E27FC236}">
-                <a16:creationId xmlns:a16="http://schemas.microsoft.com/office/drawing/2014/main" id="{5CB1E5C3-501D-496C-800A-F9FDCC2A3077}"/>
+                <a16:creationId xmlns:a16="http://schemas.microsoft.com/office/drawing/2014/main" id="{9DCA0607-8BF2-46EE-AA5E-76804CCD4159}"/>
               </a:ext>
             </a:extLst>
           </p:cNvPr>
@@ -16614,7 +16226,7 @@
           <p:cNvPr id="4" name="">
             <a:extLst xmlns:a="http://schemas.openxmlformats.org/drawingml/2006/main">
               <a:ext uri="{FF2B5EF4-FFF2-40B4-BE49-F238E27FC236}">
-                <a16:creationId xmlns:a16="http://schemas.microsoft.com/office/drawing/2014/main" id="{04AFDF30-34BE-4E1C-9676-70AD1CDA008F}"/>
+                <a16:creationId xmlns:a16="http://schemas.microsoft.com/office/drawing/2014/main" id="{529741CD-C4AC-4039-BA4B-E84EAF91FA04}"/>
               </a:ext>
             </a:extLst>
           </p:cNvPr>
@@ -16678,7 +16290,7 @@
           <p:cNvPr id="5" name="">
             <a:extLst xmlns:a="http://schemas.openxmlformats.org/drawingml/2006/main">
               <a:ext uri="{FF2B5EF4-FFF2-40B4-BE49-F238E27FC236}">
-                <a16:creationId xmlns:a16="http://schemas.microsoft.com/office/drawing/2014/main" id="{2E8587AF-382C-4ADF-B94C-CA4E8C9627D9}"/>
+                <a16:creationId xmlns:a16="http://schemas.microsoft.com/office/drawing/2014/main" id="{405193E1-8FE1-48C4-903C-2A3448481567}"/>
               </a:ext>
             </a:extLst>
           </p:cNvPr>
@@ -16742,7 +16354,7 @@
           <p:cNvPr id="6" name="">
             <a:extLst xmlns:a="http://schemas.openxmlformats.org/drawingml/2006/main">
               <a:ext uri="{FF2B5EF4-FFF2-40B4-BE49-F238E27FC236}">
-                <a16:creationId xmlns:a16="http://schemas.microsoft.com/office/drawing/2014/main" id="{CAD7F22E-C435-4F0F-AA12-906020BAE6F0}"/>
+                <a16:creationId xmlns:a16="http://schemas.microsoft.com/office/drawing/2014/main" id="{DD7A4910-AD9D-4760-B7E5-FB66CE428942}"/>
               </a:ext>
             </a:extLst>
           </p:cNvPr>
@@ -16806,7 +16418,7 @@
           <p:cNvPr id="7" name="">
             <a:extLst xmlns:a="http://schemas.openxmlformats.org/drawingml/2006/main">
               <a:ext uri="{FF2B5EF4-FFF2-40B4-BE49-F238E27FC236}">
-                <a16:creationId xmlns:a16="http://schemas.microsoft.com/office/drawing/2014/main" id="{C5356168-8D56-45E9-B0F5-0EB75D32107F}"/>
+                <a16:creationId xmlns:a16="http://schemas.microsoft.com/office/drawing/2014/main" id="{9ADE87FC-7A0A-44AB-8D20-029F414FE2B2}"/>
               </a:ext>
             </a:extLst>
           </p:cNvPr>
@@ -16860,7 +16472,7 @@
                 <a:ea typeface="Aptos"/>
                 <a:cs typeface="Aptos"/>
               </a:rPr>
-              <a:t>Next step: generate 3-5 visual examples, assemble clickable prototype, and validate the first weekly season with real users.</a:t>
+              <a:t>Next step: generate 3-5 avatar/video examples, assemble clickable prototype, and validate the first weekly season with real users.</a:t>
             </a:r>
           </a:p>
         </p:txBody>
@@ -16870,7 +16482,7 @@
           <p:cNvPr id="8" name="">
             <a:extLst xmlns:a="http://schemas.openxmlformats.org/drawingml/2006/main">
               <a:ext uri="{FF2B5EF4-FFF2-40B4-BE49-F238E27FC236}">
-                <a16:creationId xmlns:a16="http://schemas.microsoft.com/office/drawing/2014/main" id="{F6A3C818-E350-4A8F-B98C-DEE585FAAF45}"/>
+                <a16:creationId xmlns:a16="http://schemas.microsoft.com/office/drawing/2014/main" id="{DA93C13C-4277-4986-AAD1-79AF9668B97F}"/>
               </a:ext>
             </a:extLst>
           </p:cNvPr>
@@ -16934,7 +16546,7 @@
           <p:cNvPr id="9" name="">
             <a:extLst xmlns:a="http://schemas.openxmlformats.org/drawingml/2006/main">
               <a:ext uri="{FF2B5EF4-FFF2-40B4-BE49-F238E27FC236}">
-                <a16:creationId xmlns:a16="http://schemas.microsoft.com/office/drawing/2014/main" id="{C5CF5EE1-F29D-4752-B390-BC7F7BE820F8}"/>
+                <a16:creationId xmlns:a16="http://schemas.microsoft.com/office/drawing/2014/main" id="{7332AEF3-8AD7-4DB8-9114-AC44F9BBBDC8}"/>
               </a:ext>
             </a:extLst>
           </p:cNvPr>
@@ -16996,7 +16608,7 @@
     </p:spTree>
     <p:extLst>
       <p:ext uri="{BB962C8B-B14F-4D97-AF65-F5344CB8AC3E}">
-        <p14:creationId xmlns:p14="http://schemas.microsoft.com/office/powerpoint/2010/main" val="715660773"/>
+        <p14:creationId xmlns:p14="http://schemas.microsoft.com/office/powerpoint/2010/main" val="506824418"/>
       </p:ext>
     </p:extLst>
   </p:cSld>
@@ -17020,7 +16632,7 @@
           <p:cNvPr id="1" name="">
             <a:extLst xmlns:a="http://schemas.openxmlformats.org/drawingml/2006/main">
               <a:ext uri="{FF2B5EF4-FFF2-40B4-BE49-F238E27FC236}">
-                <a16:creationId xmlns:a16="http://schemas.microsoft.com/office/drawing/2014/main" id="{DBB5E85C-3EAE-4AB0-A775-C2944D5A260B}"/>
+                <a16:creationId xmlns:a16="http://schemas.microsoft.com/office/drawing/2014/main" id="{93ADCCC7-7616-4854-B430-04A3550CE9C5}"/>
               </a:ext>
             </a:extLst>
           </p:cNvPr>
@@ -17053,7 +16665,7 @@
           <p:cNvPr id="2" name="">
             <a:extLst xmlns:a="http://schemas.openxmlformats.org/drawingml/2006/main">
               <a:ext uri="{FF2B5EF4-FFF2-40B4-BE49-F238E27FC236}">
-                <a16:creationId xmlns:a16="http://schemas.microsoft.com/office/drawing/2014/main" id="{80B2ACEA-45EA-4794-89C3-7C9F7CED9FF8}"/>
+                <a16:creationId xmlns:a16="http://schemas.microsoft.com/office/drawing/2014/main" id="{77943A0E-54A7-4BB8-945A-8090AEC7904C}"/>
               </a:ext>
             </a:extLst>
           </p:cNvPr>
@@ -17086,7 +16698,7 @@
           <p:cNvPr id="3" name="">
             <a:extLst xmlns:a="http://schemas.openxmlformats.org/drawingml/2006/main">
               <a:ext uri="{FF2B5EF4-FFF2-40B4-BE49-F238E27FC236}">
-                <a16:creationId xmlns:a16="http://schemas.microsoft.com/office/drawing/2014/main" id="{6214E7BE-B7F0-4C03-9CF7-1DB85CB708F0}"/>
+                <a16:creationId xmlns:a16="http://schemas.microsoft.com/office/drawing/2014/main" id="{CD82D4F7-2E8D-4E34-BD36-FB7864BE95D2}"/>
               </a:ext>
             </a:extLst>
           </p:cNvPr>
@@ -17119,7 +16731,7 @@
           <p:cNvPr id="4" name="">
             <a:extLst xmlns:a="http://schemas.openxmlformats.org/drawingml/2006/main">
               <a:ext uri="{FF2B5EF4-FFF2-40B4-BE49-F238E27FC236}">
-                <a16:creationId xmlns:a16="http://schemas.microsoft.com/office/drawing/2014/main" id="{89AAEE18-B091-49AF-8AAF-D9A62A76CCE3}"/>
+                <a16:creationId xmlns:a16="http://schemas.microsoft.com/office/drawing/2014/main" id="{4ABA81D3-BB52-4C12-8F55-02D00E2E259D}"/>
               </a:ext>
             </a:extLst>
           </p:cNvPr>
@@ -17183,7 +16795,7 @@
           <p:cNvPr id="5" name="">
             <a:extLst xmlns:a="http://schemas.openxmlformats.org/drawingml/2006/main">
               <a:ext uri="{FF2B5EF4-FFF2-40B4-BE49-F238E27FC236}">
-                <a16:creationId xmlns:a16="http://schemas.microsoft.com/office/drawing/2014/main" id="{C3A95B45-783E-47C7-9E50-0CDF8D5CCF0E}"/>
+                <a16:creationId xmlns:a16="http://schemas.microsoft.com/office/drawing/2014/main" id="{905B38AD-51CD-4735-9E3C-57DC3D9F6099}"/>
               </a:ext>
             </a:extLst>
           </p:cNvPr>
@@ -17247,7 +16859,7 @@
           <p:cNvPr id="6" name="">
             <a:extLst xmlns:a="http://schemas.openxmlformats.org/drawingml/2006/main">
               <a:ext uri="{FF2B5EF4-FFF2-40B4-BE49-F238E27FC236}">
-                <a16:creationId xmlns:a16="http://schemas.microsoft.com/office/drawing/2014/main" id="{91783F72-2C59-4995-BC90-A162BE1B0466}"/>
+                <a16:creationId xmlns:a16="http://schemas.microsoft.com/office/drawing/2014/main" id="{32A4A41D-7FFF-4838-ABBC-34CE714C924D}"/>
               </a:ext>
             </a:extLst>
           </p:cNvPr>
@@ -17311,7 +16923,7 @@
           <p:cNvPr id="7" name="">
             <a:extLst xmlns:a="http://schemas.openxmlformats.org/drawingml/2006/main">
               <a:ext uri="{FF2B5EF4-FFF2-40B4-BE49-F238E27FC236}">
-                <a16:creationId xmlns:a16="http://schemas.microsoft.com/office/drawing/2014/main" id="{95BD8E23-54D6-4EB2-8352-1FF4F5E1EC30}"/>
+                <a16:creationId xmlns:a16="http://schemas.microsoft.com/office/drawing/2014/main" id="{E76EC9B9-CBFF-4F60-B2C5-452FF6942F4E}"/>
               </a:ext>
             </a:extLst>
           </p:cNvPr>
@@ -17365,7 +16977,7 @@
                 <a:ea typeface="Aptos"/>
                 <a:cs typeface="Aptos"/>
               </a:rPr>
-              <a:t>люди, которые хотят персональный прогноз, мягкий ежедневный ритуал и видимый образ своей траектории без тяжелого трекера привычек.</a:t>
+              <a:t>люди, которые уже потребляют astrology/self-care/AI-companion контент, хотят персональный недельный прогноз и видимый образ своей траектории.</a:t>
             </a:r>
           </a:p>
         </p:txBody>
@@ -17375,7 +16987,7 @@
           <p:cNvPr id="8" name="">
             <a:extLst xmlns:a="http://schemas.openxmlformats.org/drawingml/2006/main">
               <a:ext uri="{FF2B5EF4-FFF2-40B4-BE49-F238E27FC236}">
-                <a16:creationId xmlns:a16="http://schemas.microsoft.com/office/drawing/2014/main" id="{DDFC9BA9-4B3A-4947-88F1-91E210F9178A}"/>
+                <a16:creationId xmlns:a16="http://schemas.microsoft.com/office/drawing/2014/main" id="{3DF923FC-3592-4DB4-A267-69033B27595E}"/>
               </a:ext>
             </a:extLst>
           </p:cNvPr>
@@ -17439,7 +17051,7 @@
           <p:cNvPr id="9" name="">
             <a:extLst xmlns:a="http://schemas.openxmlformats.org/drawingml/2006/main">
               <a:ext uri="{FF2B5EF4-FFF2-40B4-BE49-F238E27FC236}">
-                <a16:creationId xmlns:a16="http://schemas.microsoft.com/office/drawing/2014/main" id="{EA8EAB19-8A5D-47D0-BAEB-8AEDB49BC49B}"/>
+                <a16:creationId xmlns:a16="http://schemas.microsoft.com/office/drawing/2014/main" id="{49D2F1AE-8A62-4FEC-95D5-3BABE6A8E61B}"/>
               </a:ext>
             </a:extLst>
           </p:cNvPr>
@@ -17493,7 +17105,7 @@
                 <a:ea typeface="Aptos"/>
                 <a:cs typeface="Aptos"/>
               </a:rPr>
-              <a:t>астрология, self-care apps, AI companions, habit trackers, заметки, Telegram-каналы, ручные консультации и генераторы картинок.</a:t>
+              <a:t>Nebula/Co-Star, Calm/Headspace, Finch, Replika/Character.AI, habit trackers, дневники, Telegram-каналы, ручные консультации и AI image/video tools.</a:t>
             </a:r>
           </a:p>
         </p:txBody>
@@ -17503,7 +17115,7 @@
           <p:cNvPr id="10" name="">
             <a:extLst xmlns:a="http://schemas.openxmlformats.org/drawingml/2006/main">
               <a:ext uri="{FF2B5EF4-FFF2-40B4-BE49-F238E27FC236}">
-                <a16:creationId xmlns:a16="http://schemas.microsoft.com/office/drawing/2014/main" id="{F8C96861-24D4-479C-8B61-631017F484CE}"/>
+                <a16:creationId xmlns:a16="http://schemas.microsoft.com/office/drawing/2014/main" id="{39E44C42-FC05-4E21-9137-88C6BE1D15BD}"/>
               </a:ext>
             </a:extLst>
           </p:cNvPr>
@@ -17567,7 +17179,7 @@
           <p:cNvPr id="11" name="">
             <a:extLst xmlns:a="http://schemas.openxmlformats.org/drawingml/2006/main">
               <a:ext uri="{FF2B5EF4-FFF2-40B4-BE49-F238E27FC236}">
-                <a16:creationId xmlns:a16="http://schemas.microsoft.com/office/drawing/2014/main" id="{B3F7165A-8754-4745-A4D8-75F8586477AB}"/>
+                <a16:creationId xmlns:a16="http://schemas.microsoft.com/office/drawing/2014/main" id="{44698BBC-C385-4DBE-8F4A-73DA05946434}"/>
               </a:ext>
             </a:extLst>
           </p:cNvPr>
@@ -17621,7 +17233,7 @@
                 <a:ea typeface="Aptos"/>
                 <a:cs typeface="Aptos"/>
               </a:rPr>
-              <a:t>пользователь получает смысл отдельно, действие отдельно, визуальный образ отдельно. Из-за этого нет ощущения личного сериала и накопления изменений.</a:t>
+              <a:t>рынок дает фрагменты: смысл без действия, действие без личного смысла, avatar без причинности, прогноз без памяти и продолжения.</a:t>
             </a:r>
           </a:p>
         </p:txBody>
@@ -17631,7 +17243,7 @@
           <p:cNvPr id="12" name="">
             <a:extLst xmlns:a="http://schemas.openxmlformats.org/drawingml/2006/main">
               <a:ext uri="{FF2B5EF4-FFF2-40B4-BE49-F238E27FC236}">
-                <a16:creationId xmlns:a16="http://schemas.microsoft.com/office/drawing/2014/main" id="{FD83F5FF-587D-4009-8C4A-26B3AB691248}"/>
+                <a16:creationId xmlns:a16="http://schemas.microsoft.com/office/drawing/2014/main" id="{06504AAA-2777-47DB-B17F-100FB88001EA}"/>
               </a:ext>
             </a:extLst>
           </p:cNvPr>
@@ -17695,7 +17307,7 @@
           <p:cNvPr id="13" name="">
             <a:extLst xmlns:a="http://schemas.openxmlformats.org/drawingml/2006/main">
               <a:ext uri="{FF2B5EF4-FFF2-40B4-BE49-F238E27FC236}">
-                <a16:creationId xmlns:a16="http://schemas.microsoft.com/office/drawing/2014/main" id="{49E497A3-078F-4485-BB87-BA05609445CD}"/>
+                <a16:creationId xmlns:a16="http://schemas.microsoft.com/office/drawing/2014/main" id="{FD730504-3FD8-429C-B115-EFA3224B2F44}"/>
               </a:ext>
             </a:extLst>
           </p:cNvPr>
@@ -17749,7 +17361,7 @@
                 <a:ea typeface="Aptos"/>
                 <a:cs typeface="Aptos"/>
               </a:rPr>
-              <a:t>AURA превращает дату рождения и текущий запрос в недельный прогноз, daily episode, маленькое действие, reset и avatar / Life Canvas, который меняется по ходу недели.</a:t>
+              <a:t>AURA собирает weekly life-series: дата рождения и запрос → прогноз недели → daily episode → действие/reset → avatar/Life Canvas → продолжение завтра.</a:t>
             </a:r>
           </a:p>
         </p:txBody>
@@ -17759,7 +17371,7 @@
           <p:cNvPr id="14" name="">
             <a:extLst xmlns:a="http://schemas.openxmlformats.org/drawingml/2006/main">
               <a:ext uri="{FF2B5EF4-FFF2-40B4-BE49-F238E27FC236}">
-                <a16:creationId xmlns:a16="http://schemas.microsoft.com/office/drawing/2014/main" id="{38413711-1E69-42F9-A9CD-A8DA9854194E}"/>
+                <a16:creationId xmlns:a16="http://schemas.microsoft.com/office/drawing/2014/main" id="{6164B73B-6338-4291-921C-272FDEB0B4E4}"/>
               </a:ext>
             </a:extLst>
           </p:cNvPr>
@@ -17823,7 +17435,7 @@
           <p:cNvPr id="15" name="">
             <a:extLst xmlns:a="http://schemas.openxmlformats.org/drawingml/2006/main">
               <a:ext uri="{FF2B5EF4-FFF2-40B4-BE49-F238E27FC236}">
-                <a16:creationId xmlns:a16="http://schemas.microsoft.com/office/drawing/2014/main" id="{A078D6C3-5A76-444D-AAED-6B27035C2C4A}"/>
+                <a16:creationId xmlns:a16="http://schemas.microsoft.com/office/drawing/2014/main" id="{5FDB3628-988D-4BFB-B2EE-E43781E0E538}"/>
               </a:ext>
             </a:extLst>
           </p:cNvPr>
@@ -17877,7 +17489,7 @@
                 <a:ea typeface="Aptos"/>
                 <a:cs typeface="Aptos"/>
               </a:rPr>
-              <a:t>пользователь вводит дату рождения, выбирает состояние и стиль помощника; система собирает недельный сценарий, daily prompts, визуальные аватары и premium video moments.</a:t>
+              <a:t>пользователь выбирает контекст и помощника, получает недельный сценарий, каждый день проходит короткий loop, а дорогие AI-video moments открываются как premium.</a:t>
             </a:r>
           </a:p>
         </p:txBody>
@@ -17887,7 +17499,7 @@
           <p:cNvPr id="16" name="">
             <a:extLst xmlns:a="http://schemas.openxmlformats.org/drawingml/2006/main">
               <a:ext uri="{FF2B5EF4-FFF2-40B4-BE49-F238E27FC236}">
-                <a16:creationId xmlns:a16="http://schemas.microsoft.com/office/drawing/2014/main" id="{BF8D8BA7-8B8C-4CF9-A31C-8D916934A4C0}"/>
+                <a16:creationId xmlns:a16="http://schemas.microsoft.com/office/drawing/2014/main" id="{3D192696-FE65-435A-8C45-244447B145C1}"/>
               </a:ext>
             </a:extLst>
           </p:cNvPr>
@@ -17951,7 +17563,7 @@
           <p:cNvPr id="17" name="">
             <a:extLst xmlns:a="http://schemas.openxmlformats.org/drawingml/2006/main">
               <a:ext uri="{FF2B5EF4-FFF2-40B4-BE49-F238E27FC236}">
-                <a16:creationId xmlns:a16="http://schemas.microsoft.com/office/drawing/2014/main" id="{0D56D26C-3983-4618-A05F-EB740F40E2B2}"/>
+                <a16:creationId xmlns:a16="http://schemas.microsoft.com/office/drawing/2014/main" id="{3CF30E25-D915-4D10-B793-C0645450E5A4}"/>
               </a:ext>
             </a:extLst>
           </p:cNvPr>
@@ -18005,7 +17617,7 @@
                 <a:ea typeface="Aptos"/>
                 <a:cs typeface="Aptos"/>
               </a:rPr>
-              <a:t>AURA продает не “гороскоп” и не “AI-картинку”, а карманного прогнозиста и визуальный сериал о своей жизни.</a:t>
+              <a:t>это не horoscope app и не avatar generator, а карманный прогнозист и визуальный сериал о собственной жизни.</a:t>
             </a:r>
           </a:p>
         </p:txBody>
@@ -18015,7 +17627,7 @@
           <p:cNvPr id="18" name="">
             <a:extLst xmlns:a="http://schemas.openxmlformats.org/drawingml/2006/main">
               <a:ext uri="{FF2B5EF4-FFF2-40B4-BE49-F238E27FC236}">
-                <a16:creationId xmlns:a16="http://schemas.microsoft.com/office/drawing/2014/main" id="{098A91B4-9261-4447-875B-6C453C51DE3F}"/>
+                <a16:creationId xmlns:a16="http://schemas.microsoft.com/office/drawing/2014/main" id="{963E2E5F-403D-4FFF-A1FD-35848C87FEF1}"/>
               </a:ext>
             </a:extLst>
           </p:cNvPr>
@@ -18077,7 +17689,7 @@
     </p:spTree>
     <p:extLst>
       <p:ext uri="{BB962C8B-B14F-4D97-AF65-F5344CB8AC3E}">
-        <p14:creationId xmlns:p14="http://schemas.microsoft.com/office/powerpoint/2010/main" val="918774076"/>
+        <p14:creationId xmlns:p14="http://schemas.microsoft.com/office/powerpoint/2010/main" val="1806747124"/>
       </p:ext>
     </p:extLst>
   </p:cSld>
@@ -18101,7 +17713,7 @@
           <p:cNvPr id="1" name="">
             <a:extLst xmlns:a="http://schemas.openxmlformats.org/drawingml/2006/main">
               <a:ext uri="{FF2B5EF4-FFF2-40B4-BE49-F238E27FC236}">
-                <a16:creationId xmlns:a16="http://schemas.microsoft.com/office/drawing/2014/main" id="{F1BE6A6F-4474-4A2B-80A2-EE2692AD757D}"/>
+                <a16:creationId xmlns:a16="http://schemas.microsoft.com/office/drawing/2014/main" id="{6BF6CFC8-4BF0-4F80-9A27-B3BE731DD48E}"/>
               </a:ext>
             </a:extLst>
           </p:cNvPr>
@@ -18134,7 +17746,7 @@
           <p:cNvPr id="2" name="">
             <a:extLst xmlns:a="http://schemas.openxmlformats.org/drawingml/2006/main">
               <a:ext uri="{FF2B5EF4-FFF2-40B4-BE49-F238E27FC236}">
-                <a16:creationId xmlns:a16="http://schemas.microsoft.com/office/drawing/2014/main" id="{D8910DAD-44B6-405C-89F4-A1774B74740E}"/>
+                <a16:creationId xmlns:a16="http://schemas.microsoft.com/office/drawing/2014/main" id="{A5283D7A-8477-4B76-988E-1AD9A837B327}"/>
               </a:ext>
             </a:extLst>
           </p:cNvPr>
@@ -18167,7 +17779,7 @@
           <p:cNvPr id="3" name="">
             <a:extLst xmlns:a="http://schemas.openxmlformats.org/drawingml/2006/main">
               <a:ext uri="{FF2B5EF4-FFF2-40B4-BE49-F238E27FC236}">
-                <a16:creationId xmlns:a16="http://schemas.microsoft.com/office/drawing/2014/main" id="{E1CE2FBD-D97A-4C88-840E-87595D8487EC}"/>
+                <a16:creationId xmlns:a16="http://schemas.microsoft.com/office/drawing/2014/main" id="{53CB8D98-7012-4AC1-8F41-B4D2AF82EF4E}"/>
               </a:ext>
             </a:extLst>
           </p:cNvPr>
@@ -18200,7 +17812,7 @@
           <p:cNvPr id="4" name="">
             <a:extLst xmlns:a="http://schemas.openxmlformats.org/drawingml/2006/main">
               <a:ext uri="{FF2B5EF4-FFF2-40B4-BE49-F238E27FC236}">
-                <a16:creationId xmlns:a16="http://schemas.microsoft.com/office/drawing/2014/main" id="{13049369-BBC5-4BC1-97E8-BC02D86A7EB5}"/>
+                <a16:creationId xmlns:a16="http://schemas.microsoft.com/office/drawing/2014/main" id="{9AB6737E-7417-48F1-8ABE-68564B815119}"/>
               </a:ext>
             </a:extLst>
           </p:cNvPr>
@@ -18264,7 +17876,7 @@
           <p:cNvPr id="5" name="">
             <a:extLst xmlns:a="http://schemas.openxmlformats.org/drawingml/2006/main">
               <a:ext uri="{FF2B5EF4-FFF2-40B4-BE49-F238E27FC236}">
-                <a16:creationId xmlns:a16="http://schemas.microsoft.com/office/drawing/2014/main" id="{6D04E612-6B25-432A-AE3C-DEAEE409AE57}"/>
+                <a16:creationId xmlns:a16="http://schemas.microsoft.com/office/drawing/2014/main" id="{8608400A-A994-425D-B8CB-9110103BBF80}"/>
               </a:ext>
             </a:extLst>
           </p:cNvPr>
@@ -18328,7 +17940,7 @@
           <p:cNvPr id="6" name="">
             <a:extLst xmlns:a="http://schemas.openxmlformats.org/drawingml/2006/main">
               <a:ext uri="{FF2B5EF4-FFF2-40B4-BE49-F238E27FC236}">
-                <a16:creationId xmlns:a16="http://schemas.microsoft.com/office/drawing/2014/main" id="{CCC89277-C6E1-4858-8936-5D1F63F4EBDC}"/>
+                <a16:creationId xmlns:a16="http://schemas.microsoft.com/office/drawing/2014/main" id="{45531399-6C68-49A7-9646-38D889CA26F6}"/>
               </a:ext>
             </a:extLst>
           </p:cNvPr>
@@ -18382,7 +17994,7 @@
                 <a:ea typeface="Aptos"/>
                 <a:cs typeface="Aptos"/>
               </a:rPr>
-              <a:t>Пользователь приходит не за приложением</a:t>
+              <a:t>Что человек уже пытается получить</a:t>
             </a:r>
           </a:p>
         </p:txBody>
@@ -18392,7 +18004,7 @@
           <p:cNvPr id="7" name="">
             <a:extLst xmlns:a="http://schemas.openxmlformats.org/drawingml/2006/main">
               <a:ext uri="{FF2B5EF4-FFF2-40B4-BE49-F238E27FC236}">
-                <a16:creationId xmlns:a16="http://schemas.microsoft.com/office/drawing/2014/main" id="{CB4D376D-11BC-45B6-ADF1-3D94602DEEE3}"/>
+                <a16:creationId xmlns:a16="http://schemas.microsoft.com/office/drawing/2014/main" id="{E24D27E7-B9B3-4E49-9050-96B55141B410}"/>
               </a:ext>
             </a:extLst>
           </p:cNvPr>
@@ -18456,7 +18068,7 @@
           <p:cNvPr id="8" name="">
             <a:extLst xmlns:a="http://schemas.openxmlformats.org/drawingml/2006/main">
               <a:ext uri="{FF2B5EF4-FFF2-40B4-BE49-F238E27FC236}">
-                <a16:creationId xmlns:a16="http://schemas.microsoft.com/office/drawing/2014/main" id="{EDBD5382-3030-4C92-9D01-67678CABC32E}"/>
+                <a16:creationId xmlns:a16="http://schemas.microsoft.com/office/drawing/2014/main" id="{E7D12AA2-BD7E-4739-B0FF-B2A4D320EA94}"/>
               </a:ext>
             </a:extLst>
           </p:cNvPr>
@@ -18510,7 +18122,7 @@
                 <a:ea typeface="Aptos"/>
                 <a:cs typeface="Aptos"/>
               </a:rPr>
-              <a:t>Хочет понять, что с ним происходит сейчас.</a:t>
+              <a:t>Личный смысл: “что со мной сейчас происходит?”</a:t>
             </a:r>
           </a:p>
         </p:txBody>
@@ -18520,7 +18132,7 @@
           <p:cNvPr id="9" name="">
             <a:extLst xmlns:a="http://schemas.openxmlformats.org/drawingml/2006/main">
               <a:ext uri="{FF2B5EF4-FFF2-40B4-BE49-F238E27FC236}">
-                <a16:creationId xmlns:a16="http://schemas.microsoft.com/office/drawing/2014/main" id="{17547031-F99A-4648-B7DF-0BBADA17786D}"/>
+                <a16:creationId xmlns:a16="http://schemas.microsoft.com/office/drawing/2014/main" id="{B2EF7EC0-C7D5-4B89-A945-EBBEA8FA9354}"/>
               </a:ext>
             </a:extLst>
           </p:cNvPr>
@@ -18584,7 +18196,7 @@
           <p:cNvPr id="10" name="">
             <a:extLst xmlns:a="http://schemas.openxmlformats.org/drawingml/2006/main">
               <a:ext uri="{FF2B5EF4-FFF2-40B4-BE49-F238E27FC236}">
-                <a16:creationId xmlns:a16="http://schemas.microsoft.com/office/drawing/2014/main" id="{576BF28C-4F63-4205-A618-4687ABB55235}"/>
+                <a16:creationId xmlns:a16="http://schemas.microsoft.com/office/drawing/2014/main" id="{1D06C172-8172-4CF4-BFDD-0EA6231215C8}"/>
               </a:ext>
             </a:extLst>
           </p:cNvPr>
@@ -18638,7 +18250,7 @@
                 <a:ea typeface="Aptos"/>
                 <a:cs typeface="Aptos"/>
               </a:rPr>
-              <a:t>Хочет прогноз на неделю, но без жесткой фатальности.</a:t>
+              <a:t>Прогноз на неделю без жесткого фатализма.</a:t>
             </a:r>
           </a:p>
         </p:txBody>
@@ -18648,7 +18260,7 @@
           <p:cNvPr id="11" name="">
             <a:extLst xmlns:a="http://schemas.openxmlformats.org/drawingml/2006/main">
               <a:ext uri="{FF2B5EF4-FFF2-40B4-BE49-F238E27FC236}">
-                <a16:creationId xmlns:a16="http://schemas.microsoft.com/office/drawing/2014/main" id="{F1D4626B-A8FD-4463-B657-6DE3A2F6619B}"/>
+                <a16:creationId xmlns:a16="http://schemas.microsoft.com/office/drawing/2014/main" id="{874CB285-40AB-4D90-B476-47458143D9F1}"/>
               </a:ext>
             </a:extLst>
           </p:cNvPr>
@@ -18712,7 +18324,7 @@
           <p:cNvPr id="12" name="">
             <a:extLst xmlns:a="http://schemas.openxmlformats.org/drawingml/2006/main">
               <a:ext uri="{FF2B5EF4-FFF2-40B4-BE49-F238E27FC236}">
-                <a16:creationId xmlns:a16="http://schemas.microsoft.com/office/drawing/2014/main" id="{31FAA66C-33AE-4AF0-B1C8-D7C9D2D983D1}"/>
+                <a16:creationId xmlns:a16="http://schemas.microsoft.com/office/drawing/2014/main" id="{38B718B4-191E-4910-B295-A7DB397559DE}"/>
               </a:ext>
             </a:extLst>
           </p:cNvPr>
@@ -18766,7 +18378,7 @@
                 <a:ea typeface="Aptos"/>
                 <a:cs typeface="Aptos"/>
               </a:rPr>
-              <a:t>Хочет красивую визуализацию себя и своего периода.</a:t>
+              <a:t>Красивую future-self / avatar визуализацию.</a:t>
             </a:r>
           </a:p>
         </p:txBody>
@@ -18776,7 +18388,7 @@
           <p:cNvPr id="13" name="">
             <a:extLst xmlns:a="http://schemas.openxmlformats.org/drawingml/2006/main">
               <a:ext uri="{FF2B5EF4-FFF2-40B4-BE49-F238E27FC236}">
-                <a16:creationId xmlns:a16="http://schemas.microsoft.com/office/drawing/2014/main" id="{598166AD-6ED1-41ED-B27D-29DE558EBB6A}"/>
+                <a16:creationId xmlns:a16="http://schemas.microsoft.com/office/drawing/2014/main" id="{7FC53D37-F07A-4DA8-930B-831BC300DF79}"/>
               </a:ext>
             </a:extLst>
           </p:cNvPr>
@@ -18840,7 +18452,7 @@
           <p:cNvPr id="14" name="">
             <a:extLst xmlns:a="http://schemas.openxmlformats.org/drawingml/2006/main">
               <a:ext uri="{FF2B5EF4-FFF2-40B4-BE49-F238E27FC236}">
-                <a16:creationId xmlns:a16="http://schemas.microsoft.com/office/drawing/2014/main" id="{2C4009BD-7AB4-4D5D-8868-0EF0EB6BD888}"/>
+                <a16:creationId xmlns:a16="http://schemas.microsoft.com/office/drawing/2014/main" id="{3B31670E-68F9-4D96-995A-EE0A7F5EC75B}"/>
               </a:ext>
             </a:extLst>
           </p:cNvPr>
@@ -18894,7 +18506,7 @@
                 <a:ea typeface="Aptos"/>
                 <a:cs typeface="Aptos"/>
               </a:rPr>
-              <a:t>Не хочет еще один сухой список задач.</a:t>
+              <a:t>Мягкое действие, а не сухой productivity checklist.</a:t>
             </a:r>
           </a:p>
         </p:txBody>
@@ -18904,7 +18516,7 @@
           <p:cNvPr id="15" name="">
             <a:extLst xmlns:a="http://schemas.openxmlformats.org/drawingml/2006/main">
               <a:ext uri="{FF2B5EF4-FFF2-40B4-BE49-F238E27FC236}">
-                <a16:creationId xmlns:a16="http://schemas.microsoft.com/office/drawing/2014/main" id="{57A5B665-E192-4368-96FF-D5EB48169EBC}"/>
+                <a16:creationId xmlns:a16="http://schemas.microsoft.com/office/drawing/2014/main" id="{E040E7E5-2380-4A7C-9BDC-0F0C311ACF59}"/>
               </a:ext>
             </a:extLst>
           </p:cNvPr>
@@ -18958,7 +18570,7 @@
                 <a:ea typeface="Aptos"/>
                 <a:cs typeface="Aptos"/>
               </a:rPr>
-              <a:t>AURA превращает это в продукт</a:t>
+              <a:t>Как это становится AURA</a:t>
             </a:r>
           </a:p>
         </p:txBody>
@@ -18968,7 +18580,7 @@
           <p:cNvPr id="16" name="">
             <a:extLst xmlns:a="http://schemas.openxmlformats.org/drawingml/2006/main">
               <a:ext uri="{FF2B5EF4-FFF2-40B4-BE49-F238E27FC236}">
-                <a16:creationId xmlns:a16="http://schemas.microsoft.com/office/drawing/2014/main" id="{E40BCCC4-ABE6-4D21-A2B0-9FA5990424B0}"/>
+                <a16:creationId xmlns:a16="http://schemas.microsoft.com/office/drawing/2014/main" id="{12D9E77F-C9E6-4C9D-A58F-41A0C5F861D3}"/>
               </a:ext>
             </a:extLst>
           </p:cNvPr>
@@ -19032,7 +18644,7 @@
           <p:cNvPr id="17" name="">
             <a:extLst xmlns:a="http://schemas.openxmlformats.org/drawingml/2006/main">
               <a:ext uri="{FF2B5EF4-FFF2-40B4-BE49-F238E27FC236}">
-                <a16:creationId xmlns:a16="http://schemas.microsoft.com/office/drawing/2014/main" id="{06F29A9A-0A31-4F16-9841-FE35C8DB33F6}"/>
+                <a16:creationId xmlns:a16="http://schemas.microsoft.com/office/drawing/2014/main" id="{E8DC8CCD-9B44-4533-BC58-2A9088593DA2}"/>
               </a:ext>
             </a:extLst>
           </p:cNvPr>
@@ -19086,7 +18698,7 @@
                 <a:ea typeface="Aptos"/>
                 <a:cs typeface="Aptos"/>
               </a:rPr>
-              <a:t>Недельный прогноз как season.</a:t>
+              <a:t>Week forecast становится season arc.</a:t>
             </a:r>
           </a:p>
         </p:txBody>
@@ -19096,7 +18708,7 @@
           <p:cNvPr id="18" name="">
             <a:extLst xmlns:a="http://schemas.openxmlformats.org/drawingml/2006/main">
               <a:ext uri="{FF2B5EF4-FFF2-40B4-BE49-F238E27FC236}">
-                <a16:creationId xmlns:a16="http://schemas.microsoft.com/office/drawing/2014/main" id="{A8E7EB0B-153F-442D-AA71-D57D00CF3850}"/>
+                <a16:creationId xmlns:a16="http://schemas.microsoft.com/office/drawing/2014/main" id="{1DBC45A1-5A69-427C-93F2-DF809CCA1581}"/>
               </a:ext>
             </a:extLst>
           </p:cNvPr>
@@ -19160,7 +18772,7 @@
           <p:cNvPr id="19" name="">
             <a:extLst xmlns:a="http://schemas.openxmlformats.org/drawingml/2006/main">
               <a:ext uri="{FF2B5EF4-FFF2-40B4-BE49-F238E27FC236}">
-                <a16:creationId xmlns:a16="http://schemas.microsoft.com/office/drawing/2014/main" id="{6530E4AE-E176-4AB1-8A0E-8364113DFE6E}"/>
+                <a16:creationId xmlns:a16="http://schemas.microsoft.com/office/drawing/2014/main" id="{A88FDB8B-77EB-4AD4-B5D1-8A8DB3E7D3E8}"/>
               </a:ext>
             </a:extLst>
           </p:cNvPr>
@@ -19214,7 +18826,7 @@
                 <a:ea typeface="Aptos"/>
                 <a:cs typeface="Aptos"/>
               </a:rPr>
-              <a:t>Daily episode и маленькое действие.</a:t>
+              <a:t>Daily episode переводит прогноз в сегодняшний фокус.</a:t>
             </a:r>
           </a:p>
         </p:txBody>
@@ -19224,7 +18836,7 @@
           <p:cNvPr id="20" name="">
             <a:extLst xmlns:a="http://schemas.openxmlformats.org/drawingml/2006/main">
               <a:ext uri="{FF2B5EF4-FFF2-40B4-BE49-F238E27FC236}">
-                <a16:creationId xmlns:a16="http://schemas.microsoft.com/office/drawing/2014/main" id="{3DD9FC41-105F-4847-83F9-C4513F3BEF0C}"/>
+                <a16:creationId xmlns:a16="http://schemas.microsoft.com/office/drawing/2014/main" id="{06E90F7B-4515-42B2-8327-09D287323619}"/>
               </a:ext>
             </a:extLst>
           </p:cNvPr>
@@ -19288,7 +18900,7 @@
           <p:cNvPr id="21" name="">
             <a:extLst xmlns:a="http://schemas.openxmlformats.org/drawingml/2006/main">
               <a:ext uri="{FF2B5EF4-FFF2-40B4-BE49-F238E27FC236}">
-                <a16:creationId xmlns:a16="http://schemas.microsoft.com/office/drawing/2014/main" id="{946C97B9-D4F0-4392-A20F-536201691D92}"/>
+                <a16:creationId xmlns:a16="http://schemas.microsoft.com/office/drawing/2014/main" id="{05772F02-A9F4-4B3F-A84D-0DAE06B611B3}"/>
               </a:ext>
             </a:extLst>
           </p:cNvPr>
@@ -19342,7 +18954,7 @@
                 <a:ea typeface="Aptos"/>
                 <a:cs typeface="Aptos"/>
               </a:rPr>
-              <a:t>Настраиваемый AI-помощник / avatar.</a:t>
+              <a:t>AI-помощник говорит с пользователем в выбранном тоне.</a:t>
             </a:r>
           </a:p>
         </p:txBody>
@@ -19352,7 +18964,7 @@
           <p:cNvPr id="22" name="">
             <a:extLst xmlns:a="http://schemas.openxmlformats.org/drawingml/2006/main">
               <a:ext uri="{FF2B5EF4-FFF2-40B4-BE49-F238E27FC236}">
-                <a16:creationId xmlns:a16="http://schemas.microsoft.com/office/drawing/2014/main" id="{9B4D1E98-CB77-42A0-AF4B-CD984B88B050}"/>
+                <a16:creationId xmlns:a16="http://schemas.microsoft.com/office/drawing/2014/main" id="{A7609BAF-3A43-4068-92B8-C6A65505D500}"/>
               </a:ext>
             </a:extLst>
           </p:cNvPr>
@@ -19416,7 +19028,7 @@
           <p:cNvPr id="23" name="">
             <a:extLst xmlns:a="http://schemas.openxmlformats.org/drawingml/2006/main">
               <a:ext uri="{FF2B5EF4-FFF2-40B4-BE49-F238E27FC236}">
-                <a16:creationId xmlns:a16="http://schemas.microsoft.com/office/drawing/2014/main" id="{1BC6D406-5C32-4E8F-BED3-247ADFD2878F}"/>
+                <a16:creationId xmlns:a16="http://schemas.microsoft.com/office/drawing/2014/main" id="{C88B081F-2E22-4AD3-ADA8-3CEC884E70D4}"/>
               </a:ext>
             </a:extLst>
           </p:cNvPr>
@@ -19470,7 +19082,7 @@
                 <a:ea typeface="Aptos"/>
                 <a:cs typeface="Aptos"/>
               </a:rPr>
-              <a:t>Life Canvas, который объясняет визуальные изменения.</a:t>
+              <a:t>Life Canvas показывает, что именно изменилось.</a:t>
             </a:r>
           </a:p>
         </p:txBody>
@@ -19480,7 +19092,7 @@
           <p:cNvPr id="24" name="">
             <a:extLst xmlns:a="http://schemas.openxmlformats.org/drawingml/2006/main">
               <a:ext uri="{FF2B5EF4-FFF2-40B4-BE49-F238E27FC236}">
-                <a16:creationId xmlns:a16="http://schemas.microsoft.com/office/drawing/2014/main" id="{566E9262-BEB7-45F2-8AF0-2A4CED6235F4}"/>
+                <a16:creationId xmlns:a16="http://schemas.microsoft.com/office/drawing/2014/main" id="{619D77C0-62E5-41B2-9211-FB0C6F61D909}"/>
               </a:ext>
             </a:extLst>
           </p:cNvPr>
@@ -19544,7 +19156,7 @@
           <p:cNvPr id="25" name="">
             <a:extLst xmlns:a="http://schemas.openxmlformats.org/drawingml/2006/main">
               <a:ext uri="{FF2B5EF4-FFF2-40B4-BE49-F238E27FC236}">
-                <a16:creationId xmlns:a16="http://schemas.microsoft.com/office/drawing/2014/main" id="{28276323-05F1-4F03-906A-ECD4912C1577}"/>
+                <a16:creationId xmlns:a16="http://schemas.microsoft.com/office/drawing/2014/main" id="{D48444FB-CDB4-4B9B-9DE6-0AFCE88F7CED}"/>
               </a:ext>
             </a:extLst>
           </p:cNvPr>
@@ -19598,7 +19210,7 @@
                 <a:ea typeface="Aptos"/>
                 <a:cs typeface="Aptos"/>
               </a:rPr>
-              <a:t>Premium video как дорогой wow-момент, а не бесплатная ежедневная норма.</a:t>
+              <a:t>Premium video продается как special episode, trailer или token moment.</a:t>
             </a:r>
           </a:p>
         </p:txBody>
@@ -19608,7 +19220,7 @@
           <p:cNvPr id="26" name="">
             <a:extLst xmlns:a="http://schemas.openxmlformats.org/drawingml/2006/main">
               <a:ext uri="{FF2B5EF4-FFF2-40B4-BE49-F238E27FC236}">
-                <a16:creationId xmlns:a16="http://schemas.microsoft.com/office/drawing/2014/main" id="{7037BC03-7DD4-478E-8A40-AC8B12E37465}"/>
+                <a16:creationId xmlns:a16="http://schemas.microsoft.com/office/drawing/2014/main" id="{DAB3394A-EFFC-46D2-8742-43ECDB7A0469}"/>
               </a:ext>
             </a:extLst>
           </p:cNvPr>
@@ -19641,7 +19253,7 @@
           <p:cNvPr id="27" name="">
             <a:extLst xmlns:a="http://schemas.openxmlformats.org/drawingml/2006/main">
               <a:ext uri="{FF2B5EF4-FFF2-40B4-BE49-F238E27FC236}">
-                <a16:creationId xmlns:a16="http://schemas.microsoft.com/office/drawing/2014/main" id="{70E18FDC-DC08-47C2-B0BB-159FA10162D5}"/>
+                <a16:creationId xmlns:a16="http://schemas.microsoft.com/office/drawing/2014/main" id="{86DD1178-35E7-41E4-A2E5-8F1ADE90C481}"/>
               </a:ext>
             </a:extLst>
           </p:cNvPr>
@@ -19703,7 +19315,7 @@
     </p:spTree>
     <p:extLst>
       <p:ext uri="{BB962C8B-B14F-4D97-AF65-F5344CB8AC3E}">
-        <p14:creationId xmlns:p14="http://schemas.microsoft.com/office/powerpoint/2010/main" val="1331919864"/>
+        <p14:creationId xmlns:p14="http://schemas.microsoft.com/office/powerpoint/2010/main" val="1656998952"/>
       </p:ext>
     </p:extLst>
   </p:cSld>
@@ -19727,7 +19339,7 @@
           <p:cNvPr id="1" name="">
             <a:extLst xmlns:a="http://schemas.openxmlformats.org/drawingml/2006/main">
               <a:ext uri="{FF2B5EF4-FFF2-40B4-BE49-F238E27FC236}">
-                <a16:creationId xmlns:a16="http://schemas.microsoft.com/office/drawing/2014/main" id="{0BEA5C2D-A5E7-4D68-88A8-E40E9B470A79}"/>
+                <a16:creationId xmlns:a16="http://schemas.microsoft.com/office/drawing/2014/main" id="{E074BB7A-AC1A-47B6-85BE-24A8D41FC23D}"/>
               </a:ext>
             </a:extLst>
           </p:cNvPr>
@@ -19760,7 +19372,7 @@
           <p:cNvPr id="2" name="">
             <a:extLst xmlns:a="http://schemas.openxmlformats.org/drawingml/2006/main">
               <a:ext uri="{FF2B5EF4-FFF2-40B4-BE49-F238E27FC236}">
-                <a16:creationId xmlns:a16="http://schemas.microsoft.com/office/drawing/2014/main" id="{BACF53B2-EEB4-4CE3-BD79-8153D83038FF}"/>
+                <a16:creationId xmlns:a16="http://schemas.microsoft.com/office/drawing/2014/main" id="{27849BD9-BC0E-40BA-A698-423F5F43C7FC}"/>
               </a:ext>
             </a:extLst>
           </p:cNvPr>
@@ -19793,7 +19405,7 @@
           <p:cNvPr id="3" name="">
             <a:extLst xmlns:a="http://schemas.openxmlformats.org/drawingml/2006/main">
               <a:ext uri="{FF2B5EF4-FFF2-40B4-BE49-F238E27FC236}">
-                <a16:creationId xmlns:a16="http://schemas.microsoft.com/office/drawing/2014/main" id="{4CF95DC8-FC21-47EE-9340-51B9E7040C68}"/>
+                <a16:creationId xmlns:a16="http://schemas.microsoft.com/office/drawing/2014/main" id="{96B16A30-4DE5-4210-AB78-601DF309F3DD}"/>
               </a:ext>
             </a:extLst>
           </p:cNvPr>
@@ -19826,7 +19438,7 @@
           <p:cNvPr id="4" name="">
             <a:extLst xmlns:a="http://schemas.openxmlformats.org/drawingml/2006/main">
               <a:ext uri="{FF2B5EF4-FFF2-40B4-BE49-F238E27FC236}">
-                <a16:creationId xmlns:a16="http://schemas.microsoft.com/office/drawing/2014/main" id="{6FCEFF45-3AA0-471E-9072-EFB0DB4D86B7}"/>
+                <a16:creationId xmlns:a16="http://schemas.microsoft.com/office/drawing/2014/main" id="{56099D9D-5433-4612-B4D9-8C3521A70F36}"/>
               </a:ext>
             </a:extLst>
           </p:cNvPr>
@@ -19890,7 +19502,7 @@
           <p:cNvPr id="5" name="">
             <a:extLst xmlns:a="http://schemas.openxmlformats.org/drawingml/2006/main">
               <a:ext uri="{FF2B5EF4-FFF2-40B4-BE49-F238E27FC236}">
-                <a16:creationId xmlns:a16="http://schemas.microsoft.com/office/drawing/2014/main" id="{CBEFA74D-4DEA-4744-9C64-3EF914E9807F}"/>
+                <a16:creationId xmlns:a16="http://schemas.microsoft.com/office/drawing/2014/main" id="{16BA9382-3E34-46A6-B0F7-8AD5DDAA6AA3}"/>
               </a:ext>
             </a:extLst>
           </p:cNvPr>
@@ -19954,7 +19566,7 @@
           <p:cNvPr id="6" name="">
             <a:extLst xmlns:a="http://schemas.openxmlformats.org/drawingml/2006/main">
               <a:ext uri="{FF2B5EF4-FFF2-40B4-BE49-F238E27FC236}">
-                <a16:creationId xmlns:a16="http://schemas.microsoft.com/office/drawing/2014/main" id="{6C97389A-B57B-4B75-B033-85F6BDCF6AD6}"/>
+                <a16:creationId xmlns:a16="http://schemas.microsoft.com/office/drawing/2014/main" id="{72C2C546-38D1-4E4F-A22A-8FC07A25EC78}"/>
               </a:ext>
             </a:extLst>
           </p:cNvPr>
@@ -19987,7 +19599,7 @@
           <p:cNvPr id="7" name="">
             <a:extLst xmlns:a="http://schemas.openxmlformats.org/drawingml/2006/main">
               <a:ext uri="{FF2B5EF4-FFF2-40B4-BE49-F238E27FC236}">
-                <a16:creationId xmlns:a16="http://schemas.microsoft.com/office/drawing/2014/main" id="{E3151C44-BF4C-4809-82B8-D68E8A20E95F}"/>
+                <a16:creationId xmlns:a16="http://schemas.microsoft.com/office/drawing/2014/main" id="{EDB00A6C-B1E8-4DE6-96EB-8BEC4A4C6987}"/>
               </a:ext>
             </a:extLst>
           </p:cNvPr>
@@ -20051,7 +19663,7 @@
           <p:cNvPr id="8" name="">
             <a:extLst xmlns:a="http://schemas.openxmlformats.org/drawingml/2006/main">
               <a:ext uri="{FF2B5EF4-FFF2-40B4-BE49-F238E27FC236}">
-                <a16:creationId xmlns:a16="http://schemas.microsoft.com/office/drawing/2014/main" id="{E924B7A5-0D1C-461C-9762-9C9E665B8A6A}"/>
+                <a16:creationId xmlns:a16="http://schemas.microsoft.com/office/drawing/2014/main" id="{9FF1C8AF-D3AB-45A1-9595-127237A2C3F8}"/>
               </a:ext>
             </a:extLst>
           </p:cNvPr>
@@ -20105,7 +19717,7 @@
                 <a:ea typeface="Aptos"/>
                 <a:cs typeface="Aptos"/>
               </a:rPr>
-              <a:t>1B+</a:t>
+              <a:t>mobile consumer apps</a:t>
             </a:r>
           </a:p>
         </p:txBody>
@@ -20115,7 +19727,7 @@
           <p:cNvPr id="9" name="">
             <a:extLst xmlns:a="http://schemas.openxmlformats.org/drawingml/2006/main">
               <a:ext uri="{FF2B5EF4-FFF2-40B4-BE49-F238E27FC236}">
-                <a16:creationId xmlns:a16="http://schemas.microsoft.com/office/drawing/2014/main" id="{AA9FBC3C-9D43-4787-909E-27B4D92FA7FC}"/>
+                <a16:creationId xmlns:a16="http://schemas.microsoft.com/office/drawing/2014/main" id="{BA22D307-876C-4C74-B55E-77373086E9D7}"/>
               </a:ext>
             </a:extLst>
           </p:cNvPr>
@@ -20169,7 +19781,7 @@
                 <a:ea typeface="Aptos"/>
                 <a:cs typeface="Aptos"/>
               </a:rPr>
-              <a:t>mobile users interested in wellness, spirituality, AI entertainment and self-improvement globally.</a:t>
+              <a:t>AURA конкурирует за привычку открыть приложение, пройти короткую сессию и вернуться завтра.</a:t>
             </a:r>
           </a:p>
         </p:txBody>
@@ -20179,7 +19791,7 @@
           <p:cNvPr id="10" name="">
             <a:extLst xmlns:a="http://schemas.openxmlformats.org/drawingml/2006/main">
               <a:ext uri="{FF2B5EF4-FFF2-40B4-BE49-F238E27FC236}">
-                <a16:creationId xmlns:a16="http://schemas.microsoft.com/office/drawing/2014/main" id="{C3F9D91B-33FF-4E92-8E8E-2314BDD8AA1D}"/>
+                <a16:creationId xmlns:a16="http://schemas.microsoft.com/office/drawing/2014/main" id="{2CEAAD39-606C-4841-8737-136314BB2EC6}"/>
               </a:ext>
             </a:extLst>
           </p:cNvPr>
@@ -20212,7 +19824,7 @@
           <p:cNvPr id="11" name="">
             <a:extLst xmlns:a="http://schemas.openxmlformats.org/drawingml/2006/main">
               <a:ext uri="{FF2B5EF4-FFF2-40B4-BE49-F238E27FC236}">
-                <a16:creationId xmlns:a16="http://schemas.microsoft.com/office/drawing/2014/main" id="{2E0A0CC7-208F-4F03-9DBA-575C538FA879}"/>
+                <a16:creationId xmlns:a16="http://schemas.microsoft.com/office/drawing/2014/main" id="{6DB4953F-2C0F-4E21-9055-73BE02872BB8}"/>
               </a:ext>
             </a:extLst>
           </p:cNvPr>
@@ -20276,7 +19888,7 @@
           <p:cNvPr id="12" name="">
             <a:extLst xmlns:a="http://schemas.openxmlformats.org/drawingml/2006/main">
               <a:ext uri="{FF2B5EF4-FFF2-40B4-BE49-F238E27FC236}">
-                <a16:creationId xmlns:a16="http://schemas.microsoft.com/office/drawing/2014/main" id="{A6F309FF-CA10-49B4-A1E6-68977AA97FB3}"/>
+                <a16:creationId xmlns:a16="http://schemas.microsoft.com/office/drawing/2014/main" id="{9DEB1675-9A53-442D-9DD8-147C584743EC}"/>
               </a:ext>
             </a:extLst>
           </p:cNvPr>
@@ -20330,7 +19942,7 @@
                 <a:ea typeface="Aptos"/>
                 <a:cs typeface="Aptos"/>
               </a:rPr>
-              <a:t>200M+</a:t>
+              <a:t>5 adjacent markets</a:t>
             </a:r>
           </a:p>
         </p:txBody>
@@ -20340,7 +19952,7 @@
           <p:cNvPr id="13" name="">
             <a:extLst xmlns:a="http://schemas.openxmlformats.org/drawingml/2006/main">
               <a:ext uri="{FF2B5EF4-FFF2-40B4-BE49-F238E27FC236}">
-                <a16:creationId xmlns:a16="http://schemas.microsoft.com/office/drawing/2014/main" id="{905333BD-8880-467C-B7A7-C653167300D6}"/>
+                <a16:creationId xmlns:a16="http://schemas.microsoft.com/office/drawing/2014/main" id="{B4A49DBA-1759-4AFF-86CB-5060D5E7EF27}"/>
               </a:ext>
             </a:extLst>
           </p:cNvPr>
@@ -20394,7 +20006,7 @@
                 <a:ea typeface="Aptos"/>
                 <a:cs typeface="Aptos"/>
               </a:rPr>
-              <a:t>users already paying attention to astrology, mindfulness, AI companions, avatar apps and habit products.</a:t>
+              <a:t>mindfulness/reset, astrology/self-discovery, AI companion, avatar/identity, coaching/habits + progression.</a:t>
             </a:r>
           </a:p>
         </p:txBody>
@@ -20404,7 +20016,7 @@
           <p:cNvPr id="14" name="">
             <a:extLst xmlns:a="http://schemas.openxmlformats.org/drawingml/2006/main">
               <a:ext uri="{FF2B5EF4-FFF2-40B4-BE49-F238E27FC236}">
-                <a16:creationId xmlns:a16="http://schemas.microsoft.com/office/drawing/2014/main" id="{74C0288B-16C4-45B9-8FA4-CD6B4FF3BCC0}"/>
+                <a16:creationId xmlns:a16="http://schemas.microsoft.com/office/drawing/2014/main" id="{5D3DC8EE-2A69-43FE-86C4-D5D20D405E97}"/>
               </a:ext>
             </a:extLst>
           </p:cNvPr>
@@ -20437,7 +20049,7 @@
           <p:cNvPr id="15" name="">
             <a:extLst xmlns:a="http://schemas.openxmlformats.org/drawingml/2006/main">
               <a:ext uri="{FF2B5EF4-FFF2-40B4-BE49-F238E27FC236}">
-                <a16:creationId xmlns:a16="http://schemas.microsoft.com/office/drawing/2014/main" id="{C3775BD4-3173-44AB-92DA-2B49934E61A6}"/>
+                <a16:creationId xmlns:a16="http://schemas.microsoft.com/office/drawing/2014/main" id="{BC777C69-0615-4499-AABE-DCB089E64236}"/>
               </a:ext>
             </a:extLst>
           </p:cNvPr>
@@ -20501,7 +20113,7 @@
           <p:cNvPr id="16" name="">
             <a:extLst xmlns:a="http://schemas.openxmlformats.org/drawingml/2006/main">
               <a:ext uri="{FF2B5EF4-FFF2-40B4-BE49-F238E27FC236}">
-                <a16:creationId xmlns:a16="http://schemas.microsoft.com/office/drawing/2014/main" id="{8F57C59C-FCFB-4BDF-A947-45E16C755FF0}"/>
+                <a16:creationId xmlns:a16="http://schemas.microsoft.com/office/drawing/2014/main" id="{5FCB4998-3FA3-43E7-B83C-E0BB3A58FE26}"/>
               </a:ext>
             </a:extLst>
           </p:cNvPr>
@@ -20555,7 +20167,7 @@
                 <a:ea typeface="Aptos"/>
                 <a:cs typeface="Aptos"/>
               </a:rPr>
-              <a:t>20-40M</a:t>
+              <a:t>68,085 objects reviewed</a:t>
             </a:r>
           </a:p>
         </p:txBody>
@@ -20565,7 +20177,7 @@
           <p:cNvPr id="17" name="">
             <a:extLst xmlns:a="http://schemas.openxmlformats.org/drawingml/2006/main">
               <a:ext uri="{FF2B5EF4-FFF2-40B4-BE49-F238E27FC236}">
-                <a16:creationId xmlns:a16="http://schemas.microsoft.com/office/drawing/2014/main" id="{92419E20-4B59-4B02-8C55-73A7460CB09F}"/>
+                <a16:creationId xmlns:a16="http://schemas.microsoft.com/office/drawing/2014/main" id="{6F9526FB-CD1E-44E4-A438-185540BD6E45}"/>
               </a:ext>
             </a:extLst>
           </p:cNvPr>
@@ -20619,7 +20231,7 @@
                 <a:ea typeface="Aptos"/>
                 <a:cs typeface="Aptos"/>
               </a:rPr>
-              <a:t>spiritual self-improvers, visual identity users and habit/progress users reachable through mobile channels.</a:t>
+              <a:t>в исследовании собран широкий competitor universe across app stores, web, desktop and adjacent sources.</a:t>
             </a:r>
           </a:p>
         </p:txBody>
@@ -20629,7 +20241,7 @@
           <p:cNvPr id="18" name="">
             <a:extLst xmlns:a="http://schemas.openxmlformats.org/drawingml/2006/main">
               <a:ext uri="{FF2B5EF4-FFF2-40B4-BE49-F238E27FC236}">
-                <a16:creationId xmlns:a16="http://schemas.microsoft.com/office/drawing/2014/main" id="{17392857-88D8-44F0-812D-253D47B4F8D3}"/>
+                <a16:creationId xmlns:a16="http://schemas.microsoft.com/office/drawing/2014/main" id="{A04949B6-F5D5-4B6D-AEC0-5BACA9AC54AF}"/>
               </a:ext>
             </a:extLst>
           </p:cNvPr>
@@ -20662,7 +20274,7 @@
           <p:cNvPr id="19" name="">
             <a:extLst xmlns:a="http://schemas.openxmlformats.org/drawingml/2006/main">
               <a:ext uri="{FF2B5EF4-FFF2-40B4-BE49-F238E27FC236}">
-                <a16:creationId xmlns:a16="http://schemas.microsoft.com/office/drawing/2014/main" id="{E3117978-2A6C-48C6-A1AC-066182DCD8B0}"/>
+                <a16:creationId xmlns:a16="http://schemas.microsoft.com/office/drawing/2014/main" id="{76B7C5E5-8031-4D51-B636-2B936B432AD2}"/>
               </a:ext>
             </a:extLst>
           </p:cNvPr>
@@ -20726,7 +20338,7 @@
           <p:cNvPr id="20" name="">
             <a:extLst xmlns:a="http://schemas.openxmlformats.org/drawingml/2006/main">
               <a:ext uri="{FF2B5EF4-FFF2-40B4-BE49-F238E27FC236}">
-                <a16:creationId xmlns:a16="http://schemas.microsoft.com/office/drawing/2014/main" id="{D1E4F282-3B38-4371-BE5A-75DFD836798F}"/>
+                <a16:creationId xmlns:a16="http://schemas.microsoft.com/office/drawing/2014/main" id="{9C2459E1-4D30-4E92-9540-1809C6FD08B7}"/>
               </a:ext>
             </a:extLst>
           </p:cNvPr>
@@ -20780,7 +20392,7 @@
                 <a:ea typeface="Aptos"/>
                 <a:cs typeface="Aptos"/>
               </a:rPr>
-              <a:t>100k-300k</a:t>
+              <a:t>100k-300k users</a:t>
             </a:r>
           </a:p>
         </p:txBody>
@@ -20790,7 +20402,7 @@
           <p:cNvPr id="21" name="">
             <a:extLst xmlns:a="http://schemas.openxmlformats.org/drawingml/2006/main">
               <a:ext uri="{FF2B5EF4-FFF2-40B4-BE49-F238E27FC236}">
-                <a16:creationId xmlns:a16="http://schemas.microsoft.com/office/drawing/2014/main" id="{8258E8C3-098B-4740-B84B-974D85944FE2}"/>
+                <a16:creationId xmlns:a16="http://schemas.microsoft.com/office/drawing/2014/main" id="{352BCD78-6814-4ED3-91C8-45F961B41681}"/>
               </a:ext>
             </a:extLst>
           </p:cNvPr>
@@ -20844,7 +20456,7 @@
                 <a:ea typeface="Aptos"/>
                 <a:cs typeface="Aptos"/>
               </a:rPr>
-              <a:t>realistic 3-year reachable user base with creator-led GTM and subscription-first product.</a:t>
+              <a:t>реалистичный reachable base на 3 года при creator-led GTM, подписке и premium visual layer.</a:t>
             </a:r>
           </a:p>
         </p:txBody>
@@ -20854,7 +20466,7 @@
           <p:cNvPr id="22" name="">
             <a:extLst xmlns:a="http://schemas.openxmlformats.org/drawingml/2006/main">
               <a:ext uri="{FF2B5EF4-FFF2-40B4-BE49-F238E27FC236}">
-                <a16:creationId xmlns:a16="http://schemas.microsoft.com/office/drawing/2014/main" id="{2C98A81F-DC2F-421F-B416-804A79F832D6}"/>
+                <a16:creationId xmlns:a16="http://schemas.microsoft.com/office/drawing/2014/main" id="{D834AAEA-9A59-4E7B-86CF-9BD1C2A6724E}"/>
               </a:ext>
             </a:extLst>
           </p:cNvPr>
@@ -20887,7 +20499,7 @@
           <p:cNvPr id="23" name="">
             <a:extLst xmlns:a="http://schemas.openxmlformats.org/drawingml/2006/main">
               <a:ext uri="{FF2B5EF4-FFF2-40B4-BE49-F238E27FC236}">
-                <a16:creationId xmlns:a16="http://schemas.microsoft.com/office/drawing/2014/main" id="{39BCAE82-706B-436D-816E-821979FFBCD3}"/>
+                <a16:creationId xmlns:a16="http://schemas.microsoft.com/office/drawing/2014/main" id="{01E9152E-5096-4E7B-8734-5015E36E9E96}"/>
               </a:ext>
             </a:extLst>
           </p:cNvPr>
@@ -20951,7 +20563,7 @@
           <p:cNvPr id="24" name="">
             <a:extLst xmlns:a="http://schemas.openxmlformats.org/drawingml/2006/main">
               <a:ext uri="{FF2B5EF4-FFF2-40B4-BE49-F238E27FC236}">
-                <a16:creationId xmlns:a16="http://schemas.microsoft.com/office/drawing/2014/main" id="{0BE3BA29-B867-47F8-9EAA-A285E7981D72}"/>
+                <a16:creationId xmlns:a16="http://schemas.microsoft.com/office/drawing/2014/main" id="{C44956C0-CBCB-4B36-AEF3-824CBF492770}"/>
               </a:ext>
             </a:extLst>
           </p:cNvPr>
@@ -21015,7 +20627,7 @@
           <p:cNvPr id="25" name="">
             <a:extLst xmlns:a="http://schemas.openxmlformats.org/drawingml/2006/main">
               <a:ext uri="{FF2B5EF4-FFF2-40B4-BE49-F238E27FC236}">
-                <a16:creationId xmlns:a16="http://schemas.microsoft.com/office/drawing/2014/main" id="{F0FA2431-A12F-4C4E-9794-378856A7609C}"/>
+                <a16:creationId xmlns:a16="http://schemas.microsoft.com/office/drawing/2014/main" id="{8D022DA9-4A09-4BC1-AB82-D42A9A7B1B6D}"/>
               </a:ext>
             </a:extLst>
           </p:cNvPr>
@@ -21069,7 +20681,7 @@
                 <a:ea typeface="Aptos"/>
                 <a:cs typeface="Aptos"/>
               </a:rPr>
-              <a:t>upside through subscriptions, premium visual moments, creator seasons and team/coach packs.</a:t>
+              <a:t>upside через подписку, premium video/avatar tokens, creator seasons и годовые планы.</a:t>
             </a:r>
           </a:p>
         </p:txBody>
@@ -21079,7 +20691,7 @@
           <p:cNvPr id="26" name="">
             <a:extLst xmlns:a="http://schemas.openxmlformats.org/drawingml/2006/main">
               <a:ext uri="{FF2B5EF4-FFF2-40B4-BE49-F238E27FC236}">
-                <a16:creationId xmlns:a16="http://schemas.microsoft.com/office/drawing/2014/main" id="{2474BFAE-B754-49B7-AEF6-5F007C7FA673}"/>
+                <a16:creationId xmlns:a16="http://schemas.microsoft.com/office/drawing/2014/main" id="{0A957A28-8F5D-4425-B796-2788B321B4E5}"/>
               </a:ext>
             </a:extLst>
           </p:cNvPr>
@@ -21133,7 +20745,7 @@
                 <a:ea typeface="Aptos"/>
                 <a:cs typeface="Aptos"/>
               </a:rPr>
-              <a:t>AURA считается как пересечение рынков, а не как узкий horoscope TAM.</a:t>
+              <a:t>Вывод: рынок не один. AURA должна считаться как пересечение платных привычек, а не как узкий horoscope TAM.</a:t>
             </a:r>
           </a:p>
         </p:txBody>
@@ -21143,7 +20755,7 @@
           <p:cNvPr id="27" name="">
             <a:extLst xmlns:a="http://schemas.openxmlformats.org/drawingml/2006/main">
               <a:ext uri="{FF2B5EF4-FFF2-40B4-BE49-F238E27FC236}">
-                <a16:creationId xmlns:a16="http://schemas.microsoft.com/office/drawing/2014/main" id="{627008D9-C165-4A9C-9CF8-4CE8C08E35B6}"/>
+                <a16:creationId xmlns:a16="http://schemas.microsoft.com/office/drawing/2014/main" id="{C6CD0797-BAF6-46F9-A30F-EB90861BF22C}"/>
               </a:ext>
             </a:extLst>
           </p:cNvPr>
@@ -21205,7 +20817,7 @@
     </p:spTree>
     <p:extLst>
       <p:ext uri="{BB962C8B-B14F-4D97-AF65-F5344CB8AC3E}">
-        <p14:creationId xmlns:p14="http://schemas.microsoft.com/office/powerpoint/2010/main" val="917619869"/>
+        <p14:creationId xmlns:p14="http://schemas.microsoft.com/office/powerpoint/2010/main" val="1071758444"/>
       </p:ext>
     </p:extLst>
   </p:cSld>
@@ -21229,7 +20841,7 @@
           <p:cNvPr id="1" name="">
             <a:extLst xmlns:a="http://schemas.openxmlformats.org/drawingml/2006/main">
               <a:ext uri="{FF2B5EF4-FFF2-40B4-BE49-F238E27FC236}">
-                <a16:creationId xmlns:a16="http://schemas.microsoft.com/office/drawing/2014/main" id="{F83AF965-7082-421D-A444-86601BBCA525}"/>
+                <a16:creationId xmlns:a16="http://schemas.microsoft.com/office/drawing/2014/main" id="{4EC6C06F-FD49-4609-902C-455B64DC1BEE}"/>
               </a:ext>
             </a:extLst>
           </p:cNvPr>
@@ -21262,7 +20874,7 @@
           <p:cNvPr id="2" name="">
             <a:extLst xmlns:a="http://schemas.openxmlformats.org/drawingml/2006/main">
               <a:ext uri="{FF2B5EF4-FFF2-40B4-BE49-F238E27FC236}">
-                <a16:creationId xmlns:a16="http://schemas.microsoft.com/office/drawing/2014/main" id="{2A2C0395-B1A5-4DE7-A486-3D5435065359}"/>
+                <a16:creationId xmlns:a16="http://schemas.microsoft.com/office/drawing/2014/main" id="{DF6A71E6-8EA7-4277-9566-D65DD6D9A679}"/>
               </a:ext>
             </a:extLst>
           </p:cNvPr>
@@ -21295,7 +20907,7 @@
           <p:cNvPr id="3" name="">
             <a:extLst xmlns:a="http://schemas.openxmlformats.org/drawingml/2006/main">
               <a:ext uri="{FF2B5EF4-FFF2-40B4-BE49-F238E27FC236}">
-                <a16:creationId xmlns:a16="http://schemas.microsoft.com/office/drawing/2014/main" id="{2C8261F2-6D2D-4BBF-9D6F-FC8995741242}"/>
+                <a16:creationId xmlns:a16="http://schemas.microsoft.com/office/drawing/2014/main" id="{FBC83F84-A845-4A5E-B023-1F11EE06DE9C}"/>
               </a:ext>
             </a:extLst>
           </p:cNvPr>
@@ -21328,7 +20940,7 @@
           <p:cNvPr id="4" name="">
             <a:extLst xmlns:a="http://schemas.openxmlformats.org/drawingml/2006/main">
               <a:ext uri="{FF2B5EF4-FFF2-40B4-BE49-F238E27FC236}">
-                <a16:creationId xmlns:a16="http://schemas.microsoft.com/office/drawing/2014/main" id="{B3A18B0C-FF55-43EF-9F8F-277F28369F87}"/>
+                <a16:creationId xmlns:a16="http://schemas.microsoft.com/office/drawing/2014/main" id="{D26503F6-097B-4176-8AE3-0E1942E40715}"/>
               </a:ext>
             </a:extLst>
           </p:cNvPr>
@@ -21392,7 +21004,7 @@
           <p:cNvPr id="5" name="">
             <a:extLst xmlns:a="http://schemas.openxmlformats.org/drawingml/2006/main">
               <a:ext uri="{FF2B5EF4-FFF2-40B4-BE49-F238E27FC236}">
-                <a16:creationId xmlns:a16="http://schemas.microsoft.com/office/drawing/2014/main" id="{A8D9B757-94BB-4C6C-87B8-CCBD3B56BDF5}"/>
+                <a16:creationId xmlns:a16="http://schemas.microsoft.com/office/drawing/2014/main" id="{DFABC9F7-BBC5-4F5C-BDE6-A2B7CD0A6D46}"/>
               </a:ext>
             </a:extLst>
           </p:cNvPr>
@@ -21456,7 +21068,7 @@
           <p:cNvPr id="6" name="">
             <a:extLst xmlns:a="http://schemas.openxmlformats.org/drawingml/2006/main">
               <a:ext uri="{FF2B5EF4-FFF2-40B4-BE49-F238E27FC236}">
-                <a16:creationId xmlns:a16="http://schemas.microsoft.com/office/drawing/2014/main" id="{797F18D3-2B3B-4324-B07C-11A2AE4F89E3}"/>
+                <a16:creationId xmlns:a16="http://schemas.microsoft.com/office/drawing/2014/main" id="{1E34C147-E69C-42EE-93EB-C3F413646DDA}"/>
               </a:ext>
             </a:extLst>
           </p:cNvPr>
@@ -21489,7 +21101,7 @@
           <p:cNvPr id="7" name="">
             <a:extLst xmlns:a="http://schemas.openxmlformats.org/drawingml/2006/main">
               <a:ext uri="{FF2B5EF4-FFF2-40B4-BE49-F238E27FC236}">
-                <a16:creationId xmlns:a16="http://schemas.microsoft.com/office/drawing/2014/main" id="{00727E9B-FB20-4DC9-8C09-A471C608008F}"/>
+                <a16:creationId xmlns:a16="http://schemas.microsoft.com/office/drawing/2014/main" id="{276E2599-DB7E-44B1-A407-F4ED2ECC03D8}"/>
               </a:ext>
             </a:extLst>
           </p:cNvPr>
@@ -21553,7 +21165,7 @@
           <p:cNvPr id="8" name="">
             <a:extLst xmlns:a="http://schemas.openxmlformats.org/drawingml/2006/main">
               <a:ext uri="{FF2B5EF4-FFF2-40B4-BE49-F238E27FC236}">
-                <a16:creationId xmlns:a16="http://schemas.microsoft.com/office/drawing/2014/main" id="{D4A2CC6C-6D71-49C6-B4E8-29CE8C1FDAF9}"/>
+                <a16:creationId xmlns:a16="http://schemas.microsoft.com/office/drawing/2014/main" id="{3959F8B7-3592-438E-8A8E-5B523BC49839}"/>
               </a:ext>
             </a:extLst>
           </p:cNvPr>
@@ -21586,7 +21198,7 @@
           <p:cNvPr id="9" name="">
             <a:extLst xmlns:a="http://schemas.openxmlformats.org/drawingml/2006/main">
               <a:ext uri="{FF2B5EF4-FFF2-40B4-BE49-F238E27FC236}">
-                <a16:creationId xmlns:a16="http://schemas.microsoft.com/office/drawing/2014/main" id="{4959B43A-61A2-45A9-91B1-11574FDC01CB}"/>
+                <a16:creationId xmlns:a16="http://schemas.microsoft.com/office/drawing/2014/main" id="{E83EBBC8-721A-4690-816E-34A052DD9A10}"/>
               </a:ext>
             </a:extLst>
           </p:cNvPr>
@@ -21640,7 +21252,7 @@
                 <a:ea typeface="Aptos"/>
                 <a:cs typeface="Aptos"/>
               </a:rPr>
-              <a:t>$300M revenue / 2023</a:t>
+              <a:t>$300M revenue / 2023 proxy</a:t>
             </a:r>
           </a:p>
         </p:txBody>
@@ -21650,7 +21262,7 @@
           <p:cNvPr id="10" name="">
             <a:extLst xmlns:a="http://schemas.openxmlformats.org/drawingml/2006/main">
               <a:ext uri="{FF2B5EF4-FFF2-40B4-BE49-F238E27FC236}">
-                <a16:creationId xmlns:a16="http://schemas.microsoft.com/office/drawing/2014/main" id="{50D350D5-0C46-4208-817C-F15E3459620E}"/>
+                <a16:creationId xmlns:a16="http://schemas.microsoft.com/office/drawing/2014/main" id="{24A574F7-734A-43A4-B35C-DE3AC8CF4D84}"/>
               </a:ext>
             </a:extLst>
           </p:cNvPr>
@@ -21683,7 +21295,7 @@
           <p:cNvPr id="11" name="">
             <a:extLst xmlns:a="http://schemas.openxmlformats.org/drawingml/2006/main">
               <a:ext uri="{FF2B5EF4-FFF2-40B4-BE49-F238E27FC236}">
-                <a16:creationId xmlns:a16="http://schemas.microsoft.com/office/drawing/2014/main" id="{BABB81EF-58F3-4C28-B313-C560A405DCD0}"/>
+                <a16:creationId xmlns:a16="http://schemas.microsoft.com/office/drawing/2014/main" id="{62EEF781-1937-4084-8435-A26938AC9313}"/>
               </a:ext>
             </a:extLst>
           </p:cNvPr>
@@ -21737,7 +21349,7 @@
                 <a:ea typeface="Aptos"/>
                 <a:cs typeface="Aptos"/>
               </a:rPr>
-              <a:t>$70/year subscription, 4M+ paying subscribers</a:t>
+              <a:t>$70/year, 4M+ paying subscribers</a:t>
             </a:r>
           </a:p>
         </p:txBody>
@@ -21747,7 +21359,7 @@
           <p:cNvPr id="12" name="">
             <a:extLst xmlns:a="http://schemas.openxmlformats.org/drawingml/2006/main">
               <a:ext uri="{FF2B5EF4-FFF2-40B4-BE49-F238E27FC236}">
-                <a16:creationId xmlns:a16="http://schemas.microsoft.com/office/drawing/2014/main" id="{F55D584D-FDE9-406A-8835-F8628A7365EB}"/>
+                <a16:creationId xmlns:a16="http://schemas.microsoft.com/office/drawing/2014/main" id="{D1B51362-CAAD-49DE-8992-0023DD6D4BB4}"/>
               </a:ext>
             </a:extLst>
           </p:cNvPr>
@@ -21780,7 +21392,7 @@
           <p:cNvPr id="13" name="">
             <a:extLst xmlns:a="http://schemas.openxmlformats.org/drawingml/2006/main">
               <a:ext uri="{FF2B5EF4-FFF2-40B4-BE49-F238E27FC236}">
-                <a16:creationId xmlns:a16="http://schemas.microsoft.com/office/drawing/2014/main" id="{8A6863AC-6714-4B98-91FE-6E4B595D7063}"/>
+                <a16:creationId xmlns:a16="http://schemas.microsoft.com/office/drawing/2014/main" id="{99191D2C-87E5-45A6-BF69-D870CAB640A8}"/>
               </a:ext>
             </a:extLst>
           </p:cNvPr>
@@ -21834,7 +21446,7 @@
                 <a:ea typeface="Aptos"/>
                 <a:cs typeface="Aptos"/>
               </a:rPr>
-              <a:t>wellness subscriptions can become large consumer businesses</a:t>
+              <a:t>wellness subscription can be a very large consumer business</a:t>
             </a:r>
           </a:p>
         </p:txBody>
@@ -21844,7 +21456,7 @@
           <p:cNvPr id="14" name="">
             <a:extLst xmlns:a="http://schemas.openxmlformats.org/drawingml/2006/main">
               <a:ext uri="{FF2B5EF4-FFF2-40B4-BE49-F238E27FC236}">
-                <a16:creationId xmlns:a16="http://schemas.microsoft.com/office/drawing/2014/main" id="{D4658B1B-6E2E-4268-AD05-703A00E9A9C1}"/>
+                <a16:creationId xmlns:a16="http://schemas.microsoft.com/office/drawing/2014/main" id="{4155BB94-4D5F-46A9-A1EC-9B648E1E165D}"/>
               </a:ext>
             </a:extLst>
           </p:cNvPr>
@@ -21877,7 +21489,7 @@
           <p:cNvPr id="15" name="">
             <a:extLst xmlns:a="http://schemas.openxmlformats.org/drawingml/2006/main">
               <a:ext uri="{FF2B5EF4-FFF2-40B4-BE49-F238E27FC236}">
-                <a16:creationId xmlns:a16="http://schemas.microsoft.com/office/drawing/2014/main" id="{0B385431-B55B-43CB-A84E-9B338B1109B3}"/>
+                <a16:creationId xmlns:a16="http://schemas.microsoft.com/office/drawing/2014/main" id="{52C034B8-1DB8-4BB8-99FF-575A179898DE}"/>
               </a:ext>
             </a:extLst>
           </p:cNvPr>
@@ -21941,7 +21553,7 @@
           <p:cNvPr id="16" name="">
             <a:extLst xmlns:a="http://schemas.openxmlformats.org/drawingml/2006/main">
               <a:ext uri="{FF2B5EF4-FFF2-40B4-BE49-F238E27FC236}">
-                <a16:creationId xmlns:a16="http://schemas.microsoft.com/office/drawing/2014/main" id="{4F3D3267-00E6-4DE6-8352-DF800E796269}"/>
+                <a16:creationId xmlns:a16="http://schemas.microsoft.com/office/drawing/2014/main" id="{638DB9EA-9E1D-4057-ABEF-28184562FBFE}"/>
               </a:ext>
             </a:extLst>
           </p:cNvPr>
@@ -21974,7 +21586,7 @@
           <p:cNvPr id="17" name="">
             <a:extLst xmlns:a="http://schemas.openxmlformats.org/drawingml/2006/main">
               <a:ext uri="{FF2B5EF4-FFF2-40B4-BE49-F238E27FC236}">
-                <a16:creationId xmlns:a16="http://schemas.microsoft.com/office/drawing/2014/main" id="{0F807858-768E-449D-883B-77A079916CCA}"/>
+                <a16:creationId xmlns:a16="http://schemas.microsoft.com/office/drawing/2014/main" id="{64E1C74C-E2DF-443F-B45B-A48A5AA664AC}"/>
               </a:ext>
             </a:extLst>
           </p:cNvPr>
@@ -22028,7 +21640,7 @@
                 <a:ea typeface="Aptos"/>
                 <a:cs typeface="Aptos"/>
               </a:rPr>
-              <a:t>$30M run-rate / 2025</a:t>
+              <a:t>$30M ARR run-rate / 2025</a:t>
             </a:r>
           </a:p>
         </p:txBody>
@@ -22038,7 +21650,7 @@
           <p:cNvPr id="18" name="">
             <a:extLst xmlns:a="http://schemas.openxmlformats.org/drawingml/2006/main">
               <a:ext uri="{FF2B5EF4-FFF2-40B4-BE49-F238E27FC236}">
-                <a16:creationId xmlns:a16="http://schemas.microsoft.com/office/drawing/2014/main" id="{432B490D-FA36-4B0A-8FF9-CD4AC99EDD9A}"/>
+                <a16:creationId xmlns:a16="http://schemas.microsoft.com/office/drawing/2014/main" id="{43229767-D6D3-46F3-85F0-DDBD98B0C62B}"/>
               </a:ext>
             </a:extLst>
           </p:cNvPr>
@@ -22071,7 +21683,7 @@
           <p:cNvPr id="19" name="">
             <a:extLst xmlns:a="http://schemas.openxmlformats.org/drawingml/2006/main">
               <a:ext uri="{FF2B5EF4-FFF2-40B4-BE49-F238E27FC236}">
-                <a16:creationId xmlns:a16="http://schemas.microsoft.com/office/drawing/2014/main" id="{B2B23E17-1C18-46A6-A3F7-E160D8686676}"/>
+                <a16:creationId xmlns:a16="http://schemas.microsoft.com/office/drawing/2014/main" id="{AD4EB32F-093B-420E-9810-EA8A99A9686C}"/>
               </a:ext>
             </a:extLst>
           </p:cNvPr>
@@ -22135,7 +21747,7 @@
           <p:cNvPr id="20" name="">
             <a:extLst xmlns:a="http://schemas.openxmlformats.org/drawingml/2006/main">
               <a:ext uri="{FF2B5EF4-FFF2-40B4-BE49-F238E27FC236}">
-                <a16:creationId xmlns:a16="http://schemas.microsoft.com/office/drawing/2014/main" id="{E688690A-E4EC-4306-93F8-C230F3F557FB}"/>
+                <a16:creationId xmlns:a16="http://schemas.microsoft.com/office/drawing/2014/main" id="{15419986-20ED-4491-8051-274616D3B928}"/>
               </a:ext>
             </a:extLst>
           </p:cNvPr>
@@ -22168,7 +21780,7 @@
           <p:cNvPr id="21" name="">
             <a:extLst xmlns:a="http://schemas.openxmlformats.org/drawingml/2006/main">
               <a:ext uri="{FF2B5EF4-FFF2-40B4-BE49-F238E27FC236}">
-                <a16:creationId xmlns:a16="http://schemas.microsoft.com/office/drawing/2014/main" id="{08C41894-87EC-4C29-9EF2-CD4ECA6AB43C}"/>
+                <a16:creationId xmlns:a16="http://schemas.microsoft.com/office/drawing/2014/main" id="{1B97E9DA-B21F-469C-BFE0-4E5402D413F6}"/>
               </a:ext>
             </a:extLst>
           </p:cNvPr>
@@ -22222,7 +21834,7 @@
                 <a:ea typeface="Aptos"/>
                 <a:cs typeface="Aptos"/>
               </a:rPr>
-              <a:t>AI companions monetize heavy engagement</a:t>
+              <a:t>AI companion monetizes engagement, but compute cost remains key risk</a:t>
             </a:r>
           </a:p>
         </p:txBody>
@@ -22232,7 +21844,7 @@
           <p:cNvPr id="22" name="">
             <a:extLst xmlns:a="http://schemas.openxmlformats.org/drawingml/2006/main">
               <a:ext uri="{FF2B5EF4-FFF2-40B4-BE49-F238E27FC236}">
-                <a16:creationId xmlns:a16="http://schemas.microsoft.com/office/drawing/2014/main" id="{4EFFF4FE-17CB-48F4-A0DD-CB5C06B7E10E}"/>
+                <a16:creationId xmlns:a16="http://schemas.microsoft.com/office/drawing/2014/main" id="{A6B5582A-87E0-4458-812C-DBDB3C92A89C}"/>
               </a:ext>
             </a:extLst>
           </p:cNvPr>
@@ -22265,7 +21877,7 @@
           <p:cNvPr id="23" name="">
             <a:extLst xmlns:a="http://schemas.openxmlformats.org/drawingml/2006/main">
               <a:ext uri="{FF2B5EF4-FFF2-40B4-BE49-F238E27FC236}">
-                <a16:creationId xmlns:a16="http://schemas.microsoft.com/office/drawing/2014/main" id="{697A79E3-27FC-41D4-824C-D96F2F501872}"/>
+                <a16:creationId xmlns:a16="http://schemas.microsoft.com/office/drawing/2014/main" id="{F26479C0-B24C-408B-ADA3-B6EC108B82E1}"/>
               </a:ext>
             </a:extLst>
           </p:cNvPr>
@@ -22329,7 +21941,7 @@
           <p:cNvPr id="24" name="">
             <a:extLst xmlns:a="http://schemas.openxmlformats.org/drawingml/2006/main">
               <a:ext uri="{FF2B5EF4-FFF2-40B4-BE49-F238E27FC236}">
-                <a16:creationId xmlns:a16="http://schemas.microsoft.com/office/drawing/2014/main" id="{FB664F24-34D0-442B-A3A7-B702BB9F02B1}"/>
+                <a16:creationId xmlns:a16="http://schemas.microsoft.com/office/drawing/2014/main" id="{B7C82D22-8326-49F2-9733-9CC59CCB32F0}"/>
               </a:ext>
             </a:extLst>
           </p:cNvPr>
@@ -22362,7 +21974,7 @@
           <p:cNvPr id="25" name="">
             <a:extLst xmlns:a="http://schemas.openxmlformats.org/drawingml/2006/main">
               <a:ext uri="{FF2B5EF4-FFF2-40B4-BE49-F238E27FC236}">
-                <a16:creationId xmlns:a16="http://schemas.microsoft.com/office/drawing/2014/main" id="{6916FA8A-C081-4266-8EBF-953BA0A646F6}"/>
+                <a16:creationId xmlns:a16="http://schemas.microsoft.com/office/drawing/2014/main" id="{FC8FCF5B-8F97-4B3E-B10A-587046508EA4}"/>
               </a:ext>
             </a:extLst>
           </p:cNvPr>
@@ -22426,7 +22038,7 @@
           <p:cNvPr id="26" name="">
             <a:extLst xmlns:a="http://schemas.openxmlformats.org/drawingml/2006/main">
               <a:ext uri="{FF2B5EF4-FFF2-40B4-BE49-F238E27FC236}">
-                <a16:creationId xmlns:a16="http://schemas.microsoft.com/office/drawing/2014/main" id="{12EB53BC-1206-444A-8FB2-A4C3A86431D7}"/>
+                <a16:creationId xmlns:a16="http://schemas.microsoft.com/office/drawing/2014/main" id="{B49DF921-1132-409A-B00A-057294D6212F}"/>
               </a:ext>
             </a:extLst>
           </p:cNvPr>
@@ -22459,7 +22071,7 @@
           <p:cNvPr id="27" name="">
             <a:extLst xmlns:a="http://schemas.openxmlformats.org/drawingml/2006/main">
               <a:ext uri="{FF2B5EF4-FFF2-40B4-BE49-F238E27FC236}">
-                <a16:creationId xmlns:a16="http://schemas.microsoft.com/office/drawing/2014/main" id="{5289E0FC-273F-4494-8541-5B015039A3D8}"/>
+                <a16:creationId xmlns:a16="http://schemas.microsoft.com/office/drawing/2014/main" id="{2684CE08-7FE1-4F75-AE44-9D0E2C51A466}"/>
               </a:ext>
             </a:extLst>
           </p:cNvPr>
@@ -22513,7 +22125,7 @@
                 <a:ea typeface="Aptos"/>
                 <a:cs typeface="Aptos"/>
               </a:rPr>
-              <a:t>~$17.23/month subscription proxy</a:t>
+              <a:t>~$17/month subscription proxy</a:t>
             </a:r>
           </a:p>
         </p:txBody>
@@ -22523,7 +22135,7 @@
           <p:cNvPr id="28" name="">
             <a:extLst xmlns:a="http://schemas.openxmlformats.org/drawingml/2006/main">
               <a:ext uri="{FF2B5EF4-FFF2-40B4-BE49-F238E27FC236}">
-                <a16:creationId xmlns:a16="http://schemas.microsoft.com/office/drawing/2014/main" id="{B59459D3-A477-4131-AF4C-699F9FE21E81}"/>
+                <a16:creationId xmlns:a16="http://schemas.microsoft.com/office/drawing/2014/main" id="{FC557CD0-A245-43AB-A3D5-E9D43845B82D}"/>
               </a:ext>
             </a:extLst>
           </p:cNvPr>
@@ -22556,7 +22168,7 @@
           <p:cNvPr id="29" name="">
             <a:extLst xmlns:a="http://schemas.openxmlformats.org/drawingml/2006/main">
               <a:ext uri="{FF2B5EF4-FFF2-40B4-BE49-F238E27FC236}">
-                <a16:creationId xmlns:a16="http://schemas.microsoft.com/office/drawing/2014/main" id="{CBA0D8C7-767F-4BB6-BE20-7FB89D1A81A7}"/>
+                <a16:creationId xmlns:a16="http://schemas.microsoft.com/office/drawing/2014/main" id="{A5036D26-2EF6-40E0-A5EB-885958704997}"/>
               </a:ext>
             </a:extLst>
           </p:cNvPr>
@@ -22610,7 +22222,7 @@
                 <a:ea typeface="Aptos"/>
                 <a:cs typeface="Aptos"/>
               </a:rPr>
-              <a:t>AI companion + avatar layer has proven paid demand</a:t>
+              <a:t>AI companion + avatar + memory can create paid intent</a:t>
             </a:r>
           </a:p>
         </p:txBody>
@@ -22620,7 +22232,7 @@
           <p:cNvPr id="30" name="">
             <a:extLst xmlns:a="http://schemas.openxmlformats.org/drawingml/2006/main">
               <a:ext uri="{FF2B5EF4-FFF2-40B4-BE49-F238E27FC236}">
-                <a16:creationId xmlns:a16="http://schemas.microsoft.com/office/drawing/2014/main" id="{3F640AF2-FB64-4E23-ACB5-3E061C6497D9}"/>
+                <a16:creationId xmlns:a16="http://schemas.microsoft.com/office/drawing/2014/main" id="{AAA14C4C-4341-4F67-B02E-CEB79553161E}"/>
               </a:ext>
             </a:extLst>
           </p:cNvPr>
@@ -22653,7 +22265,7 @@
           <p:cNvPr id="31" name="">
             <a:extLst xmlns:a="http://schemas.openxmlformats.org/drawingml/2006/main">
               <a:ext uri="{FF2B5EF4-FFF2-40B4-BE49-F238E27FC236}">
-                <a16:creationId xmlns:a16="http://schemas.microsoft.com/office/drawing/2014/main" id="{77CC48FF-26A7-4700-822B-5CC43CCA12E8}"/>
+                <a16:creationId xmlns:a16="http://schemas.microsoft.com/office/drawing/2014/main" id="{7F76A65A-E784-48CF-915E-F4E7411B41DD}"/>
               </a:ext>
             </a:extLst>
           </p:cNvPr>
@@ -22717,7 +22329,7 @@
           <p:cNvPr id="32" name="">
             <a:extLst xmlns:a="http://schemas.openxmlformats.org/drawingml/2006/main">
               <a:ext uri="{FF2B5EF4-FFF2-40B4-BE49-F238E27FC236}">
-                <a16:creationId xmlns:a16="http://schemas.microsoft.com/office/drawing/2014/main" id="{046C6A53-18A1-4DFC-B3BC-651210355AF2}"/>
+                <a16:creationId xmlns:a16="http://schemas.microsoft.com/office/drawing/2014/main" id="{EDAF902A-1018-4D09-8825-1534EC583459}"/>
               </a:ext>
             </a:extLst>
           </p:cNvPr>
@@ -22750,7 +22362,7 @@
           <p:cNvPr id="33" name="">
             <a:extLst xmlns:a="http://schemas.openxmlformats.org/drawingml/2006/main">
               <a:ext uri="{FF2B5EF4-FFF2-40B4-BE49-F238E27FC236}">
-                <a16:creationId xmlns:a16="http://schemas.microsoft.com/office/drawing/2014/main" id="{96CF6CF3-EE29-49F5-A5D3-533685CE8BFE}"/>
+                <a16:creationId xmlns:a16="http://schemas.microsoft.com/office/drawing/2014/main" id="{4B171745-FFBF-4556-B796-03B00C3789E1}"/>
               </a:ext>
             </a:extLst>
           </p:cNvPr>
@@ -22814,7 +22426,7 @@
           <p:cNvPr id="34" name="">
             <a:extLst xmlns:a="http://schemas.openxmlformats.org/drawingml/2006/main">
               <a:ext uri="{FF2B5EF4-FFF2-40B4-BE49-F238E27FC236}">
-                <a16:creationId xmlns:a16="http://schemas.microsoft.com/office/drawing/2014/main" id="{B3F0A219-434A-4343-AD7A-E7DEBBA95E46}"/>
+                <a16:creationId xmlns:a16="http://schemas.microsoft.com/office/drawing/2014/main" id="{7978B8D6-2112-4C6E-AE5E-98767AFD46C3}"/>
               </a:ext>
             </a:extLst>
           </p:cNvPr>
@@ -22847,7 +22459,7 @@
           <p:cNvPr id="35" name="">
             <a:extLst xmlns:a="http://schemas.openxmlformats.org/drawingml/2006/main">
               <a:ext uri="{FF2B5EF4-FFF2-40B4-BE49-F238E27FC236}">
-                <a16:creationId xmlns:a16="http://schemas.microsoft.com/office/drawing/2014/main" id="{79FDAA5D-0D7B-4682-848C-78C129D4C477}"/>
+                <a16:creationId xmlns:a16="http://schemas.microsoft.com/office/drawing/2014/main" id="{DFCAF3DE-DB9D-4756-8DA0-96ED7907E2AC}"/>
               </a:ext>
             </a:extLst>
           </p:cNvPr>
@@ -22901,7 +22513,7 @@
                 <a:ea typeface="Aptos"/>
                 <a:cs typeface="Aptos"/>
               </a:rPr>
-              <a:t>self-care pet + subscription</a:t>
+              <a:t>self-care pet + paid expansion</a:t>
             </a:r>
           </a:p>
         </p:txBody>
@@ -22911,7 +22523,7 @@
           <p:cNvPr id="36" name="">
             <a:extLst xmlns:a="http://schemas.openxmlformats.org/drawingml/2006/main">
               <a:ext uri="{FF2B5EF4-FFF2-40B4-BE49-F238E27FC236}">
-                <a16:creationId xmlns:a16="http://schemas.microsoft.com/office/drawing/2014/main" id="{55B6C09F-6FBC-40D8-8CBB-7A7BD8A3C75B}"/>
+                <a16:creationId xmlns:a16="http://schemas.microsoft.com/office/drawing/2014/main" id="{6793D38E-721F-4384-B55F-5BDCCC016367}"/>
               </a:ext>
             </a:extLst>
           </p:cNvPr>
@@ -22944,7 +22556,7 @@
           <p:cNvPr id="37" name="">
             <a:extLst xmlns:a="http://schemas.openxmlformats.org/drawingml/2006/main">
               <a:ext uri="{FF2B5EF4-FFF2-40B4-BE49-F238E27FC236}">
-                <a16:creationId xmlns:a16="http://schemas.microsoft.com/office/drawing/2014/main" id="{F6087E6B-9938-4AD7-959A-1A040D76073D}"/>
+                <a16:creationId xmlns:a16="http://schemas.microsoft.com/office/drawing/2014/main" id="{09B4AD79-02F5-4D4C-9045-C49454AE371F}"/>
               </a:ext>
             </a:extLst>
           </p:cNvPr>
@@ -22998,7 +22610,7 @@
                 <a:ea typeface="Aptos"/>
                 <a:cs typeface="Aptos"/>
               </a:rPr>
-              <a:t>soft companion + habit loop can monetize</a:t>
+              <a:t>soft companion + daily loop can monetize without “hard productivity”</a:t>
             </a:r>
           </a:p>
         </p:txBody>
@@ -23008,7 +22620,7 @@
           <p:cNvPr id="38" name="">
             <a:extLst xmlns:a="http://schemas.openxmlformats.org/drawingml/2006/main">
               <a:ext uri="{FF2B5EF4-FFF2-40B4-BE49-F238E27FC236}">
-                <a16:creationId xmlns:a16="http://schemas.microsoft.com/office/drawing/2014/main" id="{5178E02A-E2FA-456D-A253-90AFE33BD065}"/>
+                <a16:creationId xmlns:a16="http://schemas.microsoft.com/office/drawing/2014/main" id="{BFBFC0B4-7EAD-42C9-8909-FC492E442347}"/>
               </a:ext>
             </a:extLst>
           </p:cNvPr>
@@ -23041,7 +22653,7 @@
           <p:cNvPr id="39" name="">
             <a:extLst xmlns:a="http://schemas.openxmlformats.org/drawingml/2006/main">
               <a:ext uri="{FF2B5EF4-FFF2-40B4-BE49-F238E27FC236}">
-                <a16:creationId xmlns:a16="http://schemas.microsoft.com/office/drawing/2014/main" id="{5CFFA0D2-7B94-44B7-B179-3F8293DD008B}"/>
+                <a16:creationId xmlns:a16="http://schemas.microsoft.com/office/drawing/2014/main" id="{2EDBA360-CA3B-4AEB-B642-94F1A1507B95}"/>
               </a:ext>
             </a:extLst>
           </p:cNvPr>
@@ -23105,7 +22717,7 @@
           <p:cNvPr id="40" name="">
             <a:extLst xmlns:a="http://schemas.openxmlformats.org/drawingml/2006/main">
               <a:ext uri="{FF2B5EF4-FFF2-40B4-BE49-F238E27FC236}">
-                <a16:creationId xmlns:a16="http://schemas.microsoft.com/office/drawing/2014/main" id="{FFFB528D-7511-41B9-A215-385348A47D2C}"/>
+                <a16:creationId xmlns:a16="http://schemas.microsoft.com/office/drawing/2014/main" id="{6887429C-482D-46CA-995B-93EFC8599832}"/>
               </a:ext>
             </a:extLst>
           </p:cNvPr>
@@ -23138,7 +22750,7 @@
           <p:cNvPr id="41" name="">
             <a:extLst xmlns:a="http://schemas.openxmlformats.org/drawingml/2006/main">
               <a:ext uri="{FF2B5EF4-FFF2-40B4-BE49-F238E27FC236}">
-                <a16:creationId xmlns:a16="http://schemas.microsoft.com/office/drawing/2014/main" id="{BD678648-83DC-4D84-8C09-904873D6EC37}"/>
+                <a16:creationId xmlns:a16="http://schemas.microsoft.com/office/drawing/2014/main" id="{A36BB542-BB03-49EB-BA16-830B0545D619}"/>
               </a:ext>
             </a:extLst>
           </p:cNvPr>
@@ -23202,7 +22814,7 @@
           <p:cNvPr id="42" name="">
             <a:extLst xmlns:a="http://schemas.openxmlformats.org/drawingml/2006/main">
               <a:ext uri="{FF2B5EF4-FFF2-40B4-BE49-F238E27FC236}">
-                <a16:creationId xmlns:a16="http://schemas.microsoft.com/office/drawing/2014/main" id="{4F9C2FB3-4867-4165-A4EA-9132329556E9}"/>
+                <a16:creationId xmlns:a16="http://schemas.microsoft.com/office/drawing/2014/main" id="{34F4D961-09DF-4ED7-B028-1B7E3B4BE6DE}"/>
               </a:ext>
             </a:extLst>
           </p:cNvPr>
@@ -23235,7 +22847,7 @@
           <p:cNvPr id="43" name="">
             <a:extLst xmlns:a="http://schemas.openxmlformats.org/drawingml/2006/main">
               <a:ext uri="{FF2B5EF4-FFF2-40B4-BE49-F238E27FC236}">
-                <a16:creationId xmlns:a16="http://schemas.microsoft.com/office/drawing/2014/main" id="{862C7E8F-E49C-4E7C-9077-B060F43F8989}"/>
+                <a16:creationId xmlns:a16="http://schemas.microsoft.com/office/drawing/2014/main" id="{025BF633-299E-4588-95D2-30BAC97E7BE1}"/>
               </a:ext>
             </a:extLst>
           </p:cNvPr>
@@ -23289,7 +22901,7 @@
                 <a:ea typeface="Aptos"/>
                 <a:cs typeface="Aptos"/>
               </a:rPr>
-              <a:t>IAPs and paid readings</a:t>
+              <a:t>paid readings / IAPs</a:t>
             </a:r>
           </a:p>
         </p:txBody>
@@ -23299,7 +22911,7 @@
           <p:cNvPr id="44" name="">
             <a:extLst xmlns:a="http://schemas.openxmlformats.org/drawingml/2006/main">
               <a:ext uri="{FF2B5EF4-FFF2-40B4-BE49-F238E27FC236}">
-                <a16:creationId xmlns:a16="http://schemas.microsoft.com/office/drawing/2014/main" id="{BEDEBFD9-CE1C-4F42-BB40-E80531A0DC28}"/>
+                <a16:creationId xmlns:a16="http://schemas.microsoft.com/office/drawing/2014/main" id="{A198162A-09C4-4CEC-85AC-43326D1D2A1D}"/>
               </a:ext>
             </a:extLst>
           </p:cNvPr>
@@ -23332,7 +22944,7 @@
           <p:cNvPr id="45" name="">
             <a:extLst xmlns:a="http://schemas.openxmlformats.org/drawingml/2006/main">
               <a:ext uri="{FF2B5EF4-FFF2-40B4-BE49-F238E27FC236}">
-                <a16:creationId xmlns:a16="http://schemas.microsoft.com/office/drawing/2014/main" id="{25F2EB31-C794-4769-83DE-CC254E8528B3}"/>
+                <a16:creationId xmlns:a16="http://schemas.microsoft.com/office/drawing/2014/main" id="{37F90531-47AB-4294-BAE9-063D7725ACE5}"/>
               </a:ext>
             </a:extLst>
           </p:cNvPr>
@@ -23386,7 +22998,7 @@
                 <a:ea typeface="Aptos"/>
                 <a:cs typeface="Aptos"/>
               </a:rPr>
-              <a:t>astrology can monetize through personal depth</a:t>
+              <a:t>astrology monetizes personal depth, but needs careful positioning</a:t>
             </a:r>
           </a:p>
         </p:txBody>
@@ -23396,7 +23008,7 @@
           <p:cNvPr id="46" name="">
             <a:extLst xmlns:a="http://schemas.openxmlformats.org/drawingml/2006/main">
               <a:ext uri="{FF2B5EF4-FFF2-40B4-BE49-F238E27FC236}">
-                <a16:creationId xmlns:a16="http://schemas.microsoft.com/office/drawing/2014/main" id="{A34F2212-EB49-4FC1-85CB-26D166426F73}"/>
+                <a16:creationId xmlns:a16="http://schemas.microsoft.com/office/drawing/2014/main" id="{D2162026-105B-4594-B8DA-725602492BB0}"/>
               </a:ext>
             </a:extLst>
           </p:cNvPr>
@@ -23450,7 +23062,7 @@
                 <a:ea typeface="Aptos"/>
                 <a:cs typeface="Aptos"/>
               </a:rPr>
-              <a:t>Деньги есть в соседних категориях. AURA должна взять не одну категорию, а их связку: personal meaning + companion + visual progress.</a:t>
+              <a:t>Деньги есть не в одной нише, а вокруг связки: personal meaning + companion + visual progress + subscription habit.</a:t>
             </a:r>
           </a:p>
         </p:txBody>
@@ -23460,7 +23072,7 @@
           <p:cNvPr id="47" name="">
             <a:extLst xmlns:a="http://schemas.openxmlformats.org/drawingml/2006/main">
               <a:ext uri="{FF2B5EF4-FFF2-40B4-BE49-F238E27FC236}">
-                <a16:creationId xmlns:a16="http://schemas.microsoft.com/office/drawing/2014/main" id="{0F85779B-E1A5-4951-AA8F-9C600ED6D356}"/>
+                <a16:creationId xmlns:a16="http://schemas.microsoft.com/office/drawing/2014/main" id="{758B6698-1C59-4AA8-A0AE-1DE0A2F3749D}"/>
               </a:ext>
             </a:extLst>
           </p:cNvPr>
@@ -23524,7 +23136,7 @@
           <p:cNvPr id="48" name="">
             <a:extLst xmlns:a="http://schemas.openxmlformats.org/drawingml/2006/main">
               <a:ext uri="{FF2B5EF4-FFF2-40B4-BE49-F238E27FC236}">
-                <a16:creationId xmlns:a16="http://schemas.microsoft.com/office/drawing/2014/main" id="{E0043FDF-E0D4-40F2-B27E-48A206BB25E2}"/>
+                <a16:creationId xmlns:a16="http://schemas.microsoft.com/office/drawing/2014/main" id="{21768C19-A46F-4099-A873-BB733B20F354}"/>
               </a:ext>
             </a:extLst>
           </p:cNvPr>
@@ -23586,7 +23198,7 @@
     </p:spTree>
     <p:extLst>
       <p:ext uri="{BB962C8B-B14F-4D97-AF65-F5344CB8AC3E}">
-        <p14:creationId xmlns:p14="http://schemas.microsoft.com/office/powerpoint/2010/main" val="1471787612"/>
+        <p14:creationId xmlns:p14="http://schemas.microsoft.com/office/powerpoint/2010/main" val="685422571"/>
       </p:ext>
     </p:extLst>
   </p:cSld>
@@ -23610,7 +23222,7 @@
           <p:cNvPr id="1" name="">
             <a:extLst xmlns:a="http://schemas.openxmlformats.org/drawingml/2006/main">
               <a:ext uri="{FF2B5EF4-FFF2-40B4-BE49-F238E27FC236}">
-                <a16:creationId xmlns:a16="http://schemas.microsoft.com/office/drawing/2014/main" id="{E971F692-AD0E-4D5F-835E-A057B17AB062}"/>
+                <a16:creationId xmlns:a16="http://schemas.microsoft.com/office/drawing/2014/main" id="{B7C20169-D2A8-4712-82F2-3C4011BC422A}"/>
               </a:ext>
             </a:extLst>
           </p:cNvPr>
@@ -23643,7 +23255,7 @@
           <p:cNvPr id="2" name="">
             <a:extLst xmlns:a="http://schemas.openxmlformats.org/drawingml/2006/main">
               <a:ext uri="{FF2B5EF4-FFF2-40B4-BE49-F238E27FC236}">
-                <a16:creationId xmlns:a16="http://schemas.microsoft.com/office/drawing/2014/main" id="{3AE06272-7EAD-4C50-849B-59D4ADA25382}"/>
+                <a16:creationId xmlns:a16="http://schemas.microsoft.com/office/drawing/2014/main" id="{6D2BD1E7-0E5A-4C3A-8235-84966DAAEEC7}"/>
               </a:ext>
             </a:extLst>
           </p:cNvPr>
@@ -23676,7 +23288,7 @@
           <p:cNvPr id="3" name="">
             <a:extLst xmlns:a="http://schemas.openxmlformats.org/drawingml/2006/main">
               <a:ext uri="{FF2B5EF4-FFF2-40B4-BE49-F238E27FC236}">
-                <a16:creationId xmlns:a16="http://schemas.microsoft.com/office/drawing/2014/main" id="{9B2A4E64-89FF-47F7-BF91-D98F6CBA141E}"/>
+                <a16:creationId xmlns:a16="http://schemas.microsoft.com/office/drawing/2014/main" id="{C8BDBAAC-BB2E-4C0F-8F6F-5C0400BD1111}"/>
               </a:ext>
             </a:extLst>
           </p:cNvPr>
@@ -23709,7 +23321,7 @@
           <p:cNvPr id="4" name="">
             <a:extLst xmlns:a="http://schemas.openxmlformats.org/drawingml/2006/main">
               <a:ext uri="{FF2B5EF4-FFF2-40B4-BE49-F238E27FC236}">
-                <a16:creationId xmlns:a16="http://schemas.microsoft.com/office/drawing/2014/main" id="{F0767AD1-4735-4214-97E4-A548D0719997}"/>
+                <a16:creationId xmlns:a16="http://schemas.microsoft.com/office/drawing/2014/main" id="{CFE4E2DF-9476-4BFA-841B-A16498BB3E59}"/>
               </a:ext>
             </a:extLst>
           </p:cNvPr>
@@ -23773,7 +23385,7 @@
           <p:cNvPr id="5" name="">
             <a:extLst xmlns:a="http://schemas.openxmlformats.org/drawingml/2006/main">
               <a:ext uri="{FF2B5EF4-FFF2-40B4-BE49-F238E27FC236}">
-                <a16:creationId xmlns:a16="http://schemas.microsoft.com/office/drawing/2014/main" id="{42A739E5-024A-4994-A87F-95757656EEAC}"/>
+                <a16:creationId xmlns:a16="http://schemas.microsoft.com/office/drawing/2014/main" id="{6311C7AD-B5E5-4362-B542-C6F76832E5A5}"/>
               </a:ext>
             </a:extLst>
           </p:cNvPr>
@@ -23837,7 +23449,7 @@
           <p:cNvPr id="6" name="">
             <a:extLst xmlns:a="http://schemas.openxmlformats.org/drawingml/2006/main">
               <a:ext uri="{FF2B5EF4-FFF2-40B4-BE49-F238E27FC236}">
-                <a16:creationId xmlns:a16="http://schemas.microsoft.com/office/drawing/2014/main" id="{A1358B91-E9BF-4830-BB16-CBBAB0D61B92}"/>
+                <a16:creationId xmlns:a16="http://schemas.microsoft.com/office/drawing/2014/main" id="{D377C197-825B-4E44-9B97-D6A18D4E0DD6}"/>
               </a:ext>
             </a:extLst>
           </p:cNvPr>
@@ -23870,7 +23482,7 @@
           <p:cNvPr id="7" name="">
             <a:extLst xmlns:a="http://schemas.openxmlformats.org/drawingml/2006/main">
               <a:ext uri="{FF2B5EF4-FFF2-40B4-BE49-F238E27FC236}">
-                <a16:creationId xmlns:a16="http://schemas.microsoft.com/office/drawing/2014/main" id="{C4F8967F-9E0E-408C-8B5E-41D823BF8641}"/>
+                <a16:creationId xmlns:a16="http://schemas.microsoft.com/office/drawing/2014/main" id="{CF7508C7-18EA-420B-83BD-B0CCCBBA8246}"/>
               </a:ext>
             </a:extLst>
           </p:cNvPr>
@@ -23934,7 +23546,7 @@
           <p:cNvPr id="8" name="">
             <a:extLst xmlns:a="http://schemas.openxmlformats.org/drawingml/2006/main">
               <a:ext uri="{FF2B5EF4-FFF2-40B4-BE49-F238E27FC236}">
-                <a16:creationId xmlns:a16="http://schemas.microsoft.com/office/drawing/2014/main" id="{CFEB033A-71AF-4A82-83F7-F269DF5DBEB5}"/>
+                <a16:creationId xmlns:a16="http://schemas.microsoft.com/office/drawing/2014/main" id="{F09AFB43-CB8D-42A2-846B-470F2EB8E874}"/>
               </a:ext>
             </a:extLst>
           </p:cNvPr>
@@ -23967,7 +23579,7 @@
           <p:cNvPr id="9" name="">
             <a:extLst xmlns:a="http://schemas.openxmlformats.org/drawingml/2006/main">
               <a:ext uri="{FF2B5EF4-FFF2-40B4-BE49-F238E27FC236}">
-                <a16:creationId xmlns:a16="http://schemas.microsoft.com/office/drawing/2014/main" id="{FF4DE1D8-AE3E-4926-80EB-1B743E0A0738}"/>
+                <a16:creationId xmlns:a16="http://schemas.microsoft.com/office/drawing/2014/main" id="{904C34E6-19EF-4B98-B1A0-14B2091F59A8}"/>
               </a:ext>
             </a:extLst>
           </p:cNvPr>
@@ -24021,7 +23633,7 @@
                 <a:ea typeface="Aptos"/>
                 <a:cs typeface="Aptos"/>
               </a:rPr>
-              <a:t>Ищут смысл, символы, прогнозы, мягкую персонализацию.</a:t>
+              <a:t>уже смотрят astrology/tarot/self-care контент, но хотят меньше фатализма и больше применимости.</a:t>
             </a:r>
           </a:p>
         </p:txBody>
@@ -24031,7 +23643,7 @@
           <p:cNvPr id="10" name="">
             <a:extLst xmlns:a="http://schemas.openxmlformats.org/drawingml/2006/main">
               <a:ext uri="{FF2B5EF4-FFF2-40B4-BE49-F238E27FC236}">
-                <a16:creationId xmlns:a16="http://schemas.microsoft.com/office/drawing/2014/main" id="{E5A9BD87-E8E5-45BD-8311-FA814DC167D4}"/>
+                <a16:creationId xmlns:a16="http://schemas.microsoft.com/office/drawing/2014/main" id="{029D94A3-46B0-4E29-B6D4-F2565C028E65}"/>
               </a:ext>
             </a:extLst>
           </p:cNvPr>
@@ -24064,7 +23676,7 @@
           <p:cNvPr id="11" name="">
             <a:extLst xmlns:a="http://schemas.openxmlformats.org/drawingml/2006/main">
               <a:ext uri="{FF2B5EF4-FFF2-40B4-BE49-F238E27FC236}">
-                <a16:creationId xmlns:a16="http://schemas.microsoft.com/office/drawing/2014/main" id="{E6CF2F29-3215-409B-9FDB-954BD135A713}"/>
+                <a16:creationId xmlns:a16="http://schemas.microsoft.com/office/drawing/2014/main" id="{C19818AA-F1B8-406C-8A5C-7692F7CCF3AF}"/>
               </a:ext>
             </a:extLst>
           </p:cNvPr>
@@ -24118,7 +23730,7 @@
                 <a:ea typeface="Aptos"/>
                 <a:cs typeface="Aptos"/>
               </a:rPr>
-              <a:t>недельный прогноз + daily episode</a:t>
+              <a:t>weekly forecast + daily episode</a:t>
             </a:r>
           </a:p>
         </p:txBody>
@@ -24128,7 +23740,7 @@
           <p:cNvPr id="12" name="">
             <a:extLst xmlns:a="http://schemas.openxmlformats.org/drawingml/2006/main">
               <a:ext uri="{FF2B5EF4-FFF2-40B4-BE49-F238E27FC236}">
-                <a16:creationId xmlns:a16="http://schemas.microsoft.com/office/drawing/2014/main" id="{3476655F-0071-496D-9894-E523C3C3A18D}"/>
+                <a16:creationId xmlns:a16="http://schemas.microsoft.com/office/drawing/2014/main" id="{D9F08843-29F1-4735-A2DB-9294D46C3890}"/>
               </a:ext>
             </a:extLst>
           </p:cNvPr>
@@ -24161,7 +23773,7 @@
           <p:cNvPr id="13" name="">
             <a:extLst xmlns:a="http://schemas.openxmlformats.org/drawingml/2006/main">
               <a:ext uri="{FF2B5EF4-FFF2-40B4-BE49-F238E27FC236}">
-                <a16:creationId xmlns:a16="http://schemas.microsoft.com/office/drawing/2014/main" id="{50D4A198-454B-45F4-AF20-BDC67D50796E}"/>
+                <a16:creationId xmlns:a16="http://schemas.microsoft.com/office/drawing/2014/main" id="{B5F47A22-5E9A-4467-AFF3-8C52997ED859}"/>
               </a:ext>
             </a:extLst>
           </p:cNvPr>
@@ -24225,7 +23837,7 @@
           <p:cNvPr id="14" name="">
             <a:extLst xmlns:a="http://schemas.openxmlformats.org/drawingml/2006/main">
               <a:ext uri="{FF2B5EF4-FFF2-40B4-BE49-F238E27FC236}">
-                <a16:creationId xmlns:a16="http://schemas.microsoft.com/office/drawing/2014/main" id="{96D29486-7D63-4AA9-AE88-6A7441EB9248}"/>
+                <a16:creationId xmlns:a16="http://schemas.microsoft.com/office/drawing/2014/main" id="{33EBF17E-D136-4B16-89E2-236A041BBA6A}"/>
               </a:ext>
             </a:extLst>
           </p:cNvPr>
@@ -24258,7 +23870,7 @@
           <p:cNvPr id="15" name="">
             <a:extLst xmlns:a="http://schemas.openxmlformats.org/drawingml/2006/main">
               <a:ext uri="{FF2B5EF4-FFF2-40B4-BE49-F238E27FC236}">
-                <a16:creationId xmlns:a16="http://schemas.microsoft.com/office/drawing/2014/main" id="{2276AAF5-898D-4492-A41B-386F627AE694}"/>
+                <a16:creationId xmlns:a16="http://schemas.microsoft.com/office/drawing/2014/main" id="{36087AE8-544E-41BF-B451-DD3AA5BE7AF8}"/>
               </a:ext>
             </a:extLst>
           </p:cNvPr>
@@ -24312,7 +23924,7 @@
                 <a:ea typeface="Aptos"/>
                 <a:cs typeface="Aptos"/>
               </a:rPr>
-              <a:t>Хотят увидеть себя в другой версии и красивом визуальном мире.</a:t>
+              <a:t>хотят увидеть “другую версию себя”, визуальный стиль периода и красивый share artifact.</a:t>
             </a:r>
           </a:p>
         </p:txBody>
@@ -24322,7 +23934,7 @@
           <p:cNvPr id="16" name="">
             <a:extLst xmlns:a="http://schemas.openxmlformats.org/drawingml/2006/main">
               <a:ext uri="{FF2B5EF4-FFF2-40B4-BE49-F238E27FC236}">
-                <a16:creationId xmlns:a16="http://schemas.microsoft.com/office/drawing/2014/main" id="{BB4894D0-674F-4729-95A7-C3F36321306D}"/>
+                <a16:creationId xmlns:a16="http://schemas.microsoft.com/office/drawing/2014/main" id="{370C28B5-1C9E-433E-90BB-87CF3EE707E0}"/>
               </a:ext>
             </a:extLst>
           </p:cNvPr>
@@ -24355,7 +23967,7 @@
           <p:cNvPr id="17" name="">
             <a:extLst xmlns:a="http://schemas.openxmlformats.org/drawingml/2006/main">
               <a:ext uri="{FF2B5EF4-FFF2-40B4-BE49-F238E27FC236}">
-                <a16:creationId xmlns:a16="http://schemas.microsoft.com/office/drawing/2014/main" id="{3E0170CF-F6F7-46B0-BC20-B700EC87B62B}"/>
+                <a16:creationId xmlns:a16="http://schemas.microsoft.com/office/drawing/2014/main" id="{F36A6C6F-1FF9-483E-9FE0-181E0EBF3039}"/>
               </a:ext>
             </a:extLst>
           </p:cNvPr>
@@ -24419,7 +24031,7 @@
           <p:cNvPr id="18" name="">
             <a:extLst xmlns:a="http://schemas.openxmlformats.org/drawingml/2006/main">
               <a:ext uri="{FF2B5EF4-FFF2-40B4-BE49-F238E27FC236}">
-                <a16:creationId xmlns:a16="http://schemas.microsoft.com/office/drawing/2014/main" id="{CA408097-6DC6-4707-97EC-2591A74B07EE}"/>
+                <a16:creationId xmlns:a16="http://schemas.microsoft.com/office/drawing/2014/main" id="{65FCBD8B-819F-4B6C-9D29-09FBC66A68BF}"/>
               </a:ext>
             </a:extLst>
           </p:cNvPr>
@@ -24452,7 +24064,7 @@
           <p:cNvPr id="19" name="">
             <a:extLst xmlns:a="http://schemas.openxmlformats.org/drawingml/2006/main">
               <a:ext uri="{FF2B5EF4-FFF2-40B4-BE49-F238E27FC236}">
-                <a16:creationId xmlns:a16="http://schemas.microsoft.com/office/drawing/2014/main" id="{89D47AF1-3F46-4CAD-A2E5-110809F942D6}"/>
+                <a16:creationId xmlns:a16="http://schemas.microsoft.com/office/drawing/2014/main" id="{D6056920-D6FE-4146-A6AA-6BFA342C29A0}"/>
               </a:ext>
             </a:extLst>
           </p:cNvPr>
@@ -24516,7 +24128,7 @@
           <p:cNvPr id="20" name="">
             <a:extLst xmlns:a="http://schemas.openxmlformats.org/drawingml/2006/main">
               <a:ext uri="{FF2B5EF4-FFF2-40B4-BE49-F238E27FC236}">
-                <a16:creationId xmlns:a16="http://schemas.microsoft.com/office/drawing/2014/main" id="{646C19EC-A4A9-404E-87B6-3A289EB6A553}"/>
+                <a16:creationId xmlns:a16="http://schemas.microsoft.com/office/drawing/2014/main" id="{335357D7-8BA6-4203-8465-62C6B45F8E55}"/>
               </a:ext>
             </a:extLst>
           </p:cNvPr>
@@ -24549,7 +24161,7 @@
           <p:cNvPr id="21" name="">
             <a:extLst xmlns:a="http://schemas.openxmlformats.org/drawingml/2006/main">
               <a:ext uri="{FF2B5EF4-FFF2-40B4-BE49-F238E27FC236}">
-                <a16:creationId xmlns:a16="http://schemas.microsoft.com/office/drawing/2014/main" id="{CEF6E899-F49C-4F91-9363-EC8F39BE2C3F}"/>
+                <a16:creationId xmlns:a16="http://schemas.microsoft.com/office/drawing/2014/main" id="{FFAD97E7-4F67-40B3-8AEB-51A6E07893E1}"/>
               </a:ext>
             </a:extLst>
           </p:cNvPr>
@@ -24603,7 +24215,7 @@
                 <a:ea typeface="Aptos"/>
                 <a:cs typeface="Aptos"/>
               </a:rPr>
-              <a:t>Хотят действие, но без жесткого productivity-трека.</a:t>
+              <a:t>пытаются действовать, но устают от сухих streak и задач без эмоционального смысла.</a:t>
             </a:r>
           </a:p>
         </p:txBody>
@@ -24613,7 +24225,7 @@
           <p:cNvPr id="22" name="">
             <a:extLst xmlns:a="http://schemas.openxmlformats.org/drawingml/2006/main">
               <a:ext uri="{FF2B5EF4-FFF2-40B4-BE49-F238E27FC236}">
-                <a16:creationId xmlns:a16="http://schemas.microsoft.com/office/drawing/2014/main" id="{A04B36D0-6A7D-4170-BF1E-E7B6B203ABEE}"/>
+                <a16:creationId xmlns:a16="http://schemas.microsoft.com/office/drawing/2014/main" id="{6433A783-43BC-4BFD-AE14-E8FA9DCD896C}"/>
               </a:ext>
             </a:extLst>
           </p:cNvPr>
@@ -24646,7 +24258,7 @@
           <p:cNvPr id="23" name="">
             <a:extLst xmlns:a="http://schemas.openxmlformats.org/drawingml/2006/main">
               <a:ext uri="{FF2B5EF4-FFF2-40B4-BE49-F238E27FC236}">
-                <a16:creationId xmlns:a16="http://schemas.microsoft.com/office/drawing/2014/main" id="{B036FD1D-A032-46CB-9CF3-85AF8CFD6AE0}"/>
+                <a16:creationId xmlns:a16="http://schemas.microsoft.com/office/drawing/2014/main" id="{002423C6-7F06-441C-A10E-9CAF54B1217D}"/>
               </a:ext>
             </a:extLst>
           </p:cNvPr>
@@ -24700,7 +24312,7 @@
                 <a:ea typeface="Aptos"/>
                 <a:cs typeface="Aptos"/>
               </a:rPr>
-              <a:t>маленький шаг + reset</a:t>
+              <a:t>2-minute action + reset</a:t>
             </a:r>
           </a:p>
         </p:txBody>
@@ -24710,7 +24322,7 @@
           <p:cNvPr id="24" name="">
             <a:extLst xmlns:a="http://schemas.openxmlformats.org/drawingml/2006/main">
               <a:ext uri="{FF2B5EF4-FFF2-40B4-BE49-F238E27FC236}">
-                <a16:creationId xmlns:a16="http://schemas.microsoft.com/office/drawing/2014/main" id="{2EE2EA53-7ADA-4136-BAB4-876C93AC2A8C}"/>
+                <a16:creationId xmlns:a16="http://schemas.microsoft.com/office/drawing/2014/main" id="{B37B8982-B531-427A-82C9-F6FB50875456}"/>
               </a:ext>
             </a:extLst>
           </p:cNvPr>
@@ -24743,7 +24355,7 @@
           <p:cNvPr id="25" name="">
             <a:extLst xmlns:a="http://schemas.openxmlformats.org/drawingml/2006/main">
               <a:ext uri="{FF2B5EF4-FFF2-40B4-BE49-F238E27FC236}">
-                <a16:creationId xmlns:a16="http://schemas.microsoft.com/office/drawing/2014/main" id="{037FF268-B2E5-42C3-8A18-03ACD6084F98}"/>
+                <a16:creationId xmlns:a16="http://schemas.microsoft.com/office/drawing/2014/main" id="{68639F74-657A-4E3D-A1BC-C354B5608EBD}"/>
               </a:ext>
             </a:extLst>
           </p:cNvPr>
@@ -24807,7 +24419,7 @@
           <p:cNvPr id="26" name="">
             <a:extLst xmlns:a="http://schemas.openxmlformats.org/drawingml/2006/main">
               <a:ext uri="{FF2B5EF4-FFF2-40B4-BE49-F238E27FC236}">
-                <a16:creationId xmlns:a16="http://schemas.microsoft.com/office/drawing/2014/main" id="{B44D1E9A-7D07-4543-843F-9CD7DC8ED832}"/>
+                <a16:creationId xmlns:a16="http://schemas.microsoft.com/office/drawing/2014/main" id="{1B9B0B84-8E1F-4409-AF65-AA6C92205767}"/>
               </a:ext>
             </a:extLst>
           </p:cNvPr>
@@ -24840,7 +24452,7 @@
           <p:cNvPr id="27" name="">
             <a:extLst xmlns:a="http://schemas.openxmlformats.org/drawingml/2006/main">
               <a:ext uri="{FF2B5EF4-FFF2-40B4-BE49-F238E27FC236}">
-                <a16:creationId xmlns:a16="http://schemas.microsoft.com/office/drawing/2014/main" id="{EAE42A44-A223-4811-BF0F-DBACF27075B3}"/>
+                <a16:creationId xmlns:a16="http://schemas.microsoft.com/office/drawing/2014/main" id="{3A06A701-1326-4D27-8563-39DFA445F26E}"/>
               </a:ext>
             </a:extLst>
           </p:cNvPr>
@@ -24894,7 +24506,7 @@
                 <a:ea typeface="Aptos"/>
                 <a:cs typeface="Aptos"/>
               </a:rPr>
-              <a:t>Хочется персонального помощника, который помнит контекст.</a:t>
+              <a:t>готовы к персональному AI, но нуждаются в безопасной рамке, памяти и понятной роли помощника.</a:t>
             </a:r>
           </a:p>
         </p:txBody>
@@ -24904,7 +24516,7 @@
           <p:cNvPr id="28" name="">
             <a:extLst xmlns:a="http://schemas.openxmlformats.org/drawingml/2006/main">
               <a:ext uri="{FF2B5EF4-FFF2-40B4-BE49-F238E27FC236}">
-                <a16:creationId xmlns:a16="http://schemas.microsoft.com/office/drawing/2014/main" id="{898D6741-1D3A-49F1-8026-4912EEFC9739}"/>
+                <a16:creationId xmlns:a16="http://schemas.microsoft.com/office/drawing/2014/main" id="{CE733713-D5A3-405F-9F17-ED3ABD008A6D}"/>
               </a:ext>
             </a:extLst>
           </p:cNvPr>
@@ -24937,7 +24549,7 @@
           <p:cNvPr id="29" name="">
             <a:extLst xmlns:a="http://schemas.openxmlformats.org/drawingml/2006/main">
               <a:ext uri="{FF2B5EF4-FFF2-40B4-BE49-F238E27FC236}">
-                <a16:creationId xmlns:a16="http://schemas.microsoft.com/office/drawing/2014/main" id="{F1469C17-3384-4750-AAA6-8B1FB95474DF}"/>
+                <a16:creationId xmlns:a16="http://schemas.microsoft.com/office/drawing/2014/main" id="{80F910A8-22D7-4663-953A-D16D20256984}"/>
               </a:ext>
             </a:extLst>
           </p:cNvPr>
@@ -25001,7 +24613,7 @@
           <p:cNvPr id="30" name="">
             <a:extLst xmlns:a="http://schemas.openxmlformats.org/drawingml/2006/main">
               <a:ext uri="{FF2B5EF4-FFF2-40B4-BE49-F238E27FC236}">
-                <a16:creationId xmlns:a16="http://schemas.microsoft.com/office/drawing/2014/main" id="{6F2D459A-B77D-458C-BFA9-EC005864667B}"/>
+                <a16:creationId xmlns:a16="http://schemas.microsoft.com/office/drawing/2014/main" id="{2D657FB9-602A-4F6F-BA5D-6C63E35A0D88}"/>
               </a:ext>
             </a:extLst>
           </p:cNvPr>
@@ -25063,7 +24675,7 @@
     </p:spTree>
     <p:extLst>
       <p:ext uri="{BB962C8B-B14F-4D97-AF65-F5344CB8AC3E}">
-        <p14:creationId xmlns:p14="http://schemas.microsoft.com/office/powerpoint/2010/main" val="701331345"/>
+        <p14:creationId xmlns:p14="http://schemas.microsoft.com/office/powerpoint/2010/main" val="1570228884"/>
       </p:ext>
     </p:extLst>
   </p:cSld>
@@ -25087,7 +24699,7 @@
           <p:cNvPr id="1" name="">
             <a:extLst xmlns:a="http://schemas.openxmlformats.org/drawingml/2006/main">
               <a:ext uri="{FF2B5EF4-FFF2-40B4-BE49-F238E27FC236}">
-                <a16:creationId xmlns:a16="http://schemas.microsoft.com/office/drawing/2014/main" id="{40678F08-F3B1-42AF-8BB2-6CC66E35FFD3}"/>
+                <a16:creationId xmlns:a16="http://schemas.microsoft.com/office/drawing/2014/main" id="{0A4C6192-9A9C-45AA-B7CC-C8B706B0AA48}"/>
               </a:ext>
             </a:extLst>
           </p:cNvPr>
@@ -25120,7 +24732,7 @@
           <p:cNvPr id="2" name="">
             <a:extLst xmlns:a="http://schemas.openxmlformats.org/drawingml/2006/main">
               <a:ext uri="{FF2B5EF4-FFF2-40B4-BE49-F238E27FC236}">
-                <a16:creationId xmlns:a16="http://schemas.microsoft.com/office/drawing/2014/main" id="{B089944A-9770-4F41-BE1C-81B981E1F953}"/>
+                <a16:creationId xmlns:a16="http://schemas.microsoft.com/office/drawing/2014/main" id="{9C6D1C7F-C521-4ED5-BC72-7E66F244475A}"/>
               </a:ext>
             </a:extLst>
           </p:cNvPr>
@@ -25153,7 +24765,7 @@
           <p:cNvPr id="3" name="">
             <a:extLst xmlns:a="http://schemas.openxmlformats.org/drawingml/2006/main">
               <a:ext uri="{FF2B5EF4-FFF2-40B4-BE49-F238E27FC236}">
-                <a16:creationId xmlns:a16="http://schemas.microsoft.com/office/drawing/2014/main" id="{25AE5F8B-AB8B-49B5-8A2E-185AE58C939B}"/>
+                <a16:creationId xmlns:a16="http://schemas.microsoft.com/office/drawing/2014/main" id="{7E2389E3-1CD0-493E-9794-45631B3BF45B}"/>
               </a:ext>
             </a:extLst>
           </p:cNvPr>
@@ -25186,7 +24798,7 @@
           <p:cNvPr id="4" name="">
             <a:extLst xmlns:a="http://schemas.openxmlformats.org/drawingml/2006/main">
               <a:ext uri="{FF2B5EF4-FFF2-40B4-BE49-F238E27FC236}">
-                <a16:creationId xmlns:a16="http://schemas.microsoft.com/office/drawing/2014/main" id="{07CDDAB3-6DBA-4868-8E3E-5DDE8045320E}"/>
+                <a16:creationId xmlns:a16="http://schemas.microsoft.com/office/drawing/2014/main" id="{25AE1F2D-3E76-47C1-ABA6-26E441714B62}"/>
               </a:ext>
             </a:extLst>
           </p:cNvPr>
@@ -25250,7 +24862,7 @@
           <p:cNvPr id="5" name="">
             <a:extLst xmlns:a="http://schemas.openxmlformats.org/drawingml/2006/main">
               <a:ext uri="{FF2B5EF4-FFF2-40B4-BE49-F238E27FC236}">
-                <a16:creationId xmlns:a16="http://schemas.microsoft.com/office/drawing/2014/main" id="{10E5C99C-8CC1-4BDF-A5DD-875292EDD2B5}"/>
+                <a16:creationId xmlns:a16="http://schemas.microsoft.com/office/drawing/2014/main" id="{EC4CA82D-1038-4EE3-98A4-A1BD0C6E8A31}"/>
               </a:ext>
             </a:extLst>
           </p:cNvPr>
@@ -25314,7 +24926,7 @@
           <p:cNvPr id="6" name="">
             <a:extLst xmlns:a="http://schemas.openxmlformats.org/drawingml/2006/main">
               <a:ext uri="{FF2B5EF4-FFF2-40B4-BE49-F238E27FC236}">
-                <a16:creationId xmlns:a16="http://schemas.microsoft.com/office/drawing/2014/main" id="{CA049E1A-A95A-4F52-B4D3-B26E623DDA36}"/>
+                <a16:creationId xmlns:a16="http://schemas.microsoft.com/office/drawing/2014/main" id="{E0228FA3-7355-437A-9848-17A70303659A}"/>
               </a:ext>
             </a:extLst>
           </p:cNvPr>
@@ -25378,7 +24990,7 @@
           <p:cNvPr id="7" name="">
             <a:extLst xmlns:a="http://schemas.openxmlformats.org/drawingml/2006/main">
               <a:ext uri="{FF2B5EF4-FFF2-40B4-BE49-F238E27FC236}">
-                <a16:creationId xmlns:a16="http://schemas.microsoft.com/office/drawing/2014/main" id="{B6C75CCE-F1F2-4B56-9A2F-6B3BD4544441}"/>
+                <a16:creationId xmlns:a16="http://schemas.microsoft.com/office/drawing/2014/main" id="{C97F8236-481E-43E1-8FA5-0894C356D031}"/>
               </a:ext>
             </a:extLst>
           </p:cNvPr>
@@ -25432,7 +25044,7 @@
                 <a:ea typeface="Aptos"/>
                 <a:cs typeface="Aptos"/>
               </a:rPr>
-              <a:t>Соседние рынки уже доказали готовность платить за смысл, self-care, AI companionship и визуальные identity-механики.</a:t>
+              <a:t>В review clusters видно: 415 сигналов про ежедневный якорь, 371 про структурирование саморазвития, 308 про видимый прогресс.</a:t>
             </a:r>
           </a:p>
         </p:txBody>
@@ -25442,7 +25054,7 @@
           <p:cNvPr id="8" name="">
             <a:extLst xmlns:a="http://schemas.openxmlformats.org/drawingml/2006/main">
               <a:ext uri="{FF2B5EF4-FFF2-40B4-BE49-F238E27FC236}">
-                <a16:creationId xmlns:a16="http://schemas.microsoft.com/office/drawing/2014/main" id="{49BFAC5F-14C4-45D6-BC0B-23158F1C06C3}"/>
+                <a16:creationId xmlns:a16="http://schemas.microsoft.com/office/drawing/2014/main" id="{A478C3D5-9008-4FF9-B5A1-3C3D4A0F7AD9}"/>
               </a:ext>
             </a:extLst>
           </p:cNvPr>
@@ -25506,7 +25118,7 @@
           <p:cNvPr id="9" name="">
             <a:extLst xmlns:a="http://schemas.openxmlformats.org/drawingml/2006/main">
               <a:ext uri="{FF2B5EF4-FFF2-40B4-BE49-F238E27FC236}">
-                <a16:creationId xmlns:a16="http://schemas.microsoft.com/office/drawing/2014/main" id="{8D2CF19B-1721-409E-875A-DD692B661DC8}"/>
+                <a16:creationId xmlns:a16="http://schemas.microsoft.com/office/drawing/2014/main" id="{BA6C027D-A6A2-4BA6-A7CF-CE4790C438F0}"/>
               </a:ext>
             </a:extLst>
           </p:cNvPr>
@@ -25560,7 +25172,7 @@
                 <a:ea typeface="Aptos"/>
                 <a:cs typeface="Aptos"/>
               </a:rPr>
-              <a:t>Но пользователь часто получает либо прогноз без действия, либо действие без образа, либо avatar без личной причинности.</a:t>
+              <a:t>Главные причины ухода: 612 сигналов “не хватает глубины/кастомизации”, 367 сигналов “подписка не кажется ценной”.</a:t>
             </a:r>
           </a:p>
         </p:txBody>
@@ -25570,7 +25182,7 @@
           <p:cNvPr id="10" name="">
             <a:extLst xmlns:a="http://schemas.openxmlformats.org/drawingml/2006/main">
               <a:ext uri="{FF2B5EF4-FFF2-40B4-BE49-F238E27FC236}">
-                <a16:creationId xmlns:a16="http://schemas.microsoft.com/office/drawing/2014/main" id="{91191070-B6D4-4F1B-B9C4-1DD16D19551F}"/>
+                <a16:creationId xmlns:a16="http://schemas.microsoft.com/office/drawing/2014/main" id="{FE7EE602-434F-445C-9C2D-AC31419AF57C}"/>
               </a:ext>
             </a:extLst>
           </p:cNvPr>
@@ -25634,7 +25246,7 @@
           <p:cNvPr id="11" name="">
             <a:extLst xmlns:a="http://schemas.openxmlformats.org/drawingml/2006/main">
               <a:ext uri="{FF2B5EF4-FFF2-40B4-BE49-F238E27FC236}">
-                <a16:creationId xmlns:a16="http://schemas.microsoft.com/office/drawing/2014/main" id="{226FD29D-6BDB-4755-B83A-CCA90CE59890}"/>
+                <a16:creationId xmlns:a16="http://schemas.microsoft.com/office/drawing/2014/main" id="{90328F91-0EC5-4616-884B-23BE2334F20E}"/>
               </a:ext>
             </a:extLst>
           </p:cNvPr>
@@ -25688,7 +25300,7 @@
                 <a:ea typeface="Aptos"/>
                 <a:cs typeface="Aptos"/>
               </a:rPr>
-              <a:t>AURA закрывает разрыв: недельный сценарий, ежедневный контакт, avatar-помощник, визуальная история и понятный повод вернуться.</a:t>
+              <a:t>AURA должна доказать ценность до paywall: личный прогноз, действие, reset и объяснимое изменение avatar / Life Canvas.</a:t>
             </a:r>
           </a:p>
         </p:txBody>
@@ -25698,7 +25310,7 @@
           <p:cNvPr id="12" name="">
             <a:extLst xmlns:a="http://schemas.openxmlformats.org/drawingml/2006/main">
               <a:ext uri="{FF2B5EF4-FFF2-40B4-BE49-F238E27FC236}">
-                <a16:creationId xmlns:a16="http://schemas.microsoft.com/office/drawing/2014/main" id="{F1A749E3-324C-422F-B559-DAABF3A1EE41}"/>
+                <a16:creationId xmlns:a16="http://schemas.microsoft.com/office/drawing/2014/main" id="{E2FDE10F-EFEA-449E-9095-9C912609F93F}"/>
               </a:ext>
             </a:extLst>
           </p:cNvPr>
@@ -25762,7 +25374,7 @@
           <p:cNvPr id="13" name="">
             <a:extLst xmlns:a="http://schemas.openxmlformats.org/drawingml/2006/main">
               <a:ext uri="{FF2B5EF4-FFF2-40B4-BE49-F238E27FC236}">
-                <a16:creationId xmlns:a16="http://schemas.microsoft.com/office/drawing/2014/main" id="{BCEE7672-F6F4-4182-9BBD-4E7B064B5E17}"/>
+                <a16:creationId xmlns:a16="http://schemas.microsoft.com/office/drawing/2014/main" id="{3DF49B8B-60A9-4F57-940C-B57FD3EBDCF7}"/>
               </a:ext>
             </a:extLst>
           </p:cNvPr>
@@ -25816,7 +25428,7 @@
                 <a:ea typeface="Aptos"/>
                 <a:cs typeface="Aptos"/>
               </a:rPr>
-              <a:t>AURA не решает “астрологическую” проблему. Она решает проблему личной ясности, регулярного контакта с собой и визуального ощущения движения.</a:t>
+              <a:t>AURA нужна рынку не как еще одна astrology app, а как продукт, который делает личный смысл регулярным, действенным и видимым.</a:t>
             </a:r>
           </a:p>
         </p:txBody>
@@ -25826,7 +25438,7 @@
           <p:cNvPr id="14" name="">
             <a:extLst xmlns:a="http://schemas.openxmlformats.org/drawingml/2006/main">
               <a:ext uri="{FF2B5EF4-FFF2-40B4-BE49-F238E27FC236}">
-                <a16:creationId xmlns:a16="http://schemas.microsoft.com/office/drawing/2014/main" id="{D32BD70C-DA3A-46B7-B7B7-9BAA0D497915}"/>
+                <a16:creationId xmlns:a16="http://schemas.microsoft.com/office/drawing/2014/main" id="{1EE68554-D56B-40D1-BCCE-A87212F2D7AF}"/>
               </a:ext>
             </a:extLst>
           </p:cNvPr>
@@ -25888,7 +25500,7 @@
     </p:spTree>
     <p:extLst>
       <p:ext uri="{BB962C8B-B14F-4D97-AF65-F5344CB8AC3E}">
-        <p14:creationId xmlns:p14="http://schemas.microsoft.com/office/powerpoint/2010/main" val="1567468357"/>
+        <p14:creationId xmlns:p14="http://schemas.microsoft.com/office/powerpoint/2010/main" val="201838322"/>
       </p:ext>
     </p:extLst>
   </p:cSld>
@@ -25912,7 +25524,7 @@
           <p:cNvPr id="1" name="">
             <a:extLst xmlns:a="http://schemas.openxmlformats.org/drawingml/2006/main">
               <a:ext uri="{FF2B5EF4-FFF2-40B4-BE49-F238E27FC236}">
-                <a16:creationId xmlns:a16="http://schemas.microsoft.com/office/drawing/2014/main" id="{0B6294EA-766D-49B5-84E0-C1D4B3767335}"/>
+                <a16:creationId xmlns:a16="http://schemas.microsoft.com/office/drawing/2014/main" id="{60DF780D-9B0C-4E88-BECE-2F3DE82F2E1A}"/>
               </a:ext>
             </a:extLst>
           </p:cNvPr>
@@ -25945,7 +25557,7 @@
           <p:cNvPr id="2" name="">
             <a:extLst xmlns:a="http://schemas.openxmlformats.org/drawingml/2006/main">
               <a:ext uri="{FF2B5EF4-FFF2-40B4-BE49-F238E27FC236}">
-                <a16:creationId xmlns:a16="http://schemas.microsoft.com/office/drawing/2014/main" id="{9ADF8398-C56A-42D5-B7F7-F7CA07A7042B}"/>
+                <a16:creationId xmlns:a16="http://schemas.microsoft.com/office/drawing/2014/main" id="{7E98CED7-3440-4690-ADA8-945E3A094DBB}"/>
               </a:ext>
             </a:extLst>
           </p:cNvPr>
@@ -25978,7 +25590,7 @@
           <p:cNvPr id="3" name="">
             <a:extLst xmlns:a="http://schemas.openxmlformats.org/drawingml/2006/main">
               <a:ext uri="{FF2B5EF4-FFF2-40B4-BE49-F238E27FC236}">
-                <a16:creationId xmlns:a16="http://schemas.microsoft.com/office/drawing/2014/main" id="{829AA904-B5BD-43ED-852C-6D045239E779}"/>
+                <a16:creationId xmlns:a16="http://schemas.microsoft.com/office/drawing/2014/main" id="{CA74CA41-9E6C-4472-98D3-0EED3DEC80F4}"/>
               </a:ext>
             </a:extLst>
           </p:cNvPr>
@@ -26011,7 +25623,7 @@
           <p:cNvPr id="4" name="">
             <a:extLst xmlns:a="http://schemas.openxmlformats.org/drawingml/2006/main">
               <a:ext uri="{FF2B5EF4-FFF2-40B4-BE49-F238E27FC236}">
-                <a16:creationId xmlns:a16="http://schemas.microsoft.com/office/drawing/2014/main" id="{0277FA9B-20FC-4613-92C5-E083026E9DA6}"/>
+                <a16:creationId xmlns:a16="http://schemas.microsoft.com/office/drawing/2014/main" id="{4DA38B16-3A72-4D9B-9C64-AC9E72FE2D32}"/>
               </a:ext>
             </a:extLst>
           </p:cNvPr>
@@ -26075,7 +25687,7 @@
           <p:cNvPr id="5" name="">
             <a:extLst xmlns:a="http://schemas.openxmlformats.org/drawingml/2006/main">
               <a:ext uri="{FF2B5EF4-FFF2-40B4-BE49-F238E27FC236}">
-                <a16:creationId xmlns:a16="http://schemas.microsoft.com/office/drawing/2014/main" id="{6E708065-CC9A-4401-9387-3BE15F3A4C22}"/>
+                <a16:creationId xmlns:a16="http://schemas.microsoft.com/office/drawing/2014/main" id="{B8793C1A-EE4C-494E-9EB7-8C04B7C7DB45}"/>
               </a:ext>
             </a:extLst>
           </p:cNvPr>
@@ -26139,7 +25751,7 @@
           <p:cNvPr id="6" name="">
             <a:extLst xmlns:a="http://schemas.openxmlformats.org/drawingml/2006/main">
               <a:ext uri="{FF2B5EF4-FFF2-40B4-BE49-F238E27FC236}">
-                <a16:creationId xmlns:a16="http://schemas.microsoft.com/office/drawing/2014/main" id="{721152F8-A8FE-4643-BBF5-A6F18785FD4B}"/>
+                <a16:creationId xmlns:a16="http://schemas.microsoft.com/office/drawing/2014/main" id="{8D2A5BBD-88B7-4814-B1F7-36F5EC8B0CC6}"/>
               </a:ext>
             </a:extLst>
           </p:cNvPr>
@@ -26174,7 +25786,7 @@
           <p:cNvPr id="7" name="">
             <a:extLst xmlns:a="http://schemas.openxmlformats.org/drawingml/2006/main">
               <a:ext uri="{FF2B5EF4-FFF2-40B4-BE49-F238E27FC236}">
-                <a16:creationId xmlns:a16="http://schemas.microsoft.com/office/drawing/2014/main" id="{8D30DBD5-DF1E-49AB-B3E2-34CA22C03686}"/>
+                <a16:creationId xmlns:a16="http://schemas.microsoft.com/office/drawing/2014/main" id="{77F224A8-0E64-4C55-AEB0-25499B543601}"/>
               </a:ext>
             </a:extLst>
           </p:cNvPr>
@@ -26209,7 +25821,7 @@
           <p:cNvPr id="8" name="">
             <a:extLst xmlns:a="http://schemas.openxmlformats.org/drawingml/2006/main">
               <a:ext uri="{FF2B5EF4-FFF2-40B4-BE49-F238E27FC236}">
-                <a16:creationId xmlns:a16="http://schemas.microsoft.com/office/drawing/2014/main" id="{8B534D24-8165-47EF-92FD-9319379CA800}"/>
+                <a16:creationId xmlns:a16="http://schemas.microsoft.com/office/drawing/2014/main" id="{2A5B656A-4325-4C02-B10F-ADFCBE7D8C3C}"/>
               </a:ext>
             </a:extLst>
           </p:cNvPr>
@@ -26273,7 +25885,7 @@
           <p:cNvPr id="9" name="">
             <a:extLst xmlns:a="http://schemas.openxmlformats.org/drawingml/2006/main">
               <a:ext uri="{FF2B5EF4-FFF2-40B4-BE49-F238E27FC236}">
-                <a16:creationId xmlns:a16="http://schemas.microsoft.com/office/drawing/2014/main" id="{B73083D3-76D6-43B4-90BD-AE698CD899FB}"/>
+                <a16:creationId xmlns:a16="http://schemas.microsoft.com/office/drawing/2014/main" id="{D3B8B811-198D-4B09-BFA9-174FAE6979AA}"/>
               </a:ext>
             </a:extLst>
           </p:cNvPr>
@@ -26337,7 +25949,7 @@
           <p:cNvPr id="10" name="">
             <a:extLst xmlns:a="http://schemas.openxmlformats.org/drawingml/2006/main">
               <a:ext uri="{FF2B5EF4-FFF2-40B4-BE49-F238E27FC236}">
-                <a16:creationId xmlns:a16="http://schemas.microsoft.com/office/drawing/2014/main" id="{9748F0FB-67A4-4FD4-BD19-943A9D65FC1D}"/>
+                <a16:creationId xmlns:a16="http://schemas.microsoft.com/office/drawing/2014/main" id="{3F93576B-A636-4B87-9E8E-B3E4EFBA3B16}"/>
               </a:ext>
             </a:extLst>
           </p:cNvPr>
@@ -26370,7 +25982,7 @@
           <p:cNvPr id="11" name="">
             <a:extLst xmlns:a="http://schemas.openxmlformats.org/drawingml/2006/main">
               <a:ext uri="{FF2B5EF4-FFF2-40B4-BE49-F238E27FC236}">
-                <a16:creationId xmlns:a16="http://schemas.microsoft.com/office/drawing/2014/main" id="{0924D9C6-117E-421C-859D-286122E16FD7}"/>
+                <a16:creationId xmlns:a16="http://schemas.microsoft.com/office/drawing/2014/main" id="{2A183819-B6B1-46FC-A455-B94A9678DF10}"/>
               </a:ext>
             </a:extLst>
           </p:cNvPr>
@@ -26434,7 +26046,7 @@
           <p:cNvPr id="12" name="">
             <a:extLst xmlns:a="http://schemas.openxmlformats.org/drawingml/2006/main">
               <a:ext uri="{FF2B5EF4-FFF2-40B4-BE49-F238E27FC236}">
-                <a16:creationId xmlns:a16="http://schemas.microsoft.com/office/drawing/2014/main" id="{0F2EBA67-C25D-4D05-AB0E-1AFBBF39E2BA}"/>
+                <a16:creationId xmlns:a16="http://schemas.microsoft.com/office/drawing/2014/main" id="{EC15E799-E731-4EC9-890A-7D184BBA6932}"/>
               </a:ext>
             </a:extLst>
           </p:cNvPr>
@@ -26467,7 +26079,7 @@
           <p:cNvPr id="13" name="">
             <a:extLst xmlns:a="http://schemas.openxmlformats.org/drawingml/2006/main">
               <a:ext uri="{FF2B5EF4-FFF2-40B4-BE49-F238E27FC236}">
-                <a16:creationId xmlns:a16="http://schemas.microsoft.com/office/drawing/2014/main" id="{8319D211-95CF-4AC3-8D8A-4982FB453828}"/>
+                <a16:creationId xmlns:a16="http://schemas.microsoft.com/office/drawing/2014/main" id="{A6A96E22-D626-466D-9A82-084CD99EE3B0}"/>
               </a:ext>
             </a:extLst>
           </p:cNvPr>
@@ -26531,7 +26143,7 @@
           <p:cNvPr id="14" name="">
             <a:extLst xmlns:a="http://schemas.openxmlformats.org/drawingml/2006/main">
               <a:ext uri="{FF2B5EF4-FFF2-40B4-BE49-F238E27FC236}">
-                <a16:creationId xmlns:a16="http://schemas.microsoft.com/office/drawing/2014/main" id="{69213681-4395-4DC3-9AD9-3A0BA39AA359}"/>
+                <a16:creationId xmlns:a16="http://schemas.microsoft.com/office/drawing/2014/main" id="{FBA6F54C-21E6-4AA5-974B-358AE6FB019D}"/>
               </a:ext>
             </a:extLst>
           </p:cNvPr>
@@ -26564,7 +26176,7 @@
           <p:cNvPr id="15" name="">
             <a:extLst xmlns:a="http://schemas.openxmlformats.org/drawingml/2006/main">
               <a:ext uri="{FF2B5EF4-FFF2-40B4-BE49-F238E27FC236}">
-                <a16:creationId xmlns:a16="http://schemas.microsoft.com/office/drawing/2014/main" id="{5948212A-9B9E-4BE3-BE02-D1DA08357846}"/>
+                <a16:creationId xmlns:a16="http://schemas.microsoft.com/office/drawing/2014/main" id="{6942816D-6D87-4700-96B3-65225AA0769E}"/>
               </a:ext>
             </a:extLst>
           </p:cNvPr>
@@ -26628,7 +26240,7 @@
           <p:cNvPr id="16" name="">
             <a:extLst xmlns:a="http://schemas.openxmlformats.org/drawingml/2006/main">
               <a:ext uri="{FF2B5EF4-FFF2-40B4-BE49-F238E27FC236}">
-                <a16:creationId xmlns:a16="http://schemas.microsoft.com/office/drawing/2014/main" id="{0F8DAFC2-1A59-46EE-AB82-5759CF53DFE2}"/>
+                <a16:creationId xmlns:a16="http://schemas.microsoft.com/office/drawing/2014/main" id="{61A581F1-8A05-4E0B-B177-33A30C844C6C}"/>
               </a:ext>
             </a:extLst>
           </p:cNvPr>
@@ -26661,7 +26273,7 @@
           <p:cNvPr id="17" name="">
             <a:extLst xmlns:a="http://schemas.openxmlformats.org/drawingml/2006/main">
               <a:ext uri="{FF2B5EF4-FFF2-40B4-BE49-F238E27FC236}">
-                <a16:creationId xmlns:a16="http://schemas.microsoft.com/office/drawing/2014/main" id="{0A52542D-2424-442C-954C-BA3B92900954}"/>
+                <a16:creationId xmlns:a16="http://schemas.microsoft.com/office/drawing/2014/main" id="{686B6692-BA7F-4532-85EB-D5CF3B368246}"/>
               </a:ext>
             </a:extLst>
           </p:cNvPr>
@@ -26725,7 +26337,7 @@
           <p:cNvPr id="18" name="">
             <a:extLst xmlns:a="http://schemas.openxmlformats.org/drawingml/2006/main">
               <a:ext uri="{FF2B5EF4-FFF2-40B4-BE49-F238E27FC236}">
-                <a16:creationId xmlns:a16="http://schemas.microsoft.com/office/drawing/2014/main" id="{B068B28D-216F-471C-9470-E742C1FFFDD6}"/>
+                <a16:creationId xmlns:a16="http://schemas.microsoft.com/office/drawing/2014/main" id="{029511D9-F5BA-480F-8616-CEA7D93BB1C3}"/>
               </a:ext>
             </a:extLst>
           </p:cNvPr>
@@ -26758,7 +26370,7 @@
           <p:cNvPr id="19" name="">
             <a:extLst xmlns:a="http://schemas.openxmlformats.org/drawingml/2006/main">
               <a:ext uri="{FF2B5EF4-FFF2-40B4-BE49-F238E27FC236}">
-                <a16:creationId xmlns:a16="http://schemas.microsoft.com/office/drawing/2014/main" id="{21546BF7-F8E5-4C34-AB5A-A4ECF98302C2}"/>
+                <a16:creationId xmlns:a16="http://schemas.microsoft.com/office/drawing/2014/main" id="{063F33B0-F06A-43A0-94FC-8E6F7F16D128}"/>
               </a:ext>
             </a:extLst>
           </p:cNvPr>
@@ -26822,7 +26434,7 @@
           <p:cNvPr id="20" name="">
             <a:extLst xmlns:a="http://schemas.openxmlformats.org/drawingml/2006/main">
               <a:ext uri="{FF2B5EF4-FFF2-40B4-BE49-F238E27FC236}">
-                <a16:creationId xmlns:a16="http://schemas.microsoft.com/office/drawing/2014/main" id="{9E081909-3516-4574-9D40-12A0C82EAAAD}"/>
+                <a16:creationId xmlns:a16="http://schemas.microsoft.com/office/drawing/2014/main" id="{9D401651-56F7-4E72-B84D-C32A4298E1AB}"/>
               </a:ext>
             </a:extLst>
           </p:cNvPr>
@@ -26886,7 +26498,7 @@
           <p:cNvPr id="21" name="">
             <a:extLst xmlns:a="http://schemas.openxmlformats.org/drawingml/2006/main">
               <a:ext uri="{FF2B5EF4-FFF2-40B4-BE49-F238E27FC236}">
-                <a16:creationId xmlns:a16="http://schemas.microsoft.com/office/drawing/2014/main" id="{646AEDAF-2B41-4BBA-A73C-737CDC02C271}"/>
+                <a16:creationId xmlns:a16="http://schemas.microsoft.com/office/drawing/2014/main" id="{1537BF8F-FF9B-4235-81EF-E39B172EC021}"/>
               </a:ext>
             </a:extLst>
           </p:cNvPr>
@@ -26919,7 +26531,7 @@
           <p:cNvPr id="22" name="">
             <a:extLst xmlns:a="http://schemas.openxmlformats.org/drawingml/2006/main">
               <a:ext uri="{FF2B5EF4-FFF2-40B4-BE49-F238E27FC236}">
-                <a16:creationId xmlns:a16="http://schemas.microsoft.com/office/drawing/2014/main" id="{4BBD2CD3-0A10-40A0-B734-9B9F13BC1195}"/>
+                <a16:creationId xmlns:a16="http://schemas.microsoft.com/office/drawing/2014/main" id="{BC4EC9BD-A20C-45AC-BE0C-F6E840A4A2E4}"/>
               </a:ext>
             </a:extLst>
           </p:cNvPr>
@@ -26973,7 +26585,7 @@
                 <a:ea typeface="Aptos"/>
                 <a:cs typeface="Aptos"/>
               </a:rPr>
-              <a:t>AURA должна отвечать на вопрос “что со мной происходит и каким будет мой следующий шаг?” — не просто “что говорит мой знак” и не “какую картинку сгенерировал AI”.</a:t>
+              <a:t>AURA отвечает на вопрос “что со мной происходит, каким будет мой следующий шаг и как это меняет мой образ?” — не “что говорит знак” и не “какую картинку сгенерировал AI”.</a:t>
             </a:r>
           </a:p>
         </p:txBody>
@@ -26983,7 +26595,7 @@
           <p:cNvPr id="23" name="">
             <a:extLst xmlns:a="http://schemas.openxmlformats.org/drawingml/2006/main">
               <a:ext uri="{FF2B5EF4-FFF2-40B4-BE49-F238E27FC236}">
-                <a16:creationId xmlns:a16="http://schemas.microsoft.com/office/drawing/2014/main" id="{2A889DA3-8C22-4A3E-9140-E16CDD244877}"/>
+                <a16:creationId xmlns:a16="http://schemas.microsoft.com/office/drawing/2014/main" id="{5761EC1D-17C4-4BE6-BAA2-944CE6819C6F}"/>
               </a:ext>
             </a:extLst>
           </p:cNvPr>
@@ -27045,7 +26657,7 @@
     </p:spTree>
     <p:extLst>
       <p:ext uri="{BB962C8B-B14F-4D97-AF65-F5344CB8AC3E}">
-        <p14:creationId xmlns:p14="http://schemas.microsoft.com/office/powerpoint/2010/main" val="645855141"/>
+        <p14:creationId xmlns:p14="http://schemas.microsoft.com/office/powerpoint/2010/main" val="793828861"/>
       </p:ext>
     </p:extLst>
   </p:cSld>
@@ -27069,7 +26681,7 @@
           <p:cNvPr id="1" name="">
             <a:extLst xmlns:a="http://schemas.openxmlformats.org/drawingml/2006/main">
               <a:ext uri="{FF2B5EF4-FFF2-40B4-BE49-F238E27FC236}">
-                <a16:creationId xmlns:a16="http://schemas.microsoft.com/office/drawing/2014/main" id="{F0AEB501-B475-482E-877D-8394B5EA167B}"/>
+                <a16:creationId xmlns:a16="http://schemas.microsoft.com/office/drawing/2014/main" id="{FB6031DF-FD19-4DA9-93E3-ABED0DF448C1}"/>
               </a:ext>
             </a:extLst>
           </p:cNvPr>
@@ -27102,7 +26714,7 @@
           <p:cNvPr id="2" name="">
             <a:extLst xmlns:a="http://schemas.openxmlformats.org/drawingml/2006/main">
               <a:ext uri="{FF2B5EF4-FFF2-40B4-BE49-F238E27FC236}">
-                <a16:creationId xmlns:a16="http://schemas.microsoft.com/office/drawing/2014/main" id="{0F01738C-E7A4-4F4C-82D4-A963EF678322}"/>
+                <a16:creationId xmlns:a16="http://schemas.microsoft.com/office/drawing/2014/main" id="{C2253BA1-3BAE-4B8E-A7EF-0C77A0DD5C54}"/>
               </a:ext>
             </a:extLst>
           </p:cNvPr>
@@ -27135,7 +26747,7 @@
           <p:cNvPr id="3" name="">
             <a:extLst xmlns:a="http://schemas.openxmlformats.org/drawingml/2006/main">
               <a:ext uri="{FF2B5EF4-FFF2-40B4-BE49-F238E27FC236}">
-                <a16:creationId xmlns:a16="http://schemas.microsoft.com/office/drawing/2014/main" id="{C8986EE3-B21C-4371-87A8-C826C1C461ED}"/>
+                <a16:creationId xmlns:a16="http://schemas.microsoft.com/office/drawing/2014/main" id="{7443C31D-C79B-4200-8AC5-D034236C872D}"/>
               </a:ext>
             </a:extLst>
           </p:cNvPr>
@@ -27168,7 +26780,7 @@
           <p:cNvPr id="4" name="">
             <a:extLst xmlns:a="http://schemas.openxmlformats.org/drawingml/2006/main">
               <a:ext uri="{FF2B5EF4-FFF2-40B4-BE49-F238E27FC236}">
-                <a16:creationId xmlns:a16="http://schemas.microsoft.com/office/drawing/2014/main" id="{E76424F0-FD83-42F5-8899-64D43B98F21D}"/>
+                <a16:creationId xmlns:a16="http://schemas.microsoft.com/office/drawing/2014/main" id="{0CBD95D5-6951-49FE-8EDA-4793B55C2628}"/>
               </a:ext>
             </a:extLst>
           </p:cNvPr>
@@ -27232,7 +26844,7 @@
           <p:cNvPr id="5" name="">
             <a:extLst xmlns:a="http://schemas.openxmlformats.org/drawingml/2006/main">
               <a:ext uri="{FF2B5EF4-FFF2-40B4-BE49-F238E27FC236}">
-                <a16:creationId xmlns:a16="http://schemas.microsoft.com/office/drawing/2014/main" id="{978F145E-DB46-45BD-A90C-F16A4C3DD705}"/>
+                <a16:creationId xmlns:a16="http://schemas.microsoft.com/office/drawing/2014/main" id="{E65A15A2-A3CC-4D16-A3CC-E47B57D1E3E8}"/>
               </a:ext>
             </a:extLst>
           </p:cNvPr>
@@ -27296,7 +26908,7 @@
           <p:cNvPr id="6" name="">
             <a:extLst xmlns:a="http://schemas.openxmlformats.org/drawingml/2006/main">
               <a:ext uri="{FF2B5EF4-FFF2-40B4-BE49-F238E27FC236}">
-                <a16:creationId xmlns:a16="http://schemas.microsoft.com/office/drawing/2014/main" id="{891418BB-9D0B-4662-BBFB-A94783647DB9}"/>
+                <a16:creationId xmlns:a16="http://schemas.microsoft.com/office/drawing/2014/main" id="{6388E35D-C65C-479A-9DEA-413F784FD554}"/>
               </a:ext>
             </a:extLst>
           </p:cNvPr>
@@ -27329,7 +26941,7 @@
           <p:cNvPr id="7" name="">
             <a:extLst xmlns:a="http://schemas.openxmlformats.org/drawingml/2006/main">
               <a:ext uri="{FF2B5EF4-FFF2-40B4-BE49-F238E27FC236}">
-                <a16:creationId xmlns:a16="http://schemas.microsoft.com/office/drawing/2014/main" id="{F7C91CFD-9D23-42DA-B95A-43777A43DDBA}"/>
+                <a16:creationId xmlns:a16="http://schemas.microsoft.com/office/drawing/2014/main" id="{8466C8B0-7531-4F51-9576-46F263E153AB}"/>
               </a:ext>
             </a:extLst>
           </p:cNvPr>
@@ -27393,7 +27005,7 @@
           <p:cNvPr id="8" name="">
             <a:extLst xmlns:a="http://schemas.openxmlformats.org/drawingml/2006/main">
               <a:ext uri="{FF2B5EF4-FFF2-40B4-BE49-F238E27FC236}">
-                <a16:creationId xmlns:a16="http://schemas.microsoft.com/office/drawing/2014/main" id="{A7D7A6D5-0F35-443D-BF47-98A6A86804A6}"/>
+                <a16:creationId xmlns:a16="http://schemas.microsoft.com/office/drawing/2014/main" id="{8916D225-CCDF-4341-93E7-ED07A5BD2BCC}"/>
               </a:ext>
             </a:extLst>
           </p:cNvPr>
@@ -27426,7 +27038,7 @@
           <p:cNvPr id="9" name="">
             <a:extLst xmlns:a="http://schemas.openxmlformats.org/drawingml/2006/main">
               <a:ext uri="{FF2B5EF4-FFF2-40B4-BE49-F238E27FC236}">
-                <a16:creationId xmlns:a16="http://schemas.microsoft.com/office/drawing/2014/main" id="{F42E6276-8EB0-413C-A0A6-B0791D09DD44}"/>
+                <a16:creationId xmlns:a16="http://schemas.microsoft.com/office/drawing/2014/main" id="{5A3FF017-9FF3-457B-9332-5F869A9E2193}"/>
               </a:ext>
             </a:extLst>
           </p:cNvPr>
@@ -27490,7 +27102,7 @@
           <p:cNvPr id="10" name="">
             <a:extLst xmlns:a="http://schemas.openxmlformats.org/drawingml/2006/main">
               <a:ext uri="{FF2B5EF4-FFF2-40B4-BE49-F238E27FC236}">
-                <a16:creationId xmlns:a16="http://schemas.microsoft.com/office/drawing/2014/main" id="{3EB816BA-6290-426C-AC85-2852716BA215}"/>
+                <a16:creationId xmlns:a16="http://schemas.microsoft.com/office/drawing/2014/main" id="{F163C4E9-58EF-4BEE-9808-17D3B4C55BEB}"/>
               </a:ext>
             </a:extLst>
           </p:cNvPr>
@@ -27523,7 +27135,7 @@
           <p:cNvPr id="11" name="">
             <a:extLst xmlns:a="http://schemas.openxmlformats.org/drawingml/2006/main">
               <a:ext uri="{FF2B5EF4-FFF2-40B4-BE49-F238E27FC236}">
-                <a16:creationId xmlns:a16="http://schemas.microsoft.com/office/drawing/2014/main" id="{3798EA2F-77A5-446B-AC63-94644F938BDB}"/>
+                <a16:creationId xmlns:a16="http://schemas.microsoft.com/office/drawing/2014/main" id="{5B75C389-0E41-40D1-B708-B46C1219F337}"/>
               </a:ext>
             </a:extLst>
           </p:cNvPr>
@@ -27577,7 +27189,7 @@
                 <a:ea typeface="Aptos"/>
                 <a:cs typeface="Aptos"/>
               </a:rPr>
-              <a:t>контент и ритуал</a:t>
+              <a:t>доверие, ритуал, контентная библиотека</a:t>
             </a:r>
           </a:p>
         </p:txBody>
@@ -27587,7 +27199,7 @@
           <p:cNvPr id="12" name="">
             <a:extLst xmlns:a="http://schemas.openxmlformats.org/drawingml/2006/main">
               <a:ext uri="{FF2B5EF4-FFF2-40B4-BE49-F238E27FC236}">
-                <a16:creationId xmlns:a16="http://schemas.microsoft.com/office/drawing/2014/main" id="{73E14A30-EA5B-468F-B9AF-F3E2E7025A79}"/>
+                <a16:creationId xmlns:a16="http://schemas.microsoft.com/office/drawing/2014/main" id="{B6554E57-A98B-4C74-97BA-3209AFEBCD07}"/>
               </a:ext>
             </a:extLst>
           </p:cNvPr>
@@ -27620,7 +27232,7 @@
           <p:cNvPr id="13" name="">
             <a:extLst xmlns:a="http://schemas.openxmlformats.org/drawingml/2006/main">
               <a:ext uri="{FF2B5EF4-FFF2-40B4-BE49-F238E27FC236}">
-                <a16:creationId xmlns:a16="http://schemas.microsoft.com/office/drawing/2014/main" id="{22FF686D-A61F-473A-83FF-783594406F87}"/>
+                <a16:creationId xmlns:a16="http://schemas.microsoft.com/office/drawing/2014/main" id="{EED72B30-A21F-44C9-8EA8-0B8C817C228B}"/>
               </a:ext>
             </a:extLst>
           </p:cNvPr>
@@ -27674,7 +27286,7 @@
                 <a:ea typeface="Aptos"/>
                 <a:cs typeface="Aptos"/>
               </a:rPr>
-              <a:t>слабее персональный прогноз и визуальная identity</a:t>
+              <a:t>нет личного weekly forecast и avatar trajectory</a:t>
             </a:r>
           </a:p>
         </p:txBody>
@@ -27684,7 +27296,7 @@
           <p:cNvPr id="14" name="">
             <a:extLst xmlns:a="http://schemas.openxmlformats.org/drawingml/2006/main">
               <a:ext uri="{FF2B5EF4-FFF2-40B4-BE49-F238E27FC236}">
-                <a16:creationId xmlns:a16="http://schemas.microsoft.com/office/drawing/2014/main" id="{00D6E31C-D8C6-4D02-BDDF-5DC07821B52E}"/>
+                <a16:creationId xmlns:a16="http://schemas.microsoft.com/office/drawing/2014/main" id="{2763C4CD-53EA-40D5-8738-6DCD6F4BA9C1}"/>
               </a:ext>
             </a:extLst>
           </p:cNvPr>
@@ -27717,7 +27329,7 @@
           <p:cNvPr id="15" name="">
             <a:extLst xmlns:a="http://schemas.openxmlformats.org/drawingml/2006/main">
               <a:ext uri="{FF2B5EF4-FFF2-40B4-BE49-F238E27FC236}">
-                <a16:creationId xmlns:a16="http://schemas.microsoft.com/office/drawing/2014/main" id="{F0CAF817-0E52-4A89-93B2-9D4B34C03B26}"/>
+                <a16:creationId xmlns:a16="http://schemas.microsoft.com/office/drawing/2014/main" id="{83C69107-FC0A-4BED-88C0-DB87728C9792}"/>
               </a:ext>
             </a:extLst>
           </p:cNvPr>
@@ -27781,7 +27393,7 @@
           <p:cNvPr id="16" name="">
             <a:extLst xmlns:a="http://schemas.openxmlformats.org/drawingml/2006/main">
               <a:ext uri="{FF2B5EF4-FFF2-40B4-BE49-F238E27FC236}">
-                <a16:creationId xmlns:a16="http://schemas.microsoft.com/office/drawing/2014/main" id="{23D130B5-D2A0-409C-A1A4-0EDF856C1AD1}"/>
+                <a16:creationId xmlns:a16="http://schemas.microsoft.com/office/drawing/2014/main" id="{47AB55FC-EA14-452C-9065-1DAB0EFB00DF}"/>
               </a:ext>
             </a:extLst>
           </p:cNvPr>
@@ -27814,7 +27426,7 @@
           <p:cNvPr id="17" name="">
             <a:extLst xmlns:a="http://schemas.openxmlformats.org/drawingml/2006/main">
               <a:ext uri="{FF2B5EF4-FFF2-40B4-BE49-F238E27FC236}">
-                <a16:creationId xmlns:a16="http://schemas.microsoft.com/office/drawing/2014/main" id="{33301434-0AF1-421F-AD9D-7486F47E3B99}"/>
+                <a16:creationId xmlns:a16="http://schemas.microsoft.com/office/drawing/2014/main" id="{9139B54C-CC4A-4959-8D65-5FD73D81EE08}"/>
               </a:ext>
             </a:extLst>
           </p:cNvPr>
@@ -27868,7 +27480,7 @@
                 <a:ea typeface="Aptos"/>
                 <a:cs typeface="Aptos"/>
               </a:rPr>
-              <a:t>astrology and spiritual guidance</a:t>
+              <a:t>astrology / spiritual guidance</a:t>
             </a:r>
           </a:p>
         </p:txBody>
@@ -27878,7 +27490,7 @@
           <p:cNvPr id="18" name="">
             <a:extLst xmlns:a="http://schemas.openxmlformats.org/drawingml/2006/main">
               <a:ext uri="{FF2B5EF4-FFF2-40B4-BE49-F238E27FC236}">
-                <a16:creationId xmlns:a16="http://schemas.microsoft.com/office/drawing/2014/main" id="{A50016C1-60DA-4E4F-9CE1-7EC446EC6AF7}"/>
+                <a16:creationId xmlns:a16="http://schemas.microsoft.com/office/drawing/2014/main" id="{154D61B9-CEC3-46F7-8ADE-A09AD141AEB0}"/>
               </a:ext>
             </a:extLst>
           </p:cNvPr>
@@ -27911,7 +27523,7 @@
           <p:cNvPr id="19" name="">
             <a:extLst xmlns:a="http://schemas.openxmlformats.org/drawingml/2006/main">
               <a:ext uri="{FF2B5EF4-FFF2-40B4-BE49-F238E27FC236}">
-                <a16:creationId xmlns:a16="http://schemas.microsoft.com/office/drawing/2014/main" id="{0CE42B2D-4F4D-4188-8DA1-E975B669FE99}"/>
+                <a16:creationId xmlns:a16="http://schemas.microsoft.com/office/drawing/2014/main" id="{B424431E-346F-4D69-A4E8-AFFE87A30891}"/>
               </a:ext>
             </a:extLst>
           </p:cNvPr>
@@ -27965,7 +27577,7 @@
                 <a:ea typeface="Aptos"/>
                 <a:cs typeface="Aptos"/>
               </a:rPr>
-              <a:t>персональный смысл</a:t>
+              <a:t>персональный смысл, paid depth, регулярные прогнозы</a:t>
             </a:r>
           </a:p>
         </p:txBody>
@@ -27975,7 +27587,7 @@
           <p:cNvPr id="20" name="">
             <a:extLst xmlns:a="http://schemas.openxmlformats.org/drawingml/2006/main">
               <a:ext uri="{FF2B5EF4-FFF2-40B4-BE49-F238E27FC236}">
-                <a16:creationId xmlns:a16="http://schemas.microsoft.com/office/drawing/2014/main" id="{C2B74BCE-C4F8-4EB1-83B8-AD706A566500}"/>
+                <a16:creationId xmlns:a16="http://schemas.microsoft.com/office/drawing/2014/main" id="{247FBBEA-73C3-459F-910E-D135E5F66D50}"/>
               </a:ext>
             </a:extLst>
           </p:cNvPr>
@@ -28008,7 +27620,7 @@
           <p:cNvPr id="21" name="">
             <a:extLst xmlns:a="http://schemas.openxmlformats.org/drawingml/2006/main">
               <a:ext uri="{FF2B5EF4-FFF2-40B4-BE49-F238E27FC236}">
-                <a16:creationId xmlns:a16="http://schemas.microsoft.com/office/drawing/2014/main" id="{BE0BF96D-BCDE-4BC2-A9B5-3E9A5B01173D}"/>
+                <a16:creationId xmlns:a16="http://schemas.microsoft.com/office/drawing/2014/main" id="{496759BB-73F1-477C-B66D-E0A793F8A6D8}"/>
               </a:ext>
             </a:extLst>
           </p:cNvPr>
@@ -28062,7 +27674,7 @@
                 <a:ea typeface="Aptos"/>
                 <a:cs typeface="Aptos"/>
               </a:rPr>
-              <a:t>риск фатализма, мало действия и visual progress</a:t>
+              <a:t>риск generic readings, мало действия и visible progress</a:t>
             </a:r>
           </a:p>
         </p:txBody>
@@ -28072,7 +27684,7 @@
           <p:cNvPr id="22" name="">
             <a:extLst xmlns:a="http://schemas.openxmlformats.org/drawingml/2006/main">
               <a:ext uri="{FF2B5EF4-FFF2-40B4-BE49-F238E27FC236}">
-                <a16:creationId xmlns:a16="http://schemas.microsoft.com/office/drawing/2014/main" id="{C59F47CA-DAAB-4C9D-B546-27975F9695A4}"/>
+                <a16:creationId xmlns:a16="http://schemas.microsoft.com/office/drawing/2014/main" id="{8A052C64-DA07-45A9-9B15-23F9A815893D}"/>
               </a:ext>
             </a:extLst>
           </p:cNvPr>
@@ -28105,7 +27717,7 @@
           <p:cNvPr id="23" name="">
             <a:extLst xmlns:a="http://schemas.openxmlformats.org/drawingml/2006/main">
               <a:ext uri="{FF2B5EF4-FFF2-40B4-BE49-F238E27FC236}">
-                <a16:creationId xmlns:a16="http://schemas.microsoft.com/office/drawing/2014/main" id="{E5644673-09C1-4383-AA7C-E472D6F41A7F}"/>
+                <a16:creationId xmlns:a16="http://schemas.microsoft.com/office/drawing/2014/main" id="{819AC56E-1407-4AE0-880F-829F1892063C}"/>
               </a:ext>
             </a:extLst>
           </p:cNvPr>
@@ -28169,7 +27781,7 @@
           <p:cNvPr id="24" name="">
             <a:extLst xmlns:a="http://schemas.openxmlformats.org/drawingml/2006/main">
               <a:ext uri="{FF2B5EF4-FFF2-40B4-BE49-F238E27FC236}">
-                <a16:creationId xmlns:a16="http://schemas.microsoft.com/office/drawing/2014/main" id="{30C6E78B-423E-4E69-AF86-32EBD494CF36}"/>
+                <a16:creationId xmlns:a16="http://schemas.microsoft.com/office/drawing/2014/main" id="{983D0685-EA49-4A2C-A76C-F1C53F90E34E}"/>
               </a:ext>
             </a:extLst>
           </p:cNvPr>
@@ -28202,7 +27814,7 @@
           <p:cNvPr id="25" name="">
             <a:extLst xmlns:a="http://schemas.openxmlformats.org/drawingml/2006/main">
               <a:ext uri="{FF2B5EF4-FFF2-40B4-BE49-F238E27FC236}">
-                <a16:creationId xmlns:a16="http://schemas.microsoft.com/office/drawing/2014/main" id="{4F4C8C18-A7FF-462C-8881-D624C3EC092E}"/>
+                <a16:creationId xmlns:a16="http://schemas.microsoft.com/office/drawing/2014/main" id="{D5D062BC-8387-476C-9D9F-AF88BFB2CC68}"/>
               </a:ext>
             </a:extLst>
           </p:cNvPr>
@@ -28256,7 +27868,7 @@
                 <a:ea typeface="Aptos"/>
                 <a:cs typeface="Aptos"/>
               </a:rPr>
-              <a:t>AI companion</a:t>
+              <a:t>AI companion / roleplay</a:t>
             </a:r>
           </a:p>
         </p:txBody>
@@ -28266,7 +27878,7 @@
           <p:cNvPr id="26" name="">
             <a:extLst xmlns:a="http://schemas.openxmlformats.org/drawingml/2006/main">
               <a:ext uri="{FF2B5EF4-FFF2-40B4-BE49-F238E27FC236}">
-                <a16:creationId xmlns:a16="http://schemas.microsoft.com/office/drawing/2014/main" id="{7CB386A7-D077-424B-AFDF-174FA39DFD61}"/>
+                <a16:creationId xmlns:a16="http://schemas.microsoft.com/office/drawing/2014/main" id="{FCBABE16-FD9A-4423-A0C7-11E6D1C05685}"/>
               </a:ext>
             </a:extLst>
           </p:cNvPr>
@@ -28299,7 +27911,7 @@
           <p:cNvPr id="27" name="">
             <a:extLst xmlns:a="http://schemas.openxmlformats.org/drawingml/2006/main">
               <a:ext uri="{FF2B5EF4-FFF2-40B4-BE49-F238E27FC236}">
-                <a16:creationId xmlns:a16="http://schemas.microsoft.com/office/drawing/2014/main" id="{10A2C858-4B07-4543-A1DD-E012D0C31157}"/>
+                <a16:creationId xmlns:a16="http://schemas.microsoft.com/office/drawing/2014/main" id="{F7537C20-F948-4F03-8E01-53BD913BAFFE}"/>
               </a:ext>
             </a:extLst>
           </p:cNvPr>
@@ -28363,7 +27975,7 @@
           <p:cNvPr id="28" name="">
             <a:extLst xmlns:a="http://schemas.openxmlformats.org/drawingml/2006/main">
               <a:ext uri="{FF2B5EF4-FFF2-40B4-BE49-F238E27FC236}">
-                <a16:creationId xmlns:a16="http://schemas.microsoft.com/office/drawing/2014/main" id="{8C7EA3FA-4996-48FF-84D5-501077B04291}"/>
+                <a16:creationId xmlns:a16="http://schemas.microsoft.com/office/drawing/2014/main" id="{B2F67F29-6ACE-43DE-A22A-8C27BFA76820}"/>
               </a:ext>
             </a:extLst>
           </p:cNvPr>
@@ -28396,7 +28008,7 @@
           <p:cNvPr id="29" name="">
             <a:extLst xmlns:a="http://schemas.openxmlformats.org/drawingml/2006/main">
               <a:ext uri="{FF2B5EF4-FFF2-40B4-BE49-F238E27FC236}">
-                <a16:creationId xmlns:a16="http://schemas.microsoft.com/office/drawing/2014/main" id="{4A33AD7F-E9C3-4D05-A8AB-1B4936B55047}"/>
+                <a16:creationId xmlns:a16="http://schemas.microsoft.com/office/drawing/2014/main" id="{C7DBA1A9-BBA1-4715-8251-2A505E5774FF}"/>
               </a:ext>
             </a:extLst>
           </p:cNvPr>
@@ -28450,7 +28062,7 @@
                 <a:ea typeface="Aptos"/>
                 <a:cs typeface="Aptos"/>
               </a:rPr>
-              <a:t>нет недельного life-series и действия в реальном мире</a:t>
+              <a:t>нет life-series вокруг реальной недели пользователя</a:t>
             </a:r>
           </a:p>
         </p:txBody>
@@ -28460,7 +28072,7 @@
           <p:cNvPr id="30" name="">
             <a:extLst xmlns:a="http://schemas.openxmlformats.org/drawingml/2006/main">
               <a:ext uri="{FF2B5EF4-FFF2-40B4-BE49-F238E27FC236}">
-                <a16:creationId xmlns:a16="http://schemas.microsoft.com/office/drawing/2014/main" id="{D1CD76D2-E618-434B-B0B1-ADC826BEF3B7}"/>
+                <a16:creationId xmlns:a16="http://schemas.microsoft.com/office/drawing/2014/main" id="{13E2880E-C21E-4B99-AE1F-88C2D7474171}"/>
               </a:ext>
             </a:extLst>
           </p:cNvPr>
@@ -28493,7 +28105,7 @@
           <p:cNvPr id="31" name="">
             <a:extLst xmlns:a="http://schemas.openxmlformats.org/drawingml/2006/main">
               <a:ext uri="{FF2B5EF4-FFF2-40B4-BE49-F238E27FC236}">
-                <a16:creationId xmlns:a16="http://schemas.microsoft.com/office/drawing/2014/main" id="{1539C6AC-C316-494E-B8D8-035A7C8749AC}"/>
+                <a16:creationId xmlns:a16="http://schemas.microsoft.com/office/drawing/2014/main" id="{88D093D3-1C03-4257-AF7E-AAD923A05028}"/>
               </a:ext>
             </a:extLst>
           </p:cNvPr>
@@ -28557,7 +28169,7 @@
           <p:cNvPr id="32" name="">
             <a:extLst xmlns:a="http://schemas.openxmlformats.org/drawingml/2006/main">
               <a:ext uri="{FF2B5EF4-FFF2-40B4-BE49-F238E27FC236}">
-                <a16:creationId xmlns:a16="http://schemas.microsoft.com/office/drawing/2014/main" id="{05FFDD3C-C88A-4756-A560-A61C77BF51AC}"/>
+                <a16:creationId xmlns:a16="http://schemas.microsoft.com/office/drawing/2014/main" id="{F7DA2CAD-1D52-4A24-96DD-3F278F63C88D}"/>
               </a:ext>
             </a:extLst>
           </p:cNvPr>
@@ -28590,7 +28202,7 @@
           <p:cNvPr id="33" name="">
             <a:extLst xmlns:a="http://schemas.openxmlformats.org/drawingml/2006/main">
               <a:ext uri="{FF2B5EF4-FFF2-40B4-BE49-F238E27FC236}">
-                <a16:creationId xmlns:a16="http://schemas.microsoft.com/office/drawing/2014/main" id="{BC9605CA-4797-4E5B-BFF2-E528B49FCF91}"/>
+                <a16:creationId xmlns:a16="http://schemas.microsoft.com/office/drawing/2014/main" id="{EB673794-B71A-472B-B3B4-6D591BEB142F}"/>
               </a:ext>
             </a:extLst>
           </p:cNvPr>
@@ -28654,7 +28266,7 @@
           <p:cNvPr id="34" name="">
             <a:extLst xmlns:a="http://schemas.openxmlformats.org/drawingml/2006/main">
               <a:ext uri="{FF2B5EF4-FFF2-40B4-BE49-F238E27FC236}">
-                <a16:creationId xmlns:a16="http://schemas.microsoft.com/office/drawing/2014/main" id="{C4E4CE69-0926-4D64-9237-1490E883DFC4}"/>
+                <a16:creationId xmlns:a16="http://schemas.microsoft.com/office/drawing/2014/main" id="{ED272980-F08B-4886-A730-CA11B5841384}"/>
               </a:ext>
             </a:extLst>
           </p:cNvPr>
@@ -28687,7 +28299,7 @@
           <p:cNvPr id="35" name="">
             <a:extLst xmlns:a="http://schemas.openxmlformats.org/drawingml/2006/main">
               <a:ext uri="{FF2B5EF4-FFF2-40B4-BE49-F238E27FC236}">
-                <a16:creationId xmlns:a16="http://schemas.microsoft.com/office/drawing/2014/main" id="{1C91E345-C1FA-4748-8DA5-0330FE33D59C}"/>
+                <a16:creationId xmlns:a16="http://schemas.microsoft.com/office/drawing/2014/main" id="{7EB75B1B-BB76-467D-AA71-A8B0D028CBEE}"/>
               </a:ext>
             </a:extLst>
           </p:cNvPr>
@@ -28741,7 +28353,7 @@
                 <a:ea typeface="Aptos"/>
                 <a:cs typeface="Aptos"/>
               </a:rPr>
-              <a:t>мягкий habit loop</a:t>
+              <a:t>мягкий habit loop, companion, забота без стыда</a:t>
             </a:r>
           </a:p>
         </p:txBody>
@@ -28751,7 +28363,7 @@
           <p:cNvPr id="36" name="">
             <a:extLst xmlns:a="http://schemas.openxmlformats.org/drawingml/2006/main">
               <a:ext uri="{FF2B5EF4-FFF2-40B4-BE49-F238E27FC236}">
-                <a16:creationId xmlns:a16="http://schemas.microsoft.com/office/drawing/2014/main" id="{1CEA0F97-DFD9-41D3-8E6A-C5EBDC5C7E00}"/>
+                <a16:creationId xmlns:a16="http://schemas.microsoft.com/office/drawing/2014/main" id="{36923233-9D4A-49C1-BE01-E45745A8D2B7}"/>
               </a:ext>
             </a:extLst>
           </p:cNvPr>
@@ -28784,7 +28396,7 @@
           <p:cNvPr id="37" name="">
             <a:extLst xmlns:a="http://schemas.openxmlformats.org/drawingml/2006/main">
               <a:ext uri="{FF2B5EF4-FFF2-40B4-BE49-F238E27FC236}">
-                <a16:creationId xmlns:a16="http://schemas.microsoft.com/office/drawing/2014/main" id="{50D35511-2D9B-4108-B9F2-2AB006C7B4A0}"/>
+                <a16:creationId xmlns:a16="http://schemas.microsoft.com/office/drawing/2014/main" id="{3009A6E8-6067-4FA6-AB31-6AE6589064F1}"/>
               </a:ext>
             </a:extLst>
           </p:cNvPr>
@@ -28838,7 +28450,7 @@
                 <a:ea typeface="Aptos"/>
                 <a:cs typeface="Aptos"/>
               </a:rPr>
-              <a:t>детский образ, меньше “взрослого” визуального сериала</a:t>
+              <a:t>части аудитории слишком детско; avatar не про adult future-self</a:t>
             </a:r>
           </a:p>
         </p:txBody>
@@ -28848,7 +28460,7 @@
           <p:cNvPr id="38" name="">
             <a:extLst xmlns:a="http://schemas.openxmlformats.org/drawingml/2006/main">
               <a:ext uri="{FF2B5EF4-FFF2-40B4-BE49-F238E27FC236}">
-                <a16:creationId xmlns:a16="http://schemas.microsoft.com/office/drawing/2014/main" id="{DD7BBDF2-8D45-462D-A6A9-FE0A37365935}"/>
+                <a16:creationId xmlns:a16="http://schemas.microsoft.com/office/drawing/2014/main" id="{6E59B866-9509-4D7E-AA52-8729E27EB83E}"/>
               </a:ext>
             </a:extLst>
           </p:cNvPr>
@@ -28881,7 +28493,7 @@
           <p:cNvPr id="39" name="">
             <a:extLst xmlns:a="http://schemas.openxmlformats.org/drawingml/2006/main">
               <a:ext uri="{FF2B5EF4-FFF2-40B4-BE49-F238E27FC236}">
-                <a16:creationId xmlns:a16="http://schemas.microsoft.com/office/drawing/2014/main" id="{88D52F8D-0008-4AEA-98ED-0674E3CD3D47}"/>
+                <a16:creationId xmlns:a16="http://schemas.microsoft.com/office/drawing/2014/main" id="{749EB8FD-2B16-4639-B3DC-949A7BDE52DB}"/>
               </a:ext>
             </a:extLst>
           </p:cNvPr>
@@ -28945,7 +28557,7 @@
           <p:cNvPr id="40" name="">
             <a:extLst xmlns:a="http://schemas.openxmlformats.org/drawingml/2006/main">
               <a:ext uri="{FF2B5EF4-FFF2-40B4-BE49-F238E27FC236}">
-                <a16:creationId xmlns:a16="http://schemas.microsoft.com/office/drawing/2014/main" id="{53A64EA4-D051-43FC-A0DF-AAE82DF3DC36}"/>
+                <a16:creationId xmlns:a16="http://schemas.microsoft.com/office/drawing/2014/main" id="{E5213083-2F55-42D5-9E92-F78E723751DC}"/>
               </a:ext>
             </a:extLst>
           </p:cNvPr>
@@ -28978,7 +28590,7 @@
           <p:cNvPr id="41" name="">
             <a:extLst xmlns:a="http://schemas.openxmlformats.org/drawingml/2006/main">
               <a:ext uri="{FF2B5EF4-FFF2-40B4-BE49-F238E27FC236}">
-                <a16:creationId xmlns:a16="http://schemas.microsoft.com/office/drawing/2014/main" id="{6C3BAD43-3A5D-4100-ADA4-8C876B801497}"/>
+                <a16:creationId xmlns:a16="http://schemas.microsoft.com/office/drawing/2014/main" id="{D7677497-18A3-47EF-B24B-01DFDB059B17}"/>
               </a:ext>
             </a:extLst>
           </p:cNvPr>
@@ -29032,7 +28644,7 @@
                 <a:ea typeface="Aptos"/>
                 <a:cs typeface="Aptos"/>
               </a:rPr>
-              <a:t>weekly forecast + avatar + action</a:t>
+              <a:t>weekly forecast + assistant + Life Canvas</a:t>
             </a:r>
           </a:p>
         </p:txBody>
@@ -29042,7 +28654,7 @@
           <p:cNvPr id="42" name="">
             <a:extLst xmlns:a="http://schemas.openxmlformats.org/drawingml/2006/main">
               <a:ext uri="{FF2B5EF4-FFF2-40B4-BE49-F238E27FC236}">
-                <a16:creationId xmlns:a16="http://schemas.microsoft.com/office/drawing/2014/main" id="{7A99284B-E1CB-4FD9-A89B-825CB3B5B428}"/>
+                <a16:creationId xmlns:a16="http://schemas.microsoft.com/office/drawing/2014/main" id="{75987C73-85E6-4636-B8C4-06CACB3F647D}"/>
               </a:ext>
             </a:extLst>
           </p:cNvPr>
@@ -29075,7 +28687,7 @@
           <p:cNvPr id="43" name="">
             <a:extLst xmlns:a="http://schemas.openxmlformats.org/drawingml/2006/main">
               <a:ext uri="{FF2B5EF4-FFF2-40B4-BE49-F238E27FC236}">
-                <a16:creationId xmlns:a16="http://schemas.microsoft.com/office/drawing/2014/main" id="{98CEF138-26AD-4A6D-AC7A-FAD1CEB26564}"/>
+                <a16:creationId xmlns:a16="http://schemas.microsoft.com/office/drawing/2014/main" id="{CB8162C5-ED5C-48D0-BBB1-745EB1D772BD}"/>
               </a:ext>
             </a:extLst>
           </p:cNvPr>
@@ -29129,7 +28741,7 @@
                 <a:ea typeface="Aptos"/>
                 <a:cs typeface="Aptos"/>
               </a:rPr>
-              <a:t>смысл, действие, visual evolution</a:t>
+              <a:t>личный смысл → действие → avatar evolution</a:t>
             </a:r>
           </a:p>
         </p:txBody>
@@ -29139,7 +28751,7 @@
           <p:cNvPr id="44" name="">
             <a:extLst xmlns:a="http://schemas.openxmlformats.org/drawingml/2006/main">
               <a:ext uri="{FF2B5EF4-FFF2-40B4-BE49-F238E27FC236}">
-                <a16:creationId xmlns:a16="http://schemas.microsoft.com/office/drawing/2014/main" id="{1AB3ACAC-3F63-440A-AD5A-1F793DAE47F2}"/>
+                <a16:creationId xmlns:a16="http://schemas.microsoft.com/office/drawing/2014/main" id="{57C1E300-CDBF-4319-9AA3-58F1989F465C}"/>
               </a:ext>
             </a:extLst>
           </p:cNvPr>
@@ -29172,7 +28784,7 @@
           <p:cNvPr id="45" name="">
             <a:extLst xmlns:a="http://schemas.openxmlformats.org/drawingml/2006/main">
               <a:ext uri="{FF2B5EF4-FFF2-40B4-BE49-F238E27FC236}">
-                <a16:creationId xmlns:a16="http://schemas.microsoft.com/office/drawing/2014/main" id="{34785F97-91BD-4573-96BD-CD518A2AFD2D}"/>
+                <a16:creationId xmlns:a16="http://schemas.microsoft.com/office/drawing/2014/main" id="{2E472149-2586-4B9E-8F38-6B177DAB1532}"/>
               </a:ext>
             </a:extLst>
           </p:cNvPr>
@@ -29226,7 +28838,7 @@
                 <a:ea typeface="Aptos"/>
                 <a:cs typeface="Aptos"/>
               </a:rPr>
-              <a:t>нужно доказать причинность и экономику видео</a:t>
+              <a:t>главный риск: доказать causality и удержать video cost</a:t>
             </a:r>
           </a:p>
         </p:txBody>
@@ -29236,7 +28848,7 @@
           <p:cNvPr id="46" name="">
             <a:extLst xmlns:a="http://schemas.openxmlformats.org/drawingml/2006/main">
               <a:ext uri="{FF2B5EF4-FFF2-40B4-BE49-F238E27FC236}">
-                <a16:creationId xmlns:a16="http://schemas.microsoft.com/office/drawing/2014/main" id="{90C00713-8163-4886-B71E-1BD4EF9C7A61}"/>
+                <a16:creationId xmlns:a16="http://schemas.microsoft.com/office/drawing/2014/main" id="{1A7D6759-46A3-4611-B5D5-CA6E9A178E6D}"/>
               </a:ext>
             </a:extLst>
           </p:cNvPr>
@@ -29298,7 +28910,7 @@
     </p:spTree>
     <p:extLst>
       <p:ext uri="{BB962C8B-B14F-4D97-AF65-F5344CB8AC3E}">
-        <p14:creationId xmlns:p14="http://schemas.microsoft.com/office/powerpoint/2010/main" val="59762673"/>
+        <p14:creationId xmlns:p14="http://schemas.microsoft.com/office/powerpoint/2010/main" val="1967983275"/>
       </p:ext>
     </p:extLst>
   </p:cSld>
